--- a/中間発表資料_櫻井.pptx
+++ b/中間発表資料_櫻井.pptx
@@ -5,7 +5,7 @@
     <p:sldMasterId id="2147483648" r:id="rId4"/>
   </p:sldMasterIdLst>
   <p:notesMasterIdLst>
-    <p:notesMasterId r:id="rId15"/>
+    <p:notesMasterId r:id="rId18"/>
   </p:notesMasterIdLst>
   <p:sldIdLst>
     <p:sldId id="258" r:id="rId5"/>
@@ -15,9 +15,12 @@
     <p:sldId id="261" r:id="rId9"/>
     <p:sldId id="262" r:id="rId10"/>
     <p:sldId id="265" r:id="rId11"/>
-    <p:sldId id="264" r:id="rId12"/>
-    <p:sldId id="266" r:id="rId13"/>
-    <p:sldId id="263" r:id="rId14"/>
+    <p:sldId id="266" r:id="rId12"/>
+    <p:sldId id="263" r:id="rId13"/>
+    <p:sldId id="267" r:id="rId14"/>
+    <p:sldId id="268" r:id="rId15"/>
+    <p:sldId id="269" r:id="rId16"/>
+    <p:sldId id="270" r:id="rId17"/>
   </p:sldIdLst>
   <p:sldSz cx="12192000" cy="6858000"/>
   <p:notesSz cx="6858000" cy="9144000"/>
@@ -127,7 +130,8 @@
 <file path=ppt/revisionInfo.xml><?xml version="1.0" encoding="utf-8"?>
 <p1510:revInfo xmlns:a="http://schemas.openxmlformats.org/drawingml/2006/main" xmlns:r="http://schemas.openxmlformats.org/officeDocument/2006/relationships" xmlns:p1510="http://schemas.microsoft.com/office/powerpoint/2015/10/main">
   <p1510:revLst>
-    <p1510:client id="{390B67A8-517E-4E9D-9737-5E2DCCA11E90}" v="7" dt="2026-01-19T21:13:38.692"/>
+    <p1510:client id="{2E99751D-F2DD-4B76-9ADD-4A6FC4E75F7E}" v="1372" dt="2026-01-20T02:04:06.522"/>
+    <p1510:client id="{390B67A8-517E-4E9D-9737-5E2DCCA11E90}" v="50" dt="2026-01-20T05:49:11.730"/>
   </p1510:revLst>
 </p1510:revInfo>
 </file>
@@ -136,13 +140,187 @@
 <pc:chgInfo xmlns:a="http://schemas.openxmlformats.org/drawingml/2006/main" xmlns:r="http://schemas.openxmlformats.org/officeDocument/2006/relationships" xmlns:ac="http://schemas.microsoft.com/office/drawing/2013/main/command" xmlns:pc="http://schemas.microsoft.com/office/powerpoint/2013/main/command">
   <pc:docChgLst>
     <pc:chgData name="翔琉 櫻井" userId="9696856e3d08c427" providerId="LiveId" clId="{BD309D27-4A6C-4473-87BA-473DBBF66F9B}"/>
-    <pc:docChg chg="undo custSel addSld modSld sldOrd">
-      <pc:chgData name="翔琉 櫻井" userId="9696856e3d08c427" providerId="LiveId" clId="{BD309D27-4A6C-4473-87BA-473DBBF66F9B}" dt="2026-01-19T21:17:45.507" v="266" actId="20577"/>
+    <pc:docChg chg="undo custSel addSld delSld modSld sldOrd">
+      <pc:chgData name="翔琉 櫻井" userId="9696856e3d08c427" providerId="LiveId" clId="{BD309D27-4A6C-4473-87BA-473DBBF66F9B}" dt="2026-01-20T06:54:31.821" v="2964" actId="1076"/>
       <pc:docMkLst>
         <pc:docMk/>
       </pc:docMkLst>
-      <pc:sldChg chg="delSp modSp mod">
-        <pc:chgData name="翔琉 櫻井" userId="9696856e3d08c427" providerId="LiveId" clId="{BD309D27-4A6C-4473-87BA-473DBBF66F9B}" dt="2026-01-19T21:03:35.149" v="213" actId="1076"/>
+      <pc:sldChg chg="addSp delSp modSp mod">
+        <pc:chgData name="翔琉 櫻井" userId="9696856e3d08c427" providerId="LiveId" clId="{BD309D27-4A6C-4473-87BA-473DBBF66F9B}" dt="2026-01-19T23:42:29.406" v="2221" actId="2710"/>
+        <pc:sldMkLst>
+          <pc:docMk/>
+          <pc:sldMk cId="71332995" sldId="257"/>
+        </pc:sldMkLst>
+        <pc:spChg chg="mod">
+          <ac:chgData name="翔琉 櫻井" userId="9696856e3d08c427" providerId="LiveId" clId="{BD309D27-4A6C-4473-87BA-473DBBF66F9B}" dt="2026-01-19T23:42:29.406" v="2221" actId="2710"/>
+          <ac:spMkLst>
+            <pc:docMk/>
+            <pc:sldMk cId="71332995" sldId="257"/>
+            <ac:spMk id="3" creationId="{AFE4376B-0BE6-DC44-9A92-9FB4E9E793D6}"/>
+          </ac:spMkLst>
+        </pc:spChg>
+        <pc:spChg chg="del">
+          <ac:chgData name="翔琉 櫻井" userId="9696856e3d08c427" providerId="LiveId" clId="{BD309D27-4A6C-4473-87BA-473DBBF66F9B}" dt="2026-01-19T23:09:59.569" v="1597" actId="478"/>
+          <ac:spMkLst>
+            <pc:docMk/>
+            <pc:sldMk cId="71332995" sldId="257"/>
+            <ac:spMk id="6" creationId="{A6D35D8F-E0C6-2AE4-E8B0-B5B9AD741F25}"/>
+          </ac:spMkLst>
+        </pc:spChg>
+        <pc:spChg chg="del">
+          <ac:chgData name="翔琉 櫻井" userId="9696856e3d08c427" providerId="LiveId" clId="{BD309D27-4A6C-4473-87BA-473DBBF66F9B}" dt="2026-01-19T23:10:07.690" v="1601" actId="478"/>
+          <ac:spMkLst>
+            <pc:docMk/>
+            <pc:sldMk cId="71332995" sldId="257"/>
+            <ac:spMk id="7" creationId="{9FC13006-623A-99E8-E109-7C1F47B4D9CF}"/>
+          </ac:spMkLst>
+        </pc:spChg>
+        <pc:spChg chg="del">
+          <ac:chgData name="翔琉 櫻井" userId="9696856e3d08c427" providerId="LiveId" clId="{BD309D27-4A6C-4473-87BA-473DBBF66F9B}" dt="2026-01-19T23:10:08.451" v="1602" actId="478"/>
+          <ac:spMkLst>
+            <pc:docMk/>
+            <pc:sldMk cId="71332995" sldId="257"/>
+            <ac:spMk id="8" creationId="{8F9C7C88-EA5F-029E-69B3-5CD6AB429918}"/>
+          </ac:spMkLst>
+        </pc:spChg>
+        <pc:spChg chg="mod">
+          <ac:chgData name="翔琉 櫻井" userId="9696856e3d08c427" providerId="LiveId" clId="{BD309D27-4A6C-4473-87BA-473DBBF66F9B}" dt="2026-01-19T23:16:14.989" v="1685" actId="207"/>
+          <ac:spMkLst>
+            <pc:docMk/>
+            <pc:sldMk cId="71332995" sldId="257"/>
+            <ac:spMk id="9" creationId="{21A731A3-5876-7CD9-AD8C-2EF1AD31AA8E}"/>
+          </ac:spMkLst>
+        </pc:spChg>
+        <pc:spChg chg="add del mod">
+          <ac:chgData name="翔琉 櫻井" userId="9696856e3d08c427" providerId="LiveId" clId="{BD309D27-4A6C-4473-87BA-473DBBF66F9B}" dt="2026-01-19T22:55:27.268" v="1239" actId="21"/>
+          <ac:spMkLst>
+            <pc:docMk/>
+            <pc:sldMk cId="71332995" sldId="257"/>
+            <ac:spMk id="13" creationId="{F930A552-FE9C-877A-0A5D-ED52488A3F2D}"/>
+          </ac:spMkLst>
+        </pc:spChg>
+        <pc:spChg chg="add del mod">
+          <ac:chgData name="翔琉 櫻井" userId="9696856e3d08c427" providerId="LiveId" clId="{BD309D27-4A6C-4473-87BA-473DBBF66F9B}" dt="2026-01-19T22:55:27.268" v="1239" actId="21"/>
+          <ac:spMkLst>
+            <pc:docMk/>
+            <pc:sldMk cId="71332995" sldId="257"/>
+            <ac:spMk id="14" creationId="{783DD397-B5AA-1E2A-2F80-B043A53CD8AC}"/>
+          </ac:spMkLst>
+        </pc:spChg>
+        <pc:spChg chg="add del mod">
+          <ac:chgData name="翔琉 櫻井" userId="9696856e3d08c427" providerId="LiveId" clId="{BD309D27-4A6C-4473-87BA-473DBBF66F9B}" dt="2026-01-19T22:55:27.268" v="1239" actId="21"/>
+          <ac:spMkLst>
+            <pc:docMk/>
+            <pc:sldMk cId="71332995" sldId="257"/>
+            <ac:spMk id="15" creationId="{5D8D94C2-D9A6-B06A-2989-87D8C8F81AA5}"/>
+          </ac:spMkLst>
+        </pc:spChg>
+        <pc:spChg chg="add del mod">
+          <ac:chgData name="翔琉 櫻井" userId="9696856e3d08c427" providerId="LiveId" clId="{BD309D27-4A6C-4473-87BA-473DBBF66F9B}" dt="2026-01-19T22:55:27.268" v="1239" actId="21"/>
+          <ac:spMkLst>
+            <pc:docMk/>
+            <pc:sldMk cId="71332995" sldId="257"/>
+            <ac:spMk id="16" creationId="{B75BD28C-69A6-2F04-284D-1D8B903B1C41}"/>
+          </ac:spMkLst>
+        </pc:spChg>
+        <pc:spChg chg="add del mod">
+          <ac:chgData name="翔琉 櫻井" userId="9696856e3d08c427" providerId="LiveId" clId="{BD309D27-4A6C-4473-87BA-473DBBF66F9B}" dt="2026-01-19T22:55:27.268" v="1239" actId="21"/>
+          <ac:spMkLst>
+            <pc:docMk/>
+            <pc:sldMk cId="71332995" sldId="257"/>
+            <ac:spMk id="17" creationId="{F8A84338-9A2C-E49C-0CCD-8DB8B815D523}"/>
+          </ac:spMkLst>
+        </pc:spChg>
+        <pc:spChg chg="mod">
+          <ac:chgData name="翔琉 櫻井" userId="9696856e3d08c427" providerId="LiveId" clId="{BD309D27-4A6C-4473-87BA-473DBBF66F9B}" dt="2026-01-19T22:55:23.093" v="1238"/>
+          <ac:spMkLst>
+            <pc:docMk/>
+            <pc:sldMk cId="71332995" sldId="257"/>
+            <ac:spMk id="19" creationId="{BE2D9F2C-E01D-0B30-0645-0EA6C932F823}"/>
+          </ac:spMkLst>
+        </pc:spChg>
+        <pc:spChg chg="mod">
+          <ac:chgData name="翔琉 櫻井" userId="9696856e3d08c427" providerId="LiveId" clId="{BD309D27-4A6C-4473-87BA-473DBBF66F9B}" dt="2026-01-19T22:55:23.093" v="1238"/>
+          <ac:spMkLst>
+            <pc:docMk/>
+            <pc:sldMk cId="71332995" sldId="257"/>
+            <ac:spMk id="20" creationId="{FF75518D-AD20-F246-6D6A-EB21BC847A6B}"/>
+          </ac:spMkLst>
+        </pc:spChg>
+        <pc:spChg chg="add mod ord">
+          <ac:chgData name="翔琉 櫻井" userId="9696856e3d08c427" providerId="LiveId" clId="{BD309D27-4A6C-4473-87BA-473DBBF66F9B}" dt="2026-01-19T23:16:03.909" v="1683" actId="167"/>
+          <ac:spMkLst>
+            <pc:docMk/>
+            <pc:sldMk cId="71332995" sldId="257"/>
+            <ac:spMk id="21" creationId="{51FA538A-6348-9BB4-2E2A-E78969F497A9}"/>
+          </ac:spMkLst>
+        </pc:spChg>
+        <pc:spChg chg="add mod ord">
+          <ac:chgData name="翔琉 櫻井" userId="9696856e3d08c427" providerId="LiveId" clId="{BD309D27-4A6C-4473-87BA-473DBBF66F9B}" dt="2026-01-19T23:15:52.724" v="1679" actId="167"/>
+          <ac:spMkLst>
+            <pc:docMk/>
+            <pc:sldMk cId="71332995" sldId="257"/>
+            <ac:spMk id="22" creationId="{96E70598-9FED-356E-DDDE-530E0D867D47}"/>
+          </ac:spMkLst>
+        </pc:spChg>
+        <pc:spChg chg="add mod">
+          <ac:chgData name="翔琉 櫻井" userId="9696856e3d08c427" providerId="LiveId" clId="{BD309D27-4A6C-4473-87BA-473DBBF66F9B}" dt="2026-01-19T23:19:07.647" v="1708" actId="1076"/>
+          <ac:spMkLst>
+            <pc:docMk/>
+            <pc:sldMk cId="71332995" sldId="257"/>
+            <ac:spMk id="23" creationId="{0E3A94D9-8DA9-314B-FCD9-8E91040FBF5B}"/>
+          </ac:spMkLst>
+        </pc:spChg>
+        <pc:grpChg chg="del">
+          <ac:chgData name="翔琉 櫻井" userId="9696856e3d08c427" providerId="LiveId" clId="{BD309D27-4A6C-4473-87BA-473DBBF66F9B}" dt="2026-01-19T23:10:09.492" v="1603" actId="478"/>
+          <ac:grpSpMkLst>
+            <pc:docMk/>
+            <pc:sldMk cId="71332995" sldId="257"/>
+            <ac:grpSpMk id="10" creationId="{E3786FA9-2FAB-9036-2708-AA9220354B01}"/>
+          </ac:grpSpMkLst>
+        </pc:grpChg>
+        <pc:grpChg chg="add del mod">
+          <ac:chgData name="翔琉 櫻井" userId="9696856e3d08c427" providerId="LiveId" clId="{BD309D27-4A6C-4473-87BA-473DBBF66F9B}" dt="2026-01-19T22:55:27.268" v="1239" actId="21"/>
+          <ac:grpSpMkLst>
+            <pc:docMk/>
+            <pc:sldMk cId="71332995" sldId="257"/>
+            <ac:grpSpMk id="18" creationId="{71974747-3C92-9A45-AE82-E699A88FB7AC}"/>
+          </ac:grpSpMkLst>
+        </pc:grpChg>
+      </pc:sldChg>
+      <pc:sldChg chg="modSp mod">
+        <pc:chgData name="翔琉 櫻井" userId="9696856e3d08c427" providerId="LiveId" clId="{BD309D27-4A6C-4473-87BA-473DBBF66F9B}" dt="2026-01-20T05:49:11.715" v="2949" actId="1076"/>
+        <pc:sldMkLst>
+          <pc:docMk/>
+          <pc:sldMk cId="1560374770" sldId="259"/>
+        </pc:sldMkLst>
+        <pc:spChg chg="mod">
+          <ac:chgData name="翔琉 櫻井" userId="9696856e3d08c427" providerId="LiveId" clId="{BD309D27-4A6C-4473-87BA-473DBBF66F9B}" dt="2026-01-19T23:44:58.048" v="2237" actId="255"/>
+          <ac:spMkLst>
+            <pc:docMk/>
+            <pc:sldMk cId="1560374770" sldId="259"/>
+            <ac:spMk id="18" creationId="{A4A444F4-643C-8E74-EB09-3A0BA054C3D4}"/>
+          </ac:spMkLst>
+        </pc:spChg>
+        <pc:spChg chg="mod">
+          <ac:chgData name="翔琉 櫻井" userId="9696856e3d08c427" providerId="LiveId" clId="{BD309D27-4A6C-4473-87BA-473DBBF66F9B}" dt="2026-01-19T23:45:01.896" v="2238" actId="255"/>
+          <ac:spMkLst>
+            <pc:docMk/>
+            <pc:sldMk cId="1560374770" sldId="259"/>
+            <ac:spMk id="19" creationId="{7E66EB3B-1D8C-3DF4-0000-3BF980EF44FF}"/>
+          </ac:spMkLst>
+        </pc:spChg>
+        <pc:picChg chg="mod">
+          <ac:chgData name="翔琉 櫻井" userId="9696856e3d08c427" providerId="LiveId" clId="{BD309D27-4A6C-4473-87BA-473DBBF66F9B}" dt="2026-01-20T05:49:11.715" v="2949" actId="1076"/>
+          <ac:picMkLst>
+            <pc:docMk/>
+            <pc:sldMk cId="1560374770" sldId="259"/>
+            <ac:picMk id="22" creationId="{6AF4E1C3-755A-F4A3-CA9C-A3DD68B8056D}"/>
+          </ac:picMkLst>
+        </pc:picChg>
+      </pc:sldChg>
+      <pc:sldChg chg="addSp delSp modSp mod">
+        <pc:chgData name="翔琉 櫻井" userId="9696856e3d08c427" providerId="LiveId" clId="{BD309D27-4A6C-4473-87BA-473DBBF66F9B}" dt="2026-01-19T23:55:07.115" v="2398" actId="1076"/>
         <pc:sldMkLst>
           <pc:docMk/>
           <pc:sldMk cId="2634224573" sldId="260"/>
@@ -155,6 +333,14 @@
             <ac:spMk id="38" creationId="{2323660B-C3FF-DBCF-9C8C-8EC04DE7D714}"/>
           </ac:spMkLst>
         </pc:spChg>
+        <pc:spChg chg="mod">
+          <ac:chgData name="翔琉 櫻井" userId="9696856e3d08c427" providerId="LiveId" clId="{BD309D27-4A6C-4473-87BA-473DBBF66F9B}" dt="2026-01-19T23:53:26.788" v="2357" actId="1076"/>
+          <ac:spMkLst>
+            <pc:docMk/>
+            <pc:sldMk cId="2634224573" sldId="260"/>
+            <ac:spMk id="39" creationId="{140A9F7B-5094-1145-CABD-B246C3FDD88B}"/>
+          </ac:spMkLst>
+        </pc:spChg>
         <pc:spChg chg="del">
           <ac:chgData name="翔琉 櫻井" userId="9696856e3d08c427" providerId="LiveId" clId="{BD309D27-4A6C-4473-87BA-473DBBF66F9B}" dt="2026-01-19T19:36:47.807" v="0" actId="478"/>
           <ac:spMkLst>
@@ -164,11 +350,83 @@
           </ac:spMkLst>
         </pc:spChg>
         <pc:spChg chg="mod">
-          <ac:chgData name="翔琉 櫻井" userId="9696856e3d08c427" providerId="LiveId" clId="{BD309D27-4A6C-4473-87BA-473DBBF66F9B}" dt="2026-01-19T21:03:35.149" v="213" actId="1076"/>
+          <ac:chgData name="翔琉 櫻井" userId="9696856e3d08c427" providerId="LiveId" clId="{BD309D27-4A6C-4473-87BA-473DBBF66F9B}" dt="2026-01-19T23:54:07.585" v="2379" actId="20577"/>
+          <ac:spMkLst>
+            <pc:docMk/>
+            <pc:sldMk cId="2634224573" sldId="260"/>
+            <ac:spMk id="41" creationId="{E324E133-541E-36FF-73C0-02DDB9A8A616}"/>
+          </ac:spMkLst>
+        </pc:spChg>
+        <pc:spChg chg="del mod">
+          <ac:chgData name="翔琉 櫻井" userId="9696856e3d08c427" providerId="LiveId" clId="{BD309D27-4A6C-4473-87BA-473DBBF66F9B}" dt="2026-01-19T23:45:18.757" v="2240" actId="478"/>
           <ac:spMkLst>
             <pc:docMk/>
             <pc:sldMk cId="2634224573" sldId="260"/>
             <ac:spMk id="42" creationId="{94A8698C-1A40-2AA7-68F5-7525FD1852D4}"/>
+          </ac:spMkLst>
+        </pc:spChg>
+        <pc:spChg chg="del mod">
+          <ac:chgData name="翔琉 櫻井" userId="9696856e3d08c427" providerId="LiveId" clId="{BD309D27-4A6C-4473-87BA-473DBBF66F9B}" dt="2026-01-19T23:53:56.348" v="2372" actId="478"/>
+          <ac:spMkLst>
+            <pc:docMk/>
+            <pc:sldMk cId="2634224573" sldId="260"/>
+            <ac:spMk id="43" creationId="{7F07CBD8-4098-805B-DFF2-227230662982}"/>
+          </ac:spMkLst>
+        </pc:spChg>
+        <pc:spChg chg="del mod">
+          <ac:chgData name="翔琉 櫻井" userId="9696856e3d08c427" providerId="LiveId" clId="{BD309D27-4A6C-4473-87BA-473DBBF66F9B}" dt="2026-01-19T23:52:15.173" v="2335" actId="478"/>
+          <ac:spMkLst>
+            <pc:docMk/>
+            <pc:sldMk cId="2634224573" sldId="260"/>
+            <ac:spMk id="44" creationId="{3ABCF111-B1C3-DF2D-8039-54A2823E6A99}"/>
+          </ac:spMkLst>
+        </pc:spChg>
+        <pc:spChg chg="del mod">
+          <ac:chgData name="翔琉 櫻井" userId="9696856e3d08c427" providerId="LiveId" clId="{BD309D27-4A6C-4473-87BA-473DBBF66F9B}" dt="2026-01-19T23:52:16.453" v="2336" actId="478"/>
+          <ac:spMkLst>
+            <pc:docMk/>
+            <pc:sldMk cId="2634224573" sldId="260"/>
+            <ac:spMk id="45" creationId="{7E99F142-395C-7C6A-B330-5ED1446BAB62}"/>
+          </ac:spMkLst>
+        </pc:spChg>
+        <pc:spChg chg="mod">
+          <ac:chgData name="翔琉 櫻井" userId="9696856e3d08c427" providerId="LiveId" clId="{BD309D27-4A6C-4473-87BA-473DBBF66F9B}" dt="2026-01-19T23:55:07.115" v="2398" actId="1076"/>
+          <ac:spMkLst>
+            <pc:docMk/>
+            <pc:sldMk cId="2634224573" sldId="260"/>
+            <ac:spMk id="46" creationId="{EBF812E3-0011-B7C9-A7DA-0974DEE5299B}"/>
+          </ac:spMkLst>
+        </pc:spChg>
+        <pc:spChg chg="mod">
+          <ac:chgData name="翔琉 櫻井" userId="9696856e3d08c427" providerId="LiveId" clId="{BD309D27-4A6C-4473-87BA-473DBBF66F9B}" dt="2026-01-19T23:54:34.244" v="2385" actId="14100"/>
+          <ac:spMkLst>
+            <pc:docMk/>
+            <pc:sldMk cId="2634224573" sldId="260"/>
+            <ac:spMk id="47" creationId="{8C922CC7-B019-5A58-8C17-809C4B6A356E}"/>
+          </ac:spMkLst>
+        </pc:spChg>
+        <pc:spChg chg="del mod">
+          <ac:chgData name="翔琉 櫻井" userId="9696856e3d08c427" providerId="LiveId" clId="{BD309D27-4A6C-4473-87BA-473DBBF66F9B}" dt="2026-01-19T23:52:13.869" v="2334" actId="478"/>
+          <ac:spMkLst>
+            <pc:docMk/>
+            <pc:sldMk cId="2634224573" sldId="260"/>
+            <ac:spMk id="48" creationId="{31A2437B-2C74-B685-402D-DF5D19DD46BC}"/>
+          </ac:spMkLst>
+        </pc:spChg>
+        <pc:spChg chg="del">
+          <ac:chgData name="翔琉 櫻井" userId="9696856e3d08c427" providerId="LiveId" clId="{BD309D27-4A6C-4473-87BA-473DBBF66F9B}" dt="2026-01-19T22:40:03.893" v="1015" actId="478"/>
+          <ac:spMkLst>
+            <pc:docMk/>
+            <pc:sldMk cId="2634224573" sldId="260"/>
+            <ac:spMk id="49" creationId="{6394D0D0-ED61-4FD0-50D8-D8498098B279}"/>
+          </ac:spMkLst>
+        </pc:spChg>
+        <pc:spChg chg="add del mod">
+          <ac:chgData name="翔琉 櫻井" userId="9696856e3d08c427" providerId="LiveId" clId="{BD309D27-4A6C-4473-87BA-473DBBF66F9B}" dt="2026-01-19T23:53:36.405" v="2358" actId="478"/>
+          <ac:spMkLst>
+            <pc:docMk/>
+            <pc:sldMk cId="2634224573" sldId="260"/>
+            <ac:spMk id="50" creationId="{71E07194-10CD-D51A-ECDD-4799DAAEE10E}"/>
           </ac:spMkLst>
         </pc:spChg>
       </pc:sldChg>
@@ -196,13 +454,21 @@
         </pc:spChg>
       </pc:sldChg>
       <pc:sldChg chg="modSp mod">
-        <pc:chgData name="翔琉 櫻井" userId="9696856e3d08c427" providerId="LiveId" clId="{BD309D27-4A6C-4473-87BA-473DBBF66F9B}" dt="2026-01-19T21:00:58.141" v="212" actId="14100"/>
+        <pc:chgData name="翔琉 櫻井" userId="9696856e3d08c427" providerId="LiveId" clId="{BD309D27-4A6C-4473-87BA-473DBBF66F9B}" dt="2026-01-20T03:38:02.747" v="2920" actId="20577"/>
         <pc:sldMkLst>
           <pc:docMk/>
           <pc:sldMk cId="1416790845" sldId="262"/>
         </pc:sldMkLst>
         <pc:spChg chg="mod">
-          <ac:chgData name="翔琉 櫻井" userId="9696856e3d08c427" providerId="LiveId" clId="{BD309D27-4A6C-4473-87BA-473DBBF66F9B}" dt="2026-01-19T21:00:48.326" v="210" actId="20577"/>
+          <ac:chgData name="翔琉 櫻井" userId="9696856e3d08c427" providerId="LiveId" clId="{BD309D27-4A6C-4473-87BA-473DBBF66F9B}" dt="2026-01-20T03:27:01.747" v="2439" actId="115"/>
+          <ac:spMkLst>
+            <pc:docMk/>
+            <pc:sldMk cId="1416790845" sldId="262"/>
+            <ac:spMk id="2" creationId="{EFD60252-1501-71D8-6BC9-E78149346470}"/>
+          </ac:spMkLst>
+        </pc:spChg>
+        <pc:spChg chg="mod">
+          <ac:chgData name="翔琉 櫻井" userId="9696856e3d08c427" providerId="LiveId" clId="{BD309D27-4A6C-4473-87BA-473DBBF66F9B}" dt="2026-01-20T03:38:02.747" v="2920" actId="20577"/>
           <ac:spMkLst>
             <pc:docMk/>
             <pc:sldMk cId="1416790845" sldId="262"/>
@@ -210,7 +476,7 @@
           </ac:spMkLst>
         </pc:spChg>
         <pc:spChg chg="mod">
-          <ac:chgData name="翔琉 櫻井" userId="9696856e3d08c427" providerId="LiveId" clId="{BD309D27-4A6C-4473-87BA-473DBBF66F9B}" dt="2026-01-19T21:00:58.141" v="212" actId="14100"/>
+          <ac:chgData name="翔琉 櫻井" userId="9696856e3d08c427" providerId="LiveId" clId="{BD309D27-4A6C-4473-87BA-473DBBF66F9B}" dt="2026-01-20T03:37:52.045" v="2918" actId="1076"/>
           <ac:spMkLst>
             <pc:docMk/>
             <pc:sldMk cId="1416790845" sldId="262"/>
@@ -218,14 +484,29 @@
           </ac:spMkLst>
         </pc:spChg>
       </pc:sldChg>
-      <pc:sldChg chg="addSp delSp modSp new mod modClrScheme chgLayout">
-        <pc:chgData name="翔琉 櫻井" userId="9696856e3d08c427" providerId="LiveId" clId="{BD309D27-4A6C-4473-87BA-473DBBF66F9B}" dt="2026-01-19T21:14:11.769" v="245" actId="26606"/>
+      <pc:sldChg chg="modSp mod">
+        <pc:chgData name="翔琉 櫻井" userId="9696856e3d08c427" providerId="LiveId" clId="{BD309D27-4A6C-4473-87BA-473DBBF66F9B}" dt="2026-01-19T22:29:00.266" v="986" actId="207"/>
+        <pc:sldMkLst>
+          <pc:docMk/>
+          <pc:sldMk cId="646169899" sldId="263"/>
+        </pc:sldMkLst>
+        <pc:spChg chg="mod">
+          <ac:chgData name="翔琉 櫻井" userId="9696856e3d08c427" providerId="LiveId" clId="{BD309D27-4A6C-4473-87BA-473DBBF66F9B}" dt="2026-01-19T22:29:00.266" v="986" actId="207"/>
+          <ac:spMkLst>
+            <pc:docMk/>
+            <pc:sldMk cId="646169899" sldId="263"/>
+            <ac:spMk id="3" creationId="{83113ED6-80FB-38AA-B1C6-A2AEE513B7C5}"/>
+          </ac:spMkLst>
+        </pc:spChg>
+      </pc:sldChg>
+      <pc:sldChg chg="addSp delSp modSp new del mod modClrScheme chgLayout">
+        <pc:chgData name="翔琉 櫻井" userId="9696856e3d08c427" providerId="LiveId" clId="{BD309D27-4A6C-4473-87BA-473DBBF66F9B}" dt="2026-01-20T03:30:45.290" v="2471" actId="2696"/>
         <pc:sldMkLst>
           <pc:docMk/>
           <pc:sldMk cId="2369393797" sldId="264"/>
         </pc:sldMkLst>
         <pc:spChg chg="mod">
-          <ac:chgData name="翔琉 櫻井" userId="9696856e3d08c427" providerId="LiveId" clId="{BD309D27-4A6C-4473-87BA-473DBBF66F9B}" dt="2026-01-19T21:14:11.769" v="245" actId="26606"/>
+          <ac:chgData name="翔琉 櫻井" userId="9696856e3d08c427" providerId="LiveId" clId="{BD309D27-4A6C-4473-87BA-473DBBF66F9B}" dt="2026-01-20T03:30:38.901" v="2470"/>
           <ac:spMkLst>
             <pc:docMk/>
             <pc:sldMk cId="2369393797" sldId="264"/>
@@ -264,6 +545,70 @@
             <ac:spMk id="11" creationId="{CD4139A9-5511-CDC9-8D72-B8590820BC1A}"/>
           </ac:spMkLst>
         </pc:spChg>
+        <pc:spChg chg="add mod ord">
+          <ac:chgData name="翔琉 櫻井" userId="9696856e3d08c427" providerId="LiveId" clId="{BD309D27-4A6C-4473-87BA-473DBBF66F9B}" dt="2026-01-19T23:31:07.850" v="1902" actId="207"/>
+          <ac:spMkLst>
+            <pc:docMk/>
+            <pc:sldMk cId="2369393797" sldId="264"/>
+            <ac:spMk id="15" creationId="{F3328CBF-D74E-3AB9-7946-A1C171BBCA79}"/>
+          </ac:spMkLst>
+        </pc:spChg>
+        <pc:spChg chg="add del mod">
+          <ac:chgData name="翔琉 櫻井" userId="9696856e3d08c427" providerId="LiveId" clId="{BD309D27-4A6C-4473-87BA-473DBBF66F9B}" dt="2026-01-19T23:31:17.547" v="1903" actId="478"/>
+          <ac:spMkLst>
+            <pc:docMk/>
+            <pc:sldMk cId="2369393797" sldId="264"/>
+            <ac:spMk id="16" creationId="{8B3CC8A9-A667-888C-64BC-DA85E739F43D}"/>
+          </ac:spMkLst>
+        </pc:spChg>
+        <pc:spChg chg="add del mod">
+          <ac:chgData name="翔琉 櫻井" userId="9696856e3d08c427" providerId="LiveId" clId="{BD309D27-4A6C-4473-87BA-473DBBF66F9B}" dt="2026-01-19T23:31:19.202" v="1904" actId="478"/>
+          <ac:spMkLst>
+            <pc:docMk/>
+            <pc:sldMk cId="2369393797" sldId="264"/>
+            <ac:spMk id="17" creationId="{723FF006-AC3C-9F0F-585E-E0E398CC0A37}"/>
+          </ac:spMkLst>
+        </pc:spChg>
+        <pc:spChg chg="add mod">
+          <ac:chgData name="翔琉 櫻井" userId="9696856e3d08c427" providerId="LiveId" clId="{BD309D27-4A6C-4473-87BA-473DBBF66F9B}" dt="2026-01-19T23:31:23.500" v="1906" actId="1076"/>
+          <ac:spMkLst>
+            <pc:docMk/>
+            <pc:sldMk cId="2369393797" sldId="264"/>
+            <ac:spMk id="18" creationId="{0AD4D2E4-1716-1468-4DE6-084A4A7667CC}"/>
+          </ac:spMkLst>
+        </pc:spChg>
+        <pc:spChg chg="add mod">
+          <ac:chgData name="翔琉 櫻井" userId="9696856e3d08c427" providerId="LiveId" clId="{BD309D27-4A6C-4473-87BA-473DBBF66F9B}" dt="2026-01-19T23:31:27.132" v="1908" actId="1076"/>
+          <ac:spMkLst>
+            <pc:docMk/>
+            <pc:sldMk cId="2369393797" sldId="264"/>
+            <ac:spMk id="19" creationId="{AF4B5952-F251-8A67-25D9-45A7DB4504E4}"/>
+          </ac:spMkLst>
+        </pc:spChg>
+        <pc:spChg chg="add mod">
+          <ac:chgData name="翔琉 櫻井" userId="9696856e3d08c427" providerId="LiveId" clId="{BD309D27-4A6C-4473-87BA-473DBBF66F9B}" dt="2026-01-19T23:31:38.716" v="1910" actId="1076"/>
+          <ac:spMkLst>
+            <pc:docMk/>
+            <pc:sldMk cId="2369393797" sldId="264"/>
+            <ac:spMk id="20" creationId="{3454BBFA-7D45-E658-F8E6-2D5DD8B9F3E4}"/>
+          </ac:spMkLst>
+        </pc:spChg>
+        <pc:spChg chg="add mod">
+          <ac:chgData name="翔琉 櫻井" userId="9696856e3d08c427" providerId="LiveId" clId="{BD309D27-4A6C-4473-87BA-473DBBF66F9B}" dt="2026-01-19T23:31:43.523" v="1912" actId="1076"/>
+          <ac:spMkLst>
+            <pc:docMk/>
+            <pc:sldMk cId="2369393797" sldId="264"/>
+            <ac:spMk id="21" creationId="{A50AA3F1-5578-B3A2-E5AF-0BAD8C1D16B3}"/>
+          </ac:spMkLst>
+        </pc:spChg>
+        <pc:spChg chg="add mod">
+          <ac:chgData name="翔琉 櫻井" userId="9696856e3d08c427" providerId="LiveId" clId="{BD309D27-4A6C-4473-87BA-473DBBF66F9B}" dt="2026-01-19T23:31:47.955" v="1914" actId="1076"/>
+          <ac:spMkLst>
+            <pc:docMk/>
+            <pc:sldMk cId="2369393797" sldId="264"/>
+            <ac:spMk id="22" creationId="{7CC6D493-6DEE-8DB5-D92E-60E356A14BE3}"/>
+          </ac:spMkLst>
+        </pc:spChg>
         <pc:picChg chg="add del mod">
           <ac:chgData name="翔琉 櫻井" userId="9696856e3d08c427" providerId="LiveId" clId="{BD309D27-4A6C-4473-87BA-473DBBF66F9B}" dt="2026-01-19T21:10:24.086" v="221" actId="21"/>
           <ac:picMkLst>
@@ -288,23 +633,31 @@
             <ac:picMk id="12" creationId="{23FAF5C5-B4A3-0729-027D-75989DBECC3C}"/>
           </ac:picMkLst>
         </pc:picChg>
-        <pc:picChg chg="add mod modCrop">
-          <ac:chgData name="翔琉 櫻井" userId="9696856e3d08c427" providerId="LiveId" clId="{BD309D27-4A6C-4473-87BA-473DBBF66F9B}" dt="2026-01-19T21:14:11.769" v="245" actId="26606"/>
+        <pc:picChg chg="add del mod modCrop">
+          <ac:chgData name="翔琉 櫻井" userId="9696856e3d08c427" providerId="LiveId" clId="{BD309D27-4A6C-4473-87BA-473DBBF66F9B}" dt="2026-01-20T03:20:00.218" v="2425" actId="478"/>
           <ac:picMkLst>
             <pc:docMk/>
             <pc:sldMk cId="2369393797" sldId="264"/>
             <ac:picMk id="14" creationId="{331C40EE-E895-7BC7-AEA9-DB01736B278F}"/>
           </ac:picMkLst>
         </pc:picChg>
+        <pc:picChg chg="add mod ord modCrop">
+          <ac:chgData name="翔琉 櫻井" userId="9696856e3d08c427" providerId="LiveId" clId="{BD309D27-4A6C-4473-87BA-473DBBF66F9B}" dt="2026-01-20T03:20:16.111" v="2430" actId="167"/>
+          <ac:picMkLst>
+            <pc:docMk/>
+            <pc:sldMk cId="2369393797" sldId="264"/>
+            <ac:picMk id="24" creationId="{ABF4E412-D5C1-71D7-3101-22D8085F22FD}"/>
+          </ac:picMkLst>
+        </pc:picChg>
       </pc:sldChg>
       <pc:sldChg chg="addSp delSp modSp new mod ord">
-        <pc:chgData name="翔琉 櫻井" userId="9696856e3d08c427" providerId="LiveId" clId="{BD309D27-4A6C-4473-87BA-473DBBF66F9B}" dt="2026-01-19T21:17:45.507" v="266" actId="20577"/>
+        <pc:chgData name="翔琉 櫻井" userId="9696856e3d08c427" providerId="LiveId" clId="{BD309D27-4A6C-4473-87BA-473DBBF66F9B}" dt="2026-01-20T03:36:27.286" v="2827" actId="20577"/>
         <pc:sldMkLst>
           <pc:docMk/>
           <pc:sldMk cId="443401420" sldId="265"/>
         </pc:sldMkLst>
         <pc:spChg chg="mod">
-          <ac:chgData name="翔琉 櫻井" userId="9696856e3d08c427" providerId="LiveId" clId="{BD309D27-4A6C-4473-87BA-473DBBF66F9B}" dt="2026-01-19T21:17:45.507" v="266" actId="20577"/>
+          <ac:chgData name="翔琉 櫻井" userId="9696856e3d08c427" providerId="LiveId" clId="{BD309D27-4A6C-4473-87BA-473DBBF66F9B}" dt="2026-01-20T03:36:27.286" v="2827" actId="20577"/>
           <ac:spMkLst>
             <pc:docMk/>
             <pc:sldMk cId="443401420" sldId="265"/>
@@ -320,22 +673,46 @@
           </ac:spMkLst>
         </pc:spChg>
         <pc:spChg chg="add mod">
-          <ac:chgData name="翔琉 櫻井" userId="9696856e3d08c427" providerId="LiveId" clId="{BD309D27-4A6C-4473-87BA-473DBBF66F9B}" dt="2026-01-19T20:49:05.167" v="138"/>
+          <ac:chgData name="翔琉 櫻井" userId="9696856e3d08c427" providerId="LiveId" clId="{BD309D27-4A6C-4473-87BA-473DBBF66F9B}" dt="2026-01-19T22:30:19.850" v="999" actId="113"/>
           <ac:spMkLst>
             <pc:docMk/>
             <pc:sldMk cId="443401420" sldId="265"/>
             <ac:spMk id="9" creationId="{E221A8E1-EA11-1126-3023-712944A98EF5}"/>
           </ac:spMkLst>
         </pc:spChg>
+        <pc:picChg chg="add del mod modCrop">
+          <ac:chgData name="翔琉 櫻井" userId="9696856e3d08c427" providerId="LiveId" clId="{BD309D27-4A6C-4473-87BA-473DBBF66F9B}" dt="2026-01-19T22:08:22.530" v="394" actId="21"/>
+          <ac:picMkLst>
+            <pc:docMk/>
+            <pc:sldMk cId="443401420" sldId="265"/>
+            <ac:picMk id="6" creationId="{222E254B-5CC7-4481-9F40-1FE5B26FF33E}"/>
+          </ac:picMkLst>
+        </pc:picChg>
+        <pc:picChg chg="add del mod modCrop">
+          <ac:chgData name="翔琉 櫻井" userId="9696856e3d08c427" providerId="LiveId" clId="{BD309D27-4A6C-4473-87BA-473DBBF66F9B}" dt="2026-01-20T03:18:19.993" v="2411" actId="478"/>
+          <ac:picMkLst>
+            <pc:docMk/>
+            <pc:sldMk cId="443401420" sldId="265"/>
+            <ac:picMk id="8" creationId="{E36C9ACD-F843-906D-0A36-2D0D6728AFD8}"/>
+          </ac:picMkLst>
+        </pc:picChg>
+        <pc:picChg chg="add mod modCrop">
+          <ac:chgData name="翔琉 櫻井" userId="9696856e3d08c427" providerId="LiveId" clId="{BD309D27-4A6C-4473-87BA-473DBBF66F9B}" dt="2026-01-20T03:18:59.076" v="2424" actId="1076"/>
+          <ac:picMkLst>
+            <pc:docMk/>
+            <pc:sldMk cId="443401420" sldId="265"/>
+            <ac:picMk id="11" creationId="{39FFEEAE-C2D8-FD72-2E67-5800A0F655E4}"/>
+          </ac:picMkLst>
+        </pc:picChg>
       </pc:sldChg>
       <pc:sldChg chg="addSp delSp modSp new mod">
-        <pc:chgData name="翔琉 櫻井" userId="9696856e3d08c427" providerId="LiveId" clId="{BD309D27-4A6C-4473-87BA-473DBBF66F9B}" dt="2026-01-19T21:10:43.935" v="229" actId="20577"/>
+        <pc:chgData name="翔琉 櫻井" userId="9696856e3d08c427" providerId="LiveId" clId="{BD309D27-4A6C-4473-87BA-473DBBF66F9B}" dt="2026-01-20T06:54:31.821" v="2964" actId="1076"/>
         <pc:sldMkLst>
           <pc:docMk/>
           <pc:sldMk cId="2103166186" sldId="266"/>
         </pc:sldMkLst>
         <pc:spChg chg="mod">
-          <ac:chgData name="翔琉 櫻井" userId="9696856e3d08c427" providerId="LiveId" clId="{BD309D27-4A6C-4473-87BA-473DBBF66F9B}" dt="2026-01-19T21:10:43.935" v="229" actId="20577"/>
+          <ac:chgData name="翔琉 櫻井" userId="9696856e3d08c427" providerId="LiveId" clId="{BD309D27-4A6C-4473-87BA-473DBBF66F9B}" dt="2026-01-20T03:47:42.746" v="2948" actId="20577"/>
           <ac:spMkLst>
             <pc:docMk/>
             <pc:sldMk cId="2103166186" sldId="266"/>
@@ -358,14 +735,484 @@
             <ac:spMk id="4" creationId="{09F9951A-6AF3-3F19-70CA-A6F5979A68FA}"/>
           </ac:spMkLst>
         </pc:spChg>
-        <pc:picChg chg="add mod">
-          <ac:chgData name="翔琉 櫻井" userId="9696856e3d08c427" providerId="LiveId" clId="{BD309D27-4A6C-4473-87BA-473DBBF66F9B}" dt="2026-01-19T21:10:35.533" v="223" actId="26606"/>
+        <pc:spChg chg="add del">
+          <ac:chgData name="翔琉 櫻井" userId="9696856e3d08c427" providerId="LiveId" clId="{BD309D27-4A6C-4473-87BA-473DBBF66F9B}" dt="2026-01-19T23:32:32.542" v="1916" actId="478"/>
+          <ac:spMkLst>
+            <pc:docMk/>
+            <pc:sldMk cId="2103166186" sldId="266"/>
+            <ac:spMk id="5" creationId="{7887E9BB-5ACB-162D-652F-6C661C1573FF}"/>
+          </ac:spMkLst>
+        </pc:spChg>
+        <pc:spChg chg="add mod">
+          <ac:chgData name="翔琉 櫻井" userId="9696856e3d08c427" providerId="LiveId" clId="{BD309D27-4A6C-4473-87BA-473DBBF66F9B}" dt="2026-01-20T06:54:31.821" v="2964" actId="1076"/>
+          <ac:spMkLst>
+            <pc:docMk/>
+            <pc:sldMk cId="2103166186" sldId="266"/>
+            <ac:spMk id="7" creationId="{B8312EF7-8CE1-9C89-A8E8-C453D10403AC}"/>
+          </ac:spMkLst>
+        </pc:spChg>
+        <pc:spChg chg="add mod">
+          <ac:chgData name="翔琉 櫻井" userId="9696856e3d08c427" providerId="LiveId" clId="{BD309D27-4A6C-4473-87BA-473DBBF66F9B}" dt="2026-01-20T03:31:41.452" v="2485" actId="1076"/>
+          <ac:spMkLst>
+            <pc:docMk/>
+            <pc:sldMk cId="2103166186" sldId="266"/>
+            <ac:spMk id="8" creationId="{4351DFC4-E5E1-8B59-4A9A-0440FE30C7AE}"/>
+          </ac:spMkLst>
+        </pc:spChg>
+        <pc:spChg chg="add del mod">
+          <ac:chgData name="翔琉 櫻井" userId="9696856e3d08c427" providerId="LiveId" clId="{BD309D27-4A6C-4473-87BA-473DBBF66F9B}" dt="2026-01-20T03:21:03.882" v="2438" actId="478"/>
+          <ac:spMkLst>
+            <pc:docMk/>
+            <pc:sldMk cId="2103166186" sldId="266"/>
+            <ac:spMk id="10" creationId="{9B8AF1BF-AF20-2688-42F9-35566D506C57}"/>
+          </ac:spMkLst>
+        </pc:spChg>
+        <pc:spChg chg="add mod">
+          <ac:chgData name="翔琉 櫻井" userId="9696856e3d08c427" providerId="LiveId" clId="{BD309D27-4A6C-4473-87BA-473DBBF66F9B}" dt="2026-01-20T03:35:46.923" v="2774" actId="2085"/>
+          <ac:spMkLst>
+            <pc:docMk/>
+            <pc:sldMk cId="2103166186" sldId="266"/>
+            <ac:spMk id="17" creationId="{E7EEB41C-C27D-6A31-A643-15B1169D9244}"/>
+          </ac:spMkLst>
+        </pc:spChg>
+        <pc:spChg chg="add mod">
+          <ac:chgData name="翔琉 櫻井" userId="9696856e3d08c427" providerId="LiveId" clId="{BD309D27-4A6C-4473-87BA-473DBBF66F9B}" dt="2026-01-20T03:36:02.639" v="2794" actId="207"/>
+          <ac:spMkLst>
+            <pc:docMk/>
+            <pc:sldMk cId="2103166186" sldId="266"/>
+            <ac:spMk id="18" creationId="{EC034CE4-9D6E-DCE8-4505-EBD842E9ABB8}"/>
+          </ac:spMkLst>
+        </pc:spChg>
+        <pc:spChg chg="add mod">
+          <ac:chgData name="翔琉 櫻井" userId="9696856e3d08c427" providerId="LiveId" clId="{BD309D27-4A6C-4473-87BA-473DBBF66F9B}" dt="2026-01-20T03:36:06.945" v="2807" actId="207"/>
+          <ac:spMkLst>
+            <pc:docMk/>
+            <pc:sldMk cId="2103166186" sldId="266"/>
+            <ac:spMk id="19" creationId="{3DAE00A9-86E4-B40D-6934-0B978D3CCC43}"/>
+          </ac:spMkLst>
+        </pc:spChg>
+        <pc:spChg chg="add mod">
+          <ac:chgData name="翔琉 櫻井" userId="9696856e3d08c427" providerId="LiveId" clId="{BD309D27-4A6C-4473-87BA-473DBBF66F9B}" dt="2026-01-20T03:35:22.328" v="2757" actId="14100"/>
+          <ac:spMkLst>
+            <pc:docMk/>
+            <pc:sldMk cId="2103166186" sldId="266"/>
+            <ac:spMk id="20" creationId="{630879B5-C00B-737F-F0B1-2C8AB0983152}"/>
+          </ac:spMkLst>
+        </pc:spChg>
+        <pc:spChg chg="add mod">
+          <ac:chgData name="翔琉 櫻井" userId="9696856e3d08c427" providerId="LiveId" clId="{BD309D27-4A6C-4473-87BA-473DBBF66F9B}" dt="2026-01-20T03:35:29.013" v="2758" actId="1076"/>
+          <ac:spMkLst>
+            <pc:docMk/>
+            <pc:sldMk cId="2103166186" sldId="266"/>
+            <ac:spMk id="21" creationId="{14F74906-E8C4-F0E7-3E1A-8DF1840B1AFF}"/>
+          </ac:spMkLst>
+        </pc:spChg>
+        <pc:picChg chg="add del mod">
+          <ac:chgData name="翔琉 櫻井" userId="9696856e3d08c427" providerId="LiveId" clId="{BD309D27-4A6C-4473-87BA-473DBBF66F9B}" dt="2026-01-20T03:20:38.988" v="2431" actId="478"/>
           <ac:picMkLst>
             <pc:docMk/>
             <pc:sldMk cId="2103166186" sldId="266"/>
             <ac:picMk id="6" creationId="{04691579-E29F-3821-2738-5BBBB22581F6}"/>
           </ac:picMkLst>
         </pc:picChg>
+        <pc:picChg chg="add del mod ord">
+          <ac:chgData name="翔琉 櫻井" userId="9696856e3d08c427" providerId="LiveId" clId="{BD309D27-4A6C-4473-87BA-473DBBF66F9B}" dt="2026-01-20T03:29:16.417" v="2442" actId="478"/>
+          <ac:picMkLst>
+            <pc:docMk/>
+            <pc:sldMk cId="2103166186" sldId="266"/>
+            <ac:picMk id="12" creationId="{008D7968-C160-1684-4A88-3CB6F69A96C8}"/>
+          </ac:picMkLst>
+        </pc:picChg>
+        <pc:picChg chg="add del mod ord">
+          <ac:chgData name="翔琉 櫻井" userId="9696856e3d08c427" providerId="LiveId" clId="{BD309D27-4A6C-4473-87BA-473DBBF66F9B}" dt="2026-01-20T03:44:54.209" v="2921" actId="478"/>
+          <ac:picMkLst>
+            <pc:docMk/>
+            <pc:sldMk cId="2103166186" sldId="266"/>
+            <ac:picMk id="14" creationId="{9270F17D-301D-2B89-56BB-2D06DFBB4F5B}"/>
+          </ac:picMkLst>
+        </pc:picChg>
+        <pc:picChg chg="add mod modCrop">
+          <ac:chgData name="翔琉 櫻井" userId="9696856e3d08c427" providerId="LiveId" clId="{BD309D27-4A6C-4473-87BA-473DBBF66F9B}" dt="2026-01-20T03:31:29.228" v="2482" actId="1076"/>
+          <ac:picMkLst>
+            <pc:docMk/>
+            <pc:sldMk cId="2103166186" sldId="266"/>
+            <ac:picMk id="16" creationId="{B8A173C9-6B73-7607-E0A6-1C45CBE4AA1C}"/>
+          </ac:picMkLst>
+        </pc:picChg>
+        <pc:picChg chg="add del mod ord">
+          <ac:chgData name="翔琉 櫻井" userId="9696856e3d08c427" providerId="LiveId" clId="{BD309D27-4A6C-4473-87BA-473DBBF66F9B}" dt="2026-01-20T03:47:03.647" v="2932" actId="478"/>
+          <ac:picMkLst>
+            <pc:docMk/>
+            <pc:sldMk cId="2103166186" sldId="266"/>
+            <ac:picMk id="23" creationId="{F8132169-7D3D-D74C-44E4-BE946BC2B85D}"/>
+          </ac:picMkLst>
+        </pc:picChg>
+        <pc:picChg chg="add mod ord">
+          <ac:chgData name="翔琉 櫻井" userId="9696856e3d08c427" providerId="LiveId" clId="{BD309D27-4A6C-4473-87BA-473DBBF66F9B}" dt="2026-01-20T03:47:25.753" v="2941" actId="1076"/>
+          <ac:picMkLst>
+            <pc:docMk/>
+            <pc:sldMk cId="2103166186" sldId="266"/>
+            <ac:picMk id="25" creationId="{A0F3F623-F75A-36E6-4E1C-CF939BC5B4BE}"/>
+          </ac:picMkLst>
+        </pc:picChg>
+      </pc:sldChg>
+      <pc:sldChg chg="modSp new mod">
+        <pc:chgData name="翔琉 櫻井" userId="9696856e3d08c427" providerId="LiveId" clId="{BD309D27-4A6C-4473-87BA-473DBBF66F9B}" dt="2026-01-19T23:27:05.766" v="1748" actId="20577"/>
+        <pc:sldMkLst>
+          <pc:docMk/>
+          <pc:sldMk cId="575384196" sldId="267"/>
+        </pc:sldMkLst>
+        <pc:spChg chg="mod">
+          <ac:chgData name="翔琉 櫻井" userId="9696856e3d08c427" providerId="LiveId" clId="{BD309D27-4A6C-4473-87BA-473DBBF66F9B}" dt="2026-01-19T23:27:05.766" v="1748" actId="20577"/>
+          <ac:spMkLst>
+            <pc:docMk/>
+            <pc:sldMk cId="575384196" sldId="267"/>
+            <ac:spMk id="2" creationId="{51DF95A4-1EAD-4201-9473-01D78AD9A399}"/>
+          </ac:spMkLst>
+        </pc:spChg>
+      </pc:sldChg>
+      <pc:sldChg chg="modSp new mod">
+        <pc:chgData name="翔琉 櫻井" userId="9696856e3d08c427" providerId="LiveId" clId="{BD309D27-4A6C-4473-87BA-473DBBF66F9B}" dt="2026-01-19T23:27:26.645" v="1759" actId="20577"/>
+        <pc:sldMkLst>
+          <pc:docMk/>
+          <pc:sldMk cId="814091284" sldId="268"/>
+        </pc:sldMkLst>
+        <pc:spChg chg="mod">
+          <ac:chgData name="翔琉 櫻井" userId="9696856e3d08c427" providerId="LiveId" clId="{BD309D27-4A6C-4473-87BA-473DBBF66F9B}" dt="2026-01-19T23:27:26.645" v="1759" actId="20577"/>
+          <ac:spMkLst>
+            <pc:docMk/>
+            <pc:sldMk cId="814091284" sldId="268"/>
+            <ac:spMk id="2" creationId="{86AB8C8D-11A8-96A5-361A-59F9257AFEB8}"/>
+          </ac:spMkLst>
+        </pc:spChg>
+      </pc:sldChg>
+      <pc:sldChg chg="modSp new mod">
+        <pc:chgData name="翔琉 櫻井" userId="9696856e3d08c427" providerId="LiveId" clId="{BD309D27-4A6C-4473-87BA-473DBBF66F9B}" dt="2026-01-19T23:27:56.773" v="1784" actId="20577"/>
+        <pc:sldMkLst>
+          <pc:docMk/>
+          <pc:sldMk cId="1108715131" sldId="269"/>
+        </pc:sldMkLst>
+        <pc:spChg chg="mod">
+          <ac:chgData name="翔琉 櫻井" userId="9696856e3d08c427" providerId="LiveId" clId="{BD309D27-4A6C-4473-87BA-473DBBF66F9B}" dt="2026-01-19T23:27:56.773" v="1784" actId="20577"/>
+          <ac:spMkLst>
+            <pc:docMk/>
+            <pc:sldMk cId="1108715131" sldId="269"/>
+            <ac:spMk id="2" creationId="{4EFC2CDA-0986-B2B7-C320-6B8DE47B33BA}"/>
+          </ac:spMkLst>
+        </pc:spChg>
+      </pc:sldChg>
+    </pc:docChg>
+  </pc:docChgLst>
+  <pc:docChgLst>
+    <pc:chgData name="翔琉 櫻井" userId="9696856e3d08c427" providerId="LiveId" clId="{BF7D5C21-6C97-478A-B4E9-E9BDC868F1D2}"/>
+    <pc:docChg chg="undo custSel addSld modSld">
+      <pc:chgData name="翔琉 櫻井" userId="9696856e3d08c427" providerId="LiveId" clId="{BF7D5C21-6C97-478A-B4E9-E9BDC868F1D2}" dt="2026-01-20T02:04:13.894" v="2095" actId="1076"/>
+      <pc:docMkLst>
+        <pc:docMk/>
+      </pc:docMkLst>
+      <pc:sldChg chg="addSp delSp modSp mod">
+        <pc:chgData name="翔琉 櫻井" userId="9696856e3d08c427" providerId="LiveId" clId="{BF7D5C21-6C97-478A-B4E9-E9BDC868F1D2}" dt="2026-01-20T01:00:37.146" v="1349" actId="1076"/>
+        <pc:sldMkLst>
+          <pc:docMk/>
+          <pc:sldMk cId="1560374770" sldId="259"/>
+        </pc:sldMkLst>
+        <pc:picChg chg="add del mod">
+          <ac:chgData name="翔琉 櫻井" userId="9696856e3d08c427" providerId="LiveId" clId="{BF7D5C21-6C97-478A-B4E9-E9BDC868F1D2}" dt="2026-01-20T00:57:35.248" v="1318" actId="478"/>
+          <ac:picMkLst>
+            <pc:docMk/>
+            <pc:sldMk cId="1560374770" sldId="259"/>
+            <ac:picMk id="3" creationId="{60BDE440-1E4E-976F-3968-17FD80967C9E}"/>
+          </ac:picMkLst>
+        </pc:picChg>
+        <pc:picChg chg="del">
+          <ac:chgData name="翔琉 櫻井" userId="9696856e3d08c427" providerId="LiveId" clId="{BF7D5C21-6C97-478A-B4E9-E9BDC868F1D2}" dt="2026-01-20T00:58:35.230" v="1329" actId="478"/>
+          <ac:picMkLst>
+            <pc:docMk/>
+            <pc:sldMk cId="1560374770" sldId="259"/>
+            <ac:picMk id="5" creationId="{C729A1AC-CAA9-479A-C132-5F707810A468}"/>
+          </ac:picMkLst>
+        </pc:picChg>
+        <pc:picChg chg="del">
+          <ac:chgData name="翔琉 櫻井" userId="9696856e3d08c427" providerId="LiveId" clId="{BF7D5C21-6C97-478A-B4E9-E9BDC868F1D2}" dt="2026-01-20T00:58:22.978" v="1325" actId="478"/>
+          <ac:picMkLst>
+            <pc:docMk/>
+            <pc:sldMk cId="1560374770" sldId="259"/>
+            <ac:picMk id="6" creationId="{4A52564B-15FD-87B0-9AAF-C8FDF3EAEEFC}"/>
+          </ac:picMkLst>
+        </pc:picChg>
+        <pc:picChg chg="del">
+          <ac:chgData name="翔琉 櫻井" userId="9696856e3d08c427" providerId="LiveId" clId="{BF7D5C21-6C97-478A-B4E9-E9BDC868F1D2}" dt="2026-01-20T00:58:03.054" v="1322" actId="478"/>
+          <ac:picMkLst>
+            <pc:docMk/>
+            <pc:sldMk cId="1560374770" sldId="259"/>
+            <ac:picMk id="7" creationId="{0E411378-0E44-0B61-A5CD-848700276D4B}"/>
+          </ac:picMkLst>
+        </pc:picChg>
+        <pc:picChg chg="mod">
+          <ac:chgData name="翔琉 櫻井" userId="9696856e3d08c427" providerId="LiveId" clId="{BF7D5C21-6C97-478A-B4E9-E9BDC868F1D2}" dt="2026-01-20T00:57:52.757" v="1321" actId="1076"/>
+          <ac:picMkLst>
+            <pc:docMk/>
+            <pc:sldMk cId="1560374770" sldId="259"/>
+            <ac:picMk id="8" creationId="{F49DBF96-6781-466B-1809-F66067C18717}"/>
+          </ac:picMkLst>
+        </pc:picChg>
+        <pc:picChg chg="mod">
+          <ac:chgData name="翔琉 櫻井" userId="9696856e3d08c427" providerId="LiveId" clId="{BF7D5C21-6C97-478A-B4E9-E9BDC868F1D2}" dt="2026-01-20T00:59:08.836" v="1334" actId="1076"/>
+          <ac:picMkLst>
+            <pc:docMk/>
+            <pc:sldMk cId="1560374770" sldId="259"/>
+            <ac:picMk id="22" creationId="{6AF4E1C3-755A-F4A3-CA9C-A3DD68B8056D}"/>
+          </ac:picMkLst>
+        </pc:picChg>
+        <pc:picChg chg="mod">
+          <ac:chgData name="翔琉 櫻井" userId="9696856e3d08c427" providerId="LiveId" clId="{BF7D5C21-6C97-478A-B4E9-E9BDC868F1D2}" dt="2026-01-20T01:00:27.176" v="1347" actId="1076"/>
+          <ac:picMkLst>
+            <pc:docMk/>
+            <pc:sldMk cId="1560374770" sldId="259"/>
+            <ac:picMk id="23" creationId="{DA7BE664-2FFD-F025-17E7-F0E91AC9FE7B}"/>
+          </ac:picMkLst>
+        </pc:picChg>
+        <pc:picChg chg="mod">
+          <ac:chgData name="翔琉 櫻井" userId="9696856e3d08c427" providerId="LiveId" clId="{BF7D5C21-6C97-478A-B4E9-E9BDC868F1D2}" dt="2026-01-20T01:00:32.792" v="1348" actId="1076"/>
+          <ac:picMkLst>
+            <pc:docMk/>
+            <pc:sldMk cId="1560374770" sldId="259"/>
+            <ac:picMk id="24" creationId="{AA0C1004-6B88-B469-3CA6-9A949FC669B6}"/>
+          </ac:picMkLst>
+        </pc:picChg>
+        <pc:picChg chg="add mod">
+          <ac:chgData name="翔琉 櫻井" userId="9696856e3d08c427" providerId="LiveId" clId="{BF7D5C21-6C97-478A-B4E9-E9BDC868F1D2}" dt="2026-01-20T00:58:08.895" v="1324" actId="1076"/>
+          <ac:picMkLst>
+            <pc:docMk/>
+            <pc:sldMk cId="1560374770" sldId="259"/>
+            <ac:picMk id="32" creationId="{5AD94068-971B-6FE1-45A4-E3C09BFA739E}"/>
+          </ac:picMkLst>
+        </pc:picChg>
+        <pc:picChg chg="add mod ord">
+          <ac:chgData name="翔琉 櫻井" userId="9696856e3d08c427" providerId="LiveId" clId="{BF7D5C21-6C97-478A-B4E9-E9BDC868F1D2}" dt="2026-01-20T00:58:51.334" v="1332" actId="167"/>
+          <ac:picMkLst>
+            <pc:docMk/>
+            <pc:sldMk cId="1560374770" sldId="259"/>
+            <ac:picMk id="33" creationId="{6A103513-EEFA-701C-7883-247C6C341B04}"/>
+          </ac:picMkLst>
+        </pc:picChg>
+        <pc:picChg chg="add mod ord">
+          <ac:chgData name="翔琉 櫻井" userId="9696856e3d08c427" providerId="LiveId" clId="{BF7D5C21-6C97-478A-B4E9-E9BDC868F1D2}" dt="2026-01-20T00:58:55.821" v="1333" actId="167"/>
+          <ac:picMkLst>
+            <pc:docMk/>
+            <pc:sldMk cId="1560374770" sldId="259"/>
+            <ac:picMk id="34" creationId="{2B29FFCF-8386-AA35-22C1-E50214FCB65D}"/>
+          </ac:picMkLst>
+        </pc:picChg>
+        <pc:picChg chg="add mod">
+          <ac:chgData name="翔琉 櫻井" userId="9696856e3d08c427" providerId="LiveId" clId="{BF7D5C21-6C97-478A-B4E9-E9BDC868F1D2}" dt="2026-01-20T01:00:37.146" v="1349" actId="1076"/>
+          <ac:picMkLst>
+            <pc:docMk/>
+            <pc:sldMk cId="1560374770" sldId="259"/>
+            <ac:picMk id="35" creationId="{5201A704-56E6-842D-646B-042E096FEB95}"/>
+          </ac:picMkLst>
+        </pc:picChg>
+        <pc:picChg chg="add mod">
+          <ac:chgData name="翔琉 櫻井" userId="9696856e3d08c427" providerId="LiveId" clId="{BF7D5C21-6C97-478A-B4E9-E9BDC868F1D2}" dt="2026-01-20T01:00:17.072" v="1345" actId="1076"/>
+          <ac:picMkLst>
+            <pc:docMk/>
+            <pc:sldMk cId="1560374770" sldId="259"/>
+            <ac:picMk id="36" creationId="{A9811F2D-DFB3-A803-17EA-14C8D1790CD1}"/>
+          </ac:picMkLst>
+        </pc:picChg>
+      </pc:sldChg>
+      <pc:sldChg chg="addSp modSp mod">
+        <pc:chgData name="翔琉 櫻井" userId="9696856e3d08c427" providerId="LiveId" clId="{BF7D5C21-6C97-478A-B4E9-E9BDC868F1D2}" dt="2026-01-20T00:09:15.668" v="8" actId="1076"/>
+        <pc:sldMkLst>
+          <pc:docMk/>
+          <pc:sldMk cId="2634224573" sldId="260"/>
+        </pc:sldMkLst>
+        <pc:spChg chg="add mod">
+          <ac:chgData name="翔琉 櫻井" userId="9696856e3d08c427" providerId="LiveId" clId="{BF7D5C21-6C97-478A-B4E9-E9BDC868F1D2}" dt="2026-01-20T00:09:15.668" v="8" actId="1076"/>
+          <ac:spMkLst>
+            <pc:docMk/>
+            <pc:sldMk cId="2634224573" sldId="260"/>
+            <ac:spMk id="3" creationId="{1FE2C310-6D0C-67E7-2EA7-7148F01579DA}"/>
+          </ac:spMkLst>
+        </pc:spChg>
+        <pc:spChg chg="mod">
+          <ac:chgData name="翔琉 櫻井" userId="9696856e3d08c427" providerId="LiveId" clId="{BF7D5C21-6C97-478A-B4E9-E9BDC868F1D2}" dt="2026-01-20T00:08:55.952" v="5" actId="1076"/>
+          <ac:spMkLst>
+            <pc:docMk/>
+            <pc:sldMk cId="2634224573" sldId="260"/>
+            <ac:spMk id="46" creationId="{EBF812E3-0011-B7C9-A7DA-0974DEE5299B}"/>
+          </ac:spMkLst>
+        </pc:spChg>
+        <pc:spChg chg="mod">
+          <ac:chgData name="翔琉 櫻井" userId="9696856e3d08c427" providerId="LiveId" clId="{BF7D5C21-6C97-478A-B4E9-E9BDC868F1D2}" dt="2026-01-20T00:09:01.745" v="6" actId="1076"/>
+          <ac:spMkLst>
+            <pc:docMk/>
+            <pc:sldMk cId="2634224573" sldId="260"/>
+            <ac:spMk id="47" creationId="{8C922CC7-B019-5A58-8C17-809C4B6A356E}"/>
+          </ac:spMkLst>
+        </pc:spChg>
+      </pc:sldChg>
+      <pc:sldChg chg="modSp mod">
+        <pc:chgData name="翔琉 櫻井" userId="9696856e3d08c427" providerId="LiveId" clId="{BF7D5C21-6C97-478A-B4E9-E9BDC868F1D2}" dt="2026-01-20T01:11:25.356" v="1412" actId="20577"/>
+        <pc:sldMkLst>
+          <pc:docMk/>
+          <pc:sldMk cId="1416790845" sldId="262"/>
+        </pc:sldMkLst>
+        <pc:spChg chg="mod">
+          <ac:chgData name="翔琉 櫻井" userId="9696856e3d08c427" providerId="LiveId" clId="{BF7D5C21-6C97-478A-B4E9-E9BDC868F1D2}" dt="2026-01-20T01:11:25.356" v="1412" actId="20577"/>
+          <ac:spMkLst>
+            <pc:docMk/>
+            <pc:sldMk cId="1416790845" sldId="262"/>
+            <ac:spMk id="5" creationId="{CC2B7B21-3B66-E807-85F4-EC62EAD85EDA}"/>
+          </ac:spMkLst>
+        </pc:spChg>
+      </pc:sldChg>
+      <pc:sldChg chg="modSp mod">
+        <pc:chgData name="翔琉 櫻井" userId="9696856e3d08c427" providerId="LiveId" clId="{BF7D5C21-6C97-478A-B4E9-E9BDC868F1D2}" dt="2026-01-20T01:35:21.814" v="1509" actId="207"/>
+        <pc:sldMkLst>
+          <pc:docMk/>
+          <pc:sldMk cId="646169899" sldId="263"/>
+        </pc:sldMkLst>
+        <pc:spChg chg="mod">
+          <ac:chgData name="翔琉 櫻井" userId="9696856e3d08c427" providerId="LiveId" clId="{BF7D5C21-6C97-478A-B4E9-E9BDC868F1D2}" dt="2026-01-20T01:35:21.814" v="1509" actId="207"/>
+          <ac:spMkLst>
+            <pc:docMk/>
+            <pc:sldMk cId="646169899" sldId="263"/>
+            <ac:spMk id="3" creationId="{83113ED6-80FB-38AA-B1C6-A2AEE513B7C5}"/>
+          </ac:spMkLst>
+        </pc:spChg>
+      </pc:sldChg>
+      <pc:sldChg chg="modSp mod">
+        <pc:chgData name="翔琉 櫻井" userId="9696856e3d08c427" providerId="LiveId" clId="{BF7D5C21-6C97-478A-B4E9-E9BDC868F1D2}" dt="2026-01-20T00:15:09.245" v="45" actId="113"/>
+        <pc:sldMkLst>
+          <pc:docMk/>
+          <pc:sldMk cId="443401420" sldId="265"/>
+        </pc:sldMkLst>
+        <pc:spChg chg="mod">
+          <ac:chgData name="翔琉 櫻井" userId="9696856e3d08c427" providerId="LiveId" clId="{BF7D5C21-6C97-478A-B4E9-E9BDC868F1D2}" dt="2026-01-20T00:15:09.245" v="45" actId="113"/>
+          <ac:spMkLst>
+            <pc:docMk/>
+            <pc:sldMk cId="443401420" sldId="265"/>
+            <ac:spMk id="9" creationId="{E221A8E1-EA11-1126-3023-712944A98EF5}"/>
+          </ac:spMkLst>
+        </pc:spChg>
+      </pc:sldChg>
+      <pc:sldChg chg="modSp mod">
+        <pc:chgData name="翔琉 櫻井" userId="9696856e3d08c427" providerId="LiveId" clId="{BF7D5C21-6C97-478A-B4E9-E9BDC868F1D2}" dt="2026-01-20T01:12:10.510" v="1454" actId="20577"/>
+        <pc:sldMkLst>
+          <pc:docMk/>
+          <pc:sldMk cId="2103166186" sldId="266"/>
+        </pc:sldMkLst>
+        <pc:spChg chg="mod">
+          <ac:chgData name="翔琉 櫻井" userId="9696856e3d08c427" providerId="LiveId" clId="{BF7D5C21-6C97-478A-B4E9-E9BDC868F1D2}" dt="2026-01-20T01:11:59.697" v="1449" actId="20577"/>
+          <ac:spMkLst>
+            <pc:docMk/>
+            <pc:sldMk cId="2103166186" sldId="266"/>
+            <ac:spMk id="7" creationId="{B8312EF7-8CE1-9C89-A8E8-C453D10403AC}"/>
+          </ac:spMkLst>
+        </pc:spChg>
+        <pc:spChg chg="mod">
+          <ac:chgData name="翔琉 櫻井" userId="9696856e3d08c427" providerId="LiveId" clId="{BF7D5C21-6C97-478A-B4E9-E9BDC868F1D2}" dt="2026-01-20T01:12:10.510" v="1454" actId="20577"/>
+          <ac:spMkLst>
+            <pc:docMk/>
+            <pc:sldMk cId="2103166186" sldId="266"/>
+            <ac:spMk id="8" creationId="{4351DFC4-E5E1-8B59-4A9A-0440FE30C7AE}"/>
+          </ac:spMkLst>
+        </pc:spChg>
+      </pc:sldChg>
+      <pc:sldChg chg="modSp mod">
+        <pc:chgData name="翔琉 櫻井" userId="9696856e3d08c427" providerId="LiveId" clId="{BF7D5C21-6C97-478A-B4E9-E9BDC868F1D2}" dt="2026-01-20T01:42:06.675" v="2054" actId="20577"/>
+        <pc:sldMkLst>
+          <pc:docMk/>
+          <pc:sldMk cId="1108715131" sldId="269"/>
+        </pc:sldMkLst>
+        <pc:spChg chg="mod">
+          <ac:chgData name="翔琉 櫻井" userId="9696856e3d08c427" providerId="LiveId" clId="{BF7D5C21-6C97-478A-B4E9-E9BDC868F1D2}" dt="2026-01-20T01:37:36.221" v="1525" actId="20577"/>
+          <ac:spMkLst>
+            <pc:docMk/>
+            <pc:sldMk cId="1108715131" sldId="269"/>
+            <ac:spMk id="2" creationId="{4EFC2CDA-0986-B2B7-C320-6B8DE47B33BA}"/>
+          </ac:spMkLst>
+        </pc:spChg>
+        <pc:spChg chg="mod">
+          <ac:chgData name="翔琉 櫻井" userId="9696856e3d08c427" providerId="LiveId" clId="{BF7D5C21-6C97-478A-B4E9-E9BDC868F1D2}" dt="2026-01-20T01:42:06.675" v="2054" actId="20577"/>
+          <ac:spMkLst>
+            <pc:docMk/>
+            <pc:sldMk cId="1108715131" sldId="269"/>
+            <ac:spMk id="3" creationId="{C25B94AA-472C-E1A1-1C84-B63E0A8F320E}"/>
+          </ac:spMkLst>
+        </pc:spChg>
+      </pc:sldChg>
+      <pc:sldChg chg="addSp delSp modSp new mod">
+        <pc:chgData name="翔琉 櫻井" userId="9696856e3d08c427" providerId="LiveId" clId="{BF7D5C21-6C97-478A-B4E9-E9BDC868F1D2}" dt="2026-01-20T02:04:13.894" v="2095" actId="1076"/>
+        <pc:sldMkLst>
+          <pc:docMk/>
+          <pc:sldMk cId="1870586370" sldId="270"/>
+        </pc:sldMkLst>
+        <pc:spChg chg="mod">
+          <ac:chgData name="翔琉 櫻井" userId="9696856e3d08c427" providerId="LiveId" clId="{BF7D5C21-6C97-478A-B4E9-E9BDC868F1D2}" dt="2026-01-20T01:56:40.531" v="2069" actId="20577"/>
+          <ac:spMkLst>
+            <pc:docMk/>
+            <pc:sldMk cId="1870586370" sldId="270"/>
+            <ac:spMk id="2" creationId="{4784FD68-ED62-E78C-867B-F967C80AA95B}"/>
+          </ac:spMkLst>
+        </pc:spChg>
+        <pc:spChg chg="add del">
+          <ac:chgData name="翔琉 櫻井" userId="9696856e3d08c427" providerId="LiveId" clId="{BF7D5C21-6C97-478A-B4E9-E9BDC868F1D2}" dt="2026-01-20T01:55:31.812" v="2067"/>
+          <ac:spMkLst>
+            <pc:docMk/>
+            <pc:sldMk cId="1870586370" sldId="270"/>
+            <ac:spMk id="3" creationId="{BDE08431-37F0-D267-EAF4-CC509FD6B73D}"/>
+          </ac:spMkLst>
+        </pc:spChg>
+        <pc:spChg chg="add mod">
+          <ac:chgData name="翔琉 櫻井" userId="9696856e3d08c427" providerId="LiveId" clId="{BF7D5C21-6C97-478A-B4E9-E9BDC868F1D2}" dt="2026-01-20T01:55:18.200" v="2066"/>
+          <ac:spMkLst>
+            <pc:docMk/>
+            <pc:sldMk cId="1870586370" sldId="270"/>
+            <ac:spMk id="5" creationId="{5E3A2C60-351E-45CC-5658-67688BC903E7}"/>
+          </ac:spMkLst>
+        </pc:spChg>
+        <pc:spChg chg="add del mod">
+          <ac:chgData name="翔琉 櫻井" userId="9696856e3d08c427" providerId="LiveId" clId="{BF7D5C21-6C97-478A-B4E9-E9BDC868F1D2}" dt="2026-01-20T01:57:04.570" v="2072" actId="478"/>
+          <ac:spMkLst>
+            <pc:docMk/>
+            <pc:sldMk cId="1870586370" sldId="270"/>
+            <ac:spMk id="6" creationId="{D774A27F-C588-E532-95B7-EC651B22FC8A}"/>
+          </ac:spMkLst>
+        </pc:spChg>
+        <pc:spChg chg="add del mod">
+          <ac:chgData name="翔琉 櫻井" userId="9696856e3d08c427" providerId="LiveId" clId="{BF7D5C21-6C97-478A-B4E9-E9BDC868F1D2}" dt="2026-01-20T01:57:37.818" v="2073"/>
+          <ac:spMkLst>
+            <pc:docMk/>
+            <pc:sldMk cId="1870586370" sldId="270"/>
+            <ac:spMk id="7" creationId="{3C481BF6-308C-C62F-9B39-96BA9DD43A49}"/>
+          </ac:spMkLst>
+        </pc:spChg>
+        <pc:spChg chg="add mod">
+          <ac:chgData name="翔琉 櫻井" userId="9696856e3d08c427" providerId="LiveId" clId="{BF7D5C21-6C97-478A-B4E9-E9BDC868F1D2}" dt="2026-01-20T01:59:47.716" v="2079" actId="1076"/>
+          <ac:spMkLst>
+            <pc:docMk/>
+            <pc:sldMk cId="1870586370" sldId="270"/>
+            <ac:spMk id="8" creationId="{6D67A5E9-B205-E747-CDAE-A3A6C8147290}"/>
+          </ac:spMkLst>
+        </pc:spChg>
+        <pc:spChg chg="add mod">
+          <ac:chgData name="翔琉 櫻井" userId="9696856e3d08c427" providerId="LiveId" clId="{BF7D5C21-6C97-478A-B4E9-E9BDC868F1D2}" dt="2026-01-20T02:03:13.808" v="2087" actId="1076"/>
+          <ac:spMkLst>
+            <pc:docMk/>
+            <pc:sldMk cId="1870586370" sldId="270"/>
+            <ac:spMk id="9" creationId="{4767024B-45F0-84FF-5784-44921D6318D2}"/>
+          </ac:spMkLst>
+        </pc:spChg>
+        <pc:spChg chg="add mod">
+          <ac:chgData name="翔琉 櫻井" userId="9696856e3d08c427" providerId="LiveId" clId="{BF7D5C21-6C97-478A-B4E9-E9BDC868F1D2}" dt="2026-01-20T02:04:13.894" v="2095" actId="1076"/>
+          <ac:spMkLst>
+            <pc:docMk/>
+            <pc:sldMk cId="1870586370" sldId="270"/>
+            <ac:spMk id="11" creationId="{A7920D54-33A3-74E4-A656-FD3865C6D774}"/>
+          </ac:spMkLst>
+        </pc:spChg>
       </pc:sldChg>
     </pc:docChg>
   </pc:docChgLst>
@@ -10662,7 +11509,7 @@
           <p:cNvPr id="2" name="タイトル 1">
             <a:extLst>
               <a:ext uri="{FF2B5EF4-FFF2-40B4-BE49-F238E27FC236}">
-                <a16:creationId xmlns:a16="http://schemas.microsoft.com/office/drawing/2014/main" id="{113F3A42-9F33-C969-1239-8E61272F5176}"/>
+                <a16:creationId xmlns:a16="http://schemas.microsoft.com/office/drawing/2014/main" id="{51DF95A4-1EAD-4201-9473-01D78AD9A399}"/>
               </a:ext>
             </a:extLst>
           </p:cNvPr>
@@ -10679,8 +11526,12 @@
           <a:lstStyle/>
           <a:p>
             <a:r>
+              <a:rPr kumimoji="1" lang="en-US" altLang="ja-JP" dirty="0"/>
+              <a:t>RQ2 </a:t>
+            </a:r>
+            <a:r>
               <a:rPr kumimoji="1" lang="ja-JP" altLang="en-US" dirty="0"/>
-              <a:t>リサーチクエスチョン２</a:t>
+              <a:t>シミュレーション環境</a:t>
             </a:r>
           </a:p>
         </p:txBody>
@@ -10690,7 +11541,7 @@
           <p:cNvPr id="3" name="コンテンツ プレースホルダー 2">
             <a:extLst>
               <a:ext uri="{FF2B5EF4-FFF2-40B4-BE49-F238E27FC236}">
-                <a16:creationId xmlns:a16="http://schemas.microsoft.com/office/drawing/2014/main" id="{83113ED6-80FB-38AA-B1C6-A2AEE513B7C5}"/>
+                <a16:creationId xmlns:a16="http://schemas.microsoft.com/office/drawing/2014/main" id="{F8C9E1D8-5B52-657F-7A1E-848206807B48}"/>
               </a:ext>
             </a:extLst>
           </p:cNvPr>
@@ -10715,7 +11566,7 @@
           <p:cNvPr id="4" name="スライド番号プレースホルダー 3">
             <a:extLst>
               <a:ext uri="{FF2B5EF4-FFF2-40B4-BE49-F238E27FC236}">
-                <a16:creationId xmlns:a16="http://schemas.microsoft.com/office/drawing/2014/main" id="{11E220AF-AD77-EDA2-CFF8-25A71A459026}"/>
+                <a16:creationId xmlns:a16="http://schemas.microsoft.com/office/drawing/2014/main" id="{52B39026-6217-497F-5733-7A62EBFA40A5}"/>
               </a:ext>
             </a:extLst>
           </p:cNvPr>
@@ -10743,7 +11594,1376 @@
     </p:spTree>
     <p:extLst>
       <p:ext uri="{BB962C8B-B14F-4D97-AF65-F5344CB8AC3E}">
-        <p14:creationId xmlns:p14="http://schemas.microsoft.com/office/powerpoint/2010/main" val="646169899"/>
+        <p14:creationId xmlns:p14="http://schemas.microsoft.com/office/powerpoint/2010/main" val="575384196"/>
+      </p:ext>
+    </p:extLst>
+  </p:cSld>
+  <p:clrMapOvr>
+    <a:masterClrMapping/>
+  </p:clrMapOvr>
+</p:sld>
+</file>
+
+<file path=ppt/slides/slide11.xml><?xml version="1.0" encoding="utf-8"?>
+<p:sld xmlns:a="http://schemas.openxmlformats.org/drawingml/2006/main" xmlns:r="http://schemas.openxmlformats.org/officeDocument/2006/relationships" xmlns:p="http://schemas.openxmlformats.org/presentationml/2006/main">
+  <p:cSld>
+    <p:spTree>
+      <p:nvGrpSpPr>
+        <p:cNvPr id="1" name=""/>
+        <p:cNvGrpSpPr/>
+        <p:nvPr/>
+      </p:nvGrpSpPr>
+      <p:grpSpPr>
+        <a:xfrm>
+          <a:off x="0" y="0"/>
+          <a:ext cx="0" cy="0"/>
+          <a:chOff x="0" y="0"/>
+          <a:chExt cx="0" cy="0"/>
+        </a:xfrm>
+      </p:grpSpPr>
+      <p:sp>
+        <p:nvSpPr>
+          <p:cNvPr id="2" name="タイトル 1">
+            <a:extLst>
+              <a:ext uri="{FF2B5EF4-FFF2-40B4-BE49-F238E27FC236}">
+                <a16:creationId xmlns:a16="http://schemas.microsoft.com/office/drawing/2014/main" id="{86AB8C8D-11A8-96A5-361A-59F9257AFEB8}"/>
+              </a:ext>
+            </a:extLst>
+          </p:cNvPr>
+          <p:cNvSpPr>
+            <a:spLocks noGrp="1"/>
+          </p:cNvSpPr>
+          <p:nvPr>
+            <p:ph type="title"/>
+          </p:nvPr>
+        </p:nvSpPr>
+        <p:spPr/>
+        <p:txBody>
+          <a:bodyPr/>
+          <a:lstStyle/>
+          <a:p>
+            <a:r>
+              <a:rPr lang="en-US" altLang="ja-JP" dirty="0"/>
+              <a:t>RQ2 </a:t>
+            </a:r>
+            <a:r>
+              <a:rPr lang="ja-JP" altLang="en-US" dirty="0"/>
+              <a:t>シミュレーション結果</a:t>
+            </a:r>
+            <a:endParaRPr kumimoji="1" lang="ja-JP" altLang="en-US" dirty="0"/>
+          </a:p>
+        </p:txBody>
+      </p:sp>
+      <p:sp>
+        <p:nvSpPr>
+          <p:cNvPr id="3" name="コンテンツ プレースホルダー 2">
+            <a:extLst>
+              <a:ext uri="{FF2B5EF4-FFF2-40B4-BE49-F238E27FC236}">
+                <a16:creationId xmlns:a16="http://schemas.microsoft.com/office/drawing/2014/main" id="{C78D26AC-AF5A-200F-16DA-147EDA531C5D}"/>
+              </a:ext>
+            </a:extLst>
+          </p:cNvPr>
+          <p:cNvSpPr>
+            <a:spLocks noGrp="1"/>
+          </p:cNvSpPr>
+          <p:nvPr>
+            <p:ph idx="1"/>
+          </p:nvPr>
+        </p:nvSpPr>
+        <p:spPr/>
+        <p:txBody>
+          <a:bodyPr/>
+          <a:lstStyle/>
+          <a:p>
+            <a:endParaRPr kumimoji="1" lang="ja-JP" altLang="en-US"/>
+          </a:p>
+        </p:txBody>
+      </p:sp>
+      <p:sp>
+        <p:nvSpPr>
+          <p:cNvPr id="4" name="スライド番号プレースホルダー 3">
+            <a:extLst>
+              <a:ext uri="{FF2B5EF4-FFF2-40B4-BE49-F238E27FC236}">
+                <a16:creationId xmlns:a16="http://schemas.microsoft.com/office/drawing/2014/main" id="{10E2543F-C418-7668-E296-BC1FC3AEF9E0}"/>
+              </a:ext>
+            </a:extLst>
+          </p:cNvPr>
+          <p:cNvSpPr>
+            <a:spLocks noGrp="1"/>
+          </p:cNvSpPr>
+          <p:nvPr>
+            <p:ph type="sldNum" sz="quarter" idx="12"/>
+          </p:nvPr>
+        </p:nvSpPr>
+        <p:spPr/>
+        <p:txBody>
+          <a:bodyPr/>
+          <a:lstStyle/>
+          <a:p>
+            <a:fld id="{8D1BC46D-89B1-41A3-BBA1-F56BEABD0A90}" type="slidenum">
+              <a:rPr lang="ja-JP" altLang="en-US" smtClean="0"/>
+              <a:pPr/>
+              <a:t>11</a:t>
+            </a:fld>
+            <a:endParaRPr lang="ja-JP" altLang="en-US" dirty="0"/>
+          </a:p>
+        </p:txBody>
+      </p:sp>
+    </p:spTree>
+    <p:extLst>
+      <p:ext uri="{BB962C8B-B14F-4D97-AF65-F5344CB8AC3E}">
+        <p14:creationId xmlns:p14="http://schemas.microsoft.com/office/powerpoint/2010/main" val="814091284"/>
+      </p:ext>
+    </p:extLst>
+  </p:cSld>
+  <p:clrMapOvr>
+    <a:masterClrMapping/>
+  </p:clrMapOvr>
+</p:sld>
+</file>
+
+<file path=ppt/slides/slide12.xml><?xml version="1.0" encoding="utf-8"?>
+<p:sld xmlns:a="http://schemas.openxmlformats.org/drawingml/2006/main" xmlns:r="http://schemas.openxmlformats.org/officeDocument/2006/relationships" xmlns:p="http://schemas.openxmlformats.org/presentationml/2006/main">
+  <p:cSld>
+    <p:spTree>
+      <p:nvGrpSpPr>
+        <p:cNvPr id="1" name=""/>
+        <p:cNvGrpSpPr/>
+        <p:nvPr/>
+      </p:nvGrpSpPr>
+      <p:grpSpPr>
+        <a:xfrm>
+          <a:off x="0" y="0"/>
+          <a:ext cx="0" cy="0"/>
+          <a:chOff x="0" y="0"/>
+          <a:chExt cx="0" cy="0"/>
+        </a:xfrm>
+      </p:grpSpPr>
+      <p:sp>
+        <p:nvSpPr>
+          <p:cNvPr id="2" name="タイトル 1">
+            <a:extLst>
+              <a:ext uri="{FF2B5EF4-FFF2-40B4-BE49-F238E27FC236}">
+                <a16:creationId xmlns:a16="http://schemas.microsoft.com/office/drawing/2014/main" id="{4EFC2CDA-0986-B2B7-C320-6B8DE47B33BA}"/>
+              </a:ext>
+            </a:extLst>
+          </p:cNvPr>
+          <p:cNvSpPr>
+            <a:spLocks noGrp="1"/>
+          </p:cNvSpPr>
+          <p:nvPr>
+            <p:ph type="title"/>
+          </p:nvPr>
+        </p:nvSpPr>
+        <p:spPr/>
+        <p:txBody>
+          <a:bodyPr/>
+          <a:lstStyle/>
+          <a:p>
+            <a:r>
+              <a:rPr kumimoji="1" lang="ja-JP" altLang="en-US" dirty="0"/>
+              <a:t>まとめと今後の</a:t>
+            </a:r>
+            <a:r>
+              <a:rPr lang="ja-JP" altLang="en-US" dirty="0"/>
+              <a:t>展望</a:t>
+            </a:r>
+            <a:endParaRPr kumimoji="1" lang="ja-JP" altLang="en-US" dirty="0"/>
+          </a:p>
+        </p:txBody>
+      </p:sp>
+      <p:sp>
+        <p:nvSpPr>
+          <p:cNvPr id="3" name="コンテンツ プレースホルダー 2">
+            <a:extLst>
+              <a:ext uri="{FF2B5EF4-FFF2-40B4-BE49-F238E27FC236}">
+                <a16:creationId xmlns:a16="http://schemas.microsoft.com/office/drawing/2014/main" id="{C25B94AA-472C-E1A1-1C84-B63E0A8F320E}"/>
+              </a:ext>
+            </a:extLst>
+          </p:cNvPr>
+          <p:cNvSpPr>
+            <a:spLocks noGrp="1"/>
+          </p:cNvSpPr>
+          <p:nvPr>
+            <p:ph idx="1"/>
+          </p:nvPr>
+        </p:nvSpPr>
+        <p:spPr/>
+        <p:txBody>
+          <a:bodyPr/>
+          <a:lstStyle/>
+          <a:p>
+            <a:r>
+              <a:rPr kumimoji="1" lang="ja-JP" altLang="en-US" dirty="0"/>
+              <a:t>ぷりえんてぃぶ方式を用いたシステムは高性能な</a:t>
+            </a:r>
+            <a:r>
+              <a:rPr kumimoji="1" lang="en-US" altLang="ja-JP" dirty="0"/>
+              <a:t>GPU</a:t>
+            </a:r>
+            <a:r>
+              <a:rPr kumimoji="1" lang="ja-JP" altLang="en-US" dirty="0"/>
+              <a:t>でもメリットのあるものだとわかった</a:t>
+            </a:r>
+            <a:endParaRPr kumimoji="1" lang="en-US" altLang="ja-JP" dirty="0"/>
+          </a:p>
+          <a:p>
+            <a:r>
+              <a:rPr lang="ja-JP" altLang="en-US" dirty="0"/>
+              <a:t>しかし、少しターンアラウンドタイムが短縮できただけで、インセンティブは少ない</a:t>
+            </a:r>
+            <a:endParaRPr lang="en-US" altLang="ja-JP" dirty="0"/>
+          </a:p>
+          <a:p>
+            <a:r>
+              <a:rPr lang="ja-JP" altLang="en-US" dirty="0"/>
+              <a:t>ポイント制などのインセンティブを導入してシステムがどう変わるか</a:t>
+            </a:r>
+            <a:endParaRPr lang="en-US" altLang="ja-JP" dirty="0"/>
+          </a:p>
+          <a:p>
+            <a:r>
+              <a:rPr kumimoji="1" lang="ja-JP" altLang="en-US" dirty="0"/>
+              <a:t>複数台</a:t>
+            </a:r>
+            <a:r>
+              <a:rPr kumimoji="1" lang="en-US" altLang="ja-JP" dirty="0"/>
+              <a:t>GPU</a:t>
+            </a:r>
+            <a:r>
+              <a:rPr kumimoji="1" lang="ja-JP" altLang="en-US" dirty="0"/>
+              <a:t>などのより研究室の環境を再現して現実的なモデルの構築</a:t>
+            </a:r>
+            <a:endParaRPr kumimoji="1" lang="en-US" altLang="ja-JP" dirty="0"/>
+          </a:p>
+          <a:p>
+            <a:endParaRPr kumimoji="1" lang="ja-JP" altLang="en-US"/>
+          </a:p>
+        </p:txBody>
+      </p:sp>
+      <p:sp>
+        <p:nvSpPr>
+          <p:cNvPr id="4" name="スライド番号プレースホルダー 3">
+            <a:extLst>
+              <a:ext uri="{FF2B5EF4-FFF2-40B4-BE49-F238E27FC236}">
+                <a16:creationId xmlns:a16="http://schemas.microsoft.com/office/drawing/2014/main" id="{D4E70AE2-5A54-1804-45EC-B0458865945C}"/>
+              </a:ext>
+            </a:extLst>
+          </p:cNvPr>
+          <p:cNvSpPr>
+            <a:spLocks noGrp="1"/>
+          </p:cNvSpPr>
+          <p:nvPr>
+            <p:ph type="sldNum" sz="quarter" idx="12"/>
+          </p:nvPr>
+        </p:nvSpPr>
+        <p:spPr/>
+        <p:txBody>
+          <a:bodyPr/>
+          <a:lstStyle/>
+          <a:p>
+            <a:fld id="{8D1BC46D-89B1-41A3-BBA1-F56BEABD0A90}" type="slidenum">
+              <a:rPr lang="ja-JP" altLang="en-US" smtClean="0"/>
+              <a:pPr/>
+              <a:t>12</a:t>
+            </a:fld>
+            <a:endParaRPr lang="ja-JP" altLang="en-US" dirty="0"/>
+          </a:p>
+        </p:txBody>
+      </p:sp>
+    </p:spTree>
+    <p:extLst>
+      <p:ext uri="{BB962C8B-B14F-4D97-AF65-F5344CB8AC3E}">
+        <p14:creationId xmlns:p14="http://schemas.microsoft.com/office/powerpoint/2010/main" val="1108715131"/>
+      </p:ext>
+    </p:extLst>
+  </p:cSld>
+  <p:clrMapOvr>
+    <a:masterClrMapping/>
+  </p:clrMapOvr>
+</p:sld>
+</file>
+
+<file path=ppt/slides/slide13.xml><?xml version="1.0" encoding="utf-8"?>
+<p:sld xmlns:a="http://schemas.openxmlformats.org/drawingml/2006/main" xmlns:r="http://schemas.openxmlformats.org/officeDocument/2006/relationships" xmlns:p="http://schemas.openxmlformats.org/presentationml/2006/main">
+  <p:cSld>
+    <p:spTree>
+      <p:nvGrpSpPr>
+        <p:cNvPr id="1" name=""/>
+        <p:cNvGrpSpPr/>
+        <p:nvPr/>
+      </p:nvGrpSpPr>
+      <p:grpSpPr>
+        <a:xfrm>
+          <a:off x="0" y="0"/>
+          <a:ext cx="0" cy="0"/>
+          <a:chOff x="0" y="0"/>
+          <a:chExt cx="0" cy="0"/>
+        </a:xfrm>
+      </p:grpSpPr>
+      <p:sp>
+        <p:nvSpPr>
+          <p:cNvPr id="2" name="タイトル 1">
+            <a:extLst>
+              <a:ext uri="{FF2B5EF4-FFF2-40B4-BE49-F238E27FC236}">
+                <a16:creationId xmlns:a16="http://schemas.microsoft.com/office/drawing/2014/main" id="{4784FD68-ED62-E78C-867B-F967C80AA95B}"/>
+              </a:ext>
+            </a:extLst>
+          </p:cNvPr>
+          <p:cNvSpPr>
+            <a:spLocks noGrp="1"/>
+          </p:cNvSpPr>
+          <p:nvPr>
+            <p:ph type="title"/>
+          </p:nvPr>
+        </p:nvSpPr>
+        <p:spPr/>
+        <p:txBody>
+          <a:bodyPr/>
+          <a:lstStyle/>
+          <a:p>
+            <a:r>
+              <a:rPr kumimoji="1" lang="en-US" altLang="ja-JP" dirty="0"/>
+              <a:t>Appendix</a:t>
+            </a:r>
+            <a:endParaRPr kumimoji="1" lang="ja-JP" altLang="en-US" dirty="0"/>
+          </a:p>
+        </p:txBody>
+      </p:sp>
+      <p:sp>
+        <p:nvSpPr>
+          <p:cNvPr id="4" name="スライド番号プレースホルダー 3">
+            <a:extLst>
+              <a:ext uri="{FF2B5EF4-FFF2-40B4-BE49-F238E27FC236}">
+                <a16:creationId xmlns:a16="http://schemas.microsoft.com/office/drawing/2014/main" id="{3DA916EE-E019-3C5C-7463-2E2A494C405B}"/>
+              </a:ext>
+            </a:extLst>
+          </p:cNvPr>
+          <p:cNvSpPr>
+            <a:spLocks noGrp="1"/>
+          </p:cNvSpPr>
+          <p:nvPr>
+            <p:ph type="sldNum" sz="quarter" idx="12"/>
+          </p:nvPr>
+        </p:nvSpPr>
+        <p:spPr/>
+        <p:txBody>
+          <a:bodyPr/>
+          <a:lstStyle/>
+          <a:p>
+            <a:fld id="{8D1BC46D-89B1-41A3-BBA1-F56BEABD0A90}" type="slidenum">
+              <a:rPr lang="ja-JP" altLang="en-US" smtClean="0"/>
+              <a:pPr/>
+              <a:t>13</a:t>
+            </a:fld>
+            <a:endParaRPr lang="ja-JP" altLang="en-US" dirty="0"/>
+          </a:p>
+        </p:txBody>
+      </p:sp>
+      <mc:AlternateContent xmlns:mc="http://schemas.openxmlformats.org/markup-compatibility/2006">
+        <mc:Choice xmlns:a14="http://schemas.microsoft.com/office/drawing/2010/main" Requires="a14">
+          <p:sp>
+            <p:nvSpPr>
+              <p:cNvPr id="8" name="Rectangle 3">
+                <a:extLst>
+                  <a:ext uri="{FF2B5EF4-FFF2-40B4-BE49-F238E27FC236}">
+                    <a16:creationId xmlns:a16="http://schemas.microsoft.com/office/drawing/2014/main" id="{6D67A5E9-B205-E747-CDAE-A3A6C8147290}"/>
+                  </a:ext>
+                </a:extLst>
+              </p:cNvPr>
+              <p:cNvSpPr>
+                <a:spLocks noGrp="1" noChangeArrowheads="1"/>
+              </p:cNvSpPr>
+              <p:nvPr>
+                <p:ph idx="1"/>
+              </p:nvPr>
+            </p:nvSpPr>
+            <p:spPr bwMode="auto">
+              <a:xfrm>
+                <a:off x="1662223" y="1262686"/>
+                <a:ext cx="5466433" cy="746936"/>
+              </a:xfrm>
+              <a:prstGeom prst="rect">
+                <a:avLst/>
+              </a:prstGeom>
+              <a:noFill/>
+              <a:ln>
+                <a:noFill/>
+              </a:ln>
+              <a:effectLst/>
+              <a:extLst>
+                <a:ext uri="{909E8E84-426E-40DD-AFC4-6F175D3DCCD1}">
+                  <a14:hiddenFill>
+                    <a:solidFill>
+                      <a:schemeClr val="accent1"/>
+                    </a:solidFill>
+                  </a14:hiddenFill>
+                </a:ext>
+                <a:ext uri="{91240B29-F687-4F45-9708-019B960494DF}">
+                  <a14:hiddenLine w="9525">
+                    <a:solidFill>
+                      <a:schemeClr val="tx1"/>
+                    </a:solidFill>
+                    <a:miter lim="800000"/>
+                    <a:headEnd/>
+                    <a:tailEnd/>
+                  </a14:hiddenLine>
+                </a:ext>
+                <a:ext uri="{AF507438-7753-43E0-B8FC-AC1667EBCBE1}">
+                  <a14:hiddenEffects>
+                    <a:effectLst>
+                      <a:outerShdw dist="35921" dir="2700000" algn="ctr" rotWithShape="0">
+                        <a:schemeClr val="bg2"/>
+                      </a:outerShdw>
+                    </a:effectLst>
+                  </a14:hiddenEffects>
+                </a:ext>
+              </a:extLst>
+            </p:spPr>
+            <p:txBody>
+              <a:bodyPr vert="horz" wrap="none" lIns="91440" tIns="0" rIns="91440" bIns="45720" numCol="1" anchor="ctr" anchorCtr="0" compatLnSpc="1">
+                <a:prstTxWarp prst="textNoShape">
+                  <a:avLst/>
+                </a:prstTxWarp>
+                <a:spAutoFit/>
+              </a:bodyPr>
+              <a:lstStyle/>
+              <a:p>
+                <a:pPr marL="0" lvl="0" indent="0" eaLnBrk="0" fontAlgn="base" hangingPunct="0">
+                  <a:lnSpc>
+                    <a:spcPct val="100000"/>
+                  </a:lnSpc>
+                  <a:spcBef>
+                    <a:spcPct val="0"/>
+                  </a:spcBef>
+                  <a:spcAft>
+                    <a:spcPct val="0"/>
+                  </a:spcAft>
+                  <a:buNone/>
+                </a:pPr>
+                <a14:m>
+                  <m:oMathPara xmlns:m="http://schemas.openxmlformats.org/officeDocument/2006/math">
+                    <m:oMathParaPr>
+                      <m:jc m:val="centerGroup"/>
+                    </m:oMathParaPr>
+                    <m:oMath xmlns:m="http://schemas.openxmlformats.org/officeDocument/2006/math">
+                      <m:sSub>
+                        <m:sSubPr>
+                          <m:ctrlPr>
+                            <a:rPr lang="en-US" altLang="ja-JP" sz="1800" i="1" dirty="0" smtClean="0">
+                              <a:latin typeface="Cambria Math" panose="02040503050406030204" pitchFamily="18" charset="0"/>
+                            </a:rPr>
+                          </m:ctrlPr>
+                        </m:sSubPr>
+                        <m:e>
+                          <m:r>
+                            <a:rPr lang="en-US" altLang="ja-JP" sz="1800" i="1" dirty="0" smtClean="0">
+                              <a:latin typeface="Cambria Math" panose="02040503050406030204" pitchFamily="18" charset="0"/>
+                            </a:rPr>
+                            <m:t>𝑇</m:t>
+                          </m:r>
+                        </m:e>
+                        <m:sub>
+                          <m:r>
+                            <a:rPr lang="en-US" altLang="ja-JP" sz="1800" i="1" dirty="0" smtClean="0">
+                              <a:latin typeface="Cambria Math" panose="02040503050406030204" pitchFamily="18" charset="0"/>
+                            </a:rPr>
+                            <m:t>𝑡𝑢𝑟𝑛𝑎𝑟𝑜𝑢𝑛𝑑</m:t>
+                          </m:r>
+                        </m:sub>
+                      </m:sSub>
+                      <m:r>
+                        <a:rPr lang="en-US" altLang="ja-JP" sz="1800" i="1" dirty="0" smtClean="0">
+                          <a:latin typeface="Cambria Math" panose="02040503050406030204" pitchFamily="18" charset="0"/>
+                        </a:rPr>
+                        <m:t>=</m:t>
+                      </m:r>
+                      <m:d>
+                        <m:dPr>
+                          <m:ctrlPr>
+                            <a:rPr lang="en-US" altLang="ja-JP" sz="1800" i="1" dirty="0" smtClean="0">
+                              <a:latin typeface="Cambria Math" panose="02040503050406030204" pitchFamily="18" charset="0"/>
+                            </a:rPr>
+                          </m:ctrlPr>
+                        </m:dPr>
+                        <m:e>
+                          <m:sSub>
+                            <m:sSubPr>
+                              <m:ctrlPr>
+                                <a:rPr lang="en-US" altLang="ja-JP" sz="1800" i="1" dirty="0" smtClean="0">
+                                  <a:latin typeface="Cambria Math" panose="02040503050406030204" pitchFamily="18" charset="0"/>
+                                </a:rPr>
+                              </m:ctrlPr>
+                            </m:sSubPr>
+                            <m:e>
+                              <m:r>
+                                <a:rPr lang="en-US" altLang="ja-JP" sz="1800" i="1" dirty="0" smtClean="0">
+                                  <a:latin typeface="Cambria Math" panose="02040503050406030204" pitchFamily="18" charset="0"/>
+                                </a:rPr>
+                                <m:t>𝑇</m:t>
+                              </m:r>
+                            </m:e>
+                            <m:sub>
+                              <m:r>
+                                <a:rPr lang="en-US" altLang="ja-JP" sz="1800" i="1" dirty="0" smtClean="0">
+                                  <a:latin typeface="Cambria Math" panose="02040503050406030204" pitchFamily="18" charset="0"/>
+                                </a:rPr>
+                                <m:t>𝑓𝑖𝑛𝑖𝑠h</m:t>
+                              </m:r>
+                            </m:sub>
+                          </m:sSub>
+                          <m:r>
+                            <a:rPr lang="en-US" altLang="ja-JP" sz="1800" i="1" dirty="0" smtClean="0">
+                              <a:latin typeface="Cambria Math" panose="02040503050406030204" pitchFamily="18" charset="0"/>
+                            </a:rPr>
+                            <m:t>−</m:t>
+                          </m:r>
+                          <m:sSub>
+                            <m:sSubPr>
+                              <m:ctrlPr>
+                                <a:rPr lang="en-US" altLang="ja-JP" sz="1800" i="1" dirty="0" smtClean="0">
+                                  <a:latin typeface="Cambria Math" panose="02040503050406030204" pitchFamily="18" charset="0"/>
+                                </a:rPr>
+                              </m:ctrlPr>
+                            </m:sSubPr>
+                            <m:e>
+                              <m:r>
+                                <a:rPr lang="en-US" altLang="ja-JP" sz="1800" i="1" dirty="0" smtClean="0">
+                                  <a:latin typeface="Cambria Math" panose="02040503050406030204" pitchFamily="18" charset="0"/>
+                                </a:rPr>
+                                <m:t>𝑇</m:t>
+                              </m:r>
+                            </m:e>
+                            <m:sub>
+                              <m:r>
+                                <a:rPr lang="en-US" altLang="ja-JP" sz="1800" i="1" dirty="0" smtClean="0">
+                                  <a:latin typeface="Cambria Math" panose="02040503050406030204" pitchFamily="18" charset="0"/>
+                                </a:rPr>
+                                <m:t>𝑛𝑜𝑤</m:t>
+                              </m:r>
+                            </m:sub>
+                          </m:sSub>
+                        </m:e>
+                      </m:d>
+                      <m:r>
+                        <a:rPr lang="en-US" altLang="ja-JP" sz="1800" i="1" dirty="0" smtClean="0">
+                          <a:latin typeface="Cambria Math" panose="02040503050406030204" pitchFamily="18" charset="0"/>
+                        </a:rPr>
+                        <m:t>+</m:t>
+                      </m:r>
+                      <m:nary>
+                        <m:naryPr>
+                          <m:chr m:val="∑"/>
+                          <m:supHide m:val="on"/>
+                          <m:ctrlPr>
+                            <a:rPr lang="en-US" altLang="ja-JP" sz="1800" i="1" dirty="0" smtClean="0">
+                              <a:latin typeface="Cambria Math" panose="02040503050406030204" pitchFamily="18" charset="0"/>
+                            </a:rPr>
+                          </m:ctrlPr>
+                        </m:naryPr>
+                        <m:sub>
+                          <m:r>
+                            <a:rPr lang="en-US" altLang="ja-JP" sz="1800" i="1" dirty="0" smtClean="0">
+                              <a:latin typeface="Cambria Math" panose="02040503050406030204" pitchFamily="18" charset="0"/>
+                            </a:rPr>
+                            <m:t>𝑘</m:t>
+                          </m:r>
+                          <m:r>
+                            <a:rPr lang="en-US" altLang="ja-JP" sz="1800" i="1" dirty="0" smtClean="0">
+                              <a:latin typeface="Cambria Math" panose="02040503050406030204" pitchFamily="18" charset="0"/>
+                            </a:rPr>
+                            <m:t>∈</m:t>
+                          </m:r>
+                          <m:r>
+                            <a:rPr lang="en-US" altLang="ja-JP" sz="1800" i="1" dirty="0" smtClean="0">
+                              <a:latin typeface="Cambria Math" panose="02040503050406030204" pitchFamily="18" charset="0"/>
+                            </a:rPr>
+                            <m:t>𝑄𝑢𝑒𝑢𝑒</m:t>
+                          </m:r>
+                        </m:sub>
+                        <m:sup/>
+                        <m:e>
+                          <m:f>
+                            <m:fPr>
+                              <m:ctrlPr>
+                                <a:rPr lang="en-US" altLang="ja-JP" sz="1800" i="1" dirty="0" smtClean="0">
+                                  <a:latin typeface="Cambria Math" panose="02040503050406030204" pitchFamily="18" charset="0"/>
+                                </a:rPr>
+                              </m:ctrlPr>
+                            </m:fPr>
+                            <m:num>
+                              <m:sSub>
+                                <m:sSubPr>
+                                  <m:ctrlPr>
+                                    <a:rPr lang="en-US" altLang="ja-JP" sz="1800" i="1" dirty="0" err="1" smtClean="0">
+                                      <a:latin typeface="Cambria Math" panose="02040503050406030204" pitchFamily="18" charset="0"/>
+                                    </a:rPr>
+                                  </m:ctrlPr>
+                                </m:sSubPr>
+                                <m:e>
+                                  <m:r>
+                                    <a:rPr lang="en-US" altLang="ja-JP" sz="1800" i="1" dirty="0" err="1">
+                                      <a:latin typeface="Cambria Math" panose="02040503050406030204" pitchFamily="18" charset="0"/>
+                                    </a:rPr>
+                                    <m:t>𝑆</m:t>
+                                  </m:r>
+                                </m:e>
+                                <m:sub>
+                                  <m:r>
+                                    <a:rPr lang="en-US" altLang="ja-JP" sz="1800" i="1" dirty="0" err="1">
+                                      <a:latin typeface="Cambria Math" panose="02040503050406030204" pitchFamily="18" charset="0"/>
+                                    </a:rPr>
+                                    <m:t>𝑘</m:t>
+                                  </m:r>
+                                </m:sub>
+                              </m:sSub>
+                            </m:num>
+                            <m:den>
+                              <m:sSub>
+                                <m:sSubPr>
+                                  <m:ctrlPr>
+                                    <a:rPr lang="en-US" altLang="ja-JP" sz="1800" i="1" dirty="0">
+                                      <a:latin typeface="Cambria Math" panose="02040503050406030204" pitchFamily="18" charset="0"/>
+                                    </a:rPr>
+                                  </m:ctrlPr>
+                                </m:sSubPr>
+                                <m:e>
+                                  <m:r>
+                                    <a:rPr lang="en-US" altLang="ja-JP" sz="1800" i="1" dirty="0">
+                                      <a:latin typeface="Cambria Math" panose="02040503050406030204" pitchFamily="18" charset="0"/>
+                                    </a:rPr>
+                                    <m:t>𝜇</m:t>
+                                  </m:r>
+                                </m:e>
+                                <m:sub>
+                                  <m:r>
+                                    <a:rPr lang="en-US" altLang="ja-JP" sz="1800" i="1" dirty="0">
+                                      <a:latin typeface="Cambria Math" panose="02040503050406030204" pitchFamily="18" charset="0"/>
+                                    </a:rPr>
+                                    <m:t>𝑒𝑓𝑓</m:t>
+                                  </m:r>
+                                </m:sub>
+                              </m:sSub>
+                            </m:den>
+                          </m:f>
+                        </m:e>
+                      </m:nary>
+                      <m:r>
+                        <a:rPr lang="en-US" altLang="ja-JP" sz="1800" i="1" dirty="0">
+                          <a:latin typeface="Cambria Math" panose="02040503050406030204" pitchFamily="18" charset="0"/>
+                        </a:rPr>
+                        <m:t>+</m:t>
+                      </m:r>
+                      <m:f>
+                        <m:fPr>
+                          <m:ctrlPr>
+                            <a:rPr lang="en-US" altLang="ja-JP" sz="1800" i="1" dirty="0">
+                              <a:latin typeface="Cambria Math" panose="02040503050406030204" pitchFamily="18" charset="0"/>
+                            </a:rPr>
+                          </m:ctrlPr>
+                        </m:fPr>
+                        <m:num>
+                          <m:sSub>
+                            <m:sSubPr>
+                              <m:ctrlPr>
+                                <a:rPr lang="en-US" altLang="ja-JP" sz="1800" i="1" dirty="0">
+                                  <a:latin typeface="Cambria Math" panose="02040503050406030204" pitchFamily="18" charset="0"/>
+                                </a:rPr>
+                              </m:ctrlPr>
+                            </m:sSubPr>
+                            <m:e>
+                              <m:r>
+                                <a:rPr lang="en-US" altLang="ja-JP" sz="1800" i="1" dirty="0">
+                                  <a:latin typeface="Cambria Math" panose="02040503050406030204" pitchFamily="18" charset="0"/>
+                                </a:rPr>
+                                <m:t>𝑆</m:t>
+                              </m:r>
+                            </m:e>
+                            <m:sub>
+                              <m:r>
+                                <a:rPr lang="en-US" altLang="ja-JP" sz="1800" i="1" dirty="0">
+                                  <a:latin typeface="Cambria Math" panose="02040503050406030204" pitchFamily="18" charset="0"/>
+                                </a:rPr>
+                                <m:t>𝑛𝑒𝑤</m:t>
+                              </m:r>
+                            </m:sub>
+                          </m:sSub>
+                        </m:num>
+                        <m:den>
+                          <m:sSub>
+                            <m:sSubPr>
+                              <m:ctrlPr>
+                                <a:rPr lang="en-US" altLang="ja-JP" sz="1800" i="1" dirty="0">
+                                  <a:latin typeface="Cambria Math" panose="02040503050406030204" pitchFamily="18" charset="0"/>
+                                </a:rPr>
+                              </m:ctrlPr>
+                            </m:sSubPr>
+                            <m:e>
+                              <m:r>
+                                <a:rPr lang="en-US" altLang="ja-JP" sz="1800" i="1" dirty="0">
+                                  <a:latin typeface="Cambria Math" panose="02040503050406030204" pitchFamily="18" charset="0"/>
+                                </a:rPr>
+                                <m:t>𝜇</m:t>
+                              </m:r>
+                            </m:e>
+                            <m:sub>
+                              <m:r>
+                                <a:rPr lang="en-US" altLang="ja-JP" sz="1800" i="1" dirty="0">
+                                  <a:latin typeface="Cambria Math" panose="02040503050406030204" pitchFamily="18" charset="0"/>
+                                </a:rPr>
+                                <m:t>𝑒𝑓𝑓</m:t>
+                              </m:r>
+                            </m:sub>
+                          </m:sSub>
+                        </m:den>
+                      </m:f>
+                    </m:oMath>
+                  </m:oMathPara>
+                </a14:m>
+                <a:endParaRPr/>
+              </a:p>
+            </p:txBody>
+          </p:sp>
+        </mc:Choice>
+        <mc:Fallback>
+          <p:sp>
+            <p:nvSpPr>
+              <p:cNvPr id="8" name="Rectangle 3">
+                <a:extLst>
+                  <a:ext uri="{FF2B5EF4-FFF2-40B4-BE49-F238E27FC236}">
+                    <a16:creationId xmlns:a16="http://schemas.microsoft.com/office/drawing/2014/main" id="{6D67A5E9-B205-E747-CDAE-A3A6C8147290}"/>
+                  </a:ext>
+                </a:extLst>
+              </p:cNvPr>
+              <p:cNvSpPr>
+                <a:spLocks noGrp="1" noRot="1" noChangeAspect="1" noMove="1" noResize="1" noEditPoints="1" noAdjustHandles="1" noChangeArrowheads="1" noChangeShapeType="1" noTextEdit="1"/>
+              </p:cNvSpPr>
+              <p:nvPr>
+                <p:ph idx="1"/>
+              </p:nvPr>
+            </p:nvSpPr>
+            <p:spPr bwMode="auto">
+              <a:xfrm>
+                <a:off x="1662223" y="1262686"/>
+                <a:ext cx="5466433" cy="746936"/>
+              </a:xfrm>
+              <a:prstGeom prst="rect">
+                <a:avLst/>
+              </a:prstGeom>
+              <a:blipFill>
+                <a:blip r:embed="rId2"/>
+                <a:stretch>
+                  <a:fillRect r="-1004"/>
+                </a:stretch>
+              </a:blipFill>
+              <a:ln>
+                <a:noFill/>
+              </a:ln>
+              <a:effectLst/>
+              <a:extLst>
+                <a:ext uri="{909E8E84-426E-40DD-AFC4-6F175D3DCCD1}">
+                  <a14:hiddenFill xmlns:a14="http://schemas.microsoft.com/office/drawing/2010/main">
+                    <a:solidFill>
+                      <a:schemeClr val="accent1"/>
+                    </a:solidFill>
+                  </a14:hiddenFill>
+                </a:ext>
+                <a:ext uri="{91240B29-F687-4F45-9708-019B960494DF}">
+                  <a14:hiddenLine xmlns:a14="http://schemas.microsoft.com/office/drawing/2010/main" w="9525">
+                    <a:solidFill>
+                      <a:schemeClr val="tx1"/>
+                    </a:solidFill>
+                    <a:miter lim="800000"/>
+                    <a:headEnd/>
+                    <a:tailEnd/>
+                  </a14:hiddenLine>
+                </a:ext>
+                <a:ext uri="{AF507438-7753-43E0-B8FC-AC1667EBCBE1}">
+                  <a14:hiddenEffects xmlns:a14="http://schemas.microsoft.com/office/drawing/2010/main">
+                    <a:effectLst>
+                      <a:outerShdw dist="35921" dir="2700000" algn="ctr" rotWithShape="0">
+                        <a:schemeClr val="bg2"/>
+                      </a:outerShdw>
+                    </a:effectLst>
+                  </a14:hiddenEffects>
+                </a:ext>
+              </a:extLst>
+            </p:spPr>
+            <p:txBody>
+              <a:bodyPr/>
+              <a:lstStyle/>
+              <a:p>
+                <a:r>
+                  <a:rPr lang="ja-JP" altLang="en-US">
+                    <a:noFill/>
+                  </a:rPr>
+                  <a:t> </a:t>
+                </a:r>
+              </a:p>
+            </p:txBody>
+          </p:sp>
+        </mc:Fallback>
+      </mc:AlternateContent>
+      <mc:AlternateContent xmlns:mc="http://schemas.openxmlformats.org/markup-compatibility/2006">
+        <mc:Choice xmlns:a14="http://schemas.microsoft.com/office/drawing/2010/main" Requires="a14">
+          <p:sp>
+            <p:nvSpPr>
+              <p:cNvPr id="9" name="テキスト ボックス 8">
+                <a:extLst>
+                  <a:ext uri="{FF2B5EF4-FFF2-40B4-BE49-F238E27FC236}">
+                    <a16:creationId xmlns:a16="http://schemas.microsoft.com/office/drawing/2014/main" id="{4767024B-45F0-84FF-5784-44921D6318D2}"/>
+                  </a:ext>
+                </a:extLst>
+              </p:cNvPr>
+              <p:cNvSpPr txBox="1"/>
+              <p:nvPr/>
+            </p:nvSpPr>
+            <p:spPr>
+              <a:xfrm>
+                <a:off x="1788928" y="2009622"/>
+                <a:ext cx="1853713" cy="519309"/>
+              </a:xfrm>
+              <a:prstGeom prst="rect">
+                <a:avLst/>
+              </a:prstGeom>
+              <a:noFill/>
+            </p:spPr>
+            <p:txBody>
+              <a:bodyPr wrap="none" lIns="0" tIns="0" rIns="0" bIns="0" rtlCol="0">
+                <a:spAutoFit/>
+              </a:bodyPr>
+              <a:lstStyle/>
+              <a:p>
+                <a:pPr/>
+                <a14:m>
+                  <m:oMathPara xmlns:m="http://schemas.openxmlformats.org/officeDocument/2006/math">
+                    <m:oMathParaPr>
+                      <m:jc m:val="centerGroup"/>
+                    </m:oMathParaPr>
+                    <m:oMath xmlns:m="http://schemas.openxmlformats.org/officeDocument/2006/math">
+                      <m:sSub>
+                        <m:sSubPr>
+                          <m:ctrlPr>
+                            <a:rPr lang="en-US" altLang="ja-JP" i="1" smtClean="0">
+                              <a:latin typeface="Cambria Math" panose="02040503050406030204" pitchFamily="18" charset="0"/>
+                            </a:rPr>
+                          </m:ctrlPr>
+                        </m:sSubPr>
+                        <m:e>
+                          <m:r>
+                            <a:rPr lang="en-US" altLang="ja-JP" i="1">
+                              <a:latin typeface="Cambria Math" panose="02040503050406030204" pitchFamily="18" charset="0"/>
+                            </a:rPr>
+                            <m:t>𝜇</m:t>
+                          </m:r>
+                        </m:e>
+                        <m:sub>
+                          <m:r>
+                            <a:rPr lang="en-US" altLang="ja-JP" i="1">
+                              <a:latin typeface="Cambria Math" panose="02040503050406030204" pitchFamily="18" charset="0"/>
+                            </a:rPr>
+                            <m:t>𝑒𝑓𝑓</m:t>
+                          </m:r>
+                        </m:sub>
+                      </m:sSub>
+                      <m:r>
+                        <a:rPr lang="en-US" altLang="ja-JP">
+                          <a:latin typeface="Cambria Math" panose="02040503050406030204" pitchFamily="18" charset="0"/>
+                        </a:rPr>
+                        <m:t>=</m:t>
+                      </m:r>
+                      <m:f>
+                        <m:fPr>
+                          <m:ctrlPr>
+                            <a:rPr lang="en-US" altLang="ja-JP" i="1">
+                              <a:latin typeface="Cambria Math" panose="02040503050406030204" pitchFamily="18" charset="0"/>
+                            </a:rPr>
+                          </m:ctrlPr>
+                        </m:fPr>
+                        <m:num>
+                          <m:sSub>
+                            <m:sSubPr>
+                              <m:ctrlPr>
+                                <a:rPr lang="en-US" altLang="ja-JP" i="1">
+                                  <a:latin typeface="Cambria Math" panose="02040503050406030204" pitchFamily="18" charset="0"/>
+                                </a:rPr>
+                              </m:ctrlPr>
+                            </m:sSubPr>
+                            <m:e>
+                              <m:r>
+                                <a:rPr lang="en-US" altLang="ja-JP" i="1">
+                                  <a:latin typeface="Cambria Math" panose="02040503050406030204" pitchFamily="18" charset="0"/>
+                                </a:rPr>
+                                <m:t>𝜇</m:t>
+                              </m:r>
+                            </m:e>
+                            <m:sub>
+                              <m:r>
+                                <a:rPr lang="en-US" altLang="ja-JP" i="1">
+                                  <a:latin typeface="Cambria Math" panose="02040503050406030204" pitchFamily="18" charset="0"/>
+                                </a:rPr>
+                                <m:t>𝑏𝑎𝑠𝑒</m:t>
+                              </m:r>
+                            </m:sub>
+                          </m:sSub>
+                        </m:num>
+                        <m:den>
+                          <m:r>
+                            <a:rPr lang="en-US" altLang="ja-JP">
+                              <a:latin typeface="Cambria Math" panose="02040503050406030204" pitchFamily="18" charset="0"/>
+                            </a:rPr>
+                            <m:t>1+</m:t>
+                          </m:r>
+                          <m:sSub>
+                            <m:sSubPr>
+                              <m:ctrlPr>
+                                <a:rPr lang="en-US" altLang="ja-JP" i="1">
+                                  <a:latin typeface="Cambria Math" panose="02040503050406030204" pitchFamily="18" charset="0"/>
+                                </a:rPr>
+                              </m:ctrlPr>
+                            </m:sSubPr>
+                            <m:e>
+                              <m:r>
+                                <a:rPr lang="en-US" altLang="ja-JP" i="1">
+                                  <a:latin typeface="Cambria Math" panose="02040503050406030204" pitchFamily="18" charset="0"/>
+                                </a:rPr>
+                                <m:t>𝜌</m:t>
+                              </m:r>
+                            </m:e>
+                            <m:sub>
+                              <m:r>
+                                <a:rPr lang="en-US" altLang="ja-JP" i="1">
+                                  <a:latin typeface="Cambria Math" panose="02040503050406030204" pitchFamily="18" charset="0"/>
+                                </a:rPr>
+                                <m:t>𝑜𝑤𝑛𝑒𝑟</m:t>
+                              </m:r>
+                            </m:sub>
+                          </m:sSub>
+                        </m:den>
+                      </m:f>
+                    </m:oMath>
+                  </m:oMathPara>
+                </a14:m>
+                <a:endParaRPr/>
+              </a:p>
+            </p:txBody>
+          </p:sp>
+        </mc:Choice>
+        <mc:Fallback>
+          <p:sp>
+            <p:nvSpPr>
+              <p:cNvPr id="9" name="テキスト ボックス 8">
+                <a:extLst>
+                  <a:ext uri="{FF2B5EF4-FFF2-40B4-BE49-F238E27FC236}">
+                    <a16:creationId xmlns:a16="http://schemas.microsoft.com/office/drawing/2014/main" id="{4767024B-45F0-84FF-5784-44921D6318D2}"/>
+                  </a:ext>
+                </a:extLst>
+              </p:cNvPr>
+              <p:cNvSpPr txBox="1">
+                <a:spLocks noRot="1" noChangeAspect="1" noMove="1" noResize="1" noEditPoints="1" noAdjustHandles="1" noChangeArrowheads="1" noChangeShapeType="1" noTextEdit="1"/>
+              </p:cNvSpPr>
+              <p:nvPr/>
+            </p:nvSpPr>
+            <p:spPr>
+              <a:xfrm>
+                <a:off x="1788928" y="2009622"/>
+                <a:ext cx="1853713" cy="519309"/>
+              </a:xfrm>
+              <a:prstGeom prst="rect">
+                <a:avLst/>
+              </a:prstGeom>
+              <a:blipFill>
+                <a:blip r:embed="rId3"/>
+                <a:stretch>
+                  <a:fillRect/>
+                </a:stretch>
+              </a:blipFill>
+            </p:spPr>
+            <p:txBody>
+              <a:bodyPr/>
+              <a:lstStyle/>
+              <a:p>
+                <a:r>
+                  <a:rPr lang="ja-JP" altLang="en-US">
+                    <a:noFill/>
+                  </a:rPr>
+                  <a:t> </a:t>
+                </a:r>
+              </a:p>
+            </p:txBody>
+          </p:sp>
+        </mc:Fallback>
+      </mc:AlternateContent>
+      <mc:AlternateContent xmlns:mc="http://schemas.openxmlformats.org/markup-compatibility/2006">
+        <mc:Choice xmlns:a14="http://schemas.microsoft.com/office/drawing/2010/main" Requires="a14">
+          <p:sp>
+            <p:nvSpPr>
+              <p:cNvPr id="11" name="テキスト ボックス 10">
+                <a:extLst>
+                  <a:ext uri="{FF2B5EF4-FFF2-40B4-BE49-F238E27FC236}">
+                    <a16:creationId xmlns:a16="http://schemas.microsoft.com/office/drawing/2014/main" id="{A7920D54-33A3-74E4-A656-FD3865C6D774}"/>
+                  </a:ext>
+                </a:extLst>
+              </p:cNvPr>
+              <p:cNvSpPr txBox="1"/>
+              <p:nvPr/>
+            </p:nvSpPr>
+            <p:spPr>
+              <a:xfrm>
+                <a:off x="1468622" y="3796398"/>
+                <a:ext cx="6095114" cy="720582"/>
+              </a:xfrm>
+              <a:prstGeom prst="rect">
+                <a:avLst/>
+              </a:prstGeom>
+              <a:noFill/>
+            </p:spPr>
+            <p:txBody>
+              <a:bodyPr wrap="square">
+                <a:spAutoFit/>
+              </a:bodyPr>
+              <a:lstStyle/>
+              <a:p>
+                <a:pPr algn="ctr">
+                  <a:buNone/>
+                </a:pPr>
+                <a14:m>
+                  <m:oMathPara xmlns:m="http://schemas.openxmlformats.org/officeDocument/2006/math">
+                    <m:oMathParaPr>
+                      <m:jc m:val="centerGroup"/>
+                    </m:oMathParaPr>
+                    <m:oMath xmlns:m="http://schemas.openxmlformats.org/officeDocument/2006/math">
+                      <m:sSub>
+                        <m:sSubPr>
+                          <m:ctrlPr>
+                            <a:rPr lang="en-US" altLang="ja-JP" i="1" dirty="0" smtClean="0">
+                              <a:effectLst/>
+                              <a:latin typeface="Cambria Math" panose="02040503050406030204" pitchFamily="18" charset="0"/>
+                            </a:rPr>
+                          </m:ctrlPr>
+                        </m:sSubPr>
+                        <m:e>
+                          <m:r>
+                            <a:rPr lang="en-US" altLang="ja-JP" i="1" dirty="0" smtClean="0">
+                              <a:effectLst/>
+                              <a:latin typeface="Cambria Math" panose="02040503050406030204" pitchFamily="18" charset="0"/>
+                            </a:rPr>
+                            <m:t>𝑃</m:t>
+                          </m:r>
+                        </m:e>
+                        <m:sub>
+                          <m:r>
+                            <a:rPr lang="en-US" altLang="ja-JP" i="1" dirty="0" smtClean="0">
+                              <a:effectLst/>
+                              <a:latin typeface="Cambria Math" panose="02040503050406030204" pitchFamily="18" charset="0"/>
+                            </a:rPr>
+                            <m:t>𝑖𝑛𝑡𝑒𝑟𝑟𝑢𝑝𝑡𝑖𝑜𝑛</m:t>
+                          </m:r>
+                        </m:sub>
+                      </m:sSub>
+                      <m:r>
+                        <a:rPr lang="en-US" altLang="ja-JP" i="1" dirty="0" smtClean="0">
+                          <a:effectLst/>
+                          <a:latin typeface="Cambria Math" panose="02040503050406030204" pitchFamily="18" charset="0"/>
+                        </a:rPr>
+                        <m:t>=</m:t>
+                      </m:r>
+                      <m:d>
+                        <m:dPr>
+                          <m:ctrlPr>
+                            <a:rPr lang="en-US" altLang="ja-JP" i="1" dirty="0" smtClean="0">
+                              <a:effectLst/>
+                              <a:latin typeface="Cambria Math" panose="02040503050406030204" pitchFamily="18" charset="0"/>
+                            </a:rPr>
+                          </m:ctrlPr>
+                        </m:dPr>
+                        <m:e>
+                          <m:sSub>
+                            <m:sSubPr>
+                              <m:ctrlPr>
+                                <a:rPr lang="en-US" altLang="ja-JP" i="1" dirty="0" smtClean="0">
+                                  <a:effectLst/>
+                                  <a:latin typeface="Cambria Math" panose="02040503050406030204" pitchFamily="18" charset="0"/>
+                                </a:rPr>
+                              </m:ctrlPr>
+                            </m:sSubPr>
+                            <m:e>
+                              <m:r>
+                                <a:rPr lang="en-US" altLang="ja-JP" i="1" dirty="0" smtClean="0">
+                                  <a:effectLst/>
+                                  <a:latin typeface="Cambria Math" panose="02040503050406030204" pitchFamily="18" charset="0"/>
+                                </a:rPr>
+                                <m:t>𝜆</m:t>
+                              </m:r>
+                            </m:e>
+                            <m:sub>
+                              <m:r>
+                                <a:rPr lang="en-US" altLang="ja-JP" i="1" dirty="0" smtClean="0">
+                                  <a:effectLst/>
+                                  <a:latin typeface="Cambria Math" panose="02040503050406030204" pitchFamily="18" charset="0"/>
+                                </a:rPr>
+                                <m:t>𝑜𝑤𝑛𝑒𝑟</m:t>
+                              </m:r>
+                            </m:sub>
+                          </m:sSub>
+                          <m:r>
+                            <a:rPr lang="en-US" altLang="ja-JP" i="1" dirty="0" smtClean="0">
+                              <a:effectLst/>
+                              <a:latin typeface="Cambria Math" panose="02040503050406030204" pitchFamily="18" charset="0"/>
+                            </a:rPr>
+                            <m:t>⋅</m:t>
+                          </m:r>
+                          <m:f>
+                            <m:fPr>
+                              <m:ctrlPr>
+                                <a:rPr lang="en-US" altLang="ja-JP" i="1" dirty="0">
+                                  <a:effectLst/>
+                                  <a:latin typeface="Cambria Math" panose="02040503050406030204" pitchFamily="18" charset="0"/>
+                                </a:rPr>
+                              </m:ctrlPr>
+                            </m:fPr>
+                            <m:num>
+                              <m:sSub>
+                                <m:sSubPr>
+                                  <m:ctrlPr>
+                                    <a:rPr lang="en-US" altLang="ja-JP" i="1" dirty="0">
+                                      <a:effectLst/>
+                                      <a:latin typeface="Cambria Math" panose="02040503050406030204" pitchFamily="18" charset="0"/>
+                                    </a:rPr>
+                                  </m:ctrlPr>
+                                </m:sSubPr>
+                                <m:e>
+                                  <m:r>
+                                    <a:rPr lang="en-US" altLang="ja-JP" i="1" dirty="0">
+                                      <a:effectLst/>
+                                      <a:latin typeface="Cambria Math" panose="02040503050406030204" pitchFamily="18" charset="0"/>
+                                    </a:rPr>
+                                    <m:t>𝑆</m:t>
+                                  </m:r>
+                                </m:e>
+                                <m:sub>
+                                  <m:r>
+                                    <a:rPr lang="en-US" altLang="ja-JP" i="1" dirty="0">
+                                      <a:effectLst/>
+                                      <a:latin typeface="Cambria Math" panose="02040503050406030204" pitchFamily="18" charset="0"/>
+                                    </a:rPr>
+                                    <m:t>𝑛𝑒𝑤</m:t>
+                                  </m:r>
+                                </m:sub>
+                              </m:sSub>
+                            </m:num>
+                            <m:den>
+                              <m:sSub>
+                                <m:sSubPr>
+                                  <m:ctrlPr>
+                                    <a:rPr lang="en-US" altLang="ja-JP" i="1" dirty="0">
+                                      <a:effectLst/>
+                                      <a:latin typeface="Cambria Math" panose="02040503050406030204" pitchFamily="18" charset="0"/>
+                                    </a:rPr>
+                                  </m:ctrlPr>
+                                </m:sSubPr>
+                                <m:e>
+                                  <m:r>
+                                    <a:rPr lang="en-US" altLang="ja-JP" i="1" dirty="0">
+                                      <a:effectLst/>
+                                      <a:latin typeface="Cambria Math" panose="02040503050406030204" pitchFamily="18" charset="0"/>
+                                    </a:rPr>
+                                    <m:t>𝜇</m:t>
+                                  </m:r>
+                                </m:e>
+                                <m:sub>
+                                  <m:r>
+                                    <a:rPr lang="en-US" altLang="ja-JP" i="1" dirty="0">
+                                      <a:effectLst/>
+                                      <a:latin typeface="Cambria Math" panose="02040503050406030204" pitchFamily="18" charset="0"/>
+                                    </a:rPr>
+                                    <m:t>𝑒𝑓𝑓</m:t>
+                                  </m:r>
+                                </m:sub>
+                              </m:sSub>
+                            </m:den>
+                          </m:f>
+                        </m:e>
+                      </m:d>
+                      <m:r>
+                        <a:rPr lang="en-US" altLang="ja-JP" i="1" dirty="0">
+                          <a:effectLst/>
+                          <a:latin typeface="Cambria Math" panose="02040503050406030204" pitchFamily="18" charset="0"/>
+                        </a:rPr>
+                        <m:t>⋅</m:t>
+                      </m:r>
+                      <m:d>
+                        <m:dPr>
+                          <m:ctrlPr>
+                            <a:rPr lang="en-US" altLang="ja-JP" i="1" dirty="0">
+                              <a:effectLst/>
+                              <a:latin typeface="Cambria Math" panose="02040503050406030204" pitchFamily="18" charset="0"/>
+                            </a:rPr>
+                          </m:ctrlPr>
+                        </m:dPr>
+                        <m:e>
+                          <m:f>
+                            <m:fPr>
+                              <m:ctrlPr>
+                                <a:rPr lang="en-US" altLang="ja-JP" i="1" dirty="0">
+                                  <a:effectLst/>
+                                  <a:latin typeface="Cambria Math" panose="02040503050406030204" pitchFamily="18" charset="0"/>
+                                </a:rPr>
+                              </m:ctrlPr>
+                            </m:fPr>
+                            <m:num>
+                              <m:sSub>
+                                <m:sSubPr>
+                                  <m:ctrlPr>
+                                    <a:rPr lang="en-US" altLang="ja-JP" i="1" dirty="0">
+                                      <a:effectLst/>
+                                      <a:latin typeface="Cambria Math" panose="02040503050406030204" pitchFamily="18" charset="0"/>
+                                    </a:rPr>
+                                  </m:ctrlPr>
+                                </m:sSubPr>
+                                <m:e>
+                                  <m:r>
+                                    <a:rPr lang="en-US" altLang="ja-JP" i="1" dirty="0">
+                                      <a:effectLst/>
+                                      <a:latin typeface="Cambria Math" panose="02040503050406030204" pitchFamily="18" charset="0"/>
+                                    </a:rPr>
+                                    <m:t>𝑆</m:t>
+                                  </m:r>
+                                </m:e>
+                                <m:sub>
+                                  <m:r>
+                                    <a:rPr lang="en-US" altLang="ja-JP" i="1" dirty="0">
+                                      <a:effectLst/>
+                                      <a:latin typeface="Cambria Math" panose="02040503050406030204" pitchFamily="18" charset="0"/>
+                                    </a:rPr>
+                                    <m:t>𝑜𝑤𝑛𝑒𝑟</m:t>
+                                  </m:r>
+                                </m:sub>
+                              </m:sSub>
+                            </m:num>
+                            <m:den>
+                              <m:sSub>
+                                <m:sSubPr>
+                                  <m:ctrlPr>
+                                    <a:rPr lang="en-US" altLang="ja-JP" i="1" dirty="0">
+                                      <a:effectLst/>
+                                      <a:latin typeface="Cambria Math" panose="02040503050406030204" pitchFamily="18" charset="0"/>
+                                    </a:rPr>
+                                  </m:ctrlPr>
+                                </m:sSubPr>
+                                <m:e>
+                                  <m:r>
+                                    <a:rPr lang="en-US" altLang="ja-JP" i="1" dirty="0">
+                                      <a:effectLst/>
+                                      <a:latin typeface="Cambria Math" panose="02040503050406030204" pitchFamily="18" charset="0"/>
+                                    </a:rPr>
+                                    <m:t>𝜇</m:t>
+                                  </m:r>
+                                </m:e>
+                                <m:sub>
+                                  <m:r>
+                                    <a:rPr lang="en-US" altLang="ja-JP" i="1" dirty="0">
+                                      <a:effectLst/>
+                                      <a:latin typeface="Cambria Math" panose="02040503050406030204" pitchFamily="18" charset="0"/>
+                                    </a:rPr>
+                                    <m:t>𝑏𝑎𝑠𝑒</m:t>
+                                  </m:r>
+                                </m:sub>
+                              </m:sSub>
+                            </m:den>
+                          </m:f>
+                          <m:r>
+                            <a:rPr lang="en-US" altLang="ja-JP" i="1" dirty="0">
+                              <a:effectLst/>
+                              <a:latin typeface="Cambria Math" panose="02040503050406030204" pitchFamily="18" charset="0"/>
+                            </a:rPr>
+                            <m:t>⋅</m:t>
+                          </m:r>
+                          <m:d>
+                            <m:dPr>
+                              <m:ctrlPr>
+                                <a:rPr lang="en-US" altLang="ja-JP" i="1" dirty="0">
+                                  <a:effectLst/>
+                                  <a:latin typeface="Cambria Math" panose="02040503050406030204" pitchFamily="18" charset="0"/>
+                                </a:rPr>
+                              </m:ctrlPr>
+                            </m:dPr>
+                            <m:e>
+                              <m:r>
+                                <a:rPr lang="en-US" altLang="ja-JP" i="1" dirty="0">
+                                  <a:effectLst/>
+                                  <a:latin typeface="Cambria Math" panose="02040503050406030204" pitchFamily="18" charset="0"/>
+                                </a:rPr>
+                                <m:t>1+</m:t>
+                              </m:r>
+                              <m:r>
+                                <a:rPr lang="en-US" altLang="ja-JP" i="1" dirty="0">
+                                  <a:effectLst/>
+                                  <a:latin typeface="Cambria Math" panose="02040503050406030204" pitchFamily="18" charset="0"/>
+                                </a:rPr>
+                                <m:t>𝛼</m:t>
+                              </m:r>
+                            </m:e>
+                          </m:d>
+                        </m:e>
+                      </m:d>
+                    </m:oMath>
+                  </m:oMathPara>
+                </a14:m>
+                <a:endParaRPr/>
+              </a:p>
+            </p:txBody>
+          </p:sp>
+        </mc:Choice>
+        <mc:Fallback>
+          <p:sp>
+            <p:nvSpPr>
+              <p:cNvPr id="11" name="テキスト ボックス 10">
+                <a:extLst>
+                  <a:ext uri="{FF2B5EF4-FFF2-40B4-BE49-F238E27FC236}">
+                    <a16:creationId xmlns:a16="http://schemas.microsoft.com/office/drawing/2014/main" id="{A7920D54-33A3-74E4-A656-FD3865C6D774}"/>
+                  </a:ext>
+                </a:extLst>
+              </p:cNvPr>
+              <p:cNvSpPr txBox="1">
+                <a:spLocks noRot="1" noChangeAspect="1" noMove="1" noResize="1" noEditPoints="1" noAdjustHandles="1" noChangeArrowheads="1" noChangeShapeType="1" noTextEdit="1"/>
+              </p:cNvSpPr>
+              <p:nvPr/>
+            </p:nvSpPr>
+            <p:spPr>
+              <a:xfrm>
+                <a:off x="1468622" y="3796398"/>
+                <a:ext cx="6095114" cy="720582"/>
+              </a:xfrm>
+              <a:prstGeom prst="rect">
+                <a:avLst/>
+              </a:prstGeom>
+              <a:blipFill>
+                <a:blip r:embed="rId4"/>
+                <a:stretch>
+                  <a:fillRect b="-5932"/>
+                </a:stretch>
+              </a:blipFill>
+            </p:spPr>
+            <p:txBody>
+              <a:bodyPr/>
+              <a:lstStyle/>
+              <a:p>
+                <a:r>
+                  <a:rPr lang="ja-JP" altLang="en-US">
+                    <a:noFill/>
+                  </a:rPr>
+                  <a:t> </a:t>
+                </a:r>
+              </a:p>
+            </p:txBody>
+          </p:sp>
+        </mc:Fallback>
+      </mc:AlternateContent>
+    </p:spTree>
+    <p:extLst>
+      <p:ext uri="{BB962C8B-B14F-4D97-AF65-F5344CB8AC3E}">
+        <p14:creationId xmlns:p14="http://schemas.microsoft.com/office/powerpoint/2010/main" val="1870586370"/>
       </p:ext>
     </p:extLst>
   </p:cSld>
@@ -10772,244 +12992,10 @@
       </p:grpSpPr>
       <p:sp>
         <p:nvSpPr>
-          <p:cNvPr id="2" name="タイトル 1">
-            <a:extLst>
-              <a:ext uri="{FF2B5EF4-FFF2-40B4-BE49-F238E27FC236}">
-                <a16:creationId xmlns:a16="http://schemas.microsoft.com/office/drawing/2014/main" id="{85D61B3A-AD9E-5C90-4810-806836B72722}"/>
-              </a:ext>
-            </a:extLst>
-          </p:cNvPr>
-          <p:cNvSpPr>
-            <a:spLocks noGrp="1"/>
-          </p:cNvSpPr>
-          <p:nvPr>
-            <p:ph type="title"/>
-          </p:nvPr>
-        </p:nvSpPr>
-        <p:spPr/>
-        <p:txBody>
-          <a:bodyPr/>
-          <a:lstStyle/>
-          <a:p>
-            <a:r>
-              <a:rPr lang="ja-JP" altLang="en-US" b="1" dirty="0">
-                <a:latin typeface="メイリオ" panose="020B0604030504040204" pitchFamily="50" charset="-128"/>
-                <a:ea typeface="メイリオ" panose="020B0604030504040204" pitchFamily="50" charset="-128"/>
-              </a:rPr>
-              <a:t>背景</a:t>
-            </a:r>
-            <a:endParaRPr kumimoji="1" lang="ja-JP" altLang="en-US" dirty="0"/>
-          </a:p>
-        </p:txBody>
-      </p:sp>
-      <p:sp>
-        <p:nvSpPr>
-          <p:cNvPr id="3" name="コンテンツ プレースホルダー 2">
-            <a:extLst>
-              <a:ext uri="{FF2B5EF4-FFF2-40B4-BE49-F238E27FC236}">
-                <a16:creationId xmlns:a16="http://schemas.microsoft.com/office/drawing/2014/main" id="{AFE4376B-0BE6-DC44-9A92-9FB4E9E793D6}"/>
-              </a:ext>
-            </a:extLst>
-          </p:cNvPr>
-          <p:cNvSpPr>
-            <a:spLocks noGrp="1"/>
-          </p:cNvSpPr>
-          <p:nvPr>
-            <p:ph idx="1"/>
-          </p:nvPr>
-        </p:nvSpPr>
-        <p:spPr/>
-        <p:txBody>
-          <a:bodyPr/>
-          <a:lstStyle/>
-          <a:p>
-            <a:pPr marL="0" indent="0">
-              <a:buNone/>
-            </a:pPr>
-            <a:r>
-              <a:rPr lang="ja-JP" altLang="en-US" dirty="0"/>
-              <a:t>・</a:t>
-            </a:r>
-            <a:r>
-              <a:rPr lang="en-US" altLang="ja-JP" dirty="0"/>
-              <a:t>AI</a:t>
-            </a:r>
-            <a:r>
-              <a:rPr lang="ja-JP" altLang="en-US" dirty="0"/>
-              <a:t>・データサイエンス分野の発展</a:t>
-            </a:r>
-            <a:endParaRPr lang="en-US" altLang="ja-JP" dirty="0">
-              <a:latin typeface="+mj-ea"/>
-            </a:endParaRPr>
-          </a:p>
-          <a:p>
-            <a:pPr marL="0" indent="0">
-              <a:buNone/>
-            </a:pPr>
-            <a:r>
-              <a:rPr lang="ja-JP" altLang="en-US" dirty="0">
-                <a:latin typeface="+mj-ea"/>
-              </a:rPr>
-              <a:t>  </a:t>
-            </a:r>
-            <a:r>
-              <a:rPr lang="en-US" altLang="ja-JP" dirty="0">
-                <a:latin typeface="+mj-ea"/>
-              </a:rPr>
-              <a:t>	</a:t>
-            </a:r>
-            <a:r>
-              <a:rPr lang="ja-JP" altLang="en-US" dirty="0">
-                <a:latin typeface="+mj-ea"/>
-              </a:rPr>
-              <a:t>→　</a:t>
-            </a:r>
-            <a:r>
-              <a:rPr lang="en-US" altLang="ja-JP" dirty="0">
-                <a:latin typeface="+mj-ea"/>
-              </a:rPr>
-              <a:t>GPU</a:t>
-            </a:r>
-            <a:r>
-              <a:rPr lang="ja-JP" altLang="en-US" dirty="0">
-                <a:latin typeface="+mj-ea"/>
-              </a:rPr>
-              <a:t>の</a:t>
-            </a:r>
-            <a:r>
-              <a:rPr lang="ja-JP" altLang="en-US" b="1" dirty="0">
-                <a:solidFill>
-                  <a:schemeClr val="accent3">
-                    <a:lumMod val="75000"/>
-                  </a:schemeClr>
-                </a:solidFill>
-                <a:latin typeface="+mj-ea"/>
-              </a:rPr>
-              <a:t>需要増加</a:t>
-            </a:r>
-            <a:endParaRPr lang="en-US" altLang="ja-JP" b="1" dirty="0">
-              <a:solidFill>
-                <a:schemeClr val="accent3">
-                  <a:lumMod val="75000"/>
-                </a:schemeClr>
-              </a:solidFill>
-              <a:latin typeface="+mj-ea"/>
-            </a:endParaRPr>
-          </a:p>
-          <a:p>
-            <a:pPr marL="0" indent="0">
-              <a:buNone/>
-            </a:pPr>
-            <a:r>
-              <a:rPr lang="ja-JP" altLang="en-US" dirty="0"/>
-              <a:t>・</a:t>
-            </a:r>
-            <a:r>
-              <a:rPr lang="en-US" altLang="ja-JP" dirty="0"/>
-              <a:t>GPU</a:t>
-            </a:r>
-            <a:r>
-              <a:rPr lang="ja-JP" altLang="en-US" dirty="0"/>
-              <a:t>資源は</a:t>
-            </a:r>
-            <a:r>
-              <a:rPr lang="ja-JP" altLang="en-US" b="1" dirty="0">
-                <a:solidFill>
-                  <a:schemeClr val="accent2"/>
-                </a:solidFill>
-              </a:rPr>
-              <a:t>高価</a:t>
-            </a:r>
-            <a:endParaRPr lang="en-US" altLang="ja-JP" b="1" dirty="0">
-              <a:solidFill>
-                <a:schemeClr val="accent2"/>
-              </a:solidFill>
-            </a:endParaRPr>
-          </a:p>
-          <a:p>
-            <a:pPr marL="0" indent="0">
-              <a:buNone/>
-            </a:pPr>
-            <a:r>
-              <a:rPr lang="en-US" altLang="ja-JP" dirty="0"/>
-              <a:t>	</a:t>
-            </a:r>
-            <a:r>
-              <a:rPr lang="ja-JP" altLang="en-US" dirty="0"/>
-              <a:t>→すべての研究室が必要な時に、</a:t>
-            </a:r>
-            <a:endParaRPr lang="en-US" altLang="ja-JP" dirty="0"/>
-          </a:p>
-          <a:p>
-            <a:pPr marL="0" indent="0" algn="ctr">
-              <a:buNone/>
-            </a:pPr>
-            <a:r>
-              <a:rPr lang="ja-JP" altLang="en-US" dirty="0"/>
-              <a:t>十分な量を確保することは</a:t>
-            </a:r>
-            <a:r>
-              <a:rPr lang="ja-JP" altLang="en-US" b="1" dirty="0">
-                <a:solidFill>
-                  <a:schemeClr val="accent3">
-                    <a:lumMod val="75000"/>
-                  </a:schemeClr>
-                </a:solidFill>
-              </a:rPr>
-              <a:t>困難</a:t>
-            </a:r>
-            <a:endParaRPr lang="en-US" altLang="ja-JP" b="1" dirty="0">
-              <a:solidFill>
-                <a:schemeClr val="accent3">
-                  <a:lumMod val="75000"/>
-                </a:schemeClr>
-              </a:solidFill>
-            </a:endParaRPr>
-          </a:p>
-          <a:p>
-            <a:endParaRPr lang="ja-JP" altLang="en-US" dirty="0"/>
-          </a:p>
-          <a:p>
-            <a:endParaRPr kumimoji="1" lang="ja-JP" altLang="en-US" dirty="0"/>
-          </a:p>
-        </p:txBody>
-      </p:sp>
-      <p:sp>
-        <p:nvSpPr>
-          <p:cNvPr id="4" name="スライド番号プレースホルダー 3">
-            <a:extLst>
-              <a:ext uri="{FF2B5EF4-FFF2-40B4-BE49-F238E27FC236}">
-                <a16:creationId xmlns:a16="http://schemas.microsoft.com/office/drawing/2014/main" id="{2A0BE1F7-55D9-910D-C6AE-1E86520001C2}"/>
-              </a:ext>
-            </a:extLst>
-          </p:cNvPr>
-          <p:cNvSpPr>
-            <a:spLocks noGrp="1"/>
-          </p:cNvSpPr>
-          <p:nvPr>
-            <p:ph type="sldNum" sz="quarter" idx="12"/>
-          </p:nvPr>
-        </p:nvSpPr>
-        <p:spPr/>
-        <p:txBody>
-          <a:bodyPr/>
-          <a:lstStyle/>
-          <a:p>
-            <a:fld id="{8D1BC46D-89B1-41A3-BBA1-F56BEABD0A90}" type="slidenum">
-              <a:rPr lang="ja-JP" altLang="en-US" smtClean="0"/>
-              <a:pPr/>
-              <a:t>2</a:t>
-            </a:fld>
-            <a:endParaRPr lang="ja-JP" altLang="en-US" dirty="0"/>
-          </a:p>
-        </p:txBody>
-      </p:sp>
-      <p:sp>
-        <p:nvSpPr>
-          <p:cNvPr id="6" name="正方形/長方形 5">
-            <a:extLst>
-              <a:ext uri="{FF2B5EF4-FFF2-40B4-BE49-F238E27FC236}">
-                <a16:creationId xmlns:a16="http://schemas.microsoft.com/office/drawing/2014/main" id="{A6D35D8F-E0C6-2AE4-E8B0-B5B9AD741F25}"/>
+          <p:cNvPr id="21" name="正方形/長方形 20">
+            <a:extLst>
+              <a:ext uri="{FF2B5EF4-FFF2-40B4-BE49-F238E27FC236}">
+                <a16:creationId xmlns:a16="http://schemas.microsoft.com/office/drawing/2014/main" id="{51FA538A-6348-9BB4-2E2A-E78969F497A9}"/>
               </a:ext>
             </a:extLst>
           </p:cNvPr>
@@ -11018,8 +13004,8 @@
         </p:nvSpPr>
         <p:spPr>
           <a:xfrm>
-            <a:off x="4673911" y="5579872"/>
-            <a:ext cx="3537394" cy="387927"/>
+            <a:off x="3225800" y="5689600"/>
+            <a:ext cx="5791200" cy="304800"/>
           </a:xfrm>
           <a:prstGeom prst="rect">
             <a:avLst/>
@@ -11049,9 +13035,7 @@
             <a:tileRect/>
           </a:gradFill>
           <a:ln>
-            <a:solidFill>
-              <a:schemeClr val="bg1"/>
-            </a:solidFill>
+            <a:noFill/>
           </a:ln>
         </p:spPr>
         <p:style>
@@ -11075,16 +13059,16 @@
           <a:lstStyle/>
           <a:p>
             <a:pPr algn="ctr"/>
-            <a:endParaRPr kumimoji="1" lang="ja-JP" altLang="en-US" dirty="0"/>
+            <a:endParaRPr kumimoji="1" lang="ja-JP" altLang="en-US"/>
           </a:p>
         </p:txBody>
       </p:sp>
       <p:sp>
         <p:nvSpPr>
-          <p:cNvPr id="7" name="正方形/長方形 6">
-            <a:extLst>
-              <a:ext uri="{FF2B5EF4-FFF2-40B4-BE49-F238E27FC236}">
-                <a16:creationId xmlns:a16="http://schemas.microsoft.com/office/drawing/2014/main" id="{9FC13006-623A-99E8-E109-7C1F47B4D9CF}"/>
+          <p:cNvPr id="22" name="正方形/長方形 21">
+            <a:extLst>
+              <a:ext uri="{FF2B5EF4-FFF2-40B4-BE49-F238E27FC236}">
+                <a16:creationId xmlns:a16="http://schemas.microsoft.com/office/drawing/2014/main" id="{96E70598-9FED-356E-DDDE-530E0D867D47}"/>
               </a:ext>
             </a:extLst>
           </p:cNvPr>
@@ -11093,8 +13077,8 @@
         </p:nvSpPr>
         <p:spPr>
           <a:xfrm>
-            <a:off x="3662838" y="5004422"/>
-            <a:ext cx="5927679" cy="341854"/>
+            <a:off x="4330700" y="5181126"/>
+            <a:ext cx="3352603" cy="282971"/>
           </a:xfrm>
           <a:prstGeom prst="rect">
             <a:avLst/>
@@ -11124,9 +13108,7 @@
             <a:tileRect/>
           </a:gradFill>
           <a:ln>
-            <a:solidFill>
-              <a:schemeClr val="bg1"/>
-            </a:solidFill>
+            <a:noFill/>
           </a:ln>
         </p:spPr>
         <p:style>
@@ -11156,76 +13138,262 @@
       </p:sp>
       <p:sp>
         <p:nvSpPr>
-          <p:cNvPr id="8" name="正方形/長方形 7">
-            <a:extLst>
-              <a:ext uri="{FF2B5EF4-FFF2-40B4-BE49-F238E27FC236}">
-                <a16:creationId xmlns:a16="http://schemas.microsoft.com/office/drawing/2014/main" id="{8F9C7C88-EA5F-029E-69B3-5CD6AB429918}"/>
-              </a:ext>
-            </a:extLst>
-          </p:cNvPr>
-          <p:cNvSpPr/>
-          <p:nvPr/>
+          <p:cNvPr id="2" name="タイトル 1">
+            <a:extLst>
+              <a:ext uri="{FF2B5EF4-FFF2-40B4-BE49-F238E27FC236}">
+                <a16:creationId xmlns:a16="http://schemas.microsoft.com/office/drawing/2014/main" id="{85D61B3A-AD9E-5C90-4810-806836B72722}"/>
+              </a:ext>
+            </a:extLst>
+          </p:cNvPr>
+          <p:cNvSpPr>
+            <a:spLocks noGrp="1"/>
+          </p:cNvSpPr>
+          <p:nvPr>
+            <p:ph type="title"/>
+          </p:nvPr>
+        </p:nvSpPr>
+        <p:spPr/>
+        <p:txBody>
+          <a:bodyPr/>
+          <a:lstStyle/>
+          <a:p>
+            <a:r>
+              <a:rPr lang="ja-JP" altLang="en-US" b="1" dirty="0">
+                <a:latin typeface="メイリオ" panose="020B0604030504040204" pitchFamily="50" charset="-128"/>
+                <a:ea typeface="メイリオ" panose="020B0604030504040204" pitchFamily="50" charset="-128"/>
+              </a:rPr>
+              <a:t>背景</a:t>
+            </a:r>
+            <a:endParaRPr kumimoji="1" lang="ja-JP" altLang="en-US" dirty="0"/>
+          </a:p>
+        </p:txBody>
+      </p:sp>
+      <p:sp>
+        <p:nvSpPr>
+          <p:cNvPr id="3" name="コンテンツ プレースホルダー 2">
+            <a:extLst>
+              <a:ext uri="{FF2B5EF4-FFF2-40B4-BE49-F238E27FC236}">
+                <a16:creationId xmlns:a16="http://schemas.microsoft.com/office/drawing/2014/main" id="{AFE4376B-0BE6-DC44-9A92-9FB4E9E793D6}"/>
+              </a:ext>
+            </a:extLst>
+          </p:cNvPr>
+          <p:cNvSpPr>
+            <a:spLocks noGrp="1"/>
+          </p:cNvSpPr>
+          <p:nvPr>
+            <p:ph idx="1"/>
+          </p:nvPr>
         </p:nvSpPr>
         <p:spPr>
           <a:xfrm>
-            <a:off x="3953476" y="4294423"/>
-            <a:ext cx="5240582" cy="387927"/>
+            <a:off x="838200" y="1253331"/>
+            <a:ext cx="10515600" cy="4893469"/>
           </a:xfrm>
-          <a:prstGeom prst="rect">
-            <a:avLst/>
-          </a:prstGeom>
-          <a:gradFill flip="none" rotWithShape="1">
-            <a:gsLst>
-              <a:gs pos="0">
-                <a:schemeClr val="accent1">
-                  <a:tint val="66000"/>
-                  <a:satMod val="160000"/>
+        </p:spPr>
+        <p:txBody>
+          <a:bodyPr/>
+          <a:lstStyle/>
+          <a:p>
+            <a:pPr marL="0" indent="0">
+              <a:lnSpc>
+                <a:spcPct val="150000"/>
+              </a:lnSpc>
+              <a:buNone/>
+            </a:pPr>
+            <a:r>
+              <a:rPr lang="en-US" altLang="ja-JP" b="1" u="sng" dirty="0">
+                <a:solidFill>
+                  <a:schemeClr val="accent3">
+                    <a:lumMod val="75000"/>
+                  </a:schemeClr>
+                </a:solidFill>
+                <a:latin typeface="+mj-ea"/>
+              </a:rPr>
+              <a:t>GPU</a:t>
+            </a:r>
+            <a:r>
+              <a:rPr lang="ja-JP" altLang="en-US" b="1" u="sng" dirty="0">
+                <a:solidFill>
+                  <a:schemeClr val="accent3">
+                    <a:lumMod val="75000"/>
+                  </a:schemeClr>
+                </a:solidFill>
+                <a:latin typeface="+mj-ea"/>
+              </a:rPr>
+              <a:t>の需要増加</a:t>
+            </a:r>
+            <a:endParaRPr lang="en-US" altLang="ja-JP" b="1" u="sng" dirty="0">
+              <a:solidFill>
+                <a:schemeClr val="accent3">
+                  <a:lumMod val="75000"/>
                 </a:schemeClr>
-              </a:gs>
-              <a:gs pos="50000">
-                <a:schemeClr val="accent1">
-                  <a:tint val="44500"/>
-                  <a:satMod val="160000"/>
+              </a:solidFill>
+              <a:latin typeface="+mj-ea"/>
+            </a:endParaRPr>
+          </a:p>
+          <a:p>
+            <a:pPr marL="0" indent="0">
+              <a:lnSpc>
+                <a:spcPct val="150000"/>
+              </a:lnSpc>
+              <a:buNone/>
+            </a:pPr>
+            <a:r>
+              <a:rPr lang="en-US" altLang="ja-JP" sz="2000" dirty="0"/>
+              <a:t>AI</a:t>
+            </a:r>
+            <a:r>
+              <a:rPr lang="ja-JP" altLang="en-US" sz="2000" dirty="0"/>
+              <a:t>・データサイエンス分野の発展に伴い、</a:t>
+            </a:r>
+            <a:r>
+              <a:rPr lang="en-US" altLang="ja-JP" sz="2000" dirty="0"/>
+              <a:t>GPU</a:t>
+            </a:r>
+            <a:r>
+              <a:rPr lang="ja-JP" altLang="en-US" sz="2000" dirty="0"/>
+              <a:t>需要は年々増加している。</a:t>
+            </a:r>
+            <a:br>
+              <a:rPr lang="ja-JP" altLang="en-US" sz="2000" dirty="0"/>
+            </a:br>
+            <a:r>
+              <a:rPr lang="ja-JP" altLang="en-US" sz="2000" dirty="0"/>
+              <a:t>特にデータセンター向け</a:t>
+            </a:r>
+            <a:r>
+              <a:rPr lang="en-US" altLang="ja-JP" sz="2000" dirty="0"/>
+              <a:t>GPU</a:t>
+            </a:r>
+            <a:r>
+              <a:rPr lang="ja-JP" altLang="en-US" sz="2000" dirty="0"/>
+              <a:t>市場は、今後も高い成長率で拡大すると予測されている</a:t>
+            </a:r>
+            <a:r>
+              <a:rPr lang="en-US" altLang="ja-JP" sz="2000" dirty="0"/>
+              <a:t>¹</a:t>
+            </a:r>
+            <a:r>
+              <a:rPr lang="ja-JP" altLang="en-US" sz="2000" dirty="0"/>
+              <a:t>。</a:t>
+            </a:r>
+            <a:endParaRPr lang="en-US" altLang="ja-JP" sz="2000" dirty="0"/>
+          </a:p>
+          <a:p>
+            <a:pPr marL="0" indent="0">
+              <a:lnSpc>
+                <a:spcPct val="150000"/>
+              </a:lnSpc>
+              <a:buNone/>
+            </a:pPr>
+            <a:r>
+              <a:rPr lang="en-US" altLang="ja-JP" b="1" u="sng" dirty="0">
+                <a:solidFill>
+                  <a:schemeClr val="accent3">
+                    <a:lumMod val="75000"/>
+                  </a:schemeClr>
+                </a:solidFill>
+              </a:rPr>
+              <a:t>GPU</a:t>
+            </a:r>
+            <a:r>
+              <a:rPr lang="ja-JP" altLang="en-US" b="1" u="sng" dirty="0">
+                <a:solidFill>
+                  <a:schemeClr val="accent3">
+                    <a:lumMod val="75000"/>
+                  </a:schemeClr>
+                </a:solidFill>
+              </a:rPr>
+              <a:t>資源の高価さ・調達困難性</a:t>
+            </a:r>
+            <a:endParaRPr lang="en-US" altLang="ja-JP" b="1" u="sng" dirty="0">
+              <a:solidFill>
+                <a:schemeClr val="accent3">
+                  <a:lumMod val="75000"/>
                 </a:schemeClr>
-              </a:gs>
-              <a:gs pos="100000">
-                <a:schemeClr val="accent1">
-                  <a:tint val="23500"/>
-                  <a:satMod val="160000"/>
-                </a:schemeClr>
-              </a:gs>
-            </a:gsLst>
-            <a:lin ang="18900000" scaled="1"/>
-            <a:tileRect/>
-          </a:gradFill>
-          <a:ln>
-            <a:solidFill>
-              <a:schemeClr val="bg1"/>
-            </a:solidFill>
-          </a:ln>
-        </p:spPr>
-        <p:style>
-          <a:lnRef idx="2">
-            <a:schemeClr val="accent1">
-              <a:shade val="15000"/>
-            </a:schemeClr>
-          </a:lnRef>
-          <a:fillRef idx="1">
-            <a:schemeClr val="accent1"/>
-          </a:fillRef>
-          <a:effectRef idx="0">
-            <a:schemeClr val="accent1"/>
-          </a:effectRef>
-          <a:fontRef idx="minor">
-            <a:schemeClr val="lt1"/>
-          </a:fontRef>
-        </p:style>
+              </a:solidFill>
+            </a:endParaRPr>
+          </a:p>
+          <a:p>
+            <a:pPr marL="0" indent="0">
+              <a:lnSpc>
+                <a:spcPct val="150000"/>
+              </a:lnSpc>
+              <a:buNone/>
+            </a:pPr>
+            <a:r>
+              <a:rPr lang="ja-JP" altLang="en-US" sz="2000" dirty="0"/>
+              <a:t>高性能</a:t>
+            </a:r>
+            <a:r>
+              <a:rPr lang="en-US" altLang="ja-JP" sz="2000" dirty="0"/>
+              <a:t>GPU</a:t>
+            </a:r>
+            <a:r>
+              <a:rPr lang="ja-JP" altLang="en-US" sz="2000" dirty="0"/>
+              <a:t>は製造コストが高く、また</a:t>
+            </a:r>
+            <a:r>
+              <a:rPr lang="en-US" altLang="ja-JP" sz="2000" dirty="0"/>
+              <a:t>AI</a:t>
+            </a:r>
+            <a:r>
+              <a:rPr lang="ja-JP" altLang="en-US" sz="2000" dirty="0"/>
+              <a:t>用途の需要集中により供給が逼迫している</a:t>
+            </a:r>
+            <a:r>
+              <a:rPr lang="en-US" altLang="ja-JP" sz="2000" dirty="0"/>
+              <a:t>²</a:t>
+            </a:r>
+            <a:r>
+              <a:rPr lang="ja-JP" altLang="en-US" sz="2000" dirty="0"/>
+              <a:t>。</a:t>
+            </a:r>
+            <a:br>
+              <a:rPr lang="ja-JP" altLang="en-US" sz="2000" dirty="0"/>
+            </a:br>
+            <a:r>
+              <a:rPr lang="ja-JP" altLang="en-US" sz="2000" dirty="0"/>
+              <a:t>→　研究機関や大学において、必要な時に十分な</a:t>
+            </a:r>
+            <a:r>
+              <a:rPr lang="en-US" altLang="ja-JP" sz="2000" dirty="0"/>
+              <a:t>GPU</a:t>
+            </a:r>
+            <a:r>
+              <a:rPr lang="ja-JP" altLang="en-US" sz="2000" dirty="0"/>
+              <a:t>資源を確保することは困難。</a:t>
+            </a:r>
+          </a:p>
+        </p:txBody>
+      </p:sp>
+      <p:sp>
+        <p:nvSpPr>
+          <p:cNvPr id="4" name="スライド番号プレースホルダー 3">
+            <a:extLst>
+              <a:ext uri="{FF2B5EF4-FFF2-40B4-BE49-F238E27FC236}">
+                <a16:creationId xmlns:a16="http://schemas.microsoft.com/office/drawing/2014/main" id="{2A0BE1F7-55D9-910D-C6AE-1E86520001C2}"/>
+              </a:ext>
+            </a:extLst>
+          </p:cNvPr>
+          <p:cNvSpPr>
+            <a:spLocks noGrp="1"/>
+          </p:cNvSpPr>
+          <p:nvPr>
+            <p:ph type="sldNum" sz="quarter" idx="12"/>
+          </p:nvPr>
+        </p:nvSpPr>
+        <p:spPr/>
         <p:txBody>
-          <a:bodyPr rtlCol="0" anchor="ctr"/>
+          <a:bodyPr/>
           <a:lstStyle/>
           <a:p>
-            <a:pPr algn="ctr"/>
-            <a:endParaRPr kumimoji="1" lang="ja-JP" altLang="en-US"/>
+            <a:fld id="{8D1BC46D-89B1-41A3-BBA1-F56BEABD0A90}" type="slidenum">
+              <a:rPr lang="ja-JP" altLang="en-US" smtClean="0"/>
+              <a:pPr/>
+              <a:t>2</a:t>
+            </a:fld>
+            <a:endParaRPr lang="ja-JP" altLang="en-US" dirty="0"/>
           </a:p>
         </p:txBody>
       </p:sp>
@@ -11243,8 +13411,8 @@
         </p:nvSpPr>
         <p:spPr>
           <a:xfrm>
-            <a:off x="3171551" y="4019862"/>
-            <a:ext cx="7015186" cy="2400657"/>
+            <a:off x="2469274" y="5018086"/>
+            <a:ext cx="7015186" cy="1354217"/>
           </a:xfrm>
           <a:prstGeom prst="rect">
             <a:avLst/>
@@ -11259,47 +13427,23 @@
           <a:p>
             <a:pPr algn="ctr"/>
             <a:r>
-              <a:rPr kumimoji="1" lang="ja-JP" altLang="en-US" sz="4400" dirty="0">
-                <a:solidFill>
-                  <a:schemeClr val="accent3">
-                    <a:lumMod val="75000"/>
-                  </a:schemeClr>
-                </a:solidFill>
-              </a:rPr>
+              <a:rPr kumimoji="1" lang="ja-JP" altLang="en-US" sz="3200" b="1" dirty="0"/>
               <a:t>学内</a:t>
             </a:r>
             <a:r>
-              <a:rPr kumimoji="1" lang="en-US" altLang="ja-JP" sz="4400" dirty="0">
-                <a:solidFill>
-                  <a:schemeClr val="accent3">
-                    <a:lumMod val="75000"/>
-                  </a:schemeClr>
-                </a:solidFill>
-              </a:rPr>
+              <a:rPr kumimoji="1" lang="en-US" altLang="ja-JP" sz="3200" b="1" dirty="0"/>
               <a:t>GPU</a:t>
             </a:r>
             <a:r>
-              <a:rPr kumimoji="1" lang="ja-JP" altLang="en-US" sz="4400" dirty="0">
-                <a:solidFill>
-                  <a:schemeClr val="accent3">
-                    <a:lumMod val="75000"/>
-                  </a:schemeClr>
-                </a:solidFill>
-              </a:rPr>
+              <a:rPr kumimoji="1" lang="ja-JP" altLang="en-US" sz="3200" b="1" dirty="0"/>
               <a:t>共有基盤</a:t>
             </a:r>
-            <a:endParaRPr kumimoji="1" lang="en-US" altLang="ja-JP" sz="4400" dirty="0">
-              <a:solidFill>
-                <a:schemeClr val="accent3">
-                  <a:lumMod val="75000"/>
-                </a:schemeClr>
-              </a:solidFill>
-            </a:endParaRPr>
+            <a:endParaRPr kumimoji="1" lang="en-US" altLang="ja-JP" sz="3200" b="1" dirty="0"/>
           </a:p>
           <a:p>
             <a:pPr algn="ctr"/>
             <a:r>
-              <a:rPr lang="ja-JP" altLang="en-US" sz="4400" dirty="0">
+              <a:rPr lang="ja-JP" altLang="en-US" sz="3200" b="1" dirty="0">
                 <a:solidFill>
                   <a:schemeClr val="accent3">
                     <a:lumMod val="75000"/>
@@ -11309,220 +13453,72 @@
               <a:t>「</a:t>
             </a:r>
             <a:r>
-              <a:rPr lang="en-US" altLang="ja-JP" sz="4400" b="1" dirty="0">
-                <a:solidFill>
-                  <a:schemeClr val="accent3">
-                    <a:lumMod val="75000"/>
-                  </a:schemeClr>
-                </a:solidFill>
-              </a:rPr>
+              <a:rPr lang="en-US" altLang="ja-JP" sz="3200" b="1" dirty="0"/>
               <a:t>Air Computing Pool</a:t>
             </a:r>
             <a:r>
-              <a:rPr lang="ja-JP" altLang="en-US" sz="4400" dirty="0">
-                <a:solidFill>
-                  <a:schemeClr val="accent3">
-                    <a:lumMod val="75000"/>
-                  </a:schemeClr>
-                </a:solidFill>
-              </a:rPr>
+              <a:rPr lang="ja-JP" altLang="en-US" sz="3200" b="1" dirty="0"/>
               <a:t>」を検討</a:t>
             </a:r>
-            <a:r>
-              <a:rPr lang="en-US" altLang="ja-JP" sz="4400" dirty="0">
-                <a:solidFill>
-                  <a:schemeClr val="accent3">
-                    <a:lumMod val="75000"/>
-                  </a:schemeClr>
-                </a:solidFill>
-              </a:rPr>
-              <a:t>(ACP)</a:t>
-            </a:r>
+            <a:endParaRPr lang="en-US" altLang="ja-JP" sz="3200" b="1" dirty="0"/>
           </a:p>
           <a:p>
             <a:endParaRPr kumimoji="1" lang="ja-JP" altLang="en-US" dirty="0"/>
           </a:p>
         </p:txBody>
       </p:sp>
-      <p:grpSp>
-        <p:nvGrpSpPr>
-          <p:cNvPr id="10" name="グループ化 9">
-            <a:extLst>
-              <a:ext uri="{FF2B5EF4-FFF2-40B4-BE49-F238E27FC236}">
-                <a16:creationId xmlns:a16="http://schemas.microsoft.com/office/drawing/2014/main" id="{E3786FA9-2FAB-9036-2708-AA9220354B01}"/>
-              </a:ext>
-            </a:extLst>
-          </p:cNvPr>
-          <p:cNvGrpSpPr/>
+      <p:sp>
+        <p:nvSpPr>
+          <p:cNvPr id="23" name="テキスト ボックス 22">
+            <a:extLst>
+              <a:ext uri="{FF2B5EF4-FFF2-40B4-BE49-F238E27FC236}">
+                <a16:creationId xmlns:a16="http://schemas.microsoft.com/office/drawing/2014/main" id="{0E3A94D9-8DA9-314B-FCD9-8E91040FBF5B}"/>
+              </a:ext>
+            </a:extLst>
+          </p:cNvPr>
+          <p:cNvSpPr txBox="1"/>
           <p:nvPr/>
-        </p:nvGrpSpPr>
-        <p:grpSpPr>
-          <a:xfrm rot="16200000">
-            <a:off x="1927568" y="4025634"/>
-            <a:ext cx="1065969" cy="2054997"/>
-            <a:chOff x="7259849" y="1486857"/>
-            <a:chExt cx="1400991" cy="1736171"/>
+        </p:nvSpPr>
+        <p:spPr>
+          <a:xfrm>
+            <a:off x="3124200" y="6302416"/>
+            <a:ext cx="10055903" cy="553998"/>
           </a:xfrm>
-          <a:solidFill>
-            <a:schemeClr val="accent2"/>
-          </a:solidFill>
-          <a:scene3d>
-            <a:camera prst="orthographicFront"/>
-            <a:lightRig rig="threePt" dir="t">
-              <a:rot lat="0" lon="0" rev="7500000"/>
-            </a:lightRig>
-          </a:scene3d>
-        </p:grpSpPr>
-        <p:sp>
-          <p:nvSpPr>
-            <p:cNvPr id="11" name="矢印: 下 10">
-              <a:extLst>
-                <a:ext uri="{FF2B5EF4-FFF2-40B4-BE49-F238E27FC236}">
-                  <a16:creationId xmlns:a16="http://schemas.microsoft.com/office/drawing/2014/main" id="{D0C2E822-D7D2-DE4B-7913-2D80E05A6B1C}"/>
-                </a:ext>
-              </a:extLst>
-            </p:cNvPr>
-            <p:cNvSpPr/>
-            <p:nvPr/>
-          </p:nvSpPr>
-          <p:spPr>
-            <a:xfrm>
-              <a:off x="7259849" y="1486857"/>
-              <a:ext cx="1400991" cy="1736171"/>
-            </a:xfrm>
-            <a:prstGeom prst="downArrow">
-              <a:avLst>
-                <a:gd name="adj1" fmla="val 55000"/>
-                <a:gd name="adj2" fmla="val 45000"/>
-              </a:avLst>
-            </a:prstGeom>
-            <a:grpFill/>
-            <a:ln>
-              <a:noFill/>
-            </a:ln>
-            <a:sp3d z="152400" extrusionH="63500" prstMaterial="dkEdge">
-              <a:bevelT w="125400" h="36350" prst="relaxedInset"/>
-              <a:contourClr>
-                <a:schemeClr val="bg1"/>
-              </a:contourClr>
-            </a:sp3d>
-          </p:spPr>
-          <p:style>
-            <a:lnRef idx="1">
-              <a:schemeClr val="dk2">
-                <a:alpha val="90000"/>
-                <a:tint val="40000"/>
-                <a:hueOff val="0"/>
-                <a:satOff val="0"/>
-                <a:lumOff val="0"/>
-                <a:alphaOff val="0"/>
-              </a:schemeClr>
-            </a:lnRef>
-            <a:fillRef idx="1">
-              <a:schemeClr val="dk2">
-                <a:alpha val="90000"/>
-                <a:tint val="40000"/>
-                <a:hueOff val="0"/>
-                <a:satOff val="0"/>
-                <a:lumOff val="0"/>
-                <a:alphaOff val="0"/>
-              </a:schemeClr>
-            </a:fillRef>
-            <a:effectRef idx="0">
-              <a:schemeClr val="dk2">
-                <a:alpha val="90000"/>
-                <a:tint val="40000"/>
-                <a:hueOff val="0"/>
-                <a:satOff val="0"/>
-                <a:lumOff val="0"/>
-                <a:alphaOff val="0"/>
-              </a:schemeClr>
-            </a:effectRef>
-            <a:fontRef idx="minor">
-              <a:schemeClr val="dk1">
-                <a:hueOff val="0"/>
-                <a:satOff val="0"/>
-                <a:lumOff val="0"/>
-                <a:alphaOff val="0"/>
-              </a:schemeClr>
-            </a:fontRef>
-          </p:style>
-          <p:txBody>
-            <a:bodyPr/>
-            <a:lstStyle/>
-            <a:p>
-              <a:endParaRPr lang="ja-JP" altLang="en-US"/>
-            </a:p>
-          </p:txBody>
-        </p:sp>
-        <p:sp>
-          <p:nvSpPr>
-            <p:cNvPr id="12" name="矢印: 下 4">
-              <a:extLst>
-                <a:ext uri="{FF2B5EF4-FFF2-40B4-BE49-F238E27FC236}">
-                  <a16:creationId xmlns:a16="http://schemas.microsoft.com/office/drawing/2014/main" id="{4648D39D-C724-39CA-3C71-E9DC9DDE1E79}"/>
-                </a:ext>
-              </a:extLst>
-            </p:cNvPr>
-            <p:cNvSpPr txBox="1"/>
-            <p:nvPr/>
-          </p:nvSpPr>
-          <p:spPr>
-            <a:xfrm>
-              <a:off x="7575072" y="1486857"/>
-              <a:ext cx="770545" cy="1389426"/>
-            </a:xfrm>
-            <a:prstGeom prst="rect">
-              <a:avLst/>
-            </a:prstGeom>
-            <a:grpFill/>
-            <a:ln>
-              <a:noFill/>
-            </a:ln>
-            <a:sp3d z="152400"/>
-          </p:spPr>
-          <p:style>
-            <a:lnRef idx="0">
-              <a:scrgbClr r="0" g="0" b="0"/>
-            </a:lnRef>
-            <a:fillRef idx="0">
-              <a:scrgbClr r="0" g="0" b="0"/>
-            </a:fillRef>
-            <a:effectRef idx="0">
-              <a:scrgbClr r="0" g="0" b="0"/>
-            </a:effectRef>
-            <a:fontRef idx="minor">
-              <a:schemeClr val="dk1">
-                <a:hueOff val="0"/>
-                <a:satOff val="0"/>
-                <a:lumOff val="0"/>
-                <a:alphaOff val="0"/>
-              </a:schemeClr>
-            </a:fontRef>
-          </p:style>
-          <p:txBody>
-            <a:bodyPr spcFirstLastPara="0" vert="horz" wrap="square" lIns="45720" tIns="45720" rIns="45720" bIns="45720" numCol="1" spcCol="1270" anchor="ctr" anchorCtr="0">
-              <a:noAutofit/>
-            </a:bodyPr>
-            <a:lstStyle/>
-            <a:p>
-              <a:pPr marL="0" lvl="0" indent="0" algn="ctr" defTabSz="1600200">
-                <a:lnSpc>
-                  <a:spcPct val="90000"/>
-                </a:lnSpc>
-                <a:spcBef>
-                  <a:spcPct val="0"/>
-                </a:spcBef>
-                <a:spcAft>
-                  <a:spcPct val="35000"/>
-                </a:spcAft>
-                <a:buNone/>
-              </a:pPr>
-              <a:endParaRPr kumimoji="1" lang="ja-JP" altLang="en-US" sz="3600" kern="1200" dirty="0"/>
-            </a:p>
-          </p:txBody>
-        </p:sp>
-      </p:grpSp>
+          <a:prstGeom prst="rect">
+            <a:avLst/>
+          </a:prstGeom>
+          <a:noFill/>
+        </p:spPr>
+        <p:txBody>
+          <a:bodyPr wrap="square" rtlCol="0">
+            <a:spAutoFit/>
+          </a:bodyPr>
+          <a:lstStyle/>
+          <a:p>
+            <a:r>
+              <a:rPr lang="en-US" altLang="ja-JP" sz="1200" dirty="0">
+                <a:latin typeface="メイリオ" panose="020B0604030504040204" pitchFamily="50" charset="-128"/>
+                <a:ea typeface="メイリオ" panose="020B0604030504040204" pitchFamily="50" charset="-128"/>
+              </a:rPr>
+              <a:t>[1] Precedence Research, AI Data Center GPU Market Size Report, 2024.</a:t>
+            </a:r>
+          </a:p>
+          <a:p>
+            <a:r>
+              <a:rPr lang="en-US" altLang="ja-JP" sz="1200" dirty="0">
+                <a:latin typeface="メイリオ" panose="020B0604030504040204" pitchFamily="50" charset="-128"/>
+                <a:ea typeface="メイリオ" panose="020B0604030504040204" pitchFamily="50" charset="-128"/>
+              </a:rPr>
+              <a:t>[2] PC Gamer, AI demand is keeping GPU and memory prices high, 2024</a:t>
+            </a:r>
+            <a:r>
+              <a:rPr lang="en-US" altLang="ja-JP" dirty="0"/>
+              <a:t>.</a:t>
+            </a:r>
+            <a:endParaRPr kumimoji="1" lang="ja-JP" altLang="en-US" dirty="0"/>
+          </a:p>
+        </p:txBody>
+      </p:sp>
     </p:spTree>
     <p:extLst>
       <p:ext uri="{BB962C8B-B14F-4D97-AF65-F5344CB8AC3E}">
@@ -11553,75 +13549,12 @@
           <a:chExt cx="0" cy="0"/>
         </a:xfrm>
       </p:grpSpPr>
-      <p:sp>
-        <p:nvSpPr>
-          <p:cNvPr id="2" name="タイトル 1">
-            <a:extLst>
-              <a:ext uri="{FF2B5EF4-FFF2-40B4-BE49-F238E27FC236}">
-                <a16:creationId xmlns:a16="http://schemas.microsoft.com/office/drawing/2014/main" id="{FDD48FF9-7E2F-CD35-8A02-3A48287A73E0}"/>
-              </a:ext>
-            </a:extLst>
-          </p:cNvPr>
-          <p:cNvSpPr>
-            <a:spLocks noGrp="1"/>
-          </p:cNvSpPr>
-          <p:nvPr>
-            <p:ph type="title"/>
-          </p:nvPr>
-        </p:nvSpPr>
-        <p:spPr/>
-        <p:txBody>
-          <a:bodyPr/>
-          <a:lstStyle/>
-          <a:p>
-            <a:r>
-              <a:rPr lang="en-US" altLang="ja-JP" dirty="0"/>
-              <a:t>“ACP”</a:t>
-            </a:r>
-            <a:r>
-              <a:rPr lang="ja-JP" altLang="en-US" dirty="0"/>
-              <a:t>とは</a:t>
-            </a:r>
-            <a:endParaRPr kumimoji="1" lang="ja-JP" altLang="en-US" dirty="0"/>
-          </a:p>
-        </p:txBody>
-      </p:sp>
-      <p:sp>
-        <p:nvSpPr>
-          <p:cNvPr id="4" name="スライド番号プレースホルダー 3">
-            <a:extLst>
-              <a:ext uri="{FF2B5EF4-FFF2-40B4-BE49-F238E27FC236}">
-                <a16:creationId xmlns:a16="http://schemas.microsoft.com/office/drawing/2014/main" id="{E3DC26F3-E565-9B46-EB01-7031E3D203E8}"/>
-              </a:ext>
-            </a:extLst>
-          </p:cNvPr>
-          <p:cNvSpPr>
-            <a:spLocks noGrp="1"/>
-          </p:cNvSpPr>
-          <p:nvPr>
-            <p:ph type="sldNum" sz="quarter" idx="12"/>
-          </p:nvPr>
-        </p:nvSpPr>
-        <p:spPr/>
-        <p:txBody>
-          <a:bodyPr/>
-          <a:lstStyle/>
-          <a:p>
-            <a:fld id="{8D1BC46D-89B1-41A3-BBA1-F56BEABD0A90}" type="slidenum">
-              <a:rPr lang="ja-JP" altLang="en-US" smtClean="0"/>
-              <a:pPr/>
-              <a:t>3</a:t>
-            </a:fld>
-            <a:endParaRPr lang="ja-JP" altLang="en-US" dirty="0"/>
-          </a:p>
-        </p:txBody>
-      </p:sp>
       <p:pic>
         <p:nvPicPr>
-          <p:cNvPr id="5" name="Picture 15" descr="家の無料アイコン | 無料アイコン素材｜ICON BOX｜商用フリーアイコンがダウンロードできます">
-            <a:extLst>
-              <a:ext uri="{FF2B5EF4-FFF2-40B4-BE49-F238E27FC236}">
-                <a16:creationId xmlns:a16="http://schemas.microsoft.com/office/drawing/2014/main" id="{C729A1AC-CAA9-479A-C132-5F707810A468}"/>
+          <p:cNvPr id="34" name="Picture 15" descr="家の無料アイコン | 無料アイコン素材｜ICON BOX｜商用フリーアイコンがダウンロードできます">
+            <a:extLst>
+              <a:ext uri="{FF2B5EF4-FFF2-40B4-BE49-F238E27FC236}">
+                <a16:creationId xmlns:a16="http://schemas.microsoft.com/office/drawing/2014/main" id="{2B29FFCF-8386-AA35-22C1-E50214FCB65D}"/>
               </a:ext>
             </a:extLst>
           </p:cNvPr>
@@ -11655,8 +13588,8 @@
         </p:blipFill>
         <p:spPr bwMode="auto">
           <a:xfrm>
-            <a:off x="9210773" y="4365610"/>
-            <a:ext cx="2143027" cy="2143027"/>
+            <a:off x="9173973" y="4109653"/>
+            <a:ext cx="2494612" cy="2494612"/>
           </a:xfrm>
           <a:prstGeom prst="rect">
             <a:avLst/>
@@ -11670,10 +13603,10 @@
       </p:pic>
       <p:pic>
         <p:nvPicPr>
-          <p:cNvPr id="6" name="Picture 15" descr="家の無料アイコン | 無料アイコン素材｜ICON BOX｜商用フリーアイコンがダウンロードできます">
-            <a:extLst>
-              <a:ext uri="{FF2B5EF4-FFF2-40B4-BE49-F238E27FC236}">
-                <a16:creationId xmlns:a16="http://schemas.microsoft.com/office/drawing/2014/main" id="{4A52564B-15FD-87B0-9AAF-C8FDF3EAEEFC}"/>
+          <p:cNvPr id="33" name="Picture 15" descr="家の無料アイコン | 無料アイコン素材｜ICON BOX｜商用フリーアイコンがダウンロードできます">
+            <a:extLst>
+              <a:ext uri="{FF2B5EF4-FFF2-40B4-BE49-F238E27FC236}">
+                <a16:creationId xmlns:a16="http://schemas.microsoft.com/office/drawing/2014/main" id="{6A103513-EEFA-701C-7883-247C6C341B04}"/>
               </a:ext>
             </a:extLst>
           </p:cNvPr>
@@ -11707,8 +13640,8 @@
         </p:blipFill>
         <p:spPr bwMode="auto">
           <a:xfrm>
-            <a:off x="6493557" y="4352898"/>
-            <a:ext cx="2143027" cy="2143027"/>
+            <a:off x="6423512" y="4083453"/>
+            <a:ext cx="2494612" cy="2494612"/>
           </a:xfrm>
           <a:prstGeom prst="rect">
             <a:avLst/>
@@ -11720,12 +13653,75 @@
           </a:solidFill>
         </p:spPr>
       </p:pic>
+      <p:sp>
+        <p:nvSpPr>
+          <p:cNvPr id="2" name="タイトル 1">
+            <a:extLst>
+              <a:ext uri="{FF2B5EF4-FFF2-40B4-BE49-F238E27FC236}">
+                <a16:creationId xmlns:a16="http://schemas.microsoft.com/office/drawing/2014/main" id="{FDD48FF9-7E2F-CD35-8A02-3A48287A73E0}"/>
+              </a:ext>
+            </a:extLst>
+          </p:cNvPr>
+          <p:cNvSpPr>
+            <a:spLocks noGrp="1"/>
+          </p:cNvSpPr>
+          <p:nvPr>
+            <p:ph type="title"/>
+          </p:nvPr>
+        </p:nvSpPr>
+        <p:spPr/>
+        <p:txBody>
+          <a:bodyPr/>
+          <a:lstStyle/>
+          <a:p>
+            <a:r>
+              <a:rPr lang="en-US" altLang="ja-JP" dirty="0"/>
+              <a:t>“ACP”</a:t>
+            </a:r>
+            <a:r>
+              <a:rPr lang="ja-JP" altLang="en-US" dirty="0"/>
+              <a:t>とは</a:t>
+            </a:r>
+            <a:endParaRPr kumimoji="1" lang="ja-JP" altLang="en-US" dirty="0"/>
+          </a:p>
+        </p:txBody>
+      </p:sp>
+      <p:sp>
+        <p:nvSpPr>
+          <p:cNvPr id="4" name="スライド番号プレースホルダー 3">
+            <a:extLst>
+              <a:ext uri="{FF2B5EF4-FFF2-40B4-BE49-F238E27FC236}">
+                <a16:creationId xmlns:a16="http://schemas.microsoft.com/office/drawing/2014/main" id="{E3DC26F3-E565-9B46-EB01-7031E3D203E8}"/>
+              </a:ext>
+            </a:extLst>
+          </p:cNvPr>
+          <p:cNvSpPr>
+            <a:spLocks noGrp="1"/>
+          </p:cNvSpPr>
+          <p:nvPr>
+            <p:ph type="sldNum" sz="quarter" idx="12"/>
+          </p:nvPr>
+        </p:nvSpPr>
+        <p:spPr/>
+        <p:txBody>
+          <a:bodyPr/>
+          <a:lstStyle/>
+          <a:p>
+            <a:fld id="{8D1BC46D-89B1-41A3-BBA1-F56BEABD0A90}" type="slidenum">
+              <a:rPr lang="ja-JP" altLang="en-US" smtClean="0"/>
+              <a:pPr/>
+              <a:t>3</a:t>
+            </a:fld>
+            <a:endParaRPr lang="ja-JP" altLang="en-US" dirty="0"/>
+          </a:p>
+        </p:txBody>
+      </p:sp>
       <p:pic>
         <p:nvPicPr>
-          <p:cNvPr id="7" name="Picture 15" descr="家の無料アイコン | 無料アイコン素材｜ICON BOX｜商用フリーアイコンがダウンロードできます">
-            <a:extLst>
-              <a:ext uri="{FF2B5EF4-FFF2-40B4-BE49-F238E27FC236}">
-                <a16:creationId xmlns:a16="http://schemas.microsoft.com/office/drawing/2014/main" id="{0E411378-0E44-0B61-A5CD-848700276D4B}"/>
+          <p:cNvPr id="8" name="Picture 15" descr="家の無料アイコン | 無料アイコン素材｜ICON BOX｜商用フリーアイコンがダウンロードできます">
+            <a:extLst>
+              <a:ext uri="{FF2B5EF4-FFF2-40B4-BE49-F238E27FC236}">
+                <a16:creationId xmlns:a16="http://schemas.microsoft.com/office/drawing/2014/main" id="{F49DBF96-6781-466B-1809-F66067C18717}"/>
               </a:ext>
             </a:extLst>
           </p:cNvPr>
@@ -11759,60 +13755,8 @@
         </p:blipFill>
         <p:spPr bwMode="auto">
           <a:xfrm>
-            <a:off x="512326" y="4222812"/>
-            <a:ext cx="2143027" cy="2143027"/>
-          </a:xfrm>
-          <a:prstGeom prst="rect">
-            <a:avLst/>
-          </a:prstGeom>
-          <a:solidFill>
-            <a:schemeClr val="bg1">
-              <a:alpha val="0"/>
-            </a:schemeClr>
-          </a:solidFill>
-        </p:spPr>
-      </p:pic>
-      <p:pic>
-        <p:nvPicPr>
-          <p:cNvPr id="8" name="Picture 15" descr="家の無料アイコン | 無料アイコン素材｜ICON BOX｜商用フリーアイコンがダウンロードできます">
-            <a:extLst>
-              <a:ext uri="{FF2B5EF4-FFF2-40B4-BE49-F238E27FC236}">
-                <a16:creationId xmlns:a16="http://schemas.microsoft.com/office/drawing/2014/main" id="{F49DBF96-6781-466B-1809-F66067C18717}"/>
-              </a:ext>
-            </a:extLst>
-          </p:cNvPr>
-          <p:cNvPicPr>
-            <a:picLocks noChangeAspect="1" noChangeArrowheads="1"/>
-          </p:cNvPicPr>
-          <p:nvPr/>
-        </p:nvPicPr>
-        <p:blipFill>
-          <a:blip r:embed="rId2">
-            <a:lum bright="70000" contrast="-70000"/>
-            <a:extLst>
-              <a:ext uri="{BEBA8EAE-BF5A-486C-A8C5-ECC9F3942E4B}">
-                <a14:imgProps xmlns:a14="http://schemas.microsoft.com/office/drawing/2010/main">
-                  <a14:imgLayer r:embed="rId3">
-                    <a14:imgEffect>
-                      <a14:saturation sat="40000"/>
-                    </a14:imgEffect>
-                  </a14:imgLayer>
-                </a14:imgProps>
-              </a:ext>
-              <a:ext uri="{28A0092B-C50C-407E-A947-70E740481C1C}">
-                <a14:useLocalDpi xmlns:a14="http://schemas.microsoft.com/office/drawing/2010/main" val="0"/>
-              </a:ext>
-            </a:extLst>
-          </a:blip>
-          <a:srcRect/>
-          <a:stretch>
-            <a:fillRect/>
-          </a:stretch>
-        </p:blipFill>
-        <p:spPr bwMode="auto">
-          <a:xfrm>
-            <a:off x="3583791" y="4328880"/>
-            <a:ext cx="2143027" cy="2143027"/>
+            <a:off x="3502388" y="4083453"/>
+            <a:ext cx="2494612" cy="2494612"/>
           </a:xfrm>
           <a:prstGeom prst="rect">
             <a:avLst/>
@@ -12302,7 +14246,7 @@
         <p:spPr>
           <a:xfrm>
             <a:off x="661036" y="2702768"/>
-            <a:ext cx="2404391" cy="1077218"/>
+            <a:ext cx="2404391" cy="954107"/>
           </a:xfrm>
           <a:prstGeom prst="rect">
             <a:avLst/>
@@ -12317,15 +14261,24 @@
           <a:p>
             <a:pPr algn="ctr"/>
             <a:r>
-              <a:rPr kumimoji="1" lang="ja-JP" altLang="en-US" sz="3200" dirty="0"/>
+              <a:rPr kumimoji="1" lang="ja-JP" altLang="en-US" sz="2800" dirty="0">
+                <a:latin typeface="メイリオ" panose="020B0604030504040204" pitchFamily="50" charset="-128"/>
+                <a:ea typeface="メイリオ" panose="020B0604030504040204" pitchFamily="50" charset="-128"/>
+              </a:rPr>
               <a:t>計算資源が</a:t>
             </a:r>
-            <a:endParaRPr kumimoji="1" lang="en-US" altLang="ja-JP" sz="3200" dirty="0"/>
+            <a:endParaRPr kumimoji="1" lang="en-US" altLang="ja-JP" sz="2800" dirty="0">
+              <a:latin typeface="メイリオ" panose="020B0604030504040204" pitchFamily="50" charset="-128"/>
+              <a:ea typeface="メイリオ" panose="020B0604030504040204" pitchFamily="50" charset="-128"/>
+            </a:endParaRPr>
           </a:p>
           <a:p>
             <a:pPr algn="ctr"/>
             <a:r>
-              <a:rPr kumimoji="1" lang="ja-JP" altLang="en-US" sz="3200" dirty="0"/>
+              <a:rPr kumimoji="1" lang="ja-JP" altLang="en-US" sz="2800" dirty="0">
+                <a:latin typeface="メイリオ" panose="020B0604030504040204" pitchFamily="50" charset="-128"/>
+                <a:ea typeface="メイリオ" panose="020B0604030504040204" pitchFamily="50" charset="-128"/>
+              </a:rPr>
               <a:t>不足</a:t>
             </a:r>
           </a:p>
@@ -12346,7 +14299,7 @@
         <p:spPr>
           <a:xfrm>
             <a:off x="3755092" y="2810083"/>
-            <a:ext cx="2393650" cy="1077218"/>
+            <a:ext cx="2393650" cy="954107"/>
           </a:xfrm>
           <a:prstGeom prst="rect">
             <a:avLst/>
@@ -12361,15 +14314,24 @@
           <a:p>
             <a:pPr algn="ctr"/>
             <a:r>
-              <a:rPr kumimoji="1" lang="ja-JP" altLang="en-US" sz="3200" dirty="0"/>
+              <a:rPr kumimoji="1" lang="ja-JP" altLang="en-US" sz="2800" dirty="0">
+                <a:latin typeface="メイリオ" panose="020B0604030504040204" pitchFamily="50" charset="-128"/>
+                <a:ea typeface="メイリオ" panose="020B0604030504040204" pitchFamily="50" charset="-128"/>
+              </a:rPr>
               <a:t>計算資源が</a:t>
             </a:r>
-            <a:endParaRPr kumimoji="1" lang="en-US" altLang="ja-JP" sz="3200" dirty="0"/>
+            <a:endParaRPr kumimoji="1" lang="en-US" altLang="ja-JP" sz="2800" dirty="0">
+              <a:latin typeface="メイリオ" panose="020B0604030504040204" pitchFamily="50" charset="-128"/>
+              <a:ea typeface="メイリオ" panose="020B0604030504040204" pitchFamily="50" charset="-128"/>
+            </a:endParaRPr>
           </a:p>
           <a:p>
             <a:pPr algn="ctr"/>
             <a:r>
-              <a:rPr kumimoji="1" lang="ja-JP" altLang="en-US" sz="3200" dirty="0"/>
+              <a:rPr kumimoji="1" lang="ja-JP" altLang="en-US" sz="2800" dirty="0">
+                <a:latin typeface="メイリオ" panose="020B0604030504040204" pitchFamily="50" charset="-128"/>
+                <a:ea typeface="メイリオ" panose="020B0604030504040204" pitchFamily="50" charset="-128"/>
+              </a:rPr>
               <a:t>余剰</a:t>
             </a:r>
           </a:p>
@@ -12491,7 +14453,7 @@
         </p:blipFill>
         <p:spPr bwMode="auto">
           <a:xfrm>
-            <a:off x="4282652" y="4665380"/>
+            <a:off x="8311055" y="3142805"/>
             <a:ext cx="886685" cy="886685"/>
           </a:xfrm>
           <a:prstGeom prst="rect">
@@ -12538,7 +14500,7 @@
         </p:blipFill>
         <p:spPr bwMode="auto">
           <a:xfrm>
-            <a:off x="3677482" y="5400474"/>
+            <a:off x="3898693" y="5346838"/>
             <a:ext cx="886685" cy="886685"/>
           </a:xfrm>
           <a:prstGeom prst="rect">
@@ -12586,7 +14548,7 @@
         </p:blipFill>
         <p:spPr bwMode="auto">
           <a:xfrm>
-            <a:off x="4794806" y="5400394"/>
+            <a:off x="4659392" y="5356959"/>
             <a:ext cx="886685" cy="886685"/>
           </a:xfrm>
           <a:prstGeom prst="rect">
@@ -12974,6 +14936,152 @@
           </a:p>
         </p:txBody>
       </p:sp>
+      <p:pic>
+        <p:nvPicPr>
+          <p:cNvPr id="32" name="Picture 15" descr="家の無料アイコン | 無料アイコン素材｜ICON BOX｜商用フリーアイコンがダウンロードできます">
+            <a:extLst>
+              <a:ext uri="{FF2B5EF4-FFF2-40B4-BE49-F238E27FC236}">
+                <a16:creationId xmlns:a16="http://schemas.microsoft.com/office/drawing/2014/main" id="{5AD94068-971B-6FE1-45A4-E3C09BFA739E}"/>
+              </a:ext>
+            </a:extLst>
+          </p:cNvPr>
+          <p:cNvPicPr>
+            <a:picLocks noChangeAspect="1" noChangeArrowheads="1"/>
+          </p:cNvPicPr>
+          <p:nvPr/>
+        </p:nvPicPr>
+        <p:blipFill>
+          <a:blip r:embed="rId2">
+            <a:lum bright="70000" contrast="-70000"/>
+            <a:extLst>
+              <a:ext uri="{BEBA8EAE-BF5A-486C-A8C5-ECC9F3942E4B}">
+                <a14:imgProps xmlns:a14="http://schemas.microsoft.com/office/drawing/2010/main">
+                  <a14:imgLayer r:embed="rId3">
+                    <a14:imgEffect>
+                      <a14:saturation sat="40000"/>
+                    </a14:imgEffect>
+                  </a14:imgLayer>
+                </a14:imgProps>
+              </a:ext>
+              <a:ext uri="{28A0092B-C50C-407E-A947-70E740481C1C}">
+                <a14:useLocalDpi xmlns:a14="http://schemas.microsoft.com/office/drawing/2010/main" val="0"/>
+              </a:ext>
+            </a:extLst>
+          </a:blip>
+          <a:srcRect/>
+          <a:stretch>
+            <a:fillRect/>
+          </a:stretch>
+        </p:blipFill>
+        <p:spPr bwMode="auto">
+          <a:xfrm>
+            <a:off x="405897" y="4083453"/>
+            <a:ext cx="2494612" cy="2494612"/>
+          </a:xfrm>
+          <a:prstGeom prst="rect">
+            <a:avLst/>
+          </a:prstGeom>
+          <a:solidFill>
+            <a:schemeClr val="bg1">
+              <a:alpha val="0"/>
+            </a:schemeClr>
+          </a:solidFill>
+        </p:spPr>
+      </p:pic>
+      <p:pic>
+        <p:nvPicPr>
+          <p:cNvPr id="35" name="Picture 10" descr="「サーバー 」の無料フリー素材 | イラスト・アイコンのフリー素材なら「フリーアイコンズ」">
+            <a:extLst>
+              <a:ext uri="{FF2B5EF4-FFF2-40B4-BE49-F238E27FC236}">
+                <a16:creationId xmlns:a16="http://schemas.microsoft.com/office/drawing/2014/main" id="{5201A704-56E6-842D-646B-042E096FEB95}"/>
+              </a:ext>
+            </a:extLst>
+          </p:cNvPr>
+          <p:cNvPicPr>
+            <a:picLocks noChangeAspect="1" noChangeArrowheads="1"/>
+          </p:cNvPicPr>
+          <p:nvPr/>
+        </p:nvPicPr>
+        <p:blipFill>
+          <a:blip r:embed="rId5">
+            <a:extLst>
+              <a:ext uri="{28A0092B-C50C-407E-A947-70E740481C1C}">
+                <a14:useLocalDpi xmlns:a14="http://schemas.microsoft.com/office/drawing/2010/main" val="0"/>
+              </a:ext>
+            </a:extLst>
+          </a:blip>
+          <a:srcRect/>
+          <a:stretch>
+            <a:fillRect/>
+          </a:stretch>
+        </p:blipFill>
+        <p:spPr bwMode="auto">
+          <a:xfrm>
+            <a:off x="4003874" y="4558953"/>
+            <a:ext cx="886685" cy="886685"/>
+          </a:xfrm>
+          <a:prstGeom prst="rect">
+            <a:avLst/>
+          </a:prstGeom>
+          <a:noFill/>
+          <a:extLst>
+            <a:ext uri="{909E8E84-426E-40DD-AFC4-6F175D3DCCD1}">
+              <a14:hiddenFill xmlns:a14="http://schemas.microsoft.com/office/drawing/2010/main">
+                <a:solidFill>
+                  <a:srgbClr val="FFFFFF"/>
+                </a:solidFill>
+              </a14:hiddenFill>
+            </a:ext>
+          </a:extLst>
+        </p:spPr>
+      </p:pic>
+      <p:pic>
+        <p:nvPicPr>
+          <p:cNvPr id="36" name="Picture 10" descr="「サーバー 」の無料フリー素材 | イラスト・アイコンのフリー素材なら「フリーアイコンズ」">
+            <a:extLst>
+              <a:ext uri="{FF2B5EF4-FFF2-40B4-BE49-F238E27FC236}">
+                <a16:creationId xmlns:a16="http://schemas.microsoft.com/office/drawing/2014/main" id="{A9811F2D-DFB3-A803-17EA-14C8D1790CD1}"/>
+              </a:ext>
+            </a:extLst>
+          </p:cNvPr>
+          <p:cNvPicPr>
+            <a:picLocks noChangeAspect="1" noChangeArrowheads="1"/>
+          </p:cNvPicPr>
+          <p:nvPr/>
+        </p:nvPicPr>
+        <p:blipFill>
+          <a:blip r:embed="rId5">
+            <a:extLst>
+              <a:ext uri="{28A0092B-C50C-407E-A947-70E740481C1C}">
+                <a14:useLocalDpi xmlns:a14="http://schemas.microsoft.com/office/drawing/2010/main" val="0"/>
+              </a:ext>
+            </a:extLst>
+          </a:blip>
+          <a:srcRect/>
+          <a:stretch>
+            <a:fillRect/>
+          </a:stretch>
+        </p:blipFill>
+        <p:spPr bwMode="auto">
+          <a:xfrm>
+            <a:off x="4544461" y="4584233"/>
+            <a:ext cx="886685" cy="886685"/>
+          </a:xfrm>
+          <a:prstGeom prst="rect">
+            <a:avLst/>
+          </a:prstGeom>
+          <a:noFill/>
+          <a:extLst>
+            <a:ext uri="{909E8E84-426E-40DD-AFC4-6F175D3DCCD1}">
+              <a14:hiddenFill xmlns:a14="http://schemas.microsoft.com/office/drawing/2010/main">
+                <a:solidFill>
+                  <a:srgbClr val="FFFFFF"/>
+                </a:solidFill>
+              </a14:hiddenFill>
+            </a:ext>
+          </a:extLst>
+        </p:spPr>
+      </p:pic>
     </p:spTree>
     <p:extLst>
       <p:ext uri="{BB962C8B-B14F-4D97-AF65-F5344CB8AC3E}">
@@ -13084,7 +15192,7 @@
         </p:nvSpPr>
         <p:spPr>
           <a:xfrm>
-            <a:off x="1879751" y="5538422"/>
+            <a:off x="1064303" y="5869739"/>
             <a:ext cx="10515600" cy="631350"/>
           </a:xfrm>
         </p:spPr>
@@ -13098,10 +15206,42 @@
               <a:buNone/>
             </a:pPr>
             <a:r>
-              <a:rPr lang="ja-JP" altLang="en-US" sz="3600" dirty="0"/>
-              <a:t>貸し手が参加しやすい制度設計が必要</a:t>
-            </a:r>
-            <a:endParaRPr kumimoji="1" lang="en-US" altLang="ja-JP" sz="3600" dirty="0"/>
+              <a:rPr kumimoji="1" lang="ja-JP" altLang="en-US" b="1" dirty="0">
+                <a:solidFill>
+                  <a:schemeClr val="accent3">
+                    <a:lumMod val="75000"/>
+                  </a:schemeClr>
+                </a:solidFill>
+              </a:rPr>
+              <a:t>高性能な</a:t>
+            </a:r>
+            <a:r>
+              <a:rPr kumimoji="1" lang="en-US" altLang="ja-JP" b="1" dirty="0">
+                <a:solidFill>
+                  <a:schemeClr val="accent3">
+                    <a:lumMod val="75000"/>
+                  </a:schemeClr>
+                </a:solidFill>
+              </a:rPr>
+              <a:t>GPU</a:t>
+            </a:r>
+            <a:r>
+              <a:rPr kumimoji="1" lang="ja-JP" altLang="en-US" b="1" dirty="0">
+                <a:solidFill>
+                  <a:schemeClr val="accent3">
+                    <a:lumMod val="75000"/>
+                  </a:schemeClr>
+                </a:solidFill>
+              </a:rPr>
+              <a:t>を所有するユーザも得をするシステムを作る</a:t>
+            </a:r>
+            <a:endParaRPr kumimoji="1" lang="en-US" altLang="ja-JP" b="1" dirty="0">
+              <a:solidFill>
+                <a:schemeClr val="accent3">
+                  <a:lumMod val="75000"/>
+                </a:schemeClr>
+              </a:solidFill>
+            </a:endParaRPr>
           </a:p>
           <a:p>
             <a:pPr marL="0" indent="0">
@@ -13125,8 +15265,8 @@
         </p:nvSpPr>
         <p:spPr>
           <a:xfrm>
-            <a:off x="1743812" y="1373204"/>
-            <a:ext cx="8604069" cy="923330"/>
+            <a:off x="275963" y="791150"/>
+            <a:ext cx="10724578" cy="4862870"/>
           </a:xfrm>
           <a:prstGeom prst="rect">
             <a:avLst/>
@@ -13139,142 +15279,52 @@
           </a:bodyPr>
           <a:lstStyle/>
           <a:p>
-            <a:r>
-              <a:rPr lang="ja-JP" altLang="en-US" sz="3600" dirty="0"/>
-              <a:t>目的</a:t>
-            </a:r>
-            <a:r>
-              <a:rPr lang="ja-JP" altLang="en-US" sz="3600" b="1" dirty="0"/>
-              <a:t>：</a:t>
-            </a:r>
-            <a:r>
-              <a:rPr lang="ja-JP" altLang="en-US" sz="3600" u="sng" dirty="0"/>
-              <a:t>「</a:t>
-            </a:r>
-            <a:r>
-              <a:rPr lang="en-US" altLang="ja-JP" sz="3600" u="sng" dirty="0"/>
-              <a:t>ACP</a:t>
-            </a:r>
-            <a:r>
-              <a:rPr lang="ja-JP" altLang="en-US" sz="3600" u="sng" dirty="0"/>
-              <a:t>」の</a:t>
-            </a:r>
-            <a:r>
-              <a:rPr lang="ja-JP" altLang="en-US" sz="3600" b="1" u="sng" dirty="0">
+            <a:pPr>
+              <a:lnSpc>
+                <a:spcPct val="200000"/>
+              </a:lnSpc>
+            </a:pPr>
+            <a:r>
+              <a:rPr lang="ja-JP" altLang="en-US" sz="2800" b="1" dirty="0">
                 <a:solidFill>
                   <a:schemeClr val="accent3">
                     <a:lumMod val="75000"/>
                   </a:schemeClr>
                 </a:solidFill>
               </a:rPr>
-              <a:t>普及</a:t>
-            </a:r>
-            <a:r>
-              <a:rPr lang="ja-JP" altLang="en-US" sz="3600" u="sng" dirty="0"/>
-              <a:t>と</a:t>
-            </a:r>
-            <a:r>
-              <a:rPr lang="ja-JP" altLang="en-US" sz="3600" b="1" u="sng" dirty="0">
+              <a:t>目的：</a:t>
+            </a:r>
+            <a:r>
+              <a:rPr lang="ja-JP" altLang="en-US" sz="2800" b="1" u="sng" dirty="0">
                 <a:solidFill>
                   <a:schemeClr val="accent3">
                     <a:lumMod val="75000"/>
                   </a:schemeClr>
                 </a:solidFill>
               </a:rPr>
-              <a:t>持続的</a:t>
-            </a:r>
-            <a:r>
-              <a:rPr lang="ja-JP" altLang="en-US" sz="3600" u="sng" dirty="0"/>
-              <a:t>な運用</a:t>
-            </a:r>
-          </a:p>
-          <a:p>
-            <a:endParaRPr kumimoji="1" lang="ja-JP" altLang="en-US" dirty="0"/>
-          </a:p>
-        </p:txBody>
-      </p:sp>
-      <p:sp>
-        <p:nvSpPr>
-          <p:cNvPr id="42" name="テキスト ボックス 41">
-            <a:extLst>
-              <a:ext uri="{FF2B5EF4-FFF2-40B4-BE49-F238E27FC236}">
-                <a16:creationId xmlns:a16="http://schemas.microsoft.com/office/drawing/2014/main" id="{94A8698C-1A40-2AA7-68F5-7525FD1852D4}"/>
-              </a:ext>
-            </a:extLst>
-          </p:cNvPr>
-          <p:cNvSpPr txBox="1"/>
-          <p:nvPr/>
-        </p:nvSpPr>
-        <p:spPr>
-          <a:xfrm>
-            <a:off x="-182006" y="2077048"/>
-            <a:ext cx="11053468" cy="1415772"/>
-          </a:xfrm>
-          <a:prstGeom prst="rect">
-            <a:avLst/>
-          </a:prstGeom>
-          <a:noFill/>
-        </p:spPr>
-        <p:txBody>
-          <a:bodyPr wrap="square" rtlCol="0">
-            <a:spAutoFit/>
-          </a:bodyPr>
-          <a:lstStyle/>
-          <a:p>
-            <a:pPr algn="ctr"/>
-            <a:r>
-              <a:rPr kumimoji="1" lang="ja-JP" altLang="en-US" sz="3600" dirty="0"/>
-              <a:t>課題</a:t>
-            </a:r>
-            <a:r>
-              <a:rPr kumimoji="1" lang="ja-JP" altLang="en-US" sz="3200" dirty="0"/>
-              <a:t>：</a:t>
-            </a:r>
-            <a:r>
-              <a:rPr lang="en-US" altLang="ja-JP" sz="3200" dirty="0"/>
-              <a:t>ACP</a:t>
-            </a:r>
-            <a:r>
-              <a:rPr lang="ja-JP" altLang="en-US" sz="3200" dirty="0"/>
-              <a:t>には</a:t>
-            </a:r>
-            <a:r>
-              <a:rPr kumimoji="1" lang="ja-JP" altLang="en-US" sz="3200" b="1" u="sng" dirty="0">
+              <a:t>「</a:t>
+            </a:r>
+            <a:r>
+              <a:rPr lang="en-US" altLang="ja-JP" sz="2800" b="1" u="sng" dirty="0">
                 <a:solidFill>
                   <a:schemeClr val="accent3">
                     <a:lumMod val="75000"/>
                   </a:schemeClr>
                 </a:solidFill>
               </a:rPr>
-              <a:t>貸し手</a:t>
-            </a:r>
-            <a:r>
-              <a:rPr kumimoji="1" lang="ja-JP" altLang="en-US" sz="3200" dirty="0"/>
-              <a:t>の存在が不可欠</a:t>
-            </a:r>
-            <a:endParaRPr kumimoji="1" lang="en-US" altLang="ja-JP" sz="3200" dirty="0"/>
-          </a:p>
-          <a:p>
-            <a:pPr algn="ctr"/>
-            <a:r>
-              <a:rPr lang="ja-JP" altLang="en-US" sz="3200" dirty="0"/>
-              <a:t>　　→</a:t>
-            </a:r>
-            <a:r>
-              <a:rPr kumimoji="1" lang="ja-JP" altLang="en-US" sz="3200" dirty="0"/>
-              <a:t>共有するだけでは貸し手に対する</a:t>
-            </a:r>
-            <a:r>
-              <a:rPr kumimoji="1" lang="ja-JP" altLang="en-US" sz="3200" b="1" u="sng" dirty="0">
+              <a:t>ACP</a:t>
+            </a:r>
+            <a:r>
+              <a:rPr lang="ja-JP" altLang="en-US" sz="2800" b="1" u="sng" dirty="0">
                 <a:solidFill>
                   <a:schemeClr val="accent3">
                     <a:lumMod val="75000"/>
                   </a:schemeClr>
                 </a:solidFill>
               </a:rPr>
-              <a:t>メリットが少ない</a:t>
-            </a:r>
-            <a:endParaRPr kumimoji="1" lang="en-US" altLang="ja-JP" sz="3200" b="1" u="sng" dirty="0">
+              <a:t>」の普及と持続的な運用</a:t>
+            </a:r>
+            <a:endParaRPr lang="en-US" altLang="ja-JP" sz="2800" b="1" u="sng" dirty="0">
               <a:solidFill>
                 <a:schemeClr val="accent3">
                   <a:lumMod val="75000"/>
@@ -13283,16 +15333,178 @@
             </a:endParaRPr>
           </a:p>
           <a:p>
+            <a:pPr>
+              <a:lnSpc>
+                <a:spcPct val="200000"/>
+              </a:lnSpc>
+            </a:pPr>
+            <a:r>
+              <a:rPr lang="en-US" altLang="ja-JP" sz="2000" dirty="0"/>
+              <a:t>GPU</a:t>
+            </a:r>
+            <a:r>
+              <a:rPr lang="ja-JP" altLang="en-US" sz="2000" dirty="0"/>
+              <a:t>を保有するユーザー同士の</a:t>
+            </a:r>
+            <a:r>
+              <a:rPr lang="ja-JP" altLang="en-US" sz="2000" b="1" dirty="0"/>
+              <a:t>新しい形態の共有サービス</a:t>
+            </a:r>
+            <a:r>
+              <a:rPr lang="ja-JP" altLang="en-US" sz="2000" dirty="0"/>
+              <a:t>において、普及・</a:t>
+            </a:r>
+            <a:endParaRPr lang="en-US" altLang="ja-JP" sz="2000" dirty="0"/>
+          </a:p>
+          <a:p>
+            <a:pPr>
+              <a:lnSpc>
+                <a:spcPct val="200000"/>
+              </a:lnSpc>
+            </a:pPr>
+            <a:r>
+              <a:rPr lang="ja-JP" altLang="en-US" sz="2000" dirty="0"/>
+              <a:t>持続が可能となる運用ルールを構築すること。</a:t>
+            </a:r>
+            <a:endParaRPr lang="en-US" altLang="ja-JP" sz="2000" dirty="0"/>
+          </a:p>
+          <a:p>
+            <a:pPr>
+              <a:lnSpc>
+                <a:spcPct val="200000"/>
+              </a:lnSpc>
+            </a:pPr>
+            <a:r>
+              <a:rPr lang="ja-JP" altLang="en-US" sz="2800" b="1" dirty="0">
+                <a:solidFill>
+                  <a:schemeClr val="accent3">
+                    <a:lumMod val="75000"/>
+                  </a:schemeClr>
+                </a:solidFill>
+              </a:rPr>
+              <a:t>課題：</a:t>
+            </a:r>
+            <a:r>
+              <a:rPr lang="ja-JP" altLang="en-US" sz="2800" b="1" u="sng" dirty="0">
+                <a:solidFill>
+                  <a:schemeClr val="accent3">
+                    <a:lumMod val="75000"/>
+                  </a:schemeClr>
+                </a:solidFill>
+              </a:rPr>
+              <a:t>高性能な</a:t>
+            </a:r>
+            <a:r>
+              <a:rPr lang="en-US" altLang="ja-JP" sz="2800" b="1" u="sng" dirty="0">
+                <a:solidFill>
+                  <a:schemeClr val="accent3">
+                    <a:lumMod val="75000"/>
+                  </a:schemeClr>
+                </a:solidFill>
+              </a:rPr>
+              <a:t>GPU</a:t>
+            </a:r>
+            <a:r>
+              <a:rPr lang="ja-JP" altLang="en-US" sz="2800" b="1" u="sng" dirty="0">
+                <a:solidFill>
+                  <a:schemeClr val="accent3">
+                    <a:lumMod val="75000"/>
+                  </a:schemeClr>
+                </a:solidFill>
+              </a:rPr>
+              <a:t>の貸し手が参加しにくい</a:t>
+            </a:r>
+            <a:endParaRPr lang="en-US" altLang="ja-JP" sz="2800" b="1" u="sng" dirty="0">
+              <a:solidFill>
+                <a:schemeClr val="accent3">
+                  <a:lumMod val="75000"/>
+                </a:schemeClr>
+              </a:solidFill>
+            </a:endParaRPr>
+          </a:p>
+          <a:p>
+            <a:pPr>
+              <a:lnSpc>
+                <a:spcPct val="200000"/>
+              </a:lnSpc>
+            </a:pPr>
+            <a:r>
+              <a:rPr lang="ja-JP" altLang="en-US" sz="2000" dirty="0"/>
+              <a:t>既存の商用シェアリングサービスは、事業者が資源を提供するため貸し手を必要としない。</a:t>
+            </a:r>
+            <a:endParaRPr lang="en-US" altLang="ja-JP" sz="2000" dirty="0"/>
+          </a:p>
+          <a:p>
+            <a:pPr>
+              <a:lnSpc>
+                <a:spcPct val="150000"/>
+              </a:lnSpc>
+            </a:pPr>
+            <a:r>
+              <a:rPr lang="en-US" altLang="ja-JP" sz="2000" dirty="0"/>
+              <a:t>ACP</a:t>
+            </a:r>
+            <a:r>
+              <a:rPr lang="ja-JP" altLang="en-US" sz="2000" dirty="0"/>
+              <a:t>は</a:t>
+            </a:r>
+            <a:r>
+              <a:rPr lang="ja-JP" altLang="en-US" sz="2000" b="1" dirty="0"/>
+              <a:t>学内ユーザ自身（借り手）</a:t>
+            </a:r>
+            <a:r>
+              <a:rPr lang="ja-JP" altLang="en-US" sz="2000" dirty="0"/>
+              <a:t>が</a:t>
+            </a:r>
+            <a:r>
+              <a:rPr lang="en-US" altLang="ja-JP" sz="2000" b="1" dirty="0"/>
+              <a:t>GPU</a:t>
+            </a:r>
+            <a:r>
+              <a:rPr lang="ja-JP" altLang="en-US" sz="2000" b="1" dirty="0"/>
+              <a:t>の貸し手</a:t>
+            </a:r>
+            <a:r>
+              <a:rPr lang="ja-JP" altLang="en-US" sz="2000" dirty="0"/>
+              <a:t>となるためシステムを成り立たせるには</a:t>
+            </a:r>
+            <a:endParaRPr lang="en-US" altLang="ja-JP" sz="2000" dirty="0"/>
+          </a:p>
+          <a:p>
+            <a:pPr>
+              <a:lnSpc>
+                <a:spcPct val="150000"/>
+              </a:lnSpc>
+            </a:pPr>
+            <a:r>
+              <a:rPr lang="ja-JP" altLang="en-US" sz="2000" dirty="0"/>
+              <a:t>貸し手の存在が不可欠だが、</a:t>
+            </a:r>
+            <a:r>
+              <a:rPr lang="ja-JP" altLang="en-US" sz="2000" b="1" dirty="0"/>
+              <a:t>高性能な</a:t>
+            </a:r>
+            <a:r>
+              <a:rPr lang="en-US" altLang="ja-JP" sz="2000" b="1" dirty="0"/>
+              <a:t>GPU</a:t>
+            </a:r>
+            <a:r>
+              <a:rPr lang="ja-JP" altLang="en-US" sz="2000" b="1" dirty="0"/>
+              <a:t>は人気　→</a:t>
+            </a:r>
+            <a:endParaRPr lang="ja-JP" altLang="en-US" sz="2000" b="1" u="sng" dirty="0"/>
+          </a:p>
+          <a:p>
             <a:endParaRPr kumimoji="1" lang="ja-JP" altLang="en-US" dirty="0"/>
           </a:p>
         </p:txBody>
       </p:sp>
       <p:sp>
         <p:nvSpPr>
-          <p:cNvPr id="43" name="四角形: 角を丸くする 42">
-            <a:extLst>
-              <a:ext uri="{FF2B5EF4-FFF2-40B4-BE49-F238E27FC236}">
-                <a16:creationId xmlns:a16="http://schemas.microsoft.com/office/drawing/2014/main" id="{7F07CBD8-4098-805B-DFF2-227230662982}"/>
+          <p:cNvPr id="46" name="乗算記号 45">
+            <a:extLst>
+              <a:ext uri="{FF2B5EF4-FFF2-40B4-BE49-F238E27FC236}">
+                <a16:creationId xmlns:a16="http://schemas.microsoft.com/office/drawing/2014/main" id="{EBF812E3-0011-B7C9-A7DA-0974DEE5299B}"/>
               </a:ext>
             </a:extLst>
           </p:cNvPr>
@@ -13301,18 +15513,16 @@
         </p:nvSpPr>
         <p:spPr>
           <a:xfrm>
-            <a:off x="5803035" y="3882991"/>
-            <a:ext cx="4176369" cy="1451464"/>
+            <a:off x="6480554" y="4733719"/>
+            <a:ext cx="618656" cy="711985"/>
           </a:xfrm>
-          <a:prstGeom prst="roundRect">
+          <a:prstGeom prst="mathMultiply">
             <a:avLst/>
           </a:prstGeom>
           <a:solidFill>
-            <a:schemeClr val="bg1">
-              <a:lumMod val="95000"/>
-            </a:schemeClr>
+            <a:srgbClr val="FF0000"/>
           </a:solidFill>
-          <a:ln w="63500">
+          <a:ln w="0">
             <a:solidFill>
               <a:srgbClr val="FF0000"/>
             </a:solidFill>
@@ -13339,175 +15549,7 @@
           <a:lstStyle/>
           <a:p>
             <a:pPr algn="ctr"/>
-            <a:endParaRPr kumimoji="1" lang="ja-JP" altLang="en-US"/>
-          </a:p>
-        </p:txBody>
-      </p:sp>
-      <p:sp>
-        <p:nvSpPr>
-          <p:cNvPr id="44" name="四角形: 角を丸くする 43">
-            <a:extLst>
-              <a:ext uri="{FF2B5EF4-FFF2-40B4-BE49-F238E27FC236}">
-                <a16:creationId xmlns:a16="http://schemas.microsoft.com/office/drawing/2014/main" id="{3ABCF111-B1C3-DF2D-8039-54A2823E6A99}"/>
-              </a:ext>
-            </a:extLst>
-          </p:cNvPr>
-          <p:cNvSpPr/>
-          <p:nvPr/>
-        </p:nvSpPr>
-        <p:spPr>
-          <a:xfrm>
-            <a:off x="1743812" y="3885429"/>
-            <a:ext cx="3711297" cy="1451464"/>
-          </a:xfrm>
-          <a:prstGeom prst="roundRect">
-            <a:avLst/>
-          </a:prstGeom>
-          <a:solidFill>
-            <a:schemeClr val="bg1">
-              <a:lumMod val="95000"/>
-            </a:schemeClr>
-          </a:solidFill>
-          <a:ln w="63500">
-            <a:solidFill>
-              <a:schemeClr val="bg2">
-                <a:lumMod val="75000"/>
-              </a:schemeClr>
-            </a:solidFill>
-          </a:ln>
-        </p:spPr>
-        <p:style>
-          <a:lnRef idx="2">
-            <a:schemeClr val="accent1">
-              <a:shade val="15000"/>
-            </a:schemeClr>
-          </a:lnRef>
-          <a:fillRef idx="1">
-            <a:schemeClr val="accent1"/>
-          </a:fillRef>
-          <a:effectRef idx="0">
-            <a:schemeClr val="accent1"/>
-          </a:effectRef>
-          <a:fontRef idx="minor">
-            <a:schemeClr val="lt1"/>
-          </a:fontRef>
-        </p:style>
-        <p:txBody>
-          <a:bodyPr rtlCol="0" anchor="ctr"/>
-          <a:lstStyle/>
-          <a:p>
-            <a:pPr algn="ctr"/>
-            <a:endParaRPr kumimoji="1" lang="ja-JP" altLang="en-US"/>
-          </a:p>
-        </p:txBody>
-      </p:sp>
-      <p:sp>
-        <p:nvSpPr>
-          <p:cNvPr id="45" name="楕円 44">
-            <a:extLst>
-              <a:ext uri="{FF2B5EF4-FFF2-40B4-BE49-F238E27FC236}">
-                <a16:creationId xmlns:a16="http://schemas.microsoft.com/office/drawing/2014/main" id="{7E99F142-395C-7C6A-B330-5ED1446BAB62}"/>
-              </a:ext>
-            </a:extLst>
-          </p:cNvPr>
-          <p:cNvSpPr/>
-          <p:nvPr/>
-        </p:nvSpPr>
-        <p:spPr>
-          <a:xfrm>
-            <a:off x="1556184" y="3679197"/>
-            <a:ext cx="647135" cy="692639"/>
-          </a:xfrm>
-          <a:prstGeom prst="ellipse">
-            <a:avLst/>
-          </a:prstGeom>
-          <a:solidFill>
-            <a:schemeClr val="bg1"/>
-          </a:solidFill>
-          <a:ln w="117475">
-            <a:solidFill>
-              <a:schemeClr val="bg2">
-                <a:lumMod val="75000"/>
-              </a:schemeClr>
-            </a:solidFill>
-          </a:ln>
-        </p:spPr>
-        <p:style>
-          <a:lnRef idx="2">
-            <a:schemeClr val="accent1">
-              <a:shade val="15000"/>
-            </a:schemeClr>
-          </a:lnRef>
-          <a:fillRef idx="1">
-            <a:schemeClr val="accent1"/>
-          </a:fillRef>
-          <a:effectRef idx="0">
-            <a:schemeClr val="accent1"/>
-          </a:effectRef>
-          <a:fontRef idx="minor">
-            <a:schemeClr val="lt1"/>
-          </a:fontRef>
-        </p:style>
-        <p:txBody>
-          <a:bodyPr rtlCol="0" anchor="ctr"/>
-          <a:lstStyle/>
-          <a:p>
-            <a:pPr algn="ctr"/>
-            <a:endParaRPr kumimoji="1" lang="ja-JP" altLang="en-US"/>
-          </a:p>
-        </p:txBody>
-      </p:sp>
-      <p:sp>
-        <p:nvSpPr>
-          <p:cNvPr id="46" name="乗算記号 45">
-            <a:extLst>
-              <a:ext uri="{FF2B5EF4-FFF2-40B4-BE49-F238E27FC236}">
-                <a16:creationId xmlns:a16="http://schemas.microsoft.com/office/drawing/2014/main" id="{EBF812E3-0011-B7C9-A7DA-0974DEE5299B}"/>
-              </a:ext>
-            </a:extLst>
-          </p:cNvPr>
-          <p:cNvSpPr/>
-          <p:nvPr/>
-        </p:nvSpPr>
-        <p:spPr>
-          <a:xfrm>
-            <a:off x="5413308" y="3455321"/>
-            <a:ext cx="1079503" cy="1086278"/>
-          </a:xfrm>
-          <a:prstGeom prst="mathMultiply">
-            <a:avLst/>
-          </a:prstGeom>
-          <a:solidFill>
-            <a:srgbClr val="FF0000"/>
-          </a:solidFill>
-          <a:ln>
-            <a:solidFill>
-              <a:srgbClr val="FF0000"/>
-            </a:solidFill>
-          </a:ln>
-        </p:spPr>
-        <p:style>
-          <a:lnRef idx="2">
-            <a:schemeClr val="accent1">
-              <a:shade val="15000"/>
-            </a:schemeClr>
-          </a:lnRef>
-          <a:fillRef idx="1">
-            <a:schemeClr val="accent1"/>
-          </a:fillRef>
-          <a:effectRef idx="0">
-            <a:schemeClr val="accent1"/>
-          </a:effectRef>
-          <a:fontRef idx="minor">
-            <a:schemeClr val="lt1"/>
-          </a:fontRef>
-        </p:style>
-        <p:txBody>
-          <a:bodyPr rtlCol="0" anchor="ctr"/>
-          <a:lstStyle/>
-          <a:p>
-            <a:pPr algn="ctr"/>
-            <a:endParaRPr kumimoji="1" lang="ja-JP" altLang="en-US"/>
+            <a:endParaRPr kumimoji="1" lang="ja-JP" altLang="en-US" dirty="0"/>
           </a:p>
         </p:txBody>
       </p:sp>
@@ -13525,8 +15567,8 @@
         </p:nvSpPr>
         <p:spPr>
           <a:xfrm>
-            <a:off x="5624673" y="3633350"/>
-            <a:ext cx="4548691" cy="1692771"/>
+            <a:off x="6480554" y="4889656"/>
+            <a:ext cx="4353360" cy="400110"/>
           </a:xfrm>
           <a:prstGeom prst="rect">
             <a:avLst/>
@@ -13543,91 +15585,27 @@
           <a:lstStyle/>
           <a:p>
             <a:pPr algn="ctr"/>
-            <a:endParaRPr kumimoji="1" lang="en-US" altLang="ja-JP" sz="3200" dirty="0"/>
-          </a:p>
-          <a:p>
-            <a:pPr algn="ctr"/>
-            <a:r>
-              <a:rPr kumimoji="1" lang="ja-JP" altLang="en-US" sz="3600" dirty="0"/>
+            <a:r>
+              <a:rPr kumimoji="1" lang="ja-JP" altLang="en-US" sz="2000" b="1"/>
               <a:t>自分の</a:t>
             </a:r>
             <a:r>
-              <a:rPr kumimoji="1" lang="en-US" altLang="ja-JP" sz="3600" dirty="0"/>
+              <a:rPr kumimoji="1" lang="en-US" altLang="ja-JP" sz="2000" b="1"/>
               <a:t>GPU</a:t>
             </a:r>
             <a:r>
-              <a:rPr kumimoji="1" lang="ja-JP" altLang="en-US" sz="3600" dirty="0"/>
-              <a:t>を</a:t>
-            </a:r>
-            <a:endParaRPr kumimoji="1" lang="en-US" altLang="ja-JP" sz="3600" dirty="0"/>
-          </a:p>
-          <a:p>
-            <a:pPr algn="ctr"/>
-            <a:r>
-              <a:rPr kumimoji="1" lang="ja-JP" altLang="en-US" sz="3600" dirty="0"/>
-              <a:t>自由に使えない</a:t>
+              <a:rPr kumimoji="1" lang="ja-JP" altLang="en-US" sz="2000" b="1"/>
+              <a:t>を自由に使えない</a:t>
             </a:r>
           </a:p>
         </p:txBody>
       </p:sp>
       <p:sp>
         <p:nvSpPr>
-          <p:cNvPr id="48" name="テキスト ボックス 47">
-            <a:extLst>
-              <a:ext uri="{FF2B5EF4-FFF2-40B4-BE49-F238E27FC236}">
-                <a16:creationId xmlns:a16="http://schemas.microsoft.com/office/drawing/2014/main" id="{31A2437B-2C74-B685-402D-DF5D19DD46BC}"/>
-              </a:ext>
-            </a:extLst>
-          </p:cNvPr>
-          <p:cNvSpPr txBox="1"/>
-          <p:nvPr/>
-        </p:nvSpPr>
-        <p:spPr>
-          <a:xfrm>
-            <a:off x="1706648" y="3651597"/>
-            <a:ext cx="3638080" cy="1692771"/>
-          </a:xfrm>
-          <a:prstGeom prst="rect">
-            <a:avLst/>
-          </a:prstGeom>
-          <a:noFill/>
-        </p:spPr>
-        <p:txBody>
-          <a:bodyPr wrap="square" rtlCol="0">
-            <a:spAutoFit/>
-          </a:bodyPr>
-          <a:lstStyle/>
-          <a:p>
-            <a:pPr algn="ctr"/>
-            <a:endParaRPr kumimoji="1" lang="en-US" altLang="ja-JP" sz="3200" dirty="0"/>
-          </a:p>
-          <a:p>
-            <a:pPr algn="ctr"/>
-            <a:r>
-              <a:rPr kumimoji="1" lang="en-US" altLang="ja-JP" sz="3600" dirty="0"/>
-              <a:t>GPU</a:t>
-            </a:r>
-            <a:r>
-              <a:rPr kumimoji="1" lang="ja-JP" altLang="en-US" sz="3600" dirty="0"/>
-              <a:t>遊休時間</a:t>
-            </a:r>
-            <a:endParaRPr kumimoji="1" lang="en-US" altLang="ja-JP" sz="3600" dirty="0"/>
-          </a:p>
-          <a:p>
-            <a:pPr algn="ctr"/>
-            <a:r>
-              <a:rPr kumimoji="1" lang="ja-JP" altLang="en-US" sz="3600" dirty="0"/>
-              <a:t>の削減のみ</a:t>
-            </a:r>
-          </a:p>
-        </p:txBody>
-      </p:sp>
-      <p:sp>
-        <p:nvSpPr>
-          <p:cNvPr id="49" name="矢印: 右 48">
-            <a:extLst>
-              <a:ext uri="{FF2B5EF4-FFF2-40B4-BE49-F238E27FC236}">
-                <a16:creationId xmlns:a16="http://schemas.microsoft.com/office/drawing/2014/main" id="{6394D0D0-ED61-4FD0-50D8-D8498098B279}"/>
+          <p:cNvPr id="3" name="矢印: 右 2">
+            <a:extLst>
+              <a:ext uri="{FF2B5EF4-FFF2-40B4-BE49-F238E27FC236}">
+                <a16:creationId xmlns:a16="http://schemas.microsoft.com/office/drawing/2014/main" id="{1FE2C310-6D0C-67E7-2EA7-7148F01579DA}"/>
               </a:ext>
             </a:extLst>
           </p:cNvPr>
@@ -13636,20 +15614,12 @@
         </p:nvSpPr>
         <p:spPr>
           <a:xfrm>
-            <a:off x="997846" y="5623536"/>
-            <a:ext cx="924398" cy="365125"/>
+            <a:off x="524741" y="5953991"/>
+            <a:ext cx="477217" cy="280554"/>
           </a:xfrm>
           <a:prstGeom prst="rightArrow">
             <a:avLst/>
           </a:prstGeom>
-          <a:solidFill>
-            <a:schemeClr val="tx1"/>
-          </a:solidFill>
-          <a:ln>
-            <a:solidFill>
-              <a:schemeClr val="tx1"/>
-            </a:solidFill>
-          </a:ln>
         </p:spPr>
         <p:style>
           <a:lnRef idx="2">
@@ -16665,9 +18635,10 @@
           <a:lstStyle/>
           <a:p>
             <a:r>
-              <a:rPr kumimoji="1" lang="ja-JP" altLang="en-US" dirty="0"/>
-              <a:t>リサーチクエスチョン１</a:t>
-            </a:r>
+              <a:rPr lang="ja-JP" altLang="en-US" b="1" dirty="0"/>
+              <a:t>割り込み機能がタスクの待ち時間に与える影響</a:t>
+            </a:r>
+            <a:endParaRPr kumimoji="1" lang="ja-JP" altLang="en-US" dirty="0"/>
           </a:p>
         </p:txBody>
       </p:sp>
@@ -16717,8 +18688,8 @@
         </p:nvSpPr>
         <p:spPr bwMode="auto">
           <a:xfrm>
-            <a:off x="460963" y="1202850"/>
-            <a:ext cx="10919977" cy="5104539"/>
+            <a:off x="537163" y="1227325"/>
+            <a:ext cx="11660564" cy="5454378"/>
           </a:xfrm>
           <a:prstGeom prst="rect">
             <a:avLst/>
@@ -16934,26 +18905,16 @@
               <a:buNone/>
             </a:pPr>
             <a:r>
-              <a:rPr lang="en-US" altLang="ja-JP" sz="3200" b="1" u="sng" dirty="0">
+              <a:rPr lang="ja-JP" altLang="en-US" b="1" dirty="0">
                 <a:solidFill>
                   <a:schemeClr val="accent3">
                     <a:lumMod val="75000"/>
                   </a:schemeClr>
                 </a:solidFill>
               </a:rPr>
-              <a:t>RQ1</a:t>
-            </a:r>
-            <a:r>
-              <a:rPr lang="ja-JP" altLang="en-US" sz="3200" b="1" u="sng" dirty="0">
-                <a:solidFill>
-                  <a:schemeClr val="accent3">
-                    <a:lumMod val="75000"/>
-                  </a:schemeClr>
-                </a:solidFill>
-              </a:rPr>
-              <a:t>　割り込み機能がタスクの待ち時間に与える影響</a:t>
-            </a:r>
-            <a:endParaRPr lang="en-US" altLang="ja-JP" sz="2000" dirty="0">
+              <a:t>提案手法のシナリオで各ユーザーのタスク完了時間がどう影響するのか</a:t>
+            </a:r>
+            <a:endParaRPr lang="en-US" altLang="ja-JP" b="1" dirty="0">
               <a:solidFill>
                 <a:schemeClr val="accent3">
                   <a:lumMod val="75000"/>
@@ -17105,7 +19066,7 @@
             </a:pPr>
             <a:r>
               <a:rPr lang="ja-JP" altLang="en-US" sz="2000" b="1" dirty="0"/>
-              <a:t>④ 所有者優先＋プリエンプション </a:t>
+              <a:t>④ プリエンプション </a:t>
             </a:r>
             <a:endParaRPr lang="en-US" altLang="ja-JP" sz="2000" b="1" dirty="0"/>
           </a:p>
@@ -17180,9 +19141,16 @@
               <a:buFont typeface="Arial" panose="020B0604020202020204" pitchFamily="34" charset="0"/>
               <a:buNone/>
             </a:pPr>
+            <a:endParaRPr lang="en-US" altLang="ja-JP" sz="2000" dirty="0"/>
+          </a:p>
+          <a:p>
+            <a:pPr marL="0" indent="0">
+              <a:buFont typeface="Arial" panose="020B0604020202020204" pitchFamily="34" charset="0"/>
+              <a:buNone/>
+            </a:pPr>
             <a:r>
               <a:rPr lang="ja-JP" altLang="en-US" sz="2400" dirty="0"/>
-              <a:t>各ユーザーがタスク発生毎に、予測待ち時間が最短の</a:t>
+              <a:t>予測完了時間を効用式として、最短の</a:t>
             </a:r>
             <a:r>
               <a:rPr lang="en-US" altLang="ja-JP" sz="2400" dirty="0"/>
@@ -17190,7 +19158,7 @@
             </a:r>
             <a:r>
               <a:rPr lang="ja-JP" altLang="en-US" sz="2400" dirty="0"/>
-              <a:t>を選択して処理する</a:t>
+              <a:t>を選択してタスクを処理する</a:t>
             </a:r>
             <a:endParaRPr lang="en-US" altLang="ja-JP" sz="2400" dirty="0"/>
           </a:p>
@@ -17211,7 +19179,7 @@
                   </a:schemeClr>
                 </a:solidFill>
               </a:rPr>
-              <a:t>ユーザーごとのタスク平均待ち時間</a:t>
+              <a:t>ユーザーごとの平均ターンアラウンドタイム</a:t>
             </a:r>
             <a:r>
               <a:rPr lang="ja-JP" altLang="en-US" sz="2400" dirty="0"/>
@@ -17331,10 +19299,6 @@
           <a:lstStyle/>
           <a:p>
             <a:r>
-              <a:rPr kumimoji="1" lang="en-US" altLang="ja-JP" dirty="0"/>
-              <a:t>RQ1 </a:t>
-            </a:r>
-            <a:r>
               <a:rPr kumimoji="1" lang="ja-JP" altLang="en-US" dirty="0"/>
               <a:t>シミュレーション環境</a:t>
             </a:r>
@@ -17389,8 +19353,8 @@
         </p:nvSpPr>
         <p:spPr>
           <a:xfrm>
-            <a:off x="838200" y="1252538"/>
-            <a:ext cx="10515600" cy="5327650"/>
+            <a:off x="403853" y="1096674"/>
+            <a:ext cx="10515600" cy="5474897"/>
           </a:xfrm>
           <a:prstGeom prst="rect">
             <a:avLst/>
@@ -17403,21 +19367,306 @@
           </a:bodyPr>
           <a:lstStyle/>
           <a:p>
-            <a:r>
-              <a:rPr kumimoji="1" lang="ja-JP" altLang="en-US" dirty="0"/>
-              <a:t>到着率</a:t>
-            </a:r>
-            <a:r>
-              <a:rPr kumimoji="1" lang="en-US" altLang="ja-JP" dirty="0"/>
-              <a:t>0.005 </a:t>
-            </a:r>
-            <a:r>
-              <a:rPr kumimoji="1" lang="ja-JP" altLang="en-US" dirty="0"/>
-              <a:t>エポック数１０</a:t>
-            </a:r>
+            <a:pPr marL="0" indent="0">
+              <a:buNone/>
+            </a:pPr>
+            <a:r>
+              <a:rPr lang="en-US" altLang="ja-JP" sz="2400" b="1" dirty="0">
+                <a:solidFill>
+                  <a:schemeClr val="accent3">
+                    <a:lumMod val="75000"/>
+                  </a:schemeClr>
+                </a:solidFill>
+              </a:rPr>
+              <a:t>M/M/k </a:t>
+            </a:r>
+            <a:r>
+              <a:rPr lang="ja-JP" altLang="en-US" sz="2400" b="1" dirty="0">
+                <a:solidFill>
+                  <a:schemeClr val="accent3">
+                    <a:lumMod val="75000"/>
+                  </a:schemeClr>
+                </a:solidFill>
+              </a:rPr>
+              <a:t>待ち行列モデルによるシミュレーション</a:t>
+            </a:r>
+            <a:endParaRPr lang="en-US" altLang="ja-JP" sz="2400" b="1" dirty="0">
+              <a:solidFill>
+                <a:schemeClr val="accent3">
+                  <a:lumMod val="75000"/>
+                </a:schemeClr>
+              </a:solidFill>
+            </a:endParaRPr>
+          </a:p>
+          <a:p>
+            <a:pPr>
+              <a:lnSpc>
+                <a:spcPct val="150000"/>
+              </a:lnSpc>
+            </a:pPr>
+            <a:r>
+              <a:rPr lang="ja-JP" altLang="en-US" sz="2400" dirty="0"/>
+              <a:t>ユーザー数：</a:t>
+            </a:r>
+            <a:r>
+              <a:rPr lang="en-US" altLang="ja-JP" sz="2400" b="1" dirty="0"/>
+              <a:t>18</a:t>
+            </a:r>
+            <a:r>
+              <a:rPr lang="ja-JP" altLang="en-US" sz="2400" b="1" dirty="0"/>
+              <a:t>人</a:t>
+            </a:r>
+            <a:r>
+              <a:rPr lang="ja-JP" altLang="en-US" sz="2400" dirty="0"/>
+              <a:t>（</a:t>
+            </a:r>
+            <a:r>
+              <a:rPr lang="en-US" altLang="ja-JP" sz="2400" dirty="0"/>
+              <a:t>GPU</a:t>
+            </a:r>
+            <a:r>
+              <a:rPr lang="ja-JP" altLang="en-US" sz="2400" dirty="0"/>
+              <a:t>サーバ各１台）</a:t>
+            </a:r>
+            <a:endParaRPr lang="en-US" altLang="ja-JP" sz="2400" dirty="0"/>
+          </a:p>
+          <a:p>
+            <a:pPr>
+              <a:lnSpc>
+                <a:spcPct val="100000"/>
+              </a:lnSpc>
+            </a:pPr>
+            <a:r>
+              <a:rPr kumimoji="1" lang="en-US" altLang="ja-JP" sz="2400" dirty="0"/>
+              <a:t>GPU</a:t>
+            </a:r>
+            <a:r>
+              <a:rPr kumimoji="1" lang="ja-JP" altLang="en-US" sz="2400" dirty="0"/>
+              <a:t>性能：</a:t>
+            </a:r>
+            <a:r>
+              <a:rPr kumimoji="1" lang="ja-JP" altLang="en-US" sz="2400" b="1" dirty="0"/>
+              <a:t>９段階</a:t>
+            </a:r>
+            <a:endParaRPr kumimoji="1" lang="en-US" altLang="ja-JP" sz="2400" b="1" dirty="0"/>
+          </a:p>
+          <a:p>
+            <a:r>
+              <a:rPr lang="ja-JP" altLang="en-US" sz="2400" dirty="0"/>
+              <a:t>タスク：</a:t>
+            </a:r>
+            <a:r>
+              <a:rPr lang="en-US" altLang="ja-JP" sz="2400" dirty="0"/>
+              <a:t>YOLOv7</a:t>
+            </a:r>
+            <a:r>
+              <a:rPr lang="ja-JP" altLang="en-US" sz="2400" dirty="0"/>
+              <a:t>学習タスクを想定</a:t>
+            </a:r>
+            <a:endParaRPr lang="en-US" altLang="ja-JP" sz="2400" dirty="0"/>
+          </a:p>
+          <a:p>
+            <a:pPr marL="0" indent="0">
+              <a:buNone/>
+            </a:pPr>
+            <a:r>
+              <a:rPr lang="en-US" altLang="ja-JP" sz="2000" dirty="0"/>
+              <a:t> </a:t>
+            </a:r>
+            <a:r>
+              <a:rPr lang="ja-JP" altLang="en-US" sz="2000" dirty="0"/>
+              <a:t> </a:t>
+            </a:r>
+            <a:r>
+              <a:rPr lang="en-US" altLang="ja-JP" sz="2000" dirty="0"/>
+              <a:t>- </a:t>
+            </a:r>
+            <a:r>
+              <a:rPr lang="ja-JP" altLang="en-US" sz="2000" dirty="0"/>
+              <a:t>画像１枚当たり平均</a:t>
+            </a:r>
+            <a:r>
+              <a:rPr lang="en-US" altLang="ja-JP" sz="2000" b="1" dirty="0"/>
+              <a:t>0.360TFLOPs</a:t>
+            </a:r>
+          </a:p>
+          <a:p>
+            <a:pPr marL="0" indent="0">
+              <a:buNone/>
+            </a:pPr>
+            <a:r>
+              <a:rPr lang="en-US" altLang="ja-JP" sz="2000" dirty="0"/>
+              <a:t>  - ID</a:t>
+            </a:r>
+            <a:r>
+              <a:rPr lang="ja-JP" altLang="en-US" sz="2000" dirty="0"/>
+              <a:t> </a:t>
+            </a:r>
+            <a:r>
+              <a:rPr lang="en-US" altLang="ja-JP" sz="2000" dirty="0"/>
+              <a:t>0~8</a:t>
+            </a:r>
+            <a:r>
+              <a:rPr lang="ja-JP" altLang="en-US" sz="2000" dirty="0"/>
+              <a:t>　→　軽量タスク（バッチ数 </a:t>
+            </a:r>
+            <a:r>
+              <a:rPr lang="en-US" altLang="ja-JP" sz="2000" b="1" dirty="0"/>
+              <a:t>1000</a:t>
+            </a:r>
+            <a:r>
+              <a:rPr lang="ja-JP" altLang="en-US" sz="2000" dirty="0"/>
+              <a:t>）</a:t>
+            </a:r>
+            <a:endParaRPr lang="en-US" altLang="ja-JP" sz="2000" dirty="0"/>
+          </a:p>
+          <a:p>
+            <a:pPr marL="0" indent="0">
+              <a:buNone/>
+            </a:pPr>
+            <a:r>
+              <a:rPr lang="en-US" altLang="ja-JP" sz="2000" dirty="0"/>
+              <a:t>  - ID</a:t>
+            </a:r>
+            <a:r>
+              <a:rPr lang="ja-JP" altLang="en-US" sz="2000" dirty="0"/>
+              <a:t> </a:t>
+            </a:r>
+            <a:r>
+              <a:rPr lang="en-US" altLang="ja-JP" sz="2000" dirty="0"/>
+              <a:t>9~17</a:t>
+            </a:r>
+            <a:r>
+              <a:rPr lang="ja-JP" altLang="en-US" sz="2000" dirty="0"/>
+              <a:t>  →　重量タスク（バッチ数 </a:t>
+            </a:r>
+            <a:r>
+              <a:rPr lang="en-US" altLang="ja-JP" sz="2000" b="1" dirty="0"/>
+              <a:t>2000</a:t>
+            </a:r>
+            <a:r>
+              <a:rPr lang="ja-JP" altLang="en-US" sz="2400" dirty="0"/>
+              <a:t>）</a:t>
+            </a:r>
+            <a:endParaRPr lang="en-US" altLang="ja-JP" sz="2400" dirty="0"/>
+          </a:p>
+          <a:p>
+            <a:pPr marL="0" indent="0">
+              <a:buNone/>
+            </a:pPr>
+            <a:r>
+              <a:rPr lang="ja-JP" altLang="en-US" sz="2000" dirty="0"/>
+              <a:t>  </a:t>
+            </a:r>
+            <a:r>
+              <a:rPr lang="en-US" altLang="ja-JP" sz="2000" dirty="0"/>
+              <a:t>-</a:t>
+            </a:r>
+            <a:r>
+              <a:rPr lang="ja-JP" altLang="en-US" sz="2000" dirty="0"/>
+              <a:t> エポック数 ：</a:t>
+            </a:r>
+            <a:r>
+              <a:rPr lang="en-US" altLang="ja-JP" sz="2000" b="1" dirty="0"/>
+              <a:t>10</a:t>
+            </a:r>
+            <a:r>
+              <a:rPr lang="ja-JP" altLang="en-US" sz="2000" dirty="0"/>
+              <a:t>（均一）</a:t>
+            </a:r>
+            <a:endParaRPr lang="en-US" altLang="ja-JP" sz="2000" dirty="0"/>
+          </a:p>
+          <a:p>
+            <a:pPr>
+              <a:lnSpc>
+                <a:spcPct val="150000"/>
+              </a:lnSpc>
+            </a:pPr>
+            <a:r>
+              <a:rPr lang="ja-JP" altLang="en-US" sz="2400" dirty="0"/>
+              <a:t>タスク到着率：</a:t>
+            </a:r>
+            <a:r>
+              <a:rPr lang="en-US" altLang="ja-JP" sz="2400" dirty="0"/>
+              <a:t>0.005</a:t>
+            </a:r>
+          </a:p>
+          <a:p>
+            <a:pPr marL="0" indent="0">
+              <a:buNone/>
+            </a:pPr>
+            <a:r>
+              <a:rPr lang="ja-JP" altLang="en-US" sz="2400" dirty="0"/>
+              <a:t>  →　</a:t>
+            </a:r>
+            <a:r>
+              <a:rPr lang="ja-JP" altLang="en-US" sz="2400" b="1" dirty="0"/>
+              <a:t>平均</a:t>
+            </a:r>
+            <a:r>
+              <a:rPr lang="en-US" altLang="ja-JP" sz="2400" b="1" dirty="0"/>
+              <a:t>200</a:t>
+            </a:r>
+            <a:r>
+              <a:rPr lang="ja-JP" altLang="en-US" sz="2400" b="1" dirty="0"/>
+              <a:t>秒に１回</a:t>
+            </a:r>
+            <a:endParaRPr lang="en-US" altLang="ja-JP" sz="2400" b="1" dirty="0"/>
+          </a:p>
+          <a:p>
+            <a:pPr marL="0" indent="0">
+              <a:lnSpc>
+                <a:spcPct val="150000"/>
+              </a:lnSpc>
+              <a:buNone/>
+            </a:pPr>
+            <a:r>
+              <a:rPr lang="ja-JP" altLang="en-US" sz="2400" dirty="0"/>
+              <a:t>総シミュレーション時間：</a:t>
+            </a:r>
+            <a:r>
+              <a:rPr lang="en-US" altLang="ja-JP" sz="2400" b="1" dirty="0"/>
+              <a:t>24</a:t>
+            </a:r>
+            <a:r>
+              <a:rPr lang="ja-JP" altLang="en-US" sz="2400" b="1" dirty="0"/>
+              <a:t>時間</a:t>
+            </a:r>
+            <a:endParaRPr lang="en-US" altLang="ja-JP" sz="2400" b="1" dirty="0"/>
           </a:p>
         </p:txBody>
       </p:sp>
+      <p:pic>
+        <p:nvPicPr>
+          <p:cNvPr id="11" name="図 10" descr="テーブル&#10;&#10;AI 生成コンテンツは誤りを含む可能性があります。">
+            <a:extLst>
+              <a:ext uri="{FF2B5EF4-FFF2-40B4-BE49-F238E27FC236}">
+                <a16:creationId xmlns:a16="http://schemas.microsoft.com/office/drawing/2014/main" id="{39FFEEAE-C2D8-FD72-2E67-5800A0F655E4}"/>
+              </a:ext>
+            </a:extLst>
+          </p:cNvPr>
+          <p:cNvPicPr>
+            <a:picLocks noChangeAspect="1"/>
+          </p:cNvPicPr>
+          <p:nvPr/>
+        </p:nvPicPr>
+        <p:blipFill>
+          <a:blip r:embed="rId2"/>
+          <a:srcRect l="27228" t="43333" r="26482" b="40556"/>
+          <a:stretch>
+            <a:fillRect/>
+          </a:stretch>
+        </p:blipFill>
+        <p:spPr>
+          <a:xfrm>
+            <a:off x="6400171" y="1701800"/>
+            <a:ext cx="5412244" cy="3797300"/>
+          </a:xfrm>
+          <a:prstGeom prst="rect">
+            <a:avLst/>
+          </a:prstGeom>
+        </p:spPr>
+      </p:pic>
     </p:spTree>
     <p:extLst>
       <p:ext uri="{BB962C8B-B14F-4D97-AF65-F5344CB8AC3E}">
@@ -17448,12 +19697,42 @@
           <a:chExt cx="0" cy="0"/>
         </a:xfrm>
       </p:grpSpPr>
+      <p:pic>
+        <p:nvPicPr>
+          <p:cNvPr id="25" name="図 24" descr="グラフ, 折れ線グラフ&#10;&#10;AI 生成コンテンツは誤りを含む可能性があります。">
+            <a:extLst>
+              <a:ext uri="{FF2B5EF4-FFF2-40B4-BE49-F238E27FC236}">
+                <a16:creationId xmlns:a16="http://schemas.microsoft.com/office/drawing/2014/main" id="{A0F3F623-F75A-36E6-4E1C-CF939BC5B4BE}"/>
+              </a:ext>
+            </a:extLst>
+          </p:cNvPr>
+          <p:cNvPicPr>
+            <a:picLocks noChangeAspect="1"/>
+          </p:cNvPicPr>
+          <p:nvPr/>
+        </p:nvPicPr>
+        <p:blipFill>
+          <a:blip r:embed="rId2"/>
+          <a:stretch>
+            <a:fillRect/>
+          </a:stretch>
+        </p:blipFill>
+        <p:spPr>
+          <a:xfrm>
+            <a:off x="2136832" y="2444314"/>
+            <a:ext cx="7324668" cy="4255362"/>
+          </a:xfrm>
+          <a:prstGeom prst="rect">
+            <a:avLst/>
+          </a:prstGeom>
+        </p:spPr>
+      </p:pic>
       <p:sp>
         <p:nvSpPr>
           <p:cNvPr id="2" name="タイトル 1">
             <a:extLst>
               <a:ext uri="{FF2B5EF4-FFF2-40B4-BE49-F238E27FC236}">
-                <a16:creationId xmlns:a16="http://schemas.microsoft.com/office/drawing/2014/main" id="{180D6731-8F52-8303-E837-6C30E2DAF3F1}"/>
+                <a16:creationId xmlns:a16="http://schemas.microsoft.com/office/drawing/2014/main" id="{9F12D26F-B7BC-5F6A-BDA3-E65D2788B134}"/>
               </a:ext>
             </a:extLst>
           </p:cNvPr>
@@ -17464,20 +19743,23 @@
             <p:ph type="title"/>
           </p:nvPr>
         </p:nvSpPr>
-        <p:spPr/>
+        <p:spPr>
+          <a:xfrm>
+            <a:off x="838200" y="231697"/>
+            <a:ext cx="8268093" cy="457044"/>
+          </a:xfrm>
+        </p:spPr>
         <p:txBody>
-          <a:bodyPr/>
+          <a:bodyPr anchor="ctr">
+            <a:normAutofit/>
+          </a:bodyPr>
           <a:lstStyle/>
           <a:p>
             <a:r>
-              <a:rPr kumimoji="1" lang="en-US" altLang="ja-JP"/>
-              <a:t>RQ1  </a:t>
-            </a:r>
-            <a:r>
-              <a:rPr kumimoji="1" lang="ja-JP" altLang="en-US"/>
-              <a:t>シミュレーション結果１</a:t>
-            </a:r>
-            <a:endParaRPr kumimoji="1" lang="ja-JP" altLang="en-US" dirty="0"/>
+              <a:rPr lang="ja-JP" altLang="en-US" sz="2600" dirty="0"/>
+              <a:t>シミュレーション結果</a:t>
+            </a:r>
+            <a:endParaRPr kumimoji="1" lang="ja-JP" altLang="en-US" sz="2600" dirty="0"/>
           </a:p>
         </p:txBody>
       </p:sp>
@@ -17486,7 +19768,7 @@
           <p:cNvPr id="4" name="スライド番号プレースホルダー 3">
             <a:extLst>
               <a:ext uri="{FF2B5EF4-FFF2-40B4-BE49-F238E27FC236}">
-                <a16:creationId xmlns:a16="http://schemas.microsoft.com/office/drawing/2014/main" id="{53A8B102-914F-34F8-C02C-2BFD153011B6}"/>
+                <a16:creationId xmlns:a16="http://schemas.microsoft.com/office/drawing/2014/main" id="{09F9951A-6AF3-3F19-70CA-A6F5979A68FA}"/>
               </a:ext>
             </a:extLst>
           </p:cNvPr>
@@ -17497,26 +19779,227 @@
             <p:ph type="sldNum" sz="quarter" idx="12"/>
           </p:nvPr>
         </p:nvSpPr>
-        <p:spPr/>
+        <p:spPr>
+          <a:xfrm>
+            <a:off x="11160803" y="277657"/>
+            <a:ext cx="838200" cy="365125"/>
+          </a:xfrm>
+        </p:spPr>
         <p:txBody>
-          <a:bodyPr/>
+          <a:bodyPr anchor="ctr">
+            <a:normAutofit/>
+          </a:bodyPr>
           <a:lstStyle/>
           <a:p>
+            <a:pPr>
+              <a:lnSpc>
+                <a:spcPct val="90000"/>
+              </a:lnSpc>
+              <a:spcAft>
+                <a:spcPts val="600"/>
+              </a:spcAft>
+            </a:pPr>
             <a:fld id="{8D1BC46D-89B1-41A3-BBA1-F56BEABD0A90}" type="slidenum">
               <a:rPr lang="ja-JP" altLang="en-US" smtClean="0"/>
-              <a:pPr/>
+              <a:pPr>
+                <a:lnSpc>
+                  <a:spcPct val="90000"/>
+                </a:lnSpc>
+                <a:spcAft>
+                  <a:spcPts val="600"/>
+                </a:spcAft>
+              </a:pPr>
               <a:t>8</a:t>
             </a:fld>
-            <a:endParaRPr lang="ja-JP" altLang="en-US" dirty="0"/>
+            <a:endParaRPr lang="ja-JP" altLang="en-US"/>
+          </a:p>
+        </p:txBody>
+      </p:sp>
+      <p:sp>
+        <p:nvSpPr>
+          <p:cNvPr id="7" name="吹き出し: 角を丸めた四角形 6">
+            <a:extLst>
+              <a:ext uri="{FF2B5EF4-FFF2-40B4-BE49-F238E27FC236}">
+                <a16:creationId xmlns:a16="http://schemas.microsoft.com/office/drawing/2014/main" id="{B8312EF7-8CE1-9C89-A8E8-C453D10403AC}"/>
+              </a:ext>
+            </a:extLst>
+          </p:cNvPr>
+          <p:cNvSpPr/>
+          <p:nvPr/>
+        </p:nvSpPr>
+        <p:spPr>
+          <a:xfrm>
+            <a:off x="4419600" y="4495795"/>
+            <a:ext cx="3203575" cy="1464469"/>
+          </a:xfrm>
+          <a:prstGeom prst="wedgeRoundRectCallout">
+            <a:avLst>
+              <a:gd name="adj1" fmla="val -2659"/>
+              <a:gd name="adj2" fmla="val -108088"/>
+              <a:gd name="adj3" fmla="val 16667"/>
+            </a:avLst>
+          </a:prstGeom>
+          <a:solidFill>
+            <a:schemeClr val="bg1"/>
+          </a:solidFill>
+          <a:ln>
+            <a:solidFill>
+              <a:schemeClr val="accent3">
+                <a:lumMod val="75000"/>
+              </a:schemeClr>
+            </a:solidFill>
+          </a:ln>
+        </p:spPr>
+        <p:style>
+          <a:lnRef idx="2">
+            <a:schemeClr val="accent1">
+              <a:shade val="15000"/>
+            </a:schemeClr>
+          </a:lnRef>
+          <a:fillRef idx="1">
+            <a:schemeClr val="accent1"/>
+          </a:fillRef>
+          <a:effectRef idx="0">
+            <a:schemeClr val="accent1"/>
+          </a:effectRef>
+          <a:fontRef idx="minor">
+            <a:schemeClr val="lt1"/>
+          </a:fontRef>
+        </p:style>
+        <p:txBody>
+          <a:bodyPr rtlCol="0" anchor="ctr"/>
+          <a:lstStyle/>
+          <a:p>
+            <a:pPr algn="ctr"/>
+            <a:r>
+              <a:rPr lang="ja-JP" altLang="en-US" sz="2000" dirty="0">
+                <a:solidFill>
+                  <a:schemeClr val="tx1"/>
+                </a:solidFill>
+              </a:rPr>
+              <a:t>中・高性能な</a:t>
+            </a:r>
+            <a:r>
+              <a:rPr lang="en-US" altLang="ja-JP" sz="2000" dirty="0">
+                <a:solidFill>
+                  <a:schemeClr val="tx1"/>
+                </a:solidFill>
+              </a:rPr>
+              <a:t>GPU</a:t>
+            </a:r>
+            <a:r>
+              <a:rPr lang="ja-JP" altLang="en-US" sz="2000" dirty="0">
+                <a:solidFill>
+                  <a:schemeClr val="tx1"/>
+                </a:solidFill>
+              </a:rPr>
+              <a:t>ユーザは他人に</a:t>
+            </a:r>
+            <a:r>
+              <a:rPr lang="en-US" altLang="ja-JP" sz="2000" dirty="0">
+                <a:solidFill>
+                  <a:schemeClr val="tx1"/>
+                </a:solidFill>
+              </a:rPr>
+              <a:t>GPU</a:t>
+            </a:r>
+            <a:r>
+              <a:rPr lang="ja-JP" altLang="en-US" sz="2000" dirty="0">
+                <a:solidFill>
+                  <a:schemeClr val="tx1"/>
+                </a:solidFill>
+              </a:rPr>
+              <a:t>を使われるため、</a:t>
+            </a:r>
+            <a:r>
+              <a:rPr lang="ja-JP" altLang="en-US" sz="2000" b="1" dirty="0">
+                <a:solidFill>
+                  <a:schemeClr val="tx1"/>
+                </a:solidFill>
+              </a:rPr>
+              <a:t>待ち時間が増加</a:t>
+            </a:r>
+            <a:endParaRPr kumimoji="1" lang="ja-JP" altLang="en-US" sz="2000" b="1" dirty="0">
+              <a:solidFill>
+                <a:schemeClr val="tx1"/>
+              </a:solidFill>
+            </a:endParaRPr>
+          </a:p>
+        </p:txBody>
+      </p:sp>
+      <p:sp>
+        <p:nvSpPr>
+          <p:cNvPr id="8" name="吹き出し: 角を丸めた四角形 7">
+            <a:extLst>
+              <a:ext uri="{FF2B5EF4-FFF2-40B4-BE49-F238E27FC236}">
+                <a16:creationId xmlns:a16="http://schemas.microsoft.com/office/drawing/2014/main" id="{4351DFC4-E5E1-8B59-4A9A-0440FE30C7AE}"/>
+              </a:ext>
+            </a:extLst>
+          </p:cNvPr>
+          <p:cNvSpPr/>
+          <p:nvPr/>
+        </p:nvSpPr>
+        <p:spPr>
+          <a:xfrm>
+            <a:off x="8567899" y="3644900"/>
+            <a:ext cx="2679307" cy="1219200"/>
+          </a:xfrm>
+          <a:prstGeom prst="wedgeRoundRectCallout">
+            <a:avLst>
+              <a:gd name="adj1" fmla="val -35053"/>
+              <a:gd name="adj2" fmla="val 117708"/>
+              <a:gd name="adj3" fmla="val 16667"/>
+            </a:avLst>
+          </a:prstGeom>
+          <a:solidFill>
+            <a:schemeClr val="bg1"/>
+          </a:solidFill>
+          <a:ln>
+            <a:solidFill>
+              <a:schemeClr val="accent3">
+                <a:lumMod val="75000"/>
+              </a:schemeClr>
+            </a:solidFill>
+          </a:ln>
+        </p:spPr>
+        <p:style>
+          <a:lnRef idx="2">
+            <a:schemeClr val="accent1">
+              <a:shade val="15000"/>
+            </a:schemeClr>
+          </a:lnRef>
+          <a:fillRef idx="1">
+            <a:schemeClr val="accent1"/>
+          </a:fillRef>
+          <a:effectRef idx="0">
+            <a:schemeClr val="accent1"/>
+          </a:effectRef>
+          <a:fontRef idx="minor">
+            <a:schemeClr val="lt1"/>
+          </a:fontRef>
+        </p:style>
+        <p:txBody>
+          <a:bodyPr rtlCol="0" anchor="ctr"/>
+          <a:lstStyle/>
+          <a:p>
+            <a:pPr algn="ctr"/>
+            <a:r>
+              <a:rPr kumimoji="1" lang="ja-JP" altLang="en-US" dirty="0">
+                <a:solidFill>
+                  <a:schemeClr val="tx1"/>
+                </a:solidFill>
+              </a:rPr>
+              <a:t>プリエンプションは、他人に影響をうけないため、減少</a:t>
+            </a:r>
           </a:p>
         </p:txBody>
       </p:sp>
       <p:pic>
         <p:nvPicPr>
-          <p:cNvPr id="14" name="図 13" descr="テーブル&#10;&#10;AI 生成コンテンツは誤りを含む可能性があります。">
-            <a:extLst>
-              <a:ext uri="{FF2B5EF4-FFF2-40B4-BE49-F238E27FC236}">
-                <a16:creationId xmlns:a16="http://schemas.microsoft.com/office/drawing/2014/main" id="{331C40EE-E895-7BC7-AEA9-DB01736B278F}"/>
+          <p:cNvPr id="16" name="図 15" descr="テーブル&#10;&#10;AI 生成コンテンツは誤りを含む可能性があります。">
+            <a:extLst>
+              <a:ext uri="{FF2B5EF4-FFF2-40B4-BE49-F238E27FC236}">
+                <a16:creationId xmlns:a16="http://schemas.microsoft.com/office/drawing/2014/main" id="{B8A173C9-6B73-7607-E0A6-1C45CBE4AA1C}"/>
               </a:ext>
             </a:extLst>
           </p:cNvPr>
@@ -17526,26 +20009,305 @@
           <p:nvPr/>
         </p:nvPicPr>
         <p:blipFill>
-          <a:blip r:embed="rId2"/>
-          <a:srcRect t="11824"/>
+          <a:blip r:embed="rId3"/>
+          <a:srcRect t="36546" b="28978"/>
           <a:stretch>
             <a:fillRect/>
           </a:stretch>
         </p:blipFill>
         <p:spPr>
           <a:xfrm>
-            <a:off x="0" y="1122665"/>
-            <a:ext cx="12192000" cy="5327013"/>
+            <a:off x="1333500" y="1000762"/>
+            <a:ext cx="8572500" cy="1464469"/>
           </a:xfrm>
           <a:prstGeom prst="rect">
             <a:avLst/>
           </a:prstGeom>
         </p:spPr>
       </p:pic>
+      <p:sp>
+        <p:nvSpPr>
+          <p:cNvPr id="17" name="正方形/長方形 16">
+            <a:extLst>
+              <a:ext uri="{FF2B5EF4-FFF2-40B4-BE49-F238E27FC236}">
+                <a16:creationId xmlns:a16="http://schemas.microsoft.com/office/drawing/2014/main" id="{E7EEB41C-C27D-6A31-A643-15B1169D9244}"/>
+              </a:ext>
+            </a:extLst>
+          </p:cNvPr>
+          <p:cNvSpPr/>
+          <p:nvPr/>
+        </p:nvSpPr>
+        <p:spPr>
+          <a:xfrm>
+            <a:off x="3441700" y="1536700"/>
+            <a:ext cx="977900" cy="101600"/>
+          </a:xfrm>
+          <a:prstGeom prst="rect">
+            <a:avLst/>
+          </a:prstGeom>
+          <a:solidFill>
+            <a:schemeClr val="accent3">
+              <a:lumMod val="75000"/>
+              <a:alpha val="23000"/>
+            </a:schemeClr>
+          </a:solidFill>
+          <a:ln>
+            <a:noFill/>
+          </a:ln>
+        </p:spPr>
+        <p:style>
+          <a:lnRef idx="2">
+            <a:schemeClr val="accent1">
+              <a:shade val="15000"/>
+            </a:schemeClr>
+          </a:lnRef>
+          <a:fillRef idx="1">
+            <a:schemeClr val="accent1"/>
+          </a:fillRef>
+          <a:effectRef idx="0">
+            <a:schemeClr val="accent1"/>
+          </a:effectRef>
+          <a:fontRef idx="minor">
+            <a:schemeClr val="lt1"/>
+          </a:fontRef>
+        </p:style>
+        <p:txBody>
+          <a:bodyPr rtlCol="0" anchor="ctr"/>
+          <a:lstStyle/>
+          <a:p>
+            <a:pPr algn="ctr"/>
+            <a:endParaRPr kumimoji="1" lang="ja-JP" altLang="en-US"/>
+          </a:p>
+        </p:txBody>
+      </p:sp>
+      <p:sp>
+        <p:nvSpPr>
+          <p:cNvPr id="18" name="正方形/長方形 17">
+            <a:extLst>
+              <a:ext uri="{FF2B5EF4-FFF2-40B4-BE49-F238E27FC236}">
+                <a16:creationId xmlns:a16="http://schemas.microsoft.com/office/drawing/2014/main" id="{EC034CE4-9D6E-DCE8-4505-EBD842E9ABB8}"/>
+              </a:ext>
+            </a:extLst>
+          </p:cNvPr>
+          <p:cNvSpPr/>
+          <p:nvPr/>
+        </p:nvSpPr>
+        <p:spPr>
+          <a:xfrm>
+            <a:off x="3441700" y="1848721"/>
+            <a:ext cx="977900" cy="101600"/>
+          </a:xfrm>
+          <a:prstGeom prst="rect">
+            <a:avLst/>
+          </a:prstGeom>
+          <a:solidFill>
+            <a:schemeClr val="accent3">
+              <a:lumMod val="75000"/>
+              <a:alpha val="20000"/>
+            </a:schemeClr>
+          </a:solidFill>
+          <a:ln>
+            <a:noFill/>
+          </a:ln>
+        </p:spPr>
+        <p:style>
+          <a:lnRef idx="2">
+            <a:schemeClr val="accent1">
+              <a:shade val="15000"/>
+            </a:schemeClr>
+          </a:lnRef>
+          <a:fillRef idx="1">
+            <a:schemeClr val="accent1"/>
+          </a:fillRef>
+          <a:effectRef idx="0">
+            <a:schemeClr val="accent1"/>
+          </a:effectRef>
+          <a:fontRef idx="minor">
+            <a:schemeClr val="lt1"/>
+          </a:fontRef>
+        </p:style>
+        <p:txBody>
+          <a:bodyPr rtlCol="0" anchor="ctr"/>
+          <a:lstStyle/>
+          <a:p>
+            <a:pPr algn="ctr"/>
+            <a:endParaRPr kumimoji="1" lang="ja-JP" altLang="en-US"/>
+          </a:p>
+        </p:txBody>
+      </p:sp>
+      <p:sp>
+        <p:nvSpPr>
+          <p:cNvPr id="19" name="正方形/長方形 18">
+            <a:extLst>
+              <a:ext uri="{FF2B5EF4-FFF2-40B4-BE49-F238E27FC236}">
+                <a16:creationId xmlns:a16="http://schemas.microsoft.com/office/drawing/2014/main" id="{3DAE00A9-86E4-B40D-6934-0B978D3CCC43}"/>
+              </a:ext>
+            </a:extLst>
+          </p:cNvPr>
+          <p:cNvSpPr/>
+          <p:nvPr/>
+        </p:nvSpPr>
+        <p:spPr>
+          <a:xfrm>
+            <a:off x="3441700" y="2184406"/>
+            <a:ext cx="889000" cy="101600"/>
+          </a:xfrm>
+          <a:prstGeom prst="rect">
+            <a:avLst/>
+          </a:prstGeom>
+          <a:solidFill>
+            <a:schemeClr val="accent3">
+              <a:lumMod val="75000"/>
+              <a:alpha val="25000"/>
+            </a:schemeClr>
+          </a:solidFill>
+          <a:ln>
+            <a:noFill/>
+          </a:ln>
+        </p:spPr>
+        <p:style>
+          <a:lnRef idx="2">
+            <a:schemeClr val="accent1">
+              <a:shade val="15000"/>
+            </a:schemeClr>
+          </a:lnRef>
+          <a:fillRef idx="1">
+            <a:schemeClr val="accent1"/>
+          </a:fillRef>
+          <a:effectRef idx="0">
+            <a:schemeClr val="accent1"/>
+          </a:effectRef>
+          <a:fontRef idx="minor">
+            <a:schemeClr val="lt1"/>
+          </a:fontRef>
+        </p:style>
+        <p:txBody>
+          <a:bodyPr rtlCol="0" anchor="ctr"/>
+          <a:lstStyle/>
+          <a:p>
+            <a:pPr algn="ctr"/>
+            <a:endParaRPr kumimoji="1" lang="ja-JP" altLang="en-US"/>
+          </a:p>
+        </p:txBody>
+      </p:sp>
+      <p:sp>
+        <p:nvSpPr>
+          <p:cNvPr id="20" name="吹き出し: 角を丸めた四角形 19">
+            <a:extLst>
+              <a:ext uri="{FF2B5EF4-FFF2-40B4-BE49-F238E27FC236}">
+                <a16:creationId xmlns:a16="http://schemas.microsoft.com/office/drawing/2014/main" id="{630879B5-C00B-737F-F0B1-2C8AB0983152}"/>
+              </a:ext>
+            </a:extLst>
+          </p:cNvPr>
+          <p:cNvSpPr/>
+          <p:nvPr/>
+        </p:nvSpPr>
+        <p:spPr>
+          <a:xfrm>
+            <a:off x="264951" y="2322831"/>
+            <a:ext cx="1659099" cy="1931669"/>
+          </a:xfrm>
+          <a:prstGeom prst="wedgeRoundRectCallout">
+            <a:avLst>
+              <a:gd name="adj1" fmla="val 143401"/>
+              <a:gd name="adj2" fmla="val -40816"/>
+              <a:gd name="adj3" fmla="val 16667"/>
+            </a:avLst>
+          </a:prstGeom>
+          <a:solidFill>
+            <a:schemeClr val="bg1"/>
+          </a:solidFill>
+          <a:ln>
+            <a:solidFill>
+              <a:schemeClr val="accent3">
+                <a:lumMod val="75000"/>
+              </a:schemeClr>
+            </a:solidFill>
+          </a:ln>
+        </p:spPr>
+        <p:style>
+          <a:lnRef idx="2">
+            <a:schemeClr val="accent1">
+              <a:shade val="15000"/>
+            </a:schemeClr>
+          </a:lnRef>
+          <a:fillRef idx="1">
+            <a:schemeClr val="accent1"/>
+          </a:fillRef>
+          <a:effectRef idx="0">
+            <a:schemeClr val="accent1"/>
+          </a:effectRef>
+          <a:fontRef idx="minor">
+            <a:schemeClr val="lt1"/>
+          </a:fontRef>
+        </p:style>
+        <p:txBody>
+          <a:bodyPr rtlCol="0" anchor="ctr"/>
+          <a:lstStyle/>
+          <a:p>
+            <a:pPr algn="ctr"/>
+            <a:endParaRPr kumimoji="1" lang="ja-JP" altLang="en-US" dirty="0">
+              <a:solidFill>
+                <a:schemeClr val="tx1"/>
+              </a:solidFill>
+            </a:endParaRPr>
+          </a:p>
+        </p:txBody>
+      </p:sp>
+      <p:sp>
+        <p:nvSpPr>
+          <p:cNvPr id="21" name="テキスト ボックス 20">
+            <a:extLst>
+              <a:ext uri="{FF2B5EF4-FFF2-40B4-BE49-F238E27FC236}">
+                <a16:creationId xmlns:a16="http://schemas.microsoft.com/office/drawing/2014/main" id="{14F74906-E8C4-F0E7-3E1A-8DF1840B1AFF}"/>
+              </a:ext>
+            </a:extLst>
+          </p:cNvPr>
+          <p:cNvSpPr txBox="1"/>
+          <p:nvPr/>
+        </p:nvSpPr>
+        <p:spPr>
+          <a:xfrm>
+            <a:off x="278259" y="2739072"/>
+            <a:ext cx="1645791" cy="1477328"/>
+          </a:xfrm>
+          <a:prstGeom prst="rect">
+            <a:avLst/>
+          </a:prstGeom>
+          <a:noFill/>
+        </p:spPr>
+        <p:txBody>
+          <a:bodyPr wrap="square" rtlCol="0">
+            <a:spAutoFit/>
+          </a:bodyPr>
+          <a:lstStyle/>
+          <a:p>
+            <a:r>
+              <a:rPr lang="ja-JP" altLang="en-US" dirty="0"/>
+              <a:t>低性能</a:t>
+            </a:r>
+            <a:r>
+              <a:rPr lang="en-US" altLang="ja-JP" dirty="0"/>
+              <a:t>GPU</a:t>
+            </a:r>
+            <a:r>
+              <a:rPr lang="ja-JP" altLang="en-US" dirty="0"/>
+              <a:t>は共有シナリオで待ち時間が</a:t>
+            </a:r>
+            <a:r>
+              <a:rPr lang="ja-JP" altLang="en-US" b="1" dirty="0"/>
+              <a:t>大幅に減少</a:t>
+            </a:r>
+          </a:p>
+          <a:p>
+            <a:endParaRPr kumimoji="1" lang="ja-JP" altLang="en-US" dirty="0"/>
+          </a:p>
+        </p:txBody>
+      </p:sp>
     </p:spTree>
     <p:extLst>
       <p:ext uri="{BB962C8B-B14F-4D97-AF65-F5344CB8AC3E}">
-        <p14:creationId xmlns:p14="http://schemas.microsoft.com/office/powerpoint/2010/main" val="2369393797"/>
+        <p14:creationId xmlns:p14="http://schemas.microsoft.com/office/powerpoint/2010/main" val="2103166186"/>
       </p:ext>
     </p:extLst>
   </p:cSld>
@@ -17577,7 +20339,7 @@
           <p:cNvPr id="2" name="タイトル 1">
             <a:extLst>
               <a:ext uri="{FF2B5EF4-FFF2-40B4-BE49-F238E27FC236}">
-                <a16:creationId xmlns:a16="http://schemas.microsoft.com/office/drawing/2014/main" id="{9F12D26F-B7BC-5F6A-BDA3-E65D2788B134}"/>
+                <a16:creationId xmlns:a16="http://schemas.microsoft.com/office/drawing/2014/main" id="{113F3A42-9F33-C969-1239-8E61272F5176}"/>
               </a:ext>
             </a:extLst>
           </p:cNvPr>
@@ -17588,69 +20350,248 @@
             <p:ph type="title"/>
           </p:nvPr>
         </p:nvSpPr>
-        <p:spPr>
-          <a:xfrm>
-            <a:off x="838200" y="231697"/>
-            <a:ext cx="8268093" cy="457044"/>
-          </a:xfrm>
-        </p:spPr>
+        <p:spPr/>
         <p:txBody>
-          <a:bodyPr anchor="ctr">
-            <a:normAutofit/>
-          </a:bodyPr>
+          <a:bodyPr/>
           <a:lstStyle/>
           <a:p>
             <a:r>
-              <a:rPr lang="en-US" altLang="ja-JP" sz="2600" dirty="0"/>
-              <a:t>RQ1  </a:t>
-            </a:r>
-            <a:r>
-              <a:rPr lang="ja-JP" altLang="en-US" sz="2600" dirty="0"/>
-              <a:t>シミュレーション結果２</a:t>
-            </a:r>
-            <a:endParaRPr kumimoji="1" lang="ja-JP" altLang="en-US" sz="2600" dirty="0"/>
+              <a:rPr kumimoji="1" lang="ja-JP" altLang="en-US" dirty="0"/>
+              <a:t>リサーチクエスチョン２</a:t>
+            </a:r>
           </a:p>
         </p:txBody>
       </p:sp>
-      <p:pic>
-        <p:nvPicPr>
-          <p:cNvPr id="6" name="コンテンツ プレースホルダー 5" descr="グラフ, 折れ線グラフ&#10;&#10;AI 生成コンテンツは誤りを含む可能性があります。">
-            <a:extLst>
-              <a:ext uri="{FF2B5EF4-FFF2-40B4-BE49-F238E27FC236}">
-                <a16:creationId xmlns:a16="http://schemas.microsoft.com/office/drawing/2014/main" id="{04691579-E29F-3821-2738-5BBBB22581F6}"/>
-              </a:ext>
-            </a:extLst>
-          </p:cNvPr>
-          <p:cNvPicPr>
-            <a:picLocks noGrp="1" noChangeAspect="1"/>
-          </p:cNvPicPr>
+      <p:sp>
+        <p:nvSpPr>
+          <p:cNvPr id="3" name="コンテンツ プレースホルダー 2">
+            <a:extLst>
+              <a:ext uri="{FF2B5EF4-FFF2-40B4-BE49-F238E27FC236}">
+                <a16:creationId xmlns:a16="http://schemas.microsoft.com/office/drawing/2014/main" id="{83113ED6-80FB-38AA-B1C6-A2AEE513B7C5}"/>
+              </a:ext>
+            </a:extLst>
+          </p:cNvPr>
+          <p:cNvSpPr>
+            <a:spLocks noGrp="1"/>
+          </p:cNvSpPr>
           <p:nvPr>
             <p:ph idx="1"/>
           </p:nvPr>
-        </p:nvPicPr>
-        <p:blipFill>
-          <a:blip r:embed="rId2"/>
-          <a:stretch>
-            <a:fillRect/>
-          </a:stretch>
-        </p:blipFill>
-        <p:spPr>
-          <a:xfrm>
-            <a:off x="2105729" y="1253331"/>
-            <a:ext cx="7980542" cy="5327012"/>
-          </a:xfrm>
-          <a:prstGeom prst="rect">
-            <a:avLst/>
-          </a:prstGeom>
-          <a:noFill/>
-        </p:spPr>
-      </p:pic>
+        </p:nvSpPr>
+        <p:spPr/>
+        <p:txBody>
+          <a:bodyPr>
+            <a:normAutofit fontScale="77500" lnSpcReduction="20000"/>
+          </a:bodyPr>
+          <a:lstStyle/>
+          <a:p>
+            <a:pPr marL="0" indent="0">
+              <a:buNone/>
+            </a:pPr>
+            <a:r>
+              <a:rPr kumimoji="1" lang="en-US" altLang="ja-JP" b="1" u="sng" dirty="0">
+                <a:solidFill>
+                  <a:schemeClr val="accent3">
+                    <a:lumMod val="75000"/>
+                  </a:schemeClr>
+                </a:solidFill>
+              </a:rPr>
+              <a:t>RQ2</a:t>
+            </a:r>
+            <a:r>
+              <a:rPr kumimoji="1" lang="ja-JP" altLang="en-US" b="1" u="sng" dirty="0">
+                <a:solidFill>
+                  <a:schemeClr val="accent3">
+                    <a:lumMod val="75000"/>
+                  </a:schemeClr>
+                </a:solidFill>
+              </a:rPr>
+              <a:t>　</a:t>
+            </a:r>
+            <a:r>
+              <a:rPr lang="ja-JP" altLang="en-US" b="1" u="sng" dirty="0">
+                <a:solidFill>
+                  <a:schemeClr val="accent3">
+                    <a:lumMod val="75000"/>
+                  </a:schemeClr>
+                </a:solidFill>
+              </a:rPr>
+              <a:t>「速いなら参加する」ユーザー行動による</a:t>
+            </a:r>
+            <a:r>
+              <a:rPr lang="en-US" altLang="ja-JP" b="1" u="sng" dirty="0">
+                <a:solidFill>
+                  <a:schemeClr val="accent3">
+                    <a:lumMod val="75000"/>
+                  </a:schemeClr>
+                </a:solidFill>
+              </a:rPr>
+              <a:t>ACP</a:t>
+            </a:r>
+            <a:r>
+              <a:rPr lang="ja-JP" altLang="en-US" b="1" u="sng" dirty="0">
+                <a:solidFill>
+                  <a:schemeClr val="accent3">
+                    <a:lumMod val="75000"/>
+                  </a:schemeClr>
+                </a:solidFill>
+              </a:rPr>
+              <a:t>普及の検証</a:t>
+            </a:r>
+            <a:endParaRPr lang="en-US" altLang="ja-JP" b="1" u="sng" dirty="0">
+              <a:solidFill>
+                <a:schemeClr val="accent3">
+                  <a:lumMod val="75000"/>
+                </a:schemeClr>
+              </a:solidFill>
+            </a:endParaRPr>
+          </a:p>
+          <a:p>
+            <a:pPr marL="0" indent="0">
+              <a:lnSpc>
+                <a:spcPct val="160000"/>
+              </a:lnSpc>
+              <a:buNone/>
+            </a:pPr>
+            <a:r>
+              <a:rPr kumimoji="1" lang="ja-JP" altLang="en-US" sz="2600" b="1" dirty="0"/>
+              <a:t>タスク平均完了時間の速さのみで参加可否を判断する合理的なユーザを想定</a:t>
+            </a:r>
+            <a:endParaRPr kumimoji="1" lang="en-US" altLang="ja-JP" sz="2600" b="1" dirty="0"/>
+          </a:p>
+          <a:p>
+            <a:pPr marL="0" indent="0">
+              <a:lnSpc>
+                <a:spcPct val="160000"/>
+              </a:lnSpc>
+              <a:buNone/>
+            </a:pPr>
+            <a:r>
+              <a:rPr lang="ja-JP" altLang="en-US" sz="2600" b="1" dirty="0"/>
+              <a:t>「</a:t>
+            </a:r>
+            <a:r>
+              <a:rPr lang="en-US" altLang="ja-JP" sz="2600" b="1" dirty="0"/>
+              <a:t>FCFS</a:t>
+            </a:r>
+            <a:r>
+              <a:rPr lang="ja-JP" altLang="en-US" sz="2600" b="1" dirty="0"/>
+              <a:t>」、「所有者優先」、「ぷりえんぷしょん」の</a:t>
+            </a:r>
+            <a:r>
+              <a:rPr lang="en-US" altLang="ja-JP" sz="2600" b="1" dirty="0"/>
+              <a:t>3</a:t>
+            </a:r>
+            <a:r>
+              <a:rPr lang="ja-JP" altLang="en-US" sz="2600" b="1" dirty="0"/>
+              <a:t>シナリオで</a:t>
+            </a:r>
+            <a:r>
+              <a:rPr lang="en-US" altLang="ja-JP" sz="2600" b="1" dirty="0"/>
+              <a:t>RQ1</a:t>
+            </a:r>
+            <a:r>
+              <a:rPr lang="ja-JP" altLang="en-US" sz="2600" b="1" dirty="0"/>
+              <a:t>のシミュレーションをループさせ、ループ毎に各ユーザが参加判断を行う</a:t>
+            </a:r>
+            <a:endParaRPr lang="en-US" altLang="ja-JP" sz="2600" b="1" dirty="0"/>
+          </a:p>
+          <a:p>
+            <a:pPr marL="0" indent="0">
+              <a:lnSpc>
+                <a:spcPct val="160000"/>
+              </a:lnSpc>
+              <a:buNone/>
+            </a:pPr>
+            <a:r>
+              <a:rPr kumimoji="1" lang="ja-JP" altLang="en-US" sz="2600" b="1" dirty="0"/>
+              <a:t>参加判断</a:t>
+            </a:r>
+            <a:endParaRPr kumimoji="1" lang="en-US" altLang="ja-JP" sz="2600" b="1" dirty="0"/>
+          </a:p>
+          <a:p>
+            <a:pPr marL="0" indent="0">
+              <a:lnSpc>
+                <a:spcPct val="160000"/>
+              </a:lnSpc>
+              <a:buNone/>
+            </a:pPr>
+            <a:r>
+              <a:rPr lang="ja-JP" altLang="en-US" sz="2600" b="1" dirty="0"/>
+              <a:t>不参加のユーザ：前回の</a:t>
+            </a:r>
+            <a:r>
+              <a:rPr lang="en-US" altLang="ja-JP" sz="2600" b="1" dirty="0"/>
+              <a:t>ACP</a:t>
+            </a:r>
+            <a:r>
+              <a:rPr lang="ja-JP" altLang="en-US" sz="2600" b="1" dirty="0"/>
+              <a:t>参加者群＋自分で１度シミュレーションを回して、ターンアラウンドタイムを測定。自分の</a:t>
+            </a:r>
+            <a:r>
+              <a:rPr lang="en-US" altLang="ja-JP" sz="2600" b="1" dirty="0"/>
+              <a:t>GPU</a:t>
+            </a:r>
+            <a:r>
+              <a:rPr lang="ja-JP" altLang="en-US" sz="2600" b="1" dirty="0"/>
+              <a:t>で行った場合と比較して早いほうを選択</a:t>
+            </a:r>
+            <a:endParaRPr lang="en-US" altLang="ja-JP" sz="2600" b="1" dirty="0"/>
+          </a:p>
+          <a:p>
+            <a:pPr marL="0" indent="0">
+              <a:lnSpc>
+                <a:spcPct val="160000"/>
+              </a:lnSpc>
+              <a:buNone/>
+            </a:pPr>
+            <a:r>
+              <a:rPr kumimoji="1" lang="ja-JP" altLang="en-US" sz="2600" b="1" dirty="0"/>
+              <a:t>参加のユーザ：前回の</a:t>
+            </a:r>
+            <a:r>
+              <a:rPr kumimoji="1" lang="en-US" altLang="ja-JP" sz="2600" b="1" dirty="0"/>
+              <a:t>ACP</a:t>
+            </a:r>
+            <a:r>
+              <a:rPr kumimoji="1" lang="ja-JP" altLang="en-US" sz="2600" b="1" dirty="0"/>
+              <a:t>での平均ターンアラウンドタイムと自分一人での比較する</a:t>
+            </a:r>
+            <a:endParaRPr kumimoji="1" lang="en-US" altLang="ja-JP" sz="2600" b="1" dirty="0"/>
+          </a:p>
+          <a:p>
+            <a:pPr marL="0" indent="0">
+              <a:lnSpc>
+                <a:spcPct val="160000"/>
+              </a:lnSpc>
+              <a:buNone/>
+            </a:pPr>
+            <a:r>
+              <a:rPr lang="ja-JP" altLang="en-US" sz="2600" b="1" dirty="0"/>
+              <a:t>最初のループはランダムで参加させ、全ユーザーが選択を変更しなくなった時点で終了して、最終的な参加者を評価</a:t>
+            </a:r>
+            <a:endParaRPr kumimoji="1" lang="en-US" altLang="ja-JP" sz="2600" b="1" dirty="0"/>
+          </a:p>
+          <a:p>
+            <a:pPr marL="0" indent="0">
+              <a:buNone/>
+            </a:pPr>
+            <a:endParaRPr kumimoji="1" lang="ja-JP" altLang="en-US" b="1" dirty="0">
+              <a:solidFill>
+                <a:schemeClr val="accent3">
+                  <a:lumMod val="75000"/>
+                </a:schemeClr>
+              </a:solidFill>
+            </a:endParaRPr>
+          </a:p>
+        </p:txBody>
+      </p:sp>
       <p:sp>
         <p:nvSpPr>
           <p:cNvPr id="4" name="スライド番号プレースホルダー 3">
             <a:extLst>
               <a:ext uri="{FF2B5EF4-FFF2-40B4-BE49-F238E27FC236}">
-                <a16:creationId xmlns:a16="http://schemas.microsoft.com/office/drawing/2014/main" id="{09F9951A-6AF3-3F19-70CA-A6F5979A68FA}"/>
+                <a16:creationId xmlns:a16="http://schemas.microsoft.com/office/drawing/2014/main" id="{11E220AF-AD77-EDA2-CFF8-25A71A459026}"/>
               </a:ext>
             </a:extLst>
           </p:cNvPr>
@@ -17661,46 +20602,24 @@
             <p:ph type="sldNum" sz="quarter" idx="12"/>
           </p:nvPr>
         </p:nvSpPr>
-        <p:spPr>
-          <a:xfrm>
-            <a:off x="11160803" y="277657"/>
-            <a:ext cx="838200" cy="365125"/>
-          </a:xfrm>
-        </p:spPr>
+        <p:spPr/>
         <p:txBody>
-          <a:bodyPr anchor="ctr">
-            <a:normAutofit/>
-          </a:bodyPr>
+          <a:bodyPr/>
           <a:lstStyle/>
           <a:p>
-            <a:pPr>
-              <a:lnSpc>
-                <a:spcPct val="90000"/>
-              </a:lnSpc>
-              <a:spcAft>
-                <a:spcPts val="600"/>
-              </a:spcAft>
-            </a:pPr>
             <a:fld id="{8D1BC46D-89B1-41A3-BBA1-F56BEABD0A90}" type="slidenum">
               <a:rPr lang="ja-JP" altLang="en-US" smtClean="0"/>
-              <a:pPr>
-                <a:lnSpc>
-                  <a:spcPct val="90000"/>
-                </a:lnSpc>
-                <a:spcAft>
-                  <a:spcPts val="600"/>
-                </a:spcAft>
-              </a:pPr>
+              <a:pPr/>
               <a:t>9</a:t>
             </a:fld>
-            <a:endParaRPr lang="ja-JP" altLang="en-US"/>
+            <a:endParaRPr lang="ja-JP" altLang="en-US" dirty="0"/>
           </a:p>
         </p:txBody>
       </p:sp>
     </p:spTree>
     <p:extLst>
       <p:ext uri="{BB962C8B-B14F-4D97-AF65-F5344CB8AC3E}">
-        <p14:creationId xmlns:p14="http://schemas.microsoft.com/office/powerpoint/2010/main" val="2103166186"/>
+        <p14:creationId xmlns:p14="http://schemas.microsoft.com/office/powerpoint/2010/main" val="646169899"/>
       </p:ext>
     </p:extLst>
   </p:cSld>

--- a/中間発表資料_櫻井.pptx
+++ b/中間発表資料_櫻井.pptx
@@ -5,7 +5,7 @@
     <p:sldMasterId id="2147483648" r:id="rId4"/>
   </p:sldMasterIdLst>
   <p:notesMasterIdLst>
-    <p:notesMasterId r:id="rId18"/>
+    <p:notesMasterId r:id="rId17"/>
   </p:notesMasterIdLst>
   <p:sldIdLst>
     <p:sldId id="258" r:id="rId5"/>
@@ -17,10 +17,9 @@
     <p:sldId id="265" r:id="rId11"/>
     <p:sldId id="266" r:id="rId12"/>
     <p:sldId id="263" r:id="rId13"/>
-    <p:sldId id="267" r:id="rId14"/>
-    <p:sldId id="268" r:id="rId15"/>
-    <p:sldId id="269" r:id="rId16"/>
-    <p:sldId id="270" r:id="rId17"/>
+    <p:sldId id="268" r:id="rId14"/>
+    <p:sldId id="269" r:id="rId15"/>
+    <p:sldId id="271" r:id="rId16"/>
   </p:sldIdLst>
   <p:sldSz cx="12192000" cy="6858000"/>
   <p:notesSz cx="6858000" cy="9144000"/>
@@ -130,8 +129,8 @@
 <file path=ppt/revisionInfo.xml><?xml version="1.0" encoding="utf-8"?>
 <p1510:revInfo xmlns:a="http://schemas.openxmlformats.org/drawingml/2006/main" xmlns:r="http://schemas.openxmlformats.org/officeDocument/2006/relationships" xmlns:p1510="http://schemas.microsoft.com/office/powerpoint/2015/10/main">
   <p1510:revLst>
-    <p1510:client id="{2E99751D-F2DD-4B76-9ADD-4A6FC4E75F7E}" v="1372" dt="2026-01-20T02:04:06.522"/>
-    <p1510:client id="{390B67A8-517E-4E9D-9737-5E2DCCA11E90}" v="50" dt="2026-01-20T05:49:11.730"/>
+    <p1510:client id="{26FFD076-9043-4C2D-9E0E-7558AD92A9C3}" v="187" dt="2026-01-21T02:21:51.166"/>
+    <p1510:client id="{390B67A8-517E-4E9D-9737-5E2DCCA11E90}" v="65" dt="2026-01-20T08:50:58.677"/>
   </p1510:revLst>
 </p1510:revInfo>
 </file>
@@ -139,9 +138,85 @@
 <file path=ppt/changesInfos/changesInfo1.xml><?xml version="1.0" encoding="utf-8"?>
 <pc:chgInfo xmlns:a="http://schemas.openxmlformats.org/drawingml/2006/main" xmlns:r="http://schemas.openxmlformats.org/officeDocument/2006/relationships" xmlns:ac="http://schemas.microsoft.com/office/drawing/2013/main/command" xmlns:pc="http://schemas.microsoft.com/office/powerpoint/2013/main/command">
   <pc:docChgLst>
+    <pc:chgData name="翔琉 櫻井" userId="9696856e3d08c427" providerId="LiveId" clId="{BAD5A919-B9F7-4C11-84F2-2D1243327977}"/>
+    <pc:docChg chg="modSld modMainMaster">
+      <pc:chgData name="翔琉 櫻井" userId="9696856e3d08c427" providerId="LiveId" clId="{BAD5A919-B9F7-4C11-84F2-2D1243327977}" dt="2026-01-21T02:24:40.998" v="1077" actId="1076"/>
+      <pc:docMkLst>
+        <pc:docMk/>
+      </pc:docMkLst>
+      <pc:sldChg chg="modNotesTx">
+        <pc:chgData name="翔琉 櫻井" userId="9696856e3d08c427" providerId="LiveId" clId="{BAD5A919-B9F7-4C11-84F2-2D1243327977}" dt="2026-01-21T01:32:41.622" v="348" actId="20577"/>
+        <pc:sldMkLst>
+          <pc:docMk/>
+          <pc:sldMk cId="71332995" sldId="257"/>
+        </pc:sldMkLst>
+      </pc:sldChg>
+      <pc:sldChg chg="modNotesTx">
+        <pc:chgData name="翔琉 櫻井" userId="9696856e3d08c427" providerId="LiveId" clId="{BAD5A919-B9F7-4C11-84F2-2D1243327977}" dt="2026-01-21T01:34:17.418" v="394" actId="20577"/>
+        <pc:sldMkLst>
+          <pc:docMk/>
+          <pc:sldMk cId="1560374770" sldId="259"/>
+        </pc:sldMkLst>
+      </pc:sldChg>
+      <pc:sldChg chg="modNotesTx">
+        <pc:chgData name="翔琉 櫻井" userId="9696856e3d08c427" providerId="LiveId" clId="{BAD5A919-B9F7-4C11-84F2-2D1243327977}" dt="2026-01-21T01:23:08.962" v="218" actId="20577"/>
+        <pc:sldMkLst>
+          <pc:docMk/>
+          <pc:sldMk cId="1912879306" sldId="261"/>
+        </pc:sldMkLst>
+      </pc:sldChg>
+      <pc:sldChg chg="modNotesTx">
+        <pc:chgData name="翔琉 櫻井" userId="9696856e3d08c427" providerId="LiveId" clId="{BAD5A919-B9F7-4C11-84F2-2D1243327977}" dt="2026-01-21T01:26:08.550" v="252" actId="20577"/>
+        <pc:sldMkLst>
+          <pc:docMk/>
+          <pc:sldMk cId="2103166186" sldId="266"/>
+        </pc:sldMkLst>
+      </pc:sldChg>
+      <pc:sldChg chg="modSp mod modNotesTx">
+        <pc:chgData name="翔琉 櫻井" userId="9696856e3d08c427" providerId="LiveId" clId="{BAD5A919-B9F7-4C11-84F2-2D1243327977}" dt="2026-01-21T01:58:27.325" v="1032" actId="20577"/>
+        <pc:sldMkLst>
+          <pc:docMk/>
+          <pc:sldMk cId="1108715131" sldId="269"/>
+        </pc:sldMkLst>
+        <pc:spChg chg="mod">
+          <ac:chgData name="翔琉 櫻井" userId="9696856e3d08c427" providerId="LiveId" clId="{BAD5A919-B9F7-4C11-84F2-2D1243327977}" dt="2026-01-21T00:56:21.375" v="12" actId="20577"/>
+          <ac:spMkLst>
+            <pc:docMk/>
+            <pc:sldMk cId="1108715131" sldId="269"/>
+            <ac:spMk id="3" creationId="{C25B94AA-472C-E1A1-1C84-B63E0A8F320E}"/>
+          </ac:spMkLst>
+        </pc:spChg>
+      </pc:sldChg>
+      <pc:sldMasterChg chg="modSldLayout">
+        <pc:chgData name="翔琉 櫻井" userId="9696856e3d08c427" providerId="LiveId" clId="{BAD5A919-B9F7-4C11-84F2-2D1243327977}" dt="2026-01-21T02:24:40.998" v="1077" actId="1076"/>
+        <pc:sldMasterMkLst>
+          <pc:docMk/>
+          <pc:sldMasterMk cId="3623714491" sldId="2147483648"/>
+        </pc:sldMasterMkLst>
+        <pc:sldLayoutChg chg="addSp modSp mod">
+          <pc:chgData name="翔琉 櫻井" userId="9696856e3d08c427" providerId="LiveId" clId="{BAD5A919-B9F7-4C11-84F2-2D1243327977}" dt="2026-01-21T02:24:40.998" v="1077" actId="1076"/>
+          <pc:sldLayoutMkLst>
+            <pc:docMk/>
+            <pc:sldMasterMk cId="3623714491" sldId="2147483648"/>
+            <pc:sldLayoutMk cId="2775203085" sldId="2147483649"/>
+          </pc:sldLayoutMkLst>
+          <pc:spChg chg="add mod">
+            <ac:chgData name="翔琉 櫻井" userId="9696856e3d08c427" providerId="LiveId" clId="{BAD5A919-B9F7-4C11-84F2-2D1243327977}" dt="2026-01-21T02:24:40.998" v="1077" actId="1076"/>
+            <ac:spMkLst>
+              <pc:docMk/>
+              <pc:sldMasterMk cId="3623714491" sldId="2147483648"/>
+              <pc:sldLayoutMk cId="2775203085" sldId="2147483649"/>
+              <ac:spMk id="5" creationId="{2F2C4110-5C2F-A0CF-CEEF-A040395BCB53}"/>
+            </ac:spMkLst>
+          </pc:spChg>
+        </pc:sldLayoutChg>
+      </pc:sldMasterChg>
+    </pc:docChg>
+  </pc:docChgLst>
+  <pc:docChgLst>
     <pc:chgData name="翔琉 櫻井" userId="9696856e3d08c427" providerId="LiveId" clId="{BD309D27-4A6C-4473-87BA-473DBBF66F9B}"/>
     <pc:docChg chg="undo custSel addSld delSld modSld sldOrd">
-      <pc:chgData name="翔琉 櫻井" userId="9696856e3d08c427" providerId="LiveId" clId="{BD309D27-4A6C-4473-87BA-473DBBF66F9B}" dt="2026-01-20T06:54:31.821" v="2964" actId="1076"/>
+      <pc:chgData name="翔琉 櫻井" userId="9696856e3d08c427" providerId="LiveId" clId="{BD309D27-4A6C-4473-87BA-473DBBF66F9B}" dt="2026-01-20T08:52:09.028" v="5031" actId="1076"/>
       <pc:docMkLst>
         <pc:docMk/>
       </pc:docMkLst>
@@ -159,92 +234,12 @@
             <ac:spMk id="3" creationId="{AFE4376B-0BE6-DC44-9A92-9FB4E9E793D6}"/>
           </ac:spMkLst>
         </pc:spChg>
-        <pc:spChg chg="del">
-          <ac:chgData name="翔琉 櫻井" userId="9696856e3d08c427" providerId="LiveId" clId="{BD309D27-4A6C-4473-87BA-473DBBF66F9B}" dt="2026-01-19T23:09:59.569" v="1597" actId="478"/>
-          <ac:spMkLst>
-            <pc:docMk/>
-            <pc:sldMk cId="71332995" sldId="257"/>
-            <ac:spMk id="6" creationId="{A6D35D8F-E0C6-2AE4-E8B0-B5B9AD741F25}"/>
-          </ac:spMkLst>
-        </pc:spChg>
-        <pc:spChg chg="del">
-          <ac:chgData name="翔琉 櫻井" userId="9696856e3d08c427" providerId="LiveId" clId="{BD309D27-4A6C-4473-87BA-473DBBF66F9B}" dt="2026-01-19T23:10:07.690" v="1601" actId="478"/>
-          <ac:spMkLst>
-            <pc:docMk/>
-            <pc:sldMk cId="71332995" sldId="257"/>
-            <ac:spMk id="7" creationId="{9FC13006-623A-99E8-E109-7C1F47B4D9CF}"/>
-          </ac:spMkLst>
-        </pc:spChg>
-        <pc:spChg chg="del">
-          <ac:chgData name="翔琉 櫻井" userId="9696856e3d08c427" providerId="LiveId" clId="{BD309D27-4A6C-4473-87BA-473DBBF66F9B}" dt="2026-01-19T23:10:08.451" v="1602" actId="478"/>
-          <ac:spMkLst>
-            <pc:docMk/>
-            <pc:sldMk cId="71332995" sldId="257"/>
-            <ac:spMk id="8" creationId="{8F9C7C88-EA5F-029E-69B3-5CD6AB429918}"/>
-          </ac:spMkLst>
-        </pc:spChg>
         <pc:spChg chg="mod">
           <ac:chgData name="翔琉 櫻井" userId="9696856e3d08c427" providerId="LiveId" clId="{BD309D27-4A6C-4473-87BA-473DBBF66F9B}" dt="2026-01-19T23:16:14.989" v="1685" actId="207"/>
           <ac:spMkLst>
             <pc:docMk/>
             <pc:sldMk cId="71332995" sldId="257"/>
             <ac:spMk id="9" creationId="{21A731A3-5876-7CD9-AD8C-2EF1AD31AA8E}"/>
-          </ac:spMkLst>
-        </pc:spChg>
-        <pc:spChg chg="add del mod">
-          <ac:chgData name="翔琉 櫻井" userId="9696856e3d08c427" providerId="LiveId" clId="{BD309D27-4A6C-4473-87BA-473DBBF66F9B}" dt="2026-01-19T22:55:27.268" v="1239" actId="21"/>
-          <ac:spMkLst>
-            <pc:docMk/>
-            <pc:sldMk cId="71332995" sldId="257"/>
-            <ac:spMk id="13" creationId="{F930A552-FE9C-877A-0A5D-ED52488A3F2D}"/>
-          </ac:spMkLst>
-        </pc:spChg>
-        <pc:spChg chg="add del mod">
-          <ac:chgData name="翔琉 櫻井" userId="9696856e3d08c427" providerId="LiveId" clId="{BD309D27-4A6C-4473-87BA-473DBBF66F9B}" dt="2026-01-19T22:55:27.268" v="1239" actId="21"/>
-          <ac:spMkLst>
-            <pc:docMk/>
-            <pc:sldMk cId="71332995" sldId="257"/>
-            <ac:spMk id="14" creationId="{783DD397-B5AA-1E2A-2F80-B043A53CD8AC}"/>
-          </ac:spMkLst>
-        </pc:spChg>
-        <pc:spChg chg="add del mod">
-          <ac:chgData name="翔琉 櫻井" userId="9696856e3d08c427" providerId="LiveId" clId="{BD309D27-4A6C-4473-87BA-473DBBF66F9B}" dt="2026-01-19T22:55:27.268" v="1239" actId="21"/>
-          <ac:spMkLst>
-            <pc:docMk/>
-            <pc:sldMk cId="71332995" sldId="257"/>
-            <ac:spMk id="15" creationId="{5D8D94C2-D9A6-B06A-2989-87D8C8F81AA5}"/>
-          </ac:spMkLst>
-        </pc:spChg>
-        <pc:spChg chg="add del mod">
-          <ac:chgData name="翔琉 櫻井" userId="9696856e3d08c427" providerId="LiveId" clId="{BD309D27-4A6C-4473-87BA-473DBBF66F9B}" dt="2026-01-19T22:55:27.268" v="1239" actId="21"/>
-          <ac:spMkLst>
-            <pc:docMk/>
-            <pc:sldMk cId="71332995" sldId="257"/>
-            <ac:spMk id="16" creationId="{B75BD28C-69A6-2F04-284D-1D8B903B1C41}"/>
-          </ac:spMkLst>
-        </pc:spChg>
-        <pc:spChg chg="add del mod">
-          <ac:chgData name="翔琉 櫻井" userId="9696856e3d08c427" providerId="LiveId" clId="{BD309D27-4A6C-4473-87BA-473DBBF66F9B}" dt="2026-01-19T22:55:27.268" v="1239" actId="21"/>
-          <ac:spMkLst>
-            <pc:docMk/>
-            <pc:sldMk cId="71332995" sldId="257"/>
-            <ac:spMk id="17" creationId="{F8A84338-9A2C-E49C-0CCD-8DB8B815D523}"/>
-          </ac:spMkLst>
-        </pc:spChg>
-        <pc:spChg chg="mod">
-          <ac:chgData name="翔琉 櫻井" userId="9696856e3d08c427" providerId="LiveId" clId="{BD309D27-4A6C-4473-87BA-473DBBF66F9B}" dt="2026-01-19T22:55:23.093" v="1238"/>
-          <ac:spMkLst>
-            <pc:docMk/>
-            <pc:sldMk cId="71332995" sldId="257"/>
-            <ac:spMk id="19" creationId="{BE2D9F2C-E01D-0B30-0645-0EA6C932F823}"/>
-          </ac:spMkLst>
-        </pc:spChg>
-        <pc:spChg chg="mod">
-          <ac:chgData name="翔琉 櫻井" userId="9696856e3d08c427" providerId="LiveId" clId="{BD309D27-4A6C-4473-87BA-473DBBF66F9B}" dt="2026-01-19T22:55:23.093" v="1238"/>
-          <ac:spMkLst>
-            <pc:docMk/>
-            <pc:sldMk cId="71332995" sldId="257"/>
-            <ac:spMk id="20" creationId="{FF75518D-AD20-F246-6D6A-EB21BC847A6B}"/>
           </ac:spMkLst>
         </pc:spChg>
         <pc:spChg chg="add mod ord">
@@ -271,22 +266,6 @@
             <ac:spMk id="23" creationId="{0E3A94D9-8DA9-314B-FCD9-8E91040FBF5B}"/>
           </ac:spMkLst>
         </pc:spChg>
-        <pc:grpChg chg="del">
-          <ac:chgData name="翔琉 櫻井" userId="9696856e3d08c427" providerId="LiveId" clId="{BD309D27-4A6C-4473-87BA-473DBBF66F9B}" dt="2026-01-19T23:10:09.492" v="1603" actId="478"/>
-          <ac:grpSpMkLst>
-            <pc:docMk/>
-            <pc:sldMk cId="71332995" sldId="257"/>
-            <ac:grpSpMk id="10" creationId="{E3786FA9-2FAB-9036-2708-AA9220354B01}"/>
-          </ac:grpSpMkLst>
-        </pc:grpChg>
-        <pc:grpChg chg="add del mod">
-          <ac:chgData name="翔琉 櫻井" userId="9696856e3d08c427" providerId="LiveId" clId="{BD309D27-4A6C-4473-87BA-473DBBF66F9B}" dt="2026-01-19T22:55:27.268" v="1239" actId="21"/>
-          <ac:grpSpMkLst>
-            <pc:docMk/>
-            <pc:sldMk cId="71332995" sldId="257"/>
-            <ac:grpSpMk id="18" creationId="{71974747-3C92-9A45-AE82-E699A88FB7AC}"/>
-          </ac:grpSpMkLst>
-        </pc:grpChg>
       </pc:sldChg>
       <pc:sldChg chg="modSp mod">
         <pc:chgData name="翔琉 櫻井" userId="9696856e3d08c427" providerId="LiveId" clId="{BD309D27-4A6C-4473-87BA-473DBBF66F9B}" dt="2026-01-20T05:49:11.715" v="2949" actId="1076"/>
@@ -325,14 +304,6 @@
           <pc:docMk/>
           <pc:sldMk cId="2634224573" sldId="260"/>
         </pc:sldMkLst>
-        <pc:spChg chg="del">
-          <ac:chgData name="翔琉 櫻井" userId="9696856e3d08c427" providerId="LiveId" clId="{BD309D27-4A6C-4473-87BA-473DBBF66F9B}" dt="2026-01-19T19:36:49.792" v="1" actId="478"/>
-          <ac:spMkLst>
-            <pc:docMk/>
-            <pc:sldMk cId="2634224573" sldId="260"/>
-            <ac:spMk id="38" creationId="{2323660B-C3FF-DBCF-9C8C-8EC04DE7D714}"/>
-          </ac:spMkLst>
-        </pc:spChg>
         <pc:spChg chg="mod">
           <ac:chgData name="翔琉 櫻井" userId="9696856e3d08c427" providerId="LiveId" clId="{BD309D27-4A6C-4473-87BA-473DBBF66F9B}" dt="2026-01-19T23:53:26.788" v="2357" actId="1076"/>
           <ac:spMkLst>
@@ -341,52 +312,12 @@
             <ac:spMk id="39" creationId="{140A9F7B-5094-1145-CABD-B246C3FDD88B}"/>
           </ac:spMkLst>
         </pc:spChg>
-        <pc:spChg chg="del">
-          <ac:chgData name="翔琉 櫻井" userId="9696856e3d08c427" providerId="LiveId" clId="{BD309D27-4A6C-4473-87BA-473DBBF66F9B}" dt="2026-01-19T19:36:47.807" v="0" actId="478"/>
-          <ac:spMkLst>
-            <pc:docMk/>
-            <pc:sldMk cId="2634224573" sldId="260"/>
-            <ac:spMk id="40" creationId="{1D0508A6-5A08-327D-D3F6-789B0A6AEAF2}"/>
-          </ac:spMkLst>
-        </pc:spChg>
         <pc:spChg chg="mod">
           <ac:chgData name="翔琉 櫻井" userId="9696856e3d08c427" providerId="LiveId" clId="{BD309D27-4A6C-4473-87BA-473DBBF66F9B}" dt="2026-01-19T23:54:07.585" v="2379" actId="20577"/>
           <ac:spMkLst>
             <pc:docMk/>
             <pc:sldMk cId="2634224573" sldId="260"/>
             <ac:spMk id="41" creationId="{E324E133-541E-36FF-73C0-02DDB9A8A616}"/>
-          </ac:spMkLst>
-        </pc:spChg>
-        <pc:spChg chg="del mod">
-          <ac:chgData name="翔琉 櫻井" userId="9696856e3d08c427" providerId="LiveId" clId="{BD309D27-4A6C-4473-87BA-473DBBF66F9B}" dt="2026-01-19T23:45:18.757" v="2240" actId="478"/>
-          <ac:spMkLst>
-            <pc:docMk/>
-            <pc:sldMk cId="2634224573" sldId="260"/>
-            <ac:spMk id="42" creationId="{94A8698C-1A40-2AA7-68F5-7525FD1852D4}"/>
-          </ac:spMkLst>
-        </pc:spChg>
-        <pc:spChg chg="del mod">
-          <ac:chgData name="翔琉 櫻井" userId="9696856e3d08c427" providerId="LiveId" clId="{BD309D27-4A6C-4473-87BA-473DBBF66F9B}" dt="2026-01-19T23:53:56.348" v="2372" actId="478"/>
-          <ac:spMkLst>
-            <pc:docMk/>
-            <pc:sldMk cId="2634224573" sldId="260"/>
-            <ac:spMk id="43" creationId="{7F07CBD8-4098-805B-DFF2-227230662982}"/>
-          </ac:spMkLst>
-        </pc:spChg>
-        <pc:spChg chg="del mod">
-          <ac:chgData name="翔琉 櫻井" userId="9696856e3d08c427" providerId="LiveId" clId="{BD309D27-4A6C-4473-87BA-473DBBF66F9B}" dt="2026-01-19T23:52:15.173" v="2335" actId="478"/>
-          <ac:spMkLst>
-            <pc:docMk/>
-            <pc:sldMk cId="2634224573" sldId="260"/>
-            <ac:spMk id="44" creationId="{3ABCF111-B1C3-DF2D-8039-54A2823E6A99}"/>
-          </ac:spMkLst>
-        </pc:spChg>
-        <pc:spChg chg="del mod">
-          <ac:chgData name="翔琉 櫻井" userId="9696856e3d08c427" providerId="LiveId" clId="{BD309D27-4A6C-4473-87BA-473DBBF66F9B}" dt="2026-01-19T23:52:16.453" v="2336" actId="478"/>
-          <ac:spMkLst>
-            <pc:docMk/>
-            <pc:sldMk cId="2634224573" sldId="260"/>
-            <ac:spMk id="45" creationId="{7E99F142-395C-7C6A-B330-5ED1446BAB62}"/>
           </ac:spMkLst>
         </pc:spChg>
         <pc:spChg chg="mod">
@@ -403,30 +334,6 @@
             <pc:docMk/>
             <pc:sldMk cId="2634224573" sldId="260"/>
             <ac:spMk id="47" creationId="{8C922CC7-B019-5A58-8C17-809C4B6A356E}"/>
-          </ac:spMkLst>
-        </pc:spChg>
-        <pc:spChg chg="del mod">
-          <ac:chgData name="翔琉 櫻井" userId="9696856e3d08c427" providerId="LiveId" clId="{BD309D27-4A6C-4473-87BA-473DBBF66F9B}" dt="2026-01-19T23:52:13.869" v="2334" actId="478"/>
-          <ac:spMkLst>
-            <pc:docMk/>
-            <pc:sldMk cId="2634224573" sldId="260"/>
-            <ac:spMk id="48" creationId="{31A2437B-2C74-B685-402D-DF5D19DD46BC}"/>
-          </ac:spMkLst>
-        </pc:spChg>
-        <pc:spChg chg="del">
-          <ac:chgData name="翔琉 櫻井" userId="9696856e3d08c427" providerId="LiveId" clId="{BD309D27-4A6C-4473-87BA-473DBBF66F9B}" dt="2026-01-19T22:40:03.893" v="1015" actId="478"/>
-          <ac:spMkLst>
-            <pc:docMk/>
-            <pc:sldMk cId="2634224573" sldId="260"/>
-            <ac:spMk id="49" creationId="{6394D0D0-ED61-4FD0-50D8-D8498098B279}"/>
-          </ac:spMkLst>
-        </pc:spChg>
-        <pc:spChg chg="add del mod">
-          <ac:chgData name="翔琉 櫻井" userId="9696856e3d08c427" providerId="LiveId" clId="{BD309D27-4A6C-4473-87BA-473DBBF66F9B}" dt="2026-01-19T23:53:36.405" v="2358" actId="478"/>
-          <ac:spMkLst>
-            <pc:docMk/>
-            <pc:sldMk cId="2634224573" sldId="260"/>
-            <ac:spMk id="50" creationId="{71E07194-10CD-D51A-ECDD-4799DAAEE10E}"/>
           </ac:spMkLst>
         </pc:spChg>
       </pc:sldChg>
@@ -485,13 +392,21 @@
         </pc:spChg>
       </pc:sldChg>
       <pc:sldChg chg="modSp mod">
-        <pc:chgData name="翔琉 櫻井" userId="9696856e3d08c427" providerId="LiveId" clId="{BD309D27-4A6C-4473-87BA-473DBBF66F9B}" dt="2026-01-19T22:29:00.266" v="986" actId="207"/>
+        <pc:chgData name="翔琉 櫻井" userId="9696856e3d08c427" providerId="LiveId" clId="{BD309D27-4A6C-4473-87BA-473DBBF66F9B}" dt="2026-01-20T07:34:31.826" v="3266" actId="113"/>
         <pc:sldMkLst>
           <pc:docMk/>
           <pc:sldMk cId="646169899" sldId="263"/>
         </pc:sldMkLst>
         <pc:spChg chg="mod">
-          <ac:chgData name="翔琉 櫻井" userId="9696856e3d08c427" providerId="LiveId" clId="{BD309D27-4A6C-4473-87BA-473DBBF66F9B}" dt="2026-01-19T22:29:00.266" v="986" actId="207"/>
+          <ac:chgData name="翔琉 櫻井" userId="9696856e3d08c427" providerId="LiveId" clId="{BD309D27-4A6C-4473-87BA-473DBBF66F9B}" dt="2026-01-20T07:11:16.349" v="3015" actId="20577"/>
+          <ac:spMkLst>
+            <pc:docMk/>
+            <pc:sldMk cId="646169899" sldId="263"/>
+            <ac:spMk id="2" creationId="{113F3A42-9F33-C969-1239-8E61272F5176}"/>
+          </ac:spMkLst>
+        </pc:spChg>
+        <pc:spChg chg="mod">
+          <ac:chgData name="翔琉 櫻井" userId="9696856e3d08c427" providerId="LiveId" clId="{BD309D27-4A6C-4473-87BA-473DBBF66F9B}" dt="2026-01-20T07:34:31.826" v="3266" actId="113"/>
           <ac:spMkLst>
             <pc:docMk/>
             <pc:sldMk cId="646169899" sldId="263"/>
@@ -513,126 +428,6 @@
             <ac:spMk id="2" creationId="{180D6731-8F52-8303-E837-6C30E2DAF3F1}"/>
           </ac:spMkLst>
         </pc:spChg>
-        <pc:spChg chg="del mod">
-          <ac:chgData name="翔琉 櫻井" userId="9696856e3d08c427" providerId="LiveId" clId="{BD309D27-4A6C-4473-87BA-473DBBF66F9B}" dt="2026-01-19T20:40:02.093" v="69" actId="22"/>
-          <ac:spMkLst>
-            <pc:docMk/>
-            <pc:sldMk cId="2369393797" sldId="264"/>
-            <ac:spMk id="3" creationId="{B91221D6-1888-3BD3-0C60-DAAB3F599524}"/>
-          </ac:spMkLst>
-        </pc:spChg>
-        <pc:spChg chg="mod ord">
-          <ac:chgData name="翔琉 櫻井" userId="9696856e3d08c427" providerId="LiveId" clId="{BD309D27-4A6C-4473-87BA-473DBBF66F9B}" dt="2026-01-19T21:14:11.769" v="245" actId="26606"/>
-          <ac:spMkLst>
-            <pc:docMk/>
-            <pc:sldMk cId="2369393797" sldId="264"/>
-            <ac:spMk id="4" creationId="{53A8B102-914F-34F8-C02C-2BFD153011B6}"/>
-          </ac:spMkLst>
-        </pc:spChg>
-        <pc:spChg chg="add del mod">
-          <ac:chgData name="翔琉 櫻井" userId="9696856e3d08c427" providerId="LiveId" clId="{BD309D27-4A6C-4473-87BA-473DBBF66F9B}" dt="2026-01-19T20:49:02.950" v="137" actId="21"/>
-          <ac:spMkLst>
-            <pc:docMk/>
-            <pc:sldMk cId="2369393797" sldId="264"/>
-            <ac:spMk id="9" creationId="{E221A8E1-EA11-1126-3023-712944A98EF5}"/>
-          </ac:spMkLst>
-        </pc:spChg>
-        <pc:spChg chg="add del mod">
-          <ac:chgData name="翔琉 櫻井" userId="9696856e3d08c427" providerId="LiveId" clId="{BD309D27-4A6C-4473-87BA-473DBBF66F9B}" dt="2026-01-19T21:14:00.439" v="239" actId="478"/>
-          <ac:spMkLst>
-            <pc:docMk/>
-            <pc:sldMk cId="2369393797" sldId="264"/>
-            <ac:spMk id="11" creationId="{CD4139A9-5511-CDC9-8D72-B8590820BC1A}"/>
-          </ac:spMkLst>
-        </pc:spChg>
-        <pc:spChg chg="add mod ord">
-          <ac:chgData name="翔琉 櫻井" userId="9696856e3d08c427" providerId="LiveId" clId="{BD309D27-4A6C-4473-87BA-473DBBF66F9B}" dt="2026-01-19T23:31:07.850" v="1902" actId="207"/>
-          <ac:spMkLst>
-            <pc:docMk/>
-            <pc:sldMk cId="2369393797" sldId="264"/>
-            <ac:spMk id="15" creationId="{F3328CBF-D74E-3AB9-7946-A1C171BBCA79}"/>
-          </ac:spMkLst>
-        </pc:spChg>
-        <pc:spChg chg="add del mod">
-          <ac:chgData name="翔琉 櫻井" userId="9696856e3d08c427" providerId="LiveId" clId="{BD309D27-4A6C-4473-87BA-473DBBF66F9B}" dt="2026-01-19T23:31:17.547" v="1903" actId="478"/>
-          <ac:spMkLst>
-            <pc:docMk/>
-            <pc:sldMk cId="2369393797" sldId="264"/>
-            <ac:spMk id="16" creationId="{8B3CC8A9-A667-888C-64BC-DA85E739F43D}"/>
-          </ac:spMkLst>
-        </pc:spChg>
-        <pc:spChg chg="add del mod">
-          <ac:chgData name="翔琉 櫻井" userId="9696856e3d08c427" providerId="LiveId" clId="{BD309D27-4A6C-4473-87BA-473DBBF66F9B}" dt="2026-01-19T23:31:19.202" v="1904" actId="478"/>
-          <ac:spMkLst>
-            <pc:docMk/>
-            <pc:sldMk cId="2369393797" sldId="264"/>
-            <ac:spMk id="17" creationId="{723FF006-AC3C-9F0F-585E-E0E398CC0A37}"/>
-          </ac:spMkLst>
-        </pc:spChg>
-        <pc:spChg chg="add mod">
-          <ac:chgData name="翔琉 櫻井" userId="9696856e3d08c427" providerId="LiveId" clId="{BD309D27-4A6C-4473-87BA-473DBBF66F9B}" dt="2026-01-19T23:31:23.500" v="1906" actId="1076"/>
-          <ac:spMkLst>
-            <pc:docMk/>
-            <pc:sldMk cId="2369393797" sldId="264"/>
-            <ac:spMk id="18" creationId="{0AD4D2E4-1716-1468-4DE6-084A4A7667CC}"/>
-          </ac:spMkLst>
-        </pc:spChg>
-        <pc:spChg chg="add mod">
-          <ac:chgData name="翔琉 櫻井" userId="9696856e3d08c427" providerId="LiveId" clId="{BD309D27-4A6C-4473-87BA-473DBBF66F9B}" dt="2026-01-19T23:31:27.132" v="1908" actId="1076"/>
-          <ac:spMkLst>
-            <pc:docMk/>
-            <pc:sldMk cId="2369393797" sldId="264"/>
-            <ac:spMk id="19" creationId="{AF4B5952-F251-8A67-25D9-45A7DB4504E4}"/>
-          </ac:spMkLst>
-        </pc:spChg>
-        <pc:spChg chg="add mod">
-          <ac:chgData name="翔琉 櫻井" userId="9696856e3d08c427" providerId="LiveId" clId="{BD309D27-4A6C-4473-87BA-473DBBF66F9B}" dt="2026-01-19T23:31:38.716" v="1910" actId="1076"/>
-          <ac:spMkLst>
-            <pc:docMk/>
-            <pc:sldMk cId="2369393797" sldId="264"/>
-            <ac:spMk id="20" creationId="{3454BBFA-7D45-E658-F8E6-2D5DD8B9F3E4}"/>
-          </ac:spMkLst>
-        </pc:spChg>
-        <pc:spChg chg="add mod">
-          <ac:chgData name="翔琉 櫻井" userId="9696856e3d08c427" providerId="LiveId" clId="{BD309D27-4A6C-4473-87BA-473DBBF66F9B}" dt="2026-01-19T23:31:43.523" v="1912" actId="1076"/>
-          <ac:spMkLst>
-            <pc:docMk/>
-            <pc:sldMk cId="2369393797" sldId="264"/>
-            <ac:spMk id="21" creationId="{A50AA3F1-5578-B3A2-E5AF-0BAD8C1D16B3}"/>
-          </ac:spMkLst>
-        </pc:spChg>
-        <pc:spChg chg="add mod">
-          <ac:chgData name="翔琉 櫻井" userId="9696856e3d08c427" providerId="LiveId" clId="{BD309D27-4A6C-4473-87BA-473DBBF66F9B}" dt="2026-01-19T23:31:47.955" v="1914" actId="1076"/>
-          <ac:spMkLst>
-            <pc:docMk/>
-            <pc:sldMk cId="2369393797" sldId="264"/>
-            <ac:spMk id="22" creationId="{7CC6D493-6DEE-8DB5-D92E-60E356A14BE3}"/>
-          </ac:spMkLst>
-        </pc:spChg>
-        <pc:picChg chg="add del mod">
-          <ac:chgData name="翔琉 櫻井" userId="9696856e3d08c427" providerId="LiveId" clId="{BD309D27-4A6C-4473-87BA-473DBBF66F9B}" dt="2026-01-19T21:10:24.086" v="221" actId="21"/>
-          <ac:picMkLst>
-            <pc:docMk/>
-            <pc:sldMk cId="2369393797" sldId="264"/>
-            <ac:picMk id="6" creationId="{04691579-E29F-3821-2738-5BBBB22581F6}"/>
-          </ac:picMkLst>
-        </pc:picChg>
-        <pc:picChg chg="add del mod ord modCrop">
-          <ac:chgData name="翔琉 櫻井" userId="9696856e3d08c427" providerId="LiveId" clId="{BD309D27-4A6C-4473-87BA-473DBBF66F9B}" dt="2026-01-19T21:13:37.156" v="232" actId="478"/>
-          <ac:picMkLst>
-            <pc:docMk/>
-            <pc:sldMk cId="2369393797" sldId="264"/>
-            <ac:picMk id="8" creationId="{FC0177EA-EDC7-D7B4-2D47-D789E431667E}"/>
-          </ac:picMkLst>
-        </pc:picChg>
-        <pc:picChg chg="add del mod">
-          <ac:chgData name="翔琉 櫻井" userId="9696856e3d08c427" providerId="LiveId" clId="{BD309D27-4A6C-4473-87BA-473DBBF66F9B}" dt="2026-01-19T21:13:42.021" v="234" actId="478"/>
-          <ac:picMkLst>
-            <pc:docMk/>
-            <pc:sldMk cId="2369393797" sldId="264"/>
-            <ac:picMk id="12" creationId="{23FAF5C5-B4A3-0729-027D-75989DBECC3C}"/>
-          </ac:picMkLst>
-        </pc:picChg>
         <pc:picChg chg="add del mod modCrop">
           <ac:chgData name="翔琉 櫻井" userId="9696856e3d08c427" providerId="LiveId" clId="{BD309D27-4A6C-4473-87BA-473DBBF66F9B}" dt="2026-01-20T03:20:00.218" v="2425" actId="478"/>
           <ac:picMkLst>
@@ -664,14 +459,6 @@
             <ac:spMk id="2" creationId="{4566B3D1-161C-F037-0DA7-B0CB974F353A}"/>
           </ac:spMkLst>
         </pc:spChg>
-        <pc:spChg chg="del">
-          <ac:chgData name="翔琉 櫻井" userId="9696856e3d08c427" providerId="LiveId" clId="{BD309D27-4A6C-4473-87BA-473DBBF66F9B}" dt="2026-01-19T20:49:05.167" v="138"/>
-          <ac:spMkLst>
-            <pc:docMk/>
-            <pc:sldMk cId="443401420" sldId="265"/>
-            <ac:spMk id="3" creationId="{36779C58-D178-F7D2-BA54-1BB3471C0627}"/>
-          </ac:spMkLst>
-        </pc:spChg>
         <pc:spChg chg="add mod">
           <ac:chgData name="翔琉 櫻井" userId="9696856e3d08c427" providerId="LiveId" clId="{BD309D27-4A6C-4473-87BA-473DBBF66F9B}" dt="2026-01-19T22:30:19.850" v="999" actId="113"/>
           <ac:spMkLst>
@@ -680,14 +467,6 @@
             <ac:spMk id="9" creationId="{E221A8E1-EA11-1126-3023-712944A98EF5}"/>
           </ac:spMkLst>
         </pc:spChg>
-        <pc:picChg chg="add del mod modCrop">
-          <ac:chgData name="翔琉 櫻井" userId="9696856e3d08c427" providerId="LiveId" clId="{BD309D27-4A6C-4473-87BA-473DBBF66F9B}" dt="2026-01-19T22:08:22.530" v="394" actId="21"/>
-          <ac:picMkLst>
-            <pc:docMk/>
-            <pc:sldMk cId="443401420" sldId="265"/>
-            <ac:picMk id="6" creationId="{222E254B-5CC7-4481-9F40-1FE5B26FF33E}"/>
-          </ac:picMkLst>
-        </pc:picChg>
         <pc:picChg chg="add del mod modCrop">
           <ac:chgData name="翔琉 櫻井" userId="9696856e3d08c427" providerId="LiveId" clId="{BD309D27-4A6C-4473-87BA-473DBBF66F9B}" dt="2026-01-20T03:18:19.993" v="2411" actId="478"/>
           <ac:picMkLst>
@@ -719,28 +498,12 @@
             <ac:spMk id="2" creationId="{9F12D26F-B7BC-5F6A-BDA3-E65D2788B134}"/>
           </ac:spMkLst>
         </pc:spChg>
-        <pc:spChg chg="del">
-          <ac:chgData name="翔琉 櫻井" userId="9696856e3d08c427" providerId="LiveId" clId="{BD309D27-4A6C-4473-87BA-473DBBF66F9B}" dt="2026-01-19T21:10:26.117" v="222"/>
-          <ac:spMkLst>
-            <pc:docMk/>
-            <pc:sldMk cId="2103166186" sldId="266"/>
-            <ac:spMk id="3" creationId="{C74E004E-2B38-6194-33B9-9A3E2EAFFA70}"/>
-          </ac:spMkLst>
-        </pc:spChg>
         <pc:spChg chg="mod ord">
           <ac:chgData name="翔琉 櫻井" userId="9696856e3d08c427" providerId="LiveId" clId="{BD309D27-4A6C-4473-87BA-473DBBF66F9B}" dt="2026-01-19T21:10:35.533" v="223" actId="26606"/>
           <ac:spMkLst>
             <pc:docMk/>
             <pc:sldMk cId="2103166186" sldId="266"/>
             <ac:spMk id="4" creationId="{09F9951A-6AF3-3F19-70CA-A6F5979A68FA}"/>
-          </ac:spMkLst>
-        </pc:spChg>
-        <pc:spChg chg="add del">
-          <ac:chgData name="翔琉 櫻井" userId="9696856e3d08c427" providerId="LiveId" clId="{BD309D27-4A6C-4473-87BA-473DBBF66F9B}" dt="2026-01-19T23:32:32.542" v="1916" actId="478"/>
-          <ac:spMkLst>
-            <pc:docMk/>
-            <pc:sldMk cId="2103166186" sldId="266"/>
-            <ac:spMk id="5" creationId="{7887E9BB-5ACB-162D-652F-6C661C1573FF}"/>
           </ac:spMkLst>
         </pc:spChg>
         <pc:spChg chg="add mod">
@@ -856,14 +619,14 @@
           </ac:picMkLst>
         </pc:picChg>
       </pc:sldChg>
-      <pc:sldChg chg="modSp new mod">
-        <pc:chgData name="翔琉 櫻井" userId="9696856e3d08c427" providerId="LiveId" clId="{BD309D27-4A6C-4473-87BA-473DBBF66F9B}" dt="2026-01-19T23:27:05.766" v="1748" actId="20577"/>
+      <pc:sldChg chg="modSp new del mod">
+        <pc:chgData name="翔琉 櫻井" userId="9696856e3d08c427" providerId="LiveId" clId="{BD309D27-4A6C-4473-87BA-473DBBF66F9B}" dt="2026-01-20T07:37:10.452" v="3271" actId="2696"/>
         <pc:sldMkLst>
           <pc:docMk/>
           <pc:sldMk cId="575384196" sldId="267"/>
         </pc:sldMkLst>
         <pc:spChg chg="mod">
-          <ac:chgData name="翔琉 櫻井" userId="9696856e3d08c427" providerId="LiveId" clId="{BD309D27-4A6C-4473-87BA-473DBBF66F9B}" dt="2026-01-19T23:27:05.766" v="1748" actId="20577"/>
+          <ac:chgData name="翔琉 櫻井" userId="9696856e3d08c427" providerId="LiveId" clId="{BD309D27-4A6C-4473-87BA-473DBBF66F9B}" dt="2026-01-20T07:32:53.026" v="3228" actId="20577"/>
           <ac:spMkLst>
             <pc:docMk/>
             <pc:sldMk cId="575384196" sldId="267"/>
@@ -871,23 +634,78 @@
           </ac:spMkLst>
         </pc:spChg>
       </pc:sldChg>
-      <pc:sldChg chg="modSp new mod">
-        <pc:chgData name="翔琉 櫻井" userId="9696856e3d08c427" providerId="LiveId" clId="{BD309D27-4A6C-4473-87BA-473DBBF66F9B}" dt="2026-01-19T23:27:26.645" v="1759" actId="20577"/>
+      <pc:sldChg chg="add del">
+        <pc:chgData name="翔琉 櫻井" userId="9696856e3d08c427" providerId="LiveId" clId="{BD309D27-4A6C-4473-87BA-473DBBF66F9B}" dt="2026-01-20T07:37:31.070" v="3273"/>
+        <pc:sldMkLst>
+          <pc:docMk/>
+          <pc:sldMk cId="1311417383" sldId="267"/>
+        </pc:sldMkLst>
+      </pc:sldChg>
+      <pc:sldChg chg="addSp delSp modSp new mod">
+        <pc:chgData name="翔琉 櫻井" userId="9696856e3d08c427" providerId="LiveId" clId="{BD309D27-4A6C-4473-87BA-473DBBF66F9B}" dt="2026-01-20T07:59:40.709" v="3964" actId="20577"/>
         <pc:sldMkLst>
           <pc:docMk/>
           <pc:sldMk cId="814091284" sldId="268"/>
         </pc:sldMkLst>
         <pc:spChg chg="mod">
-          <ac:chgData name="翔琉 櫻井" userId="9696856e3d08c427" providerId="LiveId" clId="{BD309D27-4A6C-4473-87BA-473DBBF66F9B}" dt="2026-01-19T23:27:26.645" v="1759" actId="20577"/>
+          <ac:chgData name="翔琉 櫻井" userId="9696856e3d08c427" providerId="LiveId" clId="{BD309D27-4A6C-4473-87BA-473DBBF66F9B}" dt="2026-01-20T07:36:20.123" v="3270" actId="20577"/>
           <ac:spMkLst>
             <pc:docMk/>
             <pc:sldMk cId="814091284" sldId="268"/>
             <ac:spMk id="2" creationId="{86AB8C8D-11A8-96A5-361A-59F9257AFEB8}"/>
           </ac:spMkLst>
         </pc:spChg>
+        <pc:spChg chg="del mod">
+          <ac:chgData name="翔琉 櫻井" userId="9696856e3d08c427" providerId="LiveId" clId="{BD309D27-4A6C-4473-87BA-473DBBF66F9B}" dt="2026-01-20T07:37:41.398" v="3275" actId="478"/>
+          <ac:spMkLst>
+            <pc:docMk/>
+            <pc:sldMk cId="814091284" sldId="268"/>
+            <ac:spMk id="3" creationId="{C78D26AC-AF5A-200F-16DA-147EDA531C5D}"/>
+          </ac:spMkLst>
+        </pc:spChg>
+        <pc:spChg chg="add mod">
+          <ac:chgData name="翔琉 櫻井" userId="9696856e3d08c427" providerId="LiveId" clId="{BD309D27-4A6C-4473-87BA-473DBBF66F9B}" dt="2026-01-20T07:59:40.709" v="3964" actId="20577"/>
+          <ac:spMkLst>
+            <pc:docMk/>
+            <pc:sldMk cId="814091284" sldId="268"/>
+            <ac:spMk id="7" creationId="{6D53FC36-53EB-EFD9-7D0E-D4A01FFB676B}"/>
+          </ac:spMkLst>
+        </pc:spChg>
+        <pc:spChg chg="add del mod">
+          <ac:chgData name="翔琉 櫻井" userId="9696856e3d08c427" providerId="LiveId" clId="{BD309D27-4A6C-4473-87BA-473DBBF66F9B}" dt="2026-01-20T07:56:31.115" v="3825" actId="21"/>
+          <ac:spMkLst>
+            <pc:docMk/>
+            <pc:sldMk cId="814091284" sldId="268"/>
+            <ac:spMk id="9" creationId="{F54FDCF0-C453-9702-A3E7-809C763B461B}"/>
+          </ac:spMkLst>
+        </pc:spChg>
+        <pc:spChg chg="add mod">
+          <ac:chgData name="翔琉 櫻井" userId="9696856e3d08c427" providerId="LiveId" clId="{BD309D27-4A6C-4473-87BA-473DBBF66F9B}" dt="2026-01-20T07:57:35.694" v="3875" actId="207"/>
+          <ac:spMkLst>
+            <pc:docMk/>
+            <pc:sldMk cId="814091284" sldId="268"/>
+            <ac:spMk id="10" creationId="{71DE01A5-1F87-13D2-22A3-7244C2BF70CC}"/>
+          </ac:spMkLst>
+        </pc:spChg>
+        <pc:picChg chg="add mod">
+          <ac:chgData name="翔琉 櫻井" userId="9696856e3d08c427" providerId="LiveId" clId="{BD309D27-4A6C-4473-87BA-473DBBF66F9B}" dt="2026-01-20T07:47:18.315" v="3664" actId="1076"/>
+          <ac:picMkLst>
+            <pc:docMk/>
+            <pc:sldMk cId="814091284" sldId="268"/>
+            <ac:picMk id="6" creationId="{FC770F7D-DB3A-0F51-F2DC-47BD908C4EB3}"/>
+          </ac:picMkLst>
+        </pc:picChg>
+        <pc:picChg chg="add mod modCrop">
+          <ac:chgData name="翔琉 櫻井" userId="9696856e3d08c427" providerId="LiveId" clId="{BD309D27-4A6C-4473-87BA-473DBBF66F9B}" dt="2026-01-20T07:59:06.865" v="3962" actId="1076"/>
+          <ac:picMkLst>
+            <pc:docMk/>
+            <pc:sldMk cId="814091284" sldId="268"/>
+            <ac:picMk id="8" creationId="{711870A2-7CA9-83FD-1644-E0A7D535178A}"/>
+          </ac:picMkLst>
+        </pc:picChg>
       </pc:sldChg>
       <pc:sldChg chg="modSp new mod">
-        <pc:chgData name="翔琉 櫻井" userId="9696856e3d08c427" providerId="LiveId" clId="{BD309D27-4A6C-4473-87BA-473DBBF66F9B}" dt="2026-01-19T23:27:56.773" v="1784" actId="20577"/>
+        <pc:chgData name="翔琉 櫻井" userId="9696856e3d08c427" providerId="LiveId" clId="{BD309D27-4A6C-4473-87BA-473DBBF66F9B}" dt="2026-01-20T08:48:32.143" v="4849" actId="20577"/>
         <pc:sldMkLst>
           <pc:docMk/>
           <pc:sldMk cId="1108715131" sldId="269"/>
@@ -900,6 +718,92 @@
             <ac:spMk id="2" creationId="{4EFC2CDA-0986-B2B7-C320-6B8DE47B33BA}"/>
           </ac:spMkLst>
         </pc:spChg>
+        <pc:spChg chg="mod">
+          <ac:chgData name="翔琉 櫻井" userId="9696856e3d08c427" providerId="LiveId" clId="{BD309D27-4A6C-4473-87BA-473DBBF66F9B}" dt="2026-01-20T08:48:32.143" v="4849" actId="20577"/>
+          <ac:spMkLst>
+            <pc:docMk/>
+            <pc:sldMk cId="1108715131" sldId="269"/>
+            <ac:spMk id="3" creationId="{C25B94AA-472C-E1A1-1C84-B63E0A8F320E}"/>
+          </ac:spMkLst>
+        </pc:spChg>
+      </pc:sldChg>
+      <pc:sldChg chg="modSp del mod">
+        <pc:chgData name="翔琉 櫻井" userId="9696856e3d08c427" providerId="LiveId" clId="{BD309D27-4A6C-4473-87BA-473DBBF66F9B}" dt="2026-01-20T08:48:47.253" v="4850" actId="2696"/>
+        <pc:sldMkLst>
+          <pc:docMk/>
+          <pc:sldMk cId="1870586370" sldId="270"/>
+        </pc:sldMkLst>
+        <pc:spChg chg="mod">
+          <ac:chgData name="翔琉 櫻井" userId="9696856e3d08c427" providerId="LiveId" clId="{BD309D27-4A6C-4473-87BA-473DBBF66F9B}" dt="2026-01-20T07:09:26.591" v="2965" actId="1076"/>
+          <ac:spMkLst>
+            <pc:docMk/>
+            <pc:sldMk cId="1870586370" sldId="270"/>
+            <ac:spMk id="9" creationId="{4767024B-45F0-84FF-5784-44921D6318D2}"/>
+          </ac:spMkLst>
+        </pc:spChg>
+      </pc:sldChg>
+      <pc:sldChg chg="addSp delSp modSp new mod ord">
+        <pc:chgData name="翔琉 櫻井" userId="9696856e3d08c427" providerId="LiveId" clId="{BD309D27-4A6C-4473-87BA-473DBBF66F9B}" dt="2026-01-20T08:52:09.028" v="5031" actId="1076"/>
+        <pc:sldMkLst>
+          <pc:docMk/>
+          <pc:sldMk cId="174713650" sldId="271"/>
+        </pc:sldMkLst>
+        <pc:spChg chg="mod">
+          <ac:chgData name="翔琉 櫻井" userId="9696856e3d08c427" providerId="LiveId" clId="{BD309D27-4A6C-4473-87BA-473DBBF66F9B}" dt="2026-01-20T08:49:36.206" v="4879" actId="20577"/>
+          <ac:spMkLst>
+            <pc:docMk/>
+            <pc:sldMk cId="174713650" sldId="271"/>
+            <ac:spMk id="2" creationId="{0A7CEE94-C8BD-432D-227E-4DF14238166B}"/>
+          </ac:spMkLst>
+        </pc:spChg>
+        <pc:spChg chg="del">
+          <ac:chgData name="翔琉 櫻井" userId="9696856e3d08c427" providerId="LiveId" clId="{BD309D27-4A6C-4473-87BA-473DBBF66F9B}" dt="2026-01-20T08:00:24.669" v="3966" actId="22"/>
+          <ac:spMkLst>
+            <pc:docMk/>
+            <pc:sldMk cId="174713650" sldId="271"/>
+            <ac:spMk id="3" creationId="{E9A23E27-F17E-25B1-0D11-A5E31A3C5A36}"/>
+          </ac:spMkLst>
+        </pc:spChg>
+        <pc:spChg chg="add del mod">
+          <ac:chgData name="翔琉 櫻井" userId="9696856e3d08c427" providerId="LiveId" clId="{BD309D27-4A6C-4473-87BA-473DBBF66F9B}" dt="2026-01-20T08:48:58.884" v="4854"/>
+          <ac:spMkLst>
+            <pc:docMk/>
+            <pc:sldMk cId="174713650" sldId="271"/>
+            <ac:spMk id="9" creationId="{0745994F-17B7-AF4A-1D98-954F518DCBBC}"/>
+          </ac:spMkLst>
+        </pc:spChg>
+        <pc:spChg chg="add mod">
+          <ac:chgData name="翔琉 櫻井" userId="9696856e3d08c427" providerId="LiveId" clId="{BD309D27-4A6C-4473-87BA-473DBBF66F9B}" dt="2026-01-20T08:50:50.563" v="4905" actId="14100"/>
+          <ac:spMkLst>
+            <pc:docMk/>
+            <pc:sldMk cId="174713650" sldId="271"/>
+            <ac:spMk id="10" creationId="{4371705F-DC47-321C-1FD8-B2BF6D9055E7}"/>
+          </ac:spMkLst>
+        </pc:spChg>
+        <pc:spChg chg="add mod">
+          <ac:chgData name="翔琉 櫻井" userId="9696856e3d08c427" providerId="LiveId" clId="{BD309D27-4A6C-4473-87BA-473DBBF66F9B}" dt="2026-01-20T08:52:09.028" v="5031" actId="1076"/>
+          <ac:spMkLst>
+            <pc:docMk/>
+            <pc:sldMk cId="174713650" sldId="271"/>
+            <ac:spMk id="11" creationId="{1999D2C5-EBF8-C681-A231-F96EE1099F1C}"/>
+          </ac:spMkLst>
+        </pc:spChg>
+        <pc:picChg chg="add mod ord">
+          <ac:chgData name="翔琉 櫻井" userId="9696856e3d08c427" providerId="LiveId" clId="{BD309D27-4A6C-4473-87BA-473DBBF66F9B}" dt="2026-01-20T08:49:07.868" v="4856" actId="1076"/>
+          <ac:picMkLst>
+            <pc:docMk/>
+            <pc:sldMk cId="174713650" sldId="271"/>
+            <ac:picMk id="6" creationId="{545F06DE-931C-EFDC-EE0B-B643B84F27D9}"/>
+          </ac:picMkLst>
+        </pc:picChg>
+        <pc:picChg chg="add del mod">
+          <ac:chgData name="翔琉 櫻井" userId="9696856e3d08c427" providerId="LiveId" clId="{BD309D27-4A6C-4473-87BA-473DBBF66F9B}" dt="2026-01-20T08:00:44.596" v="3995" actId="478"/>
+          <ac:picMkLst>
+            <pc:docMk/>
+            <pc:sldMk cId="174713650" sldId="271"/>
+            <ac:picMk id="8" creationId="{2FCE9EB9-9A0E-8024-42D6-FF74FE6A3F76}"/>
+          </ac:picMkLst>
+        </pc:picChg>
       </pc:sldChg>
     </pc:docChg>
   </pc:docChgLst>
@@ -1301,7 +1205,7 @@
           <a:p>
             <a:fld id="{566D9647-ECF1-4A86-B476-A023641EC6F8}" type="datetimeFigureOut">
               <a:rPr kumimoji="1" lang="ja-JP" altLang="en-US" smtClean="0"/>
-              <a:t>2026/1/20</a:t>
+              <a:t>2026/1/22</a:t>
             </a:fld>
             <a:endParaRPr kumimoji="1" lang="ja-JP" altLang="en-US"/>
           </a:p>
@@ -1600,6 +1504,675 @@
 </p:notesMaster>
 </file>
 
+<file path=ppt/notesSlides/notesSlide1.xml><?xml version="1.0" encoding="utf-8"?>
+<p:notes xmlns:a="http://schemas.openxmlformats.org/drawingml/2006/main" xmlns:r="http://schemas.openxmlformats.org/officeDocument/2006/relationships" xmlns:p="http://schemas.openxmlformats.org/presentationml/2006/main">
+  <p:cSld>
+    <p:spTree>
+      <p:nvGrpSpPr>
+        <p:cNvPr id="1" name=""/>
+        <p:cNvGrpSpPr/>
+        <p:nvPr/>
+      </p:nvGrpSpPr>
+      <p:grpSpPr>
+        <a:xfrm>
+          <a:off x="0" y="0"/>
+          <a:ext cx="0" cy="0"/>
+          <a:chOff x="0" y="0"/>
+          <a:chExt cx="0" cy="0"/>
+        </a:xfrm>
+      </p:grpSpPr>
+      <p:sp>
+        <p:nvSpPr>
+          <p:cNvPr id="2" name="スライド イメージ プレースホルダー 1"/>
+          <p:cNvSpPr>
+            <a:spLocks noGrp="1" noRot="1" noChangeAspect="1"/>
+          </p:cNvSpPr>
+          <p:nvPr>
+            <p:ph type="sldImg"/>
+          </p:nvPr>
+        </p:nvSpPr>
+        <p:spPr/>
+      </p:sp>
+      <p:sp>
+        <p:nvSpPr>
+          <p:cNvPr id="3" name="ノート プレースホルダー 2"/>
+          <p:cNvSpPr>
+            <a:spLocks noGrp="1"/>
+          </p:cNvSpPr>
+          <p:nvPr>
+            <p:ph type="body" idx="1"/>
+          </p:nvPr>
+        </p:nvSpPr>
+        <p:spPr/>
+        <p:txBody>
+          <a:bodyPr/>
+          <a:lstStyle/>
+          <a:p>
+            <a:r>
+              <a:rPr kumimoji="1" lang="ja-JP" altLang="en-US"/>
+              <a:t>黄色をもう少し見やすく</a:t>
+            </a:r>
+          </a:p>
+        </p:txBody>
+      </p:sp>
+      <p:sp>
+        <p:nvSpPr>
+          <p:cNvPr id="4" name="スライド番号プレースホルダー 3"/>
+          <p:cNvSpPr>
+            <a:spLocks noGrp="1"/>
+          </p:cNvSpPr>
+          <p:nvPr>
+            <p:ph type="sldNum" sz="quarter" idx="5"/>
+          </p:nvPr>
+        </p:nvSpPr>
+        <p:spPr/>
+        <p:txBody>
+          <a:bodyPr/>
+          <a:lstStyle/>
+          <a:p>
+            <a:fld id="{074C1465-738F-4BB6-B6E4-EBA8CE2D4CD8}" type="slidenum">
+              <a:rPr kumimoji="1" lang="ja-JP" altLang="en-US" smtClean="0"/>
+              <a:t>2</a:t>
+            </a:fld>
+            <a:endParaRPr kumimoji="1" lang="ja-JP" altLang="en-US"/>
+          </a:p>
+        </p:txBody>
+      </p:sp>
+    </p:spTree>
+    <p:extLst>
+      <p:ext uri="{BB962C8B-B14F-4D97-AF65-F5344CB8AC3E}">
+        <p14:creationId xmlns:p14="http://schemas.microsoft.com/office/powerpoint/2010/main" val="2349992206"/>
+      </p:ext>
+    </p:extLst>
+  </p:cSld>
+  <p:clrMapOvr>
+    <a:masterClrMapping/>
+  </p:clrMapOvr>
+</p:notes>
+</file>
+
+<file path=ppt/notesSlides/notesSlide2.xml><?xml version="1.0" encoding="utf-8"?>
+<p:notes xmlns:a="http://schemas.openxmlformats.org/drawingml/2006/main" xmlns:r="http://schemas.openxmlformats.org/officeDocument/2006/relationships" xmlns:p="http://schemas.openxmlformats.org/presentationml/2006/main">
+  <p:cSld>
+    <p:spTree>
+      <p:nvGrpSpPr>
+        <p:cNvPr id="1" name=""/>
+        <p:cNvGrpSpPr/>
+        <p:nvPr/>
+      </p:nvGrpSpPr>
+      <p:grpSpPr>
+        <a:xfrm>
+          <a:off x="0" y="0"/>
+          <a:ext cx="0" cy="0"/>
+          <a:chOff x="0" y="0"/>
+          <a:chExt cx="0" cy="0"/>
+        </a:xfrm>
+      </p:grpSpPr>
+      <p:sp>
+        <p:nvSpPr>
+          <p:cNvPr id="2" name="スライド イメージ プレースホルダー 1"/>
+          <p:cNvSpPr>
+            <a:spLocks noGrp="1" noRot="1" noChangeAspect="1"/>
+          </p:cNvSpPr>
+          <p:nvPr>
+            <p:ph type="sldImg"/>
+          </p:nvPr>
+        </p:nvSpPr>
+        <p:spPr/>
+      </p:sp>
+      <p:sp>
+        <p:nvSpPr>
+          <p:cNvPr id="3" name="ノート プレースホルダー 2"/>
+          <p:cNvSpPr>
+            <a:spLocks noGrp="1"/>
+          </p:cNvSpPr>
+          <p:nvPr>
+            <p:ph type="body" idx="1"/>
+          </p:nvPr>
+        </p:nvSpPr>
+        <p:spPr/>
+        <p:txBody>
+          <a:bodyPr/>
+          <a:lstStyle/>
+          <a:p>
+            <a:r>
+              <a:rPr kumimoji="1" lang="ja-JP" altLang="en-US"/>
+              <a:t>もう少し</a:t>
+            </a:r>
+            <a:r>
+              <a:rPr kumimoji="1" lang="en-US" altLang="ja-JP"/>
+              <a:t>ACP</a:t>
+            </a:r>
+            <a:r>
+              <a:rPr kumimoji="1" lang="ja-JP" altLang="en-US"/>
+              <a:t>の図に手を加える</a:t>
+            </a:r>
+            <a:endParaRPr kumimoji="1" lang="en-US" altLang="ja-JP"/>
+          </a:p>
+          <a:p>
+            <a:r>
+              <a:rPr kumimoji="1" lang="ja-JP" altLang="en-US"/>
+              <a:t>研究室に残っている風にする</a:t>
+            </a:r>
+          </a:p>
+        </p:txBody>
+      </p:sp>
+      <p:sp>
+        <p:nvSpPr>
+          <p:cNvPr id="4" name="スライド番号プレースホルダー 3"/>
+          <p:cNvSpPr>
+            <a:spLocks noGrp="1"/>
+          </p:cNvSpPr>
+          <p:nvPr>
+            <p:ph type="sldNum" sz="quarter" idx="5"/>
+          </p:nvPr>
+        </p:nvSpPr>
+        <p:spPr/>
+        <p:txBody>
+          <a:bodyPr/>
+          <a:lstStyle/>
+          <a:p>
+            <a:fld id="{074C1465-738F-4BB6-B6E4-EBA8CE2D4CD8}" type="slidenum">
+              <a:rPr kumimoji="1" lang="ja-JP" altLang="en-US" smtClean="0"/>
+              <a:t>3</a:t>
+            </a:fld>
+            <a:endParaRPr kumimoji="1" lang="ja-JP" altLang="en-US"/>
+          </a:p>
+        </p:txBody>
+      </p:sp>
+    </p:spTree>
+    <p:extLst>
+      <p:ext uri="{BB962C8B-B14F-4D97-AF65-F5344CB8AC3E}">
+        <p14:creationId xmlns:p14="http://schemas.microsoft.com/office/powerpoint/2010/main" val="334831103"/>
+      </p:ext>
+    </p:extLst>
+  </p:cSld>
+  <p:clrMapOvr>
+    <a:masterClrMapping/>
+  </p:clrMapOvr>
+</p:notes>
+</file>
+
+<file path=ppt/notesSlides/notesSlide3.xml><?xml version="1.0" encoding="utf-8"?>
+<p:notes xmlns:a="http://schemas.openxmlformats.org/drawingml/2006/main" xmlns:r="http://schemas.openxmlformats.org/officeDocument/2006/relationships" xmlns:p="http://schemas.openxmlformats.org/presentationml/2006/main">
+  <p:cSld>
+    <p:spTree>
+      <p:nvGrpSpPr>
+        <p:cNvPr id="1" name=""/>
+        <p:cNvGrpSpPr/>
+        <p:nvPr/>
+      </p:nvGrpSpPr>
+      <p:grpSpPr>
+        <a:xfrm>
+          <a:off x="0" y="0"/>
+          <a:ext cx="0" cy="0"/>
+          <a:chOff x="0" y="0"/>
+          <a:chExt cx="0" cy="0"/>
+        </a:xfrm>
+      </p:grpSpPr>
+      <p:sp>
+        <p:nvSpPr>
+          <p:cNvPr id="2" name="スライド イメージ プレースホルダー 1"/>
+          <p:cNvSpPr>
+            <a:spLocks noGrp="1" noRot="1" noChangeAspect="1"/>
+          </p:cNvSpPr>
+          <p:nvPr>
+            <p:ph type="sldImg"/>
+          </p:nvPr>
+        </p:nvSpPr>
+        <p:spPr/>
+      </p:sp>
+      <p:sp>
+        <p:nvSpPr>
+          <p:cNvPr id="3" name="ノート プレースホルダー 2"/>
+          <p:cNvSpPr>
+            <a:spLocks noGrp="1"/>
+          </p:cNvSpPr>
+          <p:nvPr>
+            <p:ph type="body" idx="1"/>
+          </p:nvPr>
+        </p:nvSpPr>
+        <p:spPr/>
+        <p:txBody>
+          <a:bodyPr/>
+          <a:lstStyle/>
+          <a:p>
+            <a:r>
+              <a:rPr kumimoji="1" lang="ja-JP" altLang="en-US"/>
+              <a:t>キュー</a:t>
+            </a:r>
+          </a:p>
+        </p:txBody>
+      </p:sp>
+      <p:sp>
+        <p:nvSpPr>
+          <p:cNvPr id="4" name="スライド番号プレースホルダー 3"/>
+          <p:cNvSpPr>
+            <a:spLocks noGrp="1"/>
+          </p:cNvSpPr>
+          <p:nvPr>
+            <p:ph type="sldNum" sz="quarter" idx="5"/>
+          </p:nvPr>
+        </p:nvSpPr>
+        <p:spPr/>
+        <p:txBody>
+          <a:bodyPr/>
+          <a:lstStyle/>
+          <a:p>
+            <a:fld id="{074C1465-738F-4BB6-B6E4-EBA8CE2D4CD8}" type="slidenum">
+              <a:rPr kumimoji="1" lang="ja-JP" altLang="en-US" smtClean="0"/>
+              <a:t>5</a:t>
+            </a:fld>
+            <a:endParaRPr kumimoji="1" lang="ja-JP" altLang="en-US"/>
+          </a:p>
+        </p:txBody>
+      </p:sp>
+    </p:spTree>
+    <p:extLst>
+      <p:ext uri="{BB962C8B-B14F-4D97-AF65-F5344CB8AC3E}">
+        <p14:creationId xmlns:p14="http://schemas.microsoft.com/office/powerpoint/2010/main" val="2868919610"/>
+      </p:ext>
+    </p:extLst>
+  </p:cSld>
+  <p:clrMapOvr>
+    <a:masterClrMapping/>
+  </p:clrMapOvr>
+</p:notes>
+</file>
+
+<file path=ppt/notesSlides/notesSlide4.xml><?xml version="1.0" encoding="utf-8"?>
+<p:notes xmlns:a="http://schemas.openxmlformats.org/drawingml/2006/main" xmlns:r="http://schemas.openxmlformats.org/officeDocument/2006/relationships" xmlns:p="http://schemas.openxmlformats.org/presentationml/2006/main">
+  <p:cSld>
+    <p:spTree>
+      <p:nvGrpSpPr>
+        <p:cNvPr id="1" name=""/>
+        <p:cNvGrpSpPr/>
+        <p:nvPr/>
+      </p:nvGrpSpPr>
+      <p:grpSpPr>
+        <a:xfrm>
+          <a:off x="0" y="0"/>
+          <a:ext cx="0" cy="0"/>
+          <a:chOff x="0" y="0"/>
+          <a:chExt cx="0" cy="0"/>
+        </a:xfrm>
+      </p:grpSpPr>
+      <p:sp>
+        <p:nvSpPr>
+          <p:cNvPr id="2" name="スライド イメージ プレースホルダー 1"/>
+          <p:cNvSpPr>
+            <a:spLocks noGrp="1" noRot="1" noChangeAspect="1"/>
+          </p:cNvSpPr>
+          <p:nvPr>
+            <p:ph type="sldImg"/>
+          </p:nvPr>
+        </p:nvSpPr>
+        <p:spPr/>
+      </p:sp>
+      <p:sp>
+        <p:nvSpPr>
+          <p:cNvPr id="3" name="ノート プレースホルダー 2"/>
+          <p:cNvSpPr>
+            <a:spLocks noGrp="1"/>
+          </p:cNvSpPr>
+          <p:nvPr>
+            <p:ph type="body" idx="1"/>
+          </p:nvPr>
+        </p:nvSpPr>
+        <p:spPr/>
+        <p:txBody>
+          <a:bodyPr/>
+          <a:lstStyle/>
+          <a:p>
+            <a:endParaRPr kumimoji="1" lang="ja-JP" altLang="en-US"/>
+          </a:p>
+        </p:txBody>
+      </p:sp>
+      <p:sp>
+        <p:nvSpPr>
+          <p:cNvPr id="4" name="スライド番号プレースホルダー 3"/>
+          <p:cNvSpPr>
+            <a:spLocks noGrp="1"/>
+          </p:cNvSpPr>
+          <p:nvPr>
+            <p:ph type="sldNum" sz="quarter" idx="5"/>
+          </p:nvPr>
+        </p:nvSpPr>
+        <p:spPr/>
+        <p:txBody>
+          <a:bodyPr/>
+          <a:lstStyle/>
+          <a:p>
+            <a:fld id="{074C1465-738F-4BB6-B6E4-EBA8CE2D4CD8}" type="slidenum">
+              <a:rPr kumimoji="1" lang="ja-JP" altLang="en-US" smtClean="0"/>
+              <a:t>7</a:t>
+            </a:fld>
+            <a:endParaRPr kumimoji="1" lang="ja-JP" altLang="en-US"/>
+          </a:p>
+        </p:txBody>
+      </p:sp>
+    </p:spTree>
+    <p:extLst>
+      <p:ext uri="{BB962C8B-B14F-4D97-AF65-F5344CB8AC3E}">
+        <p14:creationId xmlns:p14="http://schemas.microsoft.com/office/powerpoint/2010/main" val="1640019617"/>
+      </p:ext>
+    </p:extLst>
+  </p:cSld>
+  <p:clrMapOvr>
+    <a:masterClrMapping/>
+  </p:clrMapOvr>
+</p:notes>
+</file>
+
+<file path=ppt/notesSlides/notesSlide5.xml><?xml version="1.0" encoding="utf-8"?>
+<p:notes xmlns:a="http://schemas.openxmlformats.org/drawingml/2006/main" xmlns:r="http://schemas.openxmlformats.org/officeDocument/2006/relationships" xmlns:p="http://schemas.openxmlformats.org/presentationml/2006/main">
+  <p:cSld>
+    <p:spTree>
+      <p:nvGrpSpPr>
+        <p:cNvPr id="1" name=""/>
+        <p:cNvGrpSpPr/>
+        <p:nvPr/>
+      </p:nvGrpSpPr>
+      <p:grpSpPr>
+        <a:xfrm>
+          <a:off x="0" y="0"/>
+          <a:ext cx="0" cy="0"/>
+          <a:chOff x="0" y="0"/>
+          <a:chExt cx="0" cy="0"/>
+        </a:xfrm>
+      </p:grpSpPr>
+      <p:sp>
+        <p:nvSpPr>
+          <p:cNvPr id="2" name="スライド イメージ プレースホルダー 1"/>
+          <p:cNvSpPr>
+            <a:spLocks noGrp="1" noRot="1" noChangeAspect="1"/>
+          </p:cNvSpPr>
+          <p:nvPr>
+            <p:ph type="sldImg"/>
+          </p:nvPr>
+        </p:nvSpPr>
+        <p:spPr/>
+      </p:sp>
+      <p:sp>
+        <p:nvSpPr>
+          <p:cNvPr id="3" name="ノート プレースホルダー 2"/>
+          <p:cNvSpPr>
+            <a:spLocks noGrp="1"/>
+          </p:cNvSpPr>
+          <p:nvPr>
+            <p:ph type="body" idx="1"/>
+          </p:nvPr>
+        </p:nvSpPr>
+        <p:spPr/>
+        <p:txBody>
+          <a:bodyPr/>
+          <a:lstStyle/>
+          <a:p>
+            <a:r>
+              <a:rPr kumimoji="1" lang="ja-JP" altLang="en-US"/>
+              <a:t>待ち時間じゃなくてターンアラウンドタイム</a:t>
+            </a:r>
+          </a:p>
+        </p:txBody>
+      </p:sp>
+      <p:sp>
+        <p:nvSpPr>
+          <p:cNvPr id="4" name="スライド番号プレースホルダー 3"/>
+          <p:cNvSpPr>
+            <a:spLocks noGrp="1"/>
+          </p:cNvSpPr>
+          <p:nvPr>
+            <p:ph type="sldNum" sz="quarter" idx="5"/>
+          </p:nvPr>
+        </p:nvSpPr>
+        <p:spPr/>
+        <p:txBody>
+          <a:bodyPr/>
+          <a:lstStyle/>
+          <a:p>
+            <a:fld id="{074C1465-738F-4BB6-B6E4-EBA8CE2D4CD8}" type="slidenum">
+              <a:rPr kumimoji="1" lang="ja-JP" altLang="en-US" smtClean="0"/>
+              <a:t>8</a:t>
+            </a:fld>
+            <a:endParaRPr kumimoji="1" lang="ja-JP" altLang="en-US"/>
+          </a:p>
+        </p:txBody>
+      </p:sp>
+    </p:spTree>
+    <p:extLst>
+      <p:ext uri="{BB962C8B-B14F-4D97-AF65-F5344CB8AC3E}">
+        <p14:creationId xmlns:p14="http://schemas.microsoft.com/office/powerpoint/2010/main" val="3596101177"/>
+      </p:ext>
+    </p:extLst>
+  </p:cSld>
+  <p:clrMapOvr>
+    <a:masterClrMapping/>
+  </p:clrMapOvr>
+</p:notes>
+</file>
+
+<file path=ppt/notesSlides/notesSlide6.xml><?xml version="1.0" encoding="utf-8"?>
+<p:notes xmlns:a="http://schemas.openxmlformats.org/drawingml/2006/main" xmlns:r="http://schemas.openxmlformats.org/officeDocument/2006/relationships" xmlns:p="http://schemas.openxmlformats.org/presentationml/2006/main">
+  <p:cSld>
+    <p:spTree>
+      <p:nvGrpSpPr>
+        <p:cNvPr id="1" name=""/>
+        <p:cNvGrpSpPr/>
+        <p:nvPr/>
+      </p:nvGrpSpPr>
+      <p:grpSpPr>
+        <a:xfrm>
+          <a:off x="0" y="0"/>
+          <a:ext cx="0" cy="0"/>
+          <a:chOff x="0" y="0"/>
+          <a:chExt cx="0" cy="0"/>
+        </a:xfrm>
+      </p:grpSpPr>
+      <p:sp>
+        <p:nvSpPr>
+          <p:cNvPr id="2" name="スライド イメージ プレースホルダー 1"/>
+          <p:cNvSpPr>
+            <a:spLocks noGrp="1" noRot="1" noChangeAspect="1"/>
+          </p:cNvSpPr>
+          <p:nvPr>
+            <p:ph type="sldImg"/>
+          </p:nvPr>
+        </p:nvSpPr>
+        <p:spPr/>
+      </p:sp>
+      <p:sp>
+        <p:nvSpPr>
+          <p:cNvPr id="3" name="ノート プレースホルダー 2"/>
+          <p:cNvSpPr>
+            <a:spLocks noGrp="1"/>
+          </p:cNvSpPr>
+          <p:nvPr>
+            <p:ph type="body" idx="1"/>
+          </p:nvPr>
+        </p:nvSpPr>
+        <p:spPr/>
+        <p:txBody>
+          <a:bodyPr/>
+          <a:lstStyle/>
+          <a:p>
+            <a:r>
+              <a:rPr kumimoji="1" lang="ja-JP" altLang="en-US"/>
+              <a:t>下西先生　グラフの説明をもうすこしうまく</a:t>
+            </a:r>
+            <a:endParaRPr kumimoji="1" lang="en-US" altLang="ja-JP"/>
+          </a:p>
+          <a:p>
+            <a:r>
+              <a:rPr kumimoji="1" lang="ja-JP" altLang="en-US"/>
+              <a:t>まとめにあわせるために、目標課題のところにプリエンティブが必要なところを持って行く</a:t>
+            </a:r>
+            <a:endParaRPr kumimoji="1" lang="en-US" altLang="ja-JP"/>
+          </a:p>
+          <a:p>
+            <a:r>
+              <a:rPr kumimoji="1" lang="en-US" altLang="ja-JP"/>
+              <a:t>ACP</a:t>
+            </a:r>
+            <a:r>
+              <a:rPr kumimoji="1" lang="ja-JP" altLang="en-US"/>
+              <a:t>の図：余剰ではないが必要ではない人でも巻き込みたい、研究室においていて、ネットワークにつながっているイメージを入れる</a:t>
+            </a:r>
+            <a:endParaRPr kumimoji="1" lang="en-US" altLang="ja-JP"/>
+          </a:p>
+          <a:p>
+            <a:r>
+              <a:rPr kumimoji="1" lang="ja-JP" altLang="en-US"/>
+              <a:t>環境設定をもう少し分かりやすく</a:t>
+            </a:r>
+            <a:endParaRPr kumimoji="1" lang="en-US" altLang="ja-JP"/>
+          </a:p>
+          <a:p>
+            <a:r>
+              <a:rPr kumimoji="1" lang="ja-JP" altLang="en-US"/>
+              <a:t>重量タスクが少なすぎる</a:t>
+            </a:r>
+            <a:endParaRPr kumimoji="1" lang="en-US" altLang="ja-JP"/>
+          </a:p>
+          <a:p>
+            <a:r>
+              <a:rPr kumimoji="1" lang="ja-JP" altLang="en-US"/>
+              <a:t>キューの説明が実際は</a:t>
+            </a:r>
+            <a:r>
+              <a:rPr kumimoji="1" lang="en-US" altLang="ja-JP"/>
+              <a:t>ACP</a:t>
+            </a:r>
+            <a:r>
+              <a:rPr kumimoji="1" lang="ja-JP" altLang="en-US"/>
+              <a:t>上にキューが積み重なるから少し誤解生みそう？</a:t>
+            </a:r>
+            <a:endParaRPr kumimoji="1" lang="en-US" altLang="ja-JP"/>
+          </a:p>
+          <a:p>
+            <a:endParaRPr kumimoji="1" lang="en-US" altLang="ja-JP"/>
+          </a:p>
+        </p:txBody>
+      </p:sp>
+      <p:sp>
+        <p:nvSpPr>
+          <p:cNvPr id="4" name="スライド番号プレースホルダー 3"/>
+          <p:cNvSpPr>
+            <a:spLocks noGrp="1"/>
+          </p:cNvSpPr>
+          <p:nvPr>
+            <p:ph type="sldNum" sz="quarter" idx="5"/>
+          </p:nvPr>
+        </p:nvSpPr>
+        <p:spPr/>
+        <p:txBody>
+          <a:bodyPr/>
+          <a:lstStyle/>
+          <a:p>
+            <a:fld id="{074C1465-738F-4BB6-B6E4-EBA8CE2D4CD8}" type="slidenum">
+              <a:rPr kumimoji="1" lang="ja-JP" altLang="en-US" smtClean="0"/>
+              <a:t>11</a:t>
+            </a:fld>
+            <a:endParaRPr kumimoji="1" lang="ja-JP" altLang="en-US"/>
+          </a:p>
+        </p:txBody>
+      </p:sp>
+    </p:spTree>
+    <p:extLst>
+      <p:ext uri="{BB962C8B-B14F-4D97-AF65-F5344CB8AC3E}">
+        <p14:creationId xmlns:p14="http://schemas.microsoft.com/office/powerpoint/2010/main" val="4205838180"/>
+      </p:ext>
+    </p:extLst>
+  </p:cSld>
+  <p:clrMapOvr>
+    <a:masterClrMapping/>
+  </p:clrMapOvr>
+</p:notes>
+</file>
+
+<file path=ppt/notesSlides/notesSlide7.xml><?xml version="1.0" encoding="utf-8"?>
+<p:notes xmlns:a="http://schemas.openxmlformats.org/drawingml/2006/main" xmlns:r="http://schemas.openxmlformats.org/officeDocument/2006/relationships" xmlns:p="http://schemas.openxmlformats.org/presentationml/2006/main">
+  <p:cSld>
+    <p:spTree>
+      <p:nvGrpSpPr>
+        <p:cNvPr id="1" name=""/>
+        <p:cNvGrpSpPr/>
+        <p:nvPr/>
+      </p:nvGrpSpPr>
+      <p:grpSpPr>
+        <a:xfrm>
+          <a:off x="0" y="0"/>
+          <a:ext cx="0" cy="0"/>
+          <a:chOff x="0" y="0"/>
+          <a:chExt cx="0" cy="0"/>
+        </a:xfrm>
+      </p:grpSpPr>
+      <p:sp>
+        <p:nvSpPr>
+          <p:cNvPr id="2" name="スライド イメージ プレースホルダー 1"/>
+          <p:cNvSpPr>
+            <a:spLocks noGrp="1" noRot="1" noChangeAspect="1"/>
+          </p:cNvSpPr>
+          <p:nvPr>
+            <p:ph type="sldImg"/>
+          </p:nvPr>
+        </p:nvSpPr>
+        <p:spPr/>
+      </p:sp>
+      <p:sp>
+        <p:nvSpPr>
+          <p:cNvPr id="3" name="ノート プレースホルダー 2"/>
+          <p:cNvSpPr>
+            <a:spLocks noGrp="1"/>
+          </p:cNvSpPr>
+          <p:nvPr>
+            <p:ph type="body" idx="1"/>
+          </p:nvPr>
+        </p:nvSpPr>
+        <p:spPr/>
+        <p:txBody>
+          <a:bodyPr/>
+          <a:lstStyle/>
+          <a:p>
+            <a:endParaRPr kumimoji="1" lang="ja-JP" altLang="en-US"/>
+          </a:p>
+        </p:txBody>
+      </p:sp>
+      <p:sp>
+        <p:nvSpPr>
+          <p:cNvPr id="4" name="スライド番号プレースホルダー 3"/>
+          <p:cNvSpPr>
+            <a:spLocks noGrp="1"/>
+          </p:cNvSpPr>
+          <p:nvPr>
+            <p:ph type="sldNum" sz="quarter" idx="5"/>
+          </p:nvPr>
+        </p:nvSpPr>
+        <p:spPr/>
+        <p:txBody>
+          <a:bodyPr/>
+          <a:lstStyle/>
+          <a:p>
+            <a:fld id="{074C1465-738F-4BB6-B6E4-EBA8CE2D4CD8}" type="slidenum">
+              <a:rPr kumimoji="1" lang="ja-JP" altLang="en-US" smtClean="0"/>
+              <a:t>12</a:t>
+            </a:fld>
+            <a:endParaRPr kumimoji="1" lang="ja-JP" altLang="en-US"/>
+          </a:p>
+        </p:txBody>
+      </p:sp>
+    </p:spTree>
+    <p:extLst>
+      <p:ext uri="{BB962C8B-B14F-4D97-AF65-F5344CB8AC3E}">
+        <p14:creationId xmlns:p14="http://schemas.microsoft.com/office/powerpoint/2010/main" val="1357172438"/>
+      </p:ext>
+    </p:extLst>
+  </p:cSld>
+  <p:clrMapOvr>
+    <a:masterClrMapping/>
+  </p:clrMapOvr>
+</p:notes>
+</file>
+
 <file path=ppt/slideLayouts/slideLayout1.xml><?xml version="1.0" encoding="utf-8"?>
 <p:sldLayout xmlns:a="http://schemas.openxmlformats.org/drawingml/2006/main" xmlns:r="http://schemas.openxmlformats.org/officeDocument/2006/relationships" xmlns:p="http://schemas.openxmlformats.org/presentationml/2006/main" preserve="1" userDrawn="1">
   <p:cSld name="タイトル スライド">
@@ -1666,7 +2239,7 @@
           </a:lstStyle>
           <a:p>
             <a:r>
-              <a:rPr kumimoji="1" lang="ja-JP" altLang="en-US" dirty="0"/>
+              <a:rPr kumimoji="1" lang="ja-JP" altLang="en-US"/>
               <a:t>発表題目</a:t>
             </a:r>
           </a:p>
@@ -1743,13 +2316,13 @@
           </a:lstStyle>
           <a:p>
             <a:r>
-              <a:rPr kumimoji="1" lang="ja-JP" altLang="en-US" dirty="0"/>
+              <a:rPr kumimoji="1" lang="ja-JP" altLang="en-US"/>
               <a:t>発表者名　大阪大学 情報科学研究科</a:t>
             </a:r>
-            <a:endParaRPr kumimoji="1" lang="en-US" altLang="ja-JP" dirty="0"/>
-          </a:p>
-          <a:p>
-            <a:endParaRPr kumimoji="1" lang="en-US" altLang="ja-JP" dirty="0"/>
+            <a:endParaRPr kumimoji="1" lang="en-US" altLang="ja-JP"/>
+          </a:p>
+          <a:p>
+            <a:endParaRPr kumimoji="1" lang="en-US" altLang="ja-JP"/>
           </a:p>
         </p:txBody>
       </p:sp>
@@ -1789,17 +2362,17 @@
           </a:lstStyle>
           <a:p>
             <a:r>
-              <a:rPr lang="ja-JP" altLang="en-US" dirty="0"/>
+              <a:rPr lang="ja-JP" altLang="en-US"/>
               <a:t>会議名</a:t>
             </a:r>
-            <a:endParaRPr lang="en-US" altLang="ja-JP" dirty="0"/>
+            <a:endParaRPr lang="en-US" altLang="ja-JP"/>
           </a:p>
           <a:p>
             <a:fld id="{BA3EB691-FF5E-41A6-9C8B-4C4CF21B2DEE}" type="datetime1">
               <a:rPr lang="ja-JP" altLang="en-US" smtClean="0"/>
-              <a:t>2026/1/20</a:t>
+              <a:t>2026/1/22</a:t>
             </a:fld>
-            <a:endParaRPr lang="ja-JP" altLang="en-US" dirty="0"/>
+            <a:endParaRPr lang="ja-JP" altLang="en-US"/>
           </a:p>
         </p:txBody>
       </p:sp>
@@ -1876,25 +2449,73 @@
           <a:p>
             <a:pPr lvl="0"/>
             <a:r>
-              <a:rPr kumimoji="1" lang="ja-JP" altLang="en-US" dirty="0"/>
+              <a:rPr kumimoji="1" lang="ja-JP" altLang="en-US"/>
               <a:t>共著者名　所属</a:t>
             </a:r>
-            <a:endParaRPr kumimoji="1" lang="en-US" altLang="ja-JP" dirty="0"/>
+            <a:endParaRPr kumimoji="1" lang="en-US" altLang="ja-JP"/>
           </a:p>
           <a:p>
             <a:pPr lvl="0"/>
             <a:r>
-              <a:rPr kumimoji="1" lang="ja-JP" altLang="en-US" dirty="0"/>
+              <a:rPr kumimoji="1" lang="ja-JP" altLang="en-US"/>
               <a:t>共著者名　所属</a:t>
             </a:r>
-            <a:endParaRPr kumimoji="1" lang="en-US" altLang="ja-JP" dirty="0"/>
+            <a:endParaRPr kumimoji="1" lang="en-US" altLang="ja-JP"/>
           </a:p>
           <a:p>
             <a:pPr lvl="0"/>
             <a:r>
-              <a:rPr kumimoji="1" lang="ja-JP" altLang="en-US" dirty="0"/>
+              <a:rPr kumimoji="1" lang="ja-JP" altLang="en-US"/>
               <a:t>共著者名　所属</a:t>
             </a:r>
+          </a:p>
+        </p:txBody>
+      </p:sp>
+      <p:sp>
+        <p:nvSpPr>
+          <p:cNvPr id="5" name="テキスト ボックス 4">
+            <a:extLst>
+              <a:ext uri="{FF2B5EF4-FFF2-40B4-BE49-F238E27FC236}">
+                <a16:creationId xmlns:a16="http://schemas.microsoft.com/office/drawing/2014/main" id="{2F2C4110-5C2F-A0CF-CEEF-A040395BCB53}"/>
+              </a:ext>
+            </a:extLst>
+          </p:cNvPr>
+          <p:cNvSpPr txBox="1"/>
+          <p:nvPr userDrawn="1"/>
+        </p:nvSpPr>
+        <p:spPr>
+          <a:xfrm>
+            <a:off x="9614913" y="6137114"/>
+            <a:ext cx="1334604" cy="276999"/>
+          </a:xfrm>
+          <a:prstGeom prst="rect">
+            <a:avLst/>
+          </a:prstGeom>
+          <a:solidFill>
+            <a:schemeClr val="bg1"/>
+          </a:solidFill>
+        </p:spPr>
+        <p:txBody>
+          <a:bodyPr wrap="square" rtlCol="0">
+            <a:spAutoFit/>
+          </a:bodyPr>
+          <a:lstStyle/>
+          <a:p>
+            <a:r>
+              <a:rPr kumimoji="1" lang="en-US" altLang="ja-JP" sz="1200">
+                <a:solidFill>
+                  <a:srgbClr val="979085"/>
+                </a:solidFill>
+                <a:latin typeface="Edwardian Script ITC" panose="030303020407070D0804" pitchFamily="66" charset="0"/>
+              </a:rPr>
+              <a:t>The University of Osaka</a:t>
+            </a:r>
+            <a:endParaRPr kumimoji="1" lang="ja-JP" altLang="en-US" sz="1200">
+              <a:solidFill>
+                <a:srgbClr val="979085"/>
+              </a:solidFill>
+              <a:latin typeface="Edwardian Script ITC" panose="030303020407070D0804" pitchFamily="66" charset="0"/>
+            </a:endParaRPr>
           </a:p>
         </p:txBody>
       </p:sp>
@@ -1983,7 +2604,6 @@
               <a:rPr kumimoji="1" lang="ja-JP" altLang="en-US"/>
               <a:t>マスター タイトルの書式設定</a:t>
             </a:r>
-            <a:endParaRPr kumimoji="1" lang="ja-JP" altLang="en-US" dirty="0"/>
           </a:p>
         </p:txBody>
       </p:sp>
@@ -2120,7 +2740,7 @@
               <a:pPr/>
               <a:t>‹#›</a:t>
             </a:fld>
-            <a:endParaRPr lang="ja-JP" altLang="en-US" dirty="0"/>
+            <a:endParaRPr lang="ja-JP" altLang="en-US"/>
           </a:p>
         </p:txBody>
       </p:sp>
@@ -2208,7 +2828,6 @@
               <a:rPr kumimoji="1" lang="ja-JP" altLang="en-US"/>
               <a:t>マスター タイトルの書式設定</a:t>
             </a:r>
-            <a:endParaRPr kumimoji="1" lang="ja-JP" altLang="en-US" dirty="0"/>
           </a:p>
         </p:txBody>
       </p:sp>
@@ -2240,7 +2859,7 @@
           <a:p>
             <a:pPr lvl="0"/>
             <a:r>
-              <a:rPr kumimoji="1" lang="ja-JP" altLang="en-US" dirty="0"/>
+              <a:rPr kumimoji="1" lang="ja-JP" altLang="en-US"/>
               <a:t>メッセージについての補足説明</a:t>
             </a:r>
           </a:p>
@@ -2285,7 +2904,7 @@
               <a:pPr/>
               <a:t>‹#›</a:t>
             </a:fld>
-            <a:endParaRPr lang="ja-JP" altLang="en-US" dirty="0"/>
+            <a:endParaRPr lang="ja-JP" altLang="en-US"/>
           </a:p>
         </p:txBody>
       </p:sp>
@@ -2337,7 +2956,7 @@
           </a:lstStyle>
           <a:p>
             <a:r>
-              <a:rPr lang="ja-JP" altLang="en-US" dirty="0">
+              <a:rPr lang="ja-JP" altLang="en-US">
                 <a:solidFill>
                   <a:schemeClr val="tx1"/>
                 </a:solidFill>
@@ -2431,7 +3050,6 @@
               <a:rPr kumimoji="1" lang="ja-JP" altLang="en-US"/>
               <a:t>マスター タイトルの書式設定</a:t>
             </a:r>
-            <a:endParaRPr kumimoji="1" lang="ja-JP" altLang="en-US" dirty="0"/>
           </a:p>
         </p:txBody>
       </p:sp>
@@ -2474,7 +3092,7 @@
               <a:pPr/>
               <a:t>‹#›</a:t>
             </a:fld>
-            <a:endParaRPr lang="ja-JP" altLang="en-US" dirty="0"/>
+            <a:endParaRPr lang="ja-JP" altLang="en-US"/>
           </a:p>
         </p:txBody>
       </p:sp>
@@ -2645,7 +3263,7 @@
             <a:lstStyle/>
             <a:p>
               <a:pPr algn="ctr"/>
-              <a:endParaRPr kumimoji="1" lang="ja-JP" altLang="en-US" dirty="0"/>
+              <a:endParaRPr kumimoji="1" lang="ja-JP" altLang="en-US"/>
             </a:p>
           </p:txBody>
         </p:sp>
@@ -2679,7 +3297,7 @@
             <a:p>
               <a:pPr algn="ctr"/>
               <a:r>
-                <a:rPr lang="ja-JP" altLang="en-US" sz="2800" b="1" dirty="0">
+                <a:rPr lang="ja-JP" altLang="en-US" sz="2800" b="1">
                   <a:solidFill>
                     <a:schemeClr val="bg1"/>
                   </a:solidFill>
@@ -2688,7 +3306,7 @@
                 </a:rPr>
                 <a:t>①</a:t>
               </a:r>
-              <a:endParaRPr lang="en-US" altLang="ja-JP" sz="2800" b="1" dirty="0">
+              <a:endParaRPr lang="en-US" altLang="ja-JP" sz="2800" b="1">
                 <a:solidFill>
                   <a:schemeClr val="bg1"/>
                 </a:solidFill>
@@ -2699,7 +3317,7 @@
             <a:p>
               <a:pPr algn="ctr"/>
               <a:r>
-                <a:rPr lang="ja-JP" altLang="en-US" sz="2800" b="1" dirty="0">
+                <a:rPr lang="ja-JP" altLang="en-US" sz="2800" b="1">
                   <a:solidFill>
                     <a:schemeClr val="bg1"/>
                   </a:solidFill>
@@ -2708,7 +3326,7 @@
                 </a:rPr>
                 <a:t>ひとつめ</a:t>
               </a:r>
-              <a:endParaRPr kumimoji="1" lang="ja-JP" altLang="en-US" sz="2800" b="1" dirty="0">
+              <a:endParaRPr kumimoji="1" lang="ja-JP" altLang="en-US" sz="2800" b="1">
                 <a:solidFill>
                   <a:schemeClr val="bg1"/>
                 </a:solidFill>
@@ -2865,7 +3483,7 @@
             <a:lstStyle/>
             <a:p>
               <a:pPr algn="ctr"/>
-              <a:endParaRPr kumimoji="1" lang="ja-JP" altLang="en-US" dirty="0"/>
+              <a:endParaRPr kumimoji="1" lang="ja-JP" altLang="en-US"/>
             </a:p>
           </p:txBody>
         </p:sp>
@@ -2899,7 +3517,7 @@
             <a:p>
               <a:pPr algn="ctr"/>
               <a:r>
-                <a:rPr lang="ja-JP" altLang="en-US" sz="2800" b="1" dirty="0">
+                <a:rPr lang="ja-JP" altLang="en-US" sz="2800" b="1">
                   <a:solidFill>
                     <a:schemeClr val="bg1"/>
                   </a:solidFill>
@@ -2908,7 +3526,7 @@
                 </a:rPr>
                 <a:t>③</a:t>
               </a:r>
-              <a:endParaRPr lang="en-US" altLang="ja-JP" sz="2800" b="1" dirty="0">
+              <a:endParaRPr lang="en-US" altLang="ja-JP" sz="2800" b="1">
                 <a:solidFill>
                   <a:schemeClr val="bg1"/>
                 </a:solidFill>
@@ -2919,7 +3537,7 @@
             <a:p>
               <a:pPr algn="ctr"/>
               <a:r>
-                <a:rPr lang="ja-JP" altLang="en-US" sz="2800" b="1" dirty="0">
+                <a:rPr lang="ja-JP" altLang="en-US" sz="2800" b="1">
                   <a:solidFill>
                     <a:schemeClr val="bg1"/>
                   </a:solidFill>
@@ -2928,7 +3546,7 @@
                 </a:rPr>
                 <a:t>みっつめ</a:t>
               </a:r>
-              <a:endParaRPr kumimoji="1" lang="ja-JP" altLang="en-US" sz="2800" b="1" dirty="0">
+              <a:endParaRPr kumimoji="1" lang="ja-JP" altLang="en-US" sz="2800" b="1">
                 <a:solidFill>
                   <a:schemeClr val="bg1"/>
                 </a:solidFill>
@@ -3085,7 +3703,7 @@
             <a:lstStyle/>
             <a:p>
               <a:pPr algn="ctr"/>
-              <a:endParaRPr kumimoji="1" lang="ja-JP" altLang="en-US" dirty="0"/>
+              <a:endParaRPr kumimoji="1" lang="ja-JP" altLang="en-US"/>
             </a:p>
           </p:txBody>
         </p:sp>
@@ -3119,7 +3737,7 @@
             <a:p>
               <a:pPr algn="ctr"/>
               <a:r>
-                <a:rPr lang="ja-JP" altLang="en-US" sz="2800" b="1" dirty="0">
+                <a:rPr lang="ja-JP" altLang="en-US" sz="2800" b="1">
                   <a:solidFill>
                     <a:schemeClr val="bg1"/>
                   </a:solidFill>
@@ -3128,7 +3746,7 @@
                 </a:rPr>
                 <a:t>➁</a:t>
               </a:r>
-              <a:endParaRPr lang="en-US" altLang="ja-JP" sz="2800" b="1" dirty="0">
+              <a:endParaRPr lang="en-US" altLang="ja-JP" sz="2800" b="1">
                 <a:solidFill>
                   <a:schemeClr val="bg1"/>
                 </a:solidFill>
@@ -3139,7 +3757,7 @@
             <a:p>
               <a:pPr algn="ctr"/>
               <a:r>
-                <a:rPr lang="ja-JP" altLang="en-US" sz="2800" b="1" dirty="0">
+                <a:rPr lang="ja-JP" altLang="en-US" sz="2800" b="1">
                   <a:solidFill>
                     <a:schemeClr val="bg1"/>
                   </a:solidFill>
@@ -3148,7 +3766,7 @@
                 </a:rPr>
                 <a:t>ふたつめ</a:t>
               </a:r>
-              <a:endParaRPr kumimoji="1" lang="ja-JP" altLang="en-US" sz="2800" b="1" dirty="0">
+              <a:endParaRPr kumimoji="1" lang="ja-JP" altLang="en-US" sz="2800" b="1">
                 <a:solidFill>
                   <a:schemeClr val="bg1"/>
                 </a:solidFill>
@@ -3228,7 +3846,7 @@
               <a:lstStyle/>
               <a:p>
                 <a:pPr algn="ctr"/>
-                <a:endParaRPr kumimoji="1" lang="ja-JP" altLang="en-US" dirty="0"/>
+                <a:endParaRPr kumimoji="1" lang="ja-JP" altLang="en-US"/>
               </a:p>
             </p:txBody>
           </p:sp>
@@ -3353,7 +3971,7 @@
               <a:lstStyle/>
               <a:p>
                 <a:pPr algn="ctr"/>
-                <a:endParaRPr kumimoji="1" lang="ja-JP" altLang="en-US" dirty="0"/>
+                <a:endParaRPr kumimoji="1" lang="ja-JP" altLang="en-US"/>
               </a:p>
             </p:txBody>
           </p:sp>
@@ -3428,7 +4046,7 @@
               <a:lstStyle/>
               <a:p>
                 <a:pPr algn="ctr"/>
-                <a:endParaRPr kumimoji="1" lang="ja-JP" altLang="en-US" dirty="0"/>
+                <a:endParaRPr kumimoji="1" lang="ja-JP" altLang="en-US"/>
               </a:p>
             </p:txBody>
           </p:sp>
@@ -3553,7 +4171,7 @@
               <a:lstStyle/>
               <a:p>
                 <a:pPr algn="ctr"/>
-                <a:endParaRPr kumimoji="1" lang="ja-JP" altLang="en-US" dirty="0"/>
+                <a:endParaRPr kumimoji="1" lang="ja-JP" altLang="en-US"/>
               </a:p>
             </p:txBody>
           </p:sp>
@@ -3628,7 +4246,7 @@
               <a:lstStyle/>
               <a:p>
                 <a:pPr algn="ctr"/>
-                <a:endParaRPr kumimoji="1" lang="ja-JP" altLang="en-US" dirty="0"/>
+                <a:endParaRPr kumimoji="1" lang="ja-JP" altLang="en-US"/>
               </a:p>
             </p:txBody>
           </p:sp>
@@ -3753,7 +4371,7 @@
               <a:lstStyle/>
               <a:p>
                 <a:pPr algn="ctr"/>
-                <a:endParaRPr kumimoji="1" lang="ja-JP" altLang="en-US" dirty="0"/>
+                <a:endParaRPr kumimoji="1" lang="ja-JP" altLang="en-US"/>
               </a:p>
             </p:txBody>
           </p:sp>
@@ -3788,7 +4406,7 @@
             <a:p>
               <a:pPr algn="ctr"/>
               <a:r>
-                <a:rPr lang="ja-JP" altLang="en-US" sz="2000" b="1" dirty="0">
+                <a:rPr lang="ja-JP" altLang="en-US" sz="2000" b="1">
                   <a:solidFill>
                     <a:schemeClr val="accent4"/>
                   </a:solidFill>
@@ -3797,7 +4415,7 @@
                 </a:rPr>
                 <a:t>変化</a:t>
               </a:r>
-              <a:endParaRPr lang="en-US" altLang="ja-JP" sz="2000" b="1" dirty="0">
+              <a:endParaRPr lang="en-US" altLang="ja-JP" sz="2000" b="1">
                 <a:solidFill>
                   <a:schemeClr val="accent4"/>
                 </a:solidFill>
@@ -3837,7 +4455,7 @@
             <a:p>
               <a:pPr algn="ctr"/>
               <a:r>
-                <a:rPr lang="ja-JP" altLang="en-US" sz="2000" b="1" dirty="0">
+                <a:rPr lang="ja-JP" altLang="en-US" sz="2000" b="1">
                   <a:solidFill>
                     <a:schemeClr val="accent4"/>
                   </a:solidFill>
@@ -3846,7 +4464,7 @@
                 </a:rPr>
                 <a:t>変化</a:t>
               </a:r>
-              <a:endParaRPr lang="en-US" altLang="ja-JP" sz="2000" b="1" dirty="0">
+              <a:endParaRPr lang="en-US" altLang="ja-JP" sz="2000" b="1">
                 <a:solidFill>
                   <a:schemeClr val="accent4"/>
                 </a:solidFill>
@@ -3886,7 +4504,7 @@
             <a:p>
               <a:pPr algn="ctr"/>
               <a:r>
-                <a:rPr lang="ja-JP" altLang="en-US" sz="2000" b="1" dirty="0">
+                <a:rPr lang="ja-JP" altLang="en-US" sz="2000" b="1">
                   <a:solidFill>
                     <a:schemeClr val="accent4"/>
                   </a:solidFill>
@@ -3895,7 +4513,7 @@
                 </a:rPr>
                 <a:t>変化</a:t>
               </a:r>
-              <a:endParaRPr lang="en-US" altLang="ja-JP" sz="2000" b="1" dirty="0">
+              <a:endParaRPr lang="en-US" altLang="ja-JP" sz="2000" b="1">
                 <a:solidFill>
                   <a:schemeClr val="accent4"/>
                 </a:solidFill>
@@ -4024,7 +4642,7 @@
           <a:lstStyle/>
           <a:p>
             <a:pPr algn="ctr"/>
-            <a:endParaRPr kumimoji="1" lang="ja-JP" altLang="en-US" dirty="0"/>
+            <a:endParaRPr kumimoji="1" lang="ja-JP" altLang="en-US"/>
           </a:p>
         </p:txBody>
       </p:sp>
@@ -4384,7 +5002,7 @@
           <a:p>
             <a:pPr algn="ctr"/>
             <a:r>
-              <a:rPr lang="en-US" altLang="ja-JP" b="1" dirty="0">
+              <a:rPr lang="en-US" altLang="ja-JP" b="1">
                 <a:solidFill>
                   <a:schemeClr val="bg1"/>
                 </a:solidFill>
@@ -4394,7 +5012,7 @@
               <a:t> </a:t>
             </a:r>
             <a:r>
-              <a:rPr lang="ja-JP" altLang="en-US" sz="2800" b="1" dirty="0">
+              <a:rPr lang="ja-JP" altLang="en-US" sz="2800" b="1">
                 <a:solidFill>
                   <a:schemeClr val="bg1"/>
                 </a:solidFill>
@@ -4403,7 +5021,7 @@
               </a:rPr>
               <a:t>何か</a:t>
             </a:r>
-            <a:endParaRPr lang="en-US" altLang="ja-JP" sz="2800" b="1" dirty="0">
+            <a:endParaRPr lang="en-US" altLang="ja-JP" sz="2800" b="1">
               <a:solidFill>
                 <a:schemeClr val="bg1"/>
               </a:solidFill>
@@ -4414,7 +5032,7 @@
           <a:p>
             <a:pPr algn="ctr"/>
             <a:r>
-              <a:rPr lang="ja-JP" altLang="en-US" dirty="0">
+              <a:rPr lang="ja-JP" altLang="en-US">
                 <a:solidFill>
                   <a:schemeClr val="bg1"/>
                 </a:solidFill>
@@ -4422,7 +5040,7 @@
               </a:rPr>
               <a:t>メッセージ</a:t>
             </a:r>
-            <a:endParaRPr lang="ja-JP" altLang="en-US" sz="1200" dirty="0">
+            <a:endParaRPr lang="ja-JP" altLang="en-US" sz="1200">
               <a:solidFill>
                 <a:schemeClr val="bg1"/>
               </a:solidFill>
@@ -4974,7 +5592,7 @@
           <a:lstStyle/>
           <a:p>
             <a:pPr algn="ctr"/>
-            <a:endParaRPr kumimoji="1" lang="ja-JP" altLang="en-US" dirty="0"/>
+            <a:endParaRPr kumimoji="1" lang="ja-JP" altLang="en-US"/>
           </a:p>
         </p:txBody>
       </p:sp>
@@ -5062,7 +5680,6 @@
               <a:rPr kumimoji="1" lang="ja-JP" altLang="en-US"/>
               <a:t>マスター タイトルの書式設定</a:t>
             </a:r>
-            <a:endParaRPr kumimoji="1" lang="ja-JP" altLang="en-US" dirty="0"/>
           </a:p>
         </p:txBody>
       </p:sp>
@@ -5105,7 +5722,7 @@
               <a:pPr/>
               <a:t>‹#›</a:t>
             </a:fld>
-            <a:endParaRPr lang="ja-JP" altLang="en-US" dirty="0"/>
+            <a:endParaRPr lang="ja-JP" altLang="en-US"/>
           </a:p>
         </p:txBody>
       </p:sp>
@@ -5157,7 +5774,7 @@
           </a:lstStyle>
           <a:p>
             <a:r>
-              <a:rPr lang="ja-JP" altLang="en-US" sz="3600" dirty="0"/>
+              <a:rPr lang="ja-JP" altLang="en-US" sz="3600"/>
               <a:t>寸法や色は場合に応じて調整しましょう</a:t>
             </a:r>
           </a:p>
@@ -5233,7 +5850,7 @@
             <a:lstStyle/>
             <a:p>
               <a:pPr algn="ctr"/>
-              <a:endParaRPr kumimoji="1" lang="ja-JP" altLang="en-US" dirty="0"/>
+              <a:endParaRPr kumimoji="1" lang="ja-JP" altLang="en-US"/>
             </a:p>
           </p:txBody>
         </p:sp>
@@ -5358,7 +5975,7 @@
             <a:lstStyle/>
             <a:p>
               <a:pPr algn="ctr"/>
-              <a:endParaRPr kumimoji="1" lang="ja-JP" altLang="en-US" dirty="0"/>
+              <a:endParaRPr kumimoji="1" lang="ja-JP" altLang="en-US"/>
             </a:p>
           </p:txBody>
         </p:sp>
@@ -5618,7 +6235,7 @@
             <a:lstStyle/>
             <a:p>
               <a:pPr algn="ctr"/>
-              <a:endParaRPr kumimoji="1" lang="ja-JP" altLang="en-US" dirty="0"/>
+              <a:endParaRPr kumimoji="1" lang="ja-JP" altLang="en-US"/>
             </a:p>
           </p:txBody>
         </p:sp>
@@ -5905,13 +6522,13 @@
           <a:p>
             <a:pPr algn="ctr"/>
             <a:r>
-              <a:rPr kumimoji="1" lang="en-US" altLang="ja-JP" sz="2800" b="1" dirty="0">
+              <a:rPr kumimoji="1" lang="en-US" altLang="ja-JP" sz="2800" b="1">
                 <a:latin typeface="游ゴシック" panose="020B0400000000000000" pitchFamily="50" charset="-128"/>
                 <a:ea typeface="游ゴシック" panose="020B0400000000000000" pitchFamily="50" charset="-128"/>
               </a:rPr>
               <a:t>1</a:t>
             </a:r>
-            <a:endParaRPr kumimoji="1" lang="ja-JP" altLang="en-US" sz="2800" b="1" dirty="0">
+            <a:endParaRPr kumimoji="1" lang="ja-JP" altLang="en-US" sz="2800" b="1">
               <a:latin typeface="游ゴシック" panose="020B0400000000000000" pitchFamily="50" charset="-128"/>
               <a:ea typeface="游ゴシック" panose="020B0400000000000000" pitchFamily="50" charset="-128"/>
             </a:endParaRPr>
@@ -5988,7 +6605,7 @@
             <a:lstStyle/>
             <a:p>
               <a:pPr algn="ctr"/>
-              <a:endParaRPr kumimoji="1" lang="ja-JP" altLang="en-US" dirty="0"/>
+              <a:endParaRPr kumimoji="1" lang="ja-JP" altLang="en-US"/>
             </a:p>
           </p:txBody>
         </p:sp>
@@ -6123,7 +6740,7 @@
             <a:lstStyle/>
             <a:p>
               <a:pPr algn="ctr"/>
-              <a:endParaRPr kumimoji="1" lang="ja-JP" altLang="en-US" dirty="0"/>
+              <a:endParaRPr kumimoji="1" lang="ja-JP" altLang="en-US"/>
             </a:p>
           </p:txBody>
         </p:sp>
@@ -6451,7 +7068,7 @@
           <a:lstStyle/>
           <a:p>
             <a:r>
-              <a:rPr lang="en-US" altLang="ja-JP" b="1" dirty="0">
+              <a:rPr lang="en-US" altLang="ja-JP" b="1">
                 <a:solidFill>
                   <a:schemeClr val="bg1"/>
                 </a:solidFill>
@@ -6461,7 +7078,7 @@
               <a:t> </a:t>
             </a:r>
             <a:r>
-              <a:rPr lang="ja-JP" altLang="en-US" b="1" dirty="0">
+              <a:rPr lang="ja-JP" altLang="en-US" b="1">
                 <a:solidFill>
                   <a:schemeClr val="bg1"/>
                 </a:solidFill>
@@ -6735,7 +7352,7 @@
           <a:lstStyle/>
           <a:p>
             <a:pPr algn="ctr"/>
-            <a:endParaRPr kumimoji="1" lang="ja-JP" altLang="en-US" dirty="0"/>
+            <a:endParaRPr kumimoji="1" lang="ja-JP" altLang="en-US"/>
           </a:p>
         </p:txBody>
       </p:sp>
@@ -8342,7 +8959,6 @@
               <a:rPr kumimoji="1" lang="ja-JP" altLang="en-US"/>
               <a:t>マスター タイトルの書式設定</a:t>
             </a:r>
-            <a:endParaRPr kumimoji="1" lang="ja-JP" altLang="en-US" dirty="0"/>
           </a:p>
         </p:txBody>
       </p:sp>
@@ -8385,7 +9001,7 @@
               <a:pPr/>
               <a:t>‹#›</a:t>
             </a:fld>
-            <a:endParaRPr lang="ja-JP" altLang="en-US" dirty="0"/>
+            <a:endParaRPr lang="ja-JP" altLang="en-US"/>
           </a:p>
         </p:txBody>
       </p:sp>
@@ -8437,7 +9053,7 @@
           </a:lstStyle>
           <a:p>
             <a:r>
-              <a:rPr lang="ja-JP" altLang="en-US" sz="3600" dirty="0"/>
+              <a:rPr lang="ja-JP" altLang="en-US" sz="3600"/>
               <a:t>３つあることが一目でわかる</a:t>
             </a:r>
           </a:p>
@@ -8634,7 +9250,7 @@
           <a:lstStyle/>
           <a:p>
             <a:r>
-              <a:rPr lang="ja-JP" altLang="en-US" sz="1400" b="1" dirty="0">
+              <a:rPr lang="ja-JP" altLang="en-US" sz="1400" b="1">
                 <a:solidFill>
                   <a:schemeClr val="tx2"/>
                 </a:solidFill>
@@ -8644,7 +9260,7 @@
               <a:t>カード</a:t>
             </a:r>
             <a:r>
-              <a:rPr kumimoji="1" lang="ja-JP" altLang="en-US" b="1" dirty="0">
+              <a:rPr kumimoji="1" lang="ja-JP" altLang="en-US" b="1">
                 <a:solidFill>
                   <a:schemeClr val="tx2"/>
                 </a:solidFill>
@@ -8685,7 +9301,7 @@
           <a:lstStyle/>
           <a:p>
             <a:r>
-              <a:rPr kumimoji="1" lang="ja-JP" altLang="en-US" sz="1400" b="1" dirty="0">
+              <a:rPr kumimoji="1" lang="ja-JP" altLang="en-US" sz="1400" b="1">
                 <a:solidFill>
                   <a:schemeClr val="tx2"/>
                 </a:solidFill>
@@ -8695,7 +9311,7 @@
               <a:t>カード</a:t>
             </a:r>
             <a:r>
-              <a:rPr kumimoji="1" lang="ja-JP" altLang="en-US" b="1" dirty="0">
+              <a:rPr kumimoji="1" lang="ja-JP" altLang="en-US" b="1">
                 <a:solidFill>
                   <a:schemeClr val="tx2"/>
                 </a:solidFill>
@@ -8736,7 +9352,7 @@
           <a:lstStyle/>
           <a:p>
             <a:r>
-              <a:rPr kumimoji="1" lang="ja-JP" altLang="en-US" sz="2800" b="1" dirty="0">
+              <a:rPr kumimoji="1" lang="ja-JP" altLang="en-US" sz="2800" b="1">
                 <a:solidFill>
                   <a:schemeClr val="accent4"/>
                 </a:solidFill>
@@ -8777,7 +9393,7 @@
           <a:lstStyle/>
           <a:p>
             <a:r>
-              <a:rPr lang="ja-JP" altLang="en-US" sz="2800" b="1" dirty="0">
+              <a:rPr lang="ja-JP" altLang="en-US" sz="2800" b="1">
                 <a:solidFill>
                   <a:schemeClr val="accent4"/>
                 </a:solidFill>
@@ -8786,7 +9402,7 @@
               </a:rPr>
               <a:t>カードの見出し</a:t>
             </a:r>
-            <a:endParaRPr kumimoji="1" lang="ja-JP" altLang="en-US" sz="2800" b="1" dirty="0">
+            <a:endParaRPr kumimoji="1" lang="ja-JP" altLang="en-US" sz="2800" b="1">
               <a:solidFill>
                 <a:schemeClr val="accent4"/>
               </a:solidFill>
@@ -8825,7 +9441,7 @@
           <a:lstStyle/>
           <a:p>
             <a:r>
-              <a:rPr lang="ja-JP" altLang="en-US" sz="1400" b="1" dirty="0">
+              <a:rPr lang="ja-JP" altLang="en-US" sz="1400" b="1">
                 <a:solidFill>
                   <a:schemeClr val="tx2"/>
                 </a:solidFill>
@@ -8835,7 +9451,7 @@
               <a:t>カード</a:t>
             </a:r>
             <a:r>
-              <a:rPr kumimoji="1" lang="ja-JP" altLang="en-US" b="1" dirty="0">
+              <a:rPr kumimoji="1" lang="ja-JP" altLang="en-US" b="1">
                 <a:solidFill>
                   <a:schemeClr val="tx2"/>
                 </a:solidFill>
@@ -8876,7 +9492,7 @@
           <a:lstStyle/>
           <a:p>
             <a:r>
-              <a:rPr kumimoji="1" lang="ja-JP" altLang="en-US" sz="2800" b="1" dirty="0">
+              <a:rPr kumimoji="1" lang="ja-JP" altLang="en-US" sz="2800" b="1">
                 <a:solidFill>
                   <a:schemeClr val="accent4"/>
                 </a:solidFill>
@@ -8972,7 +9588,6 @@
               <a:rPr kumimoji="1" lang="ja-JP" altLang="en-US"/>
               <a:t>マスター タイトルの書式設定</a:t>
             </a:r>
-            <a:endParaRPr kumimoji="1" lang="ja-JP" altLang="en-US" dirty="0"/>
           </a:p>
         </p:txBody>
       </p:sp>
@@ -9015,7 +9630,7 @@
               <a:pPr/>
               <a:t>‹#›</a:t>
             </a:fld>
-            <a:endParaRPr lang="ja-JP" altLang="en-US" dirty="0"/>
+            <a:endParaRPr lang="ja-JP" altLang="en-US"/>
           </a:p>
         </p:txBody>
       </p:sp>
@@ -9067,7 +9682,7 @@
           </a:lstStyle>
           <a:p>
             <a:r>
-              <a:rPr lang="ja-JP" altLang="en-US" sz="3600" dirty="0"/>
+              <a:rPr lang="ja-JP" altLang="en-US" sz="3600"/>
               <a:t>順序関係がある場合は並列よりこちらが良い</a:t>
             </a:r>
           </a:p>
@@ -9264,7 +9879,7 @@
           <a:lstStyle/>
           <a:p>
             <a:r>
-              <a:rPr lang="ja-JP" altLang="en-US" sz="1400" b="1" dirty="0">
+              <a:rPr lang="ja-JP" altLang="en-US" sz="1400" b="1">
                 <a:solidFill>
                   <a:schemeClr val="tx2"/>
                 </a:solidFill>
@@ -9274,7 +9889,7 @@
               <a:t>カード</a:t>
             </a:r>
             <a:r>
-              <a:rPr kumimoji="1" lang="ja-JP" altLang="en-US" b="1" dirty="0">
+              <a:rPr kumimoji="1" lang="ja-JP" altLang="en-US" b="1">
                 <a:solidFill>
                   <a:schemeClr val="tx2"/>
                 </a:solidFill>
@@ -9315,7 +9930,7 @@
           <a:lstStyle/>
           <a:p>
             <a:r>
-              <a:rPr kumimoji="1" lang="ja-JP" altLang="en-US" sz="1400" b="1" dirty="0">
+              <a:rPr kumimoji="1" lang="ja-JP" altLang="en-US" sz="1400" b="1">
                 <a:solidFill>
                   <a:schemeClr val="tx2"/>
                 </a:solidFill>
@@ -9325,7 +9940,7 @@
               <a:t>カード</a:t>
             </a:r>
             <a:r>
-              <a:rPr kumimoji="1" lang="ja-JP" altLang="en-US" b="1" dirty="0">
+              <a:rPr kumimoji="1" lang="ja-JP" altLang="en-US" b="1">
                 <a:solidFill>
                   <a:schemeClr val="tx2"/>
                 </a:solidFill>
@@ -9366,7 +9981,7 @@
           <a:lstStyle/>
           <a:p>
             <a:r>
-              <a:rPr kumimoji="1" lang="ja-JP" altLang="en-US" sz="2800" b="1" dirty="0">
+              <a:rPr kumimoji="1" lang="ja-JP" altLang="en-US" sz="2800" b="1">
                 <a:solidFill>
                   <a:schemeClr val="accent4"/>
                 </a:solidFill>
@@ -9407,7 +10022,7 @@
           <a:lstStyle/>
           <a:p>
             <a:r>
-              <a:rPr lang="ja-JP" altLang="en-US" sz="2800" b="1" dirty="0">
+              <a:rPr lang="ja-JP" altLang="en-US" sz="2800" b="1">
                 <a:solidFill>
                   <a:schemeClr val="accent4"/>
                 </a:solidFill>
@@ -9416,7 +10031,7 @@
               </a:rPr>
               <a:t>カードの見出し</a:t>
             </a:r>
-            <a:endParaRPr kumimoji="1" lang="ja-JP" altLang="en-US" sz="2800" b="1" dirty="0">
+            <a:endParaRPr kumimoji="1" lang="ja-JP" altLang="en-US" sz="2800" b="1">
               <a:solidFill>
                 <a:schemeClr val="accent4"/>
               </a:solidFill>
@@ -9455,7 +10070,7 @@
           <a:lstStyle/>
           <a:p>
             <a:r>
-              <a:rPr lang="ja-JP" altLang="en-US" sz="1400" b="1" dirty="0">
+              <a:rPr lang="ja-JP" altLang="en-US" sz="1400" b="1">
                 <a:solidFill>
                   <a:schemeClr val="tx2"/>
                 </a:solidFill>
@@ -9465,7 +10080,7 @@
               <a:t>カード</a:t>
             </a:r>
             <a:r>
-              <a:rPr kumimoji="1" lang="ja-JP" altLang="en-US" b="1" dirty="0">
+              <a:rPr kumimoji="1" lang="ja-JP" altLang="en-US" b="1">
                 <a:solidFill>
                   <a:schemeClr val="tx2"/>
                 </a:solidFill>
@@ -9506,7 +10121,7 @@
           <a:lstStyle/>
           <a:p>
             <a:r>
-              <a:rPr kumimoji="1" lang="ja-JP" altLang="en-US" sz="2800" b="1" dirty="0">
+              <a:rPr kumimoji="1" lang="ja-JP" altLang="en-US" sz="2800" b="1">
                 <a:solidFill>
                   <a:schemeClr val="accent4"/>
                 </a:solidFill>
@@ -9588,7 +10203,7 @@
             <a:lstStyle/>
             <a:p>
               <a:pPr algn="ctr"/>
-              <a:endParaRPr kumimoji="1" lang="ja-JP" altLang="en-US" dirty="0"/>
+              <a:endParaRPr kumimoji="1" lang="ja-JP" altLang="en-US"/>
             </a:p>
           </p:txBody>
         </p:sp>
@@ -9713,7 +10328,7 @@
             <a:lstStyle/>
             <a:p>
               <a:pPr algn="ctr"/>
-              <a:endParaRPr kumimoji="1" lang="ja-JP" altLang="en-US" dirty="0"/>
+              <a:endParaRPr kumimoji="1" lang="ja-JP" altLang="en-US"/>
             </a:p>
           </p:txBody>
         </p:sp>
@@ -9788,7 +10403,7 @@
             <a:lstStyle/>
             <a:p>
               <a:pPr algn="ctr"/>
-              <a:endParaRPr kumimoji="1" lang="ja-JP" altLang="en-US" dirty="0"/>
+              <a:endParaRPr kumimoji="1" lang="ja-JP" altLang="en-US"/>
             </a:p>
           </p:txBody>
         </p:sp>
@@ -9913,7 +10528,7 @@
             <a:lstStyle/>
             <a:p>
               <a:pPr algn="ctr"/>
-              <a:endParaRPr kumimoji="1" lang="ja-JP" altLang="en-US" dirty="0"/>
+              <a:endParaRPr kumimoji="1" lang="ja-JP" altLang="en-US"/>
             </a:p>
           </p:txBody>
         </p:sp>
@@ -10002,7 +10617,6 @@
               <a:rPr kumimoji="1" lang="ja-JP" altLang="en-US"/>
               <a:t>マスター タイトルの書式設定</a:t>
             </a:r>
-            <a:endParaRPr kumimoji="1" lang="ja-JP" altLang="en-US" dirty="0"/>
           </a:p>
         </p:txBody>
       </p:sp>
@@ -10045,7 +10659,7 @@
               <a:pPr/>
               <a:t>‹#›</a:t>
             </a:fld>
-            <a:endParaRPr lang="ja-JP" altLang="en-US" dirty="0"/>
+            <a:endParaRPr lang="ja-JP" altLang="en-US"/>
           </a:p>
         </p:txBody>
       </p:sp>
@@ -10097,7 +10711,7 @@
           </a:lstStyle>
           <a:p>
             <a:r>
-              <a:rPr lang="ja-JP" altLang="en-US" sz="3600" dirty="0"/>
+              <a:rPr lang="ja-JP" altLang="en-US" sz="3600"/>
               <a:t>カードの間隔やアスペクト比は適宜調整</a:t>
             </a:r>
           </a:p>
@@ -10186,7 +10800,7 @@
           <a:lstStyle/>
           <a:p>
             <a:r>
-              <a:rPr lang="ja-JP" altLang="en-US" sz="1400" b="1" dirty="0">
+              <a:rPr lang="ja-JP" altLang="en-US" sz="1400" b="1">
                 <a:solidFill>
                   <a:schemeClr val="tx2"/>
                 </a:solidFill>
@@ -10196,7 +10810,7 @@
               <a:t>カード</a:t>
             </a:r>
             <a:r>
-              <a:rPr kumimoji="1" lang="ja-JP" altLang="en-US" b="1" dirty="0">
+              <a:rPr kumimoji="1" lang="ja-JP" altLang="en-US" b="1">
                 <a:solidFill>
                   <a:schemeClr val="tx2"/>
                 </a:solidFill>
@@ -10237,7 +10851,7 @@
           <a:lstStyle/>
           <a:p>
             <a:r>
-              <a:rPr kumimoji="1" lang="ja-JP" altLang="en-US" sz="2800" b="1" dirty="0">
+              <a:rPr kumimoji="1" lang="ja-JP" altLang="en-US" sz="2800" b="1">
                 <a:solidFill>
                   <a:schemeClr val="accent4"/>
                 </a:solidFill>
@@ -10332,7 +10946,7 @@
           <a:lstStyle/>
           <a:p>
             <a:r>
-              <a:rPr lang="ja-JP" altLang="en-US" sz="1400" b="1" dirty="0">
+              <a:rPr lang="ja-JP" altLang="en-US" sz="1400" b="1">
                 <a:solidFill>
                   <a:schemeClr val="tx2"/>
                 </a:solidFill>
@@ -10342,7 +10956,7 @@
               <a:t>カード</a:t>
             </a:r>
             <a:r>
-              <a:rPr lang="ja-JP" altLang="en-US" b="1" dirty="0">
+              <a:rPr lang="ja-JP" altLang="en-US" b="1">
                 <a:solidFill>
                   <a:schemeClr val="tx2"/>
                 </a:solidFill>
@@ -10351,7 +10965,7 @@
               </a:rPr>
               <a:t>②</a:t>
             </a:r>
-            <a:endParaRPr kumimoji="1" lang="ja-JP" altLang="en-US" b="1" dirty="0">
+            <a:endParaRPr kumimoji="1" lang="ja-JP" altLang="en-US" b="1">
               <a:solidFill>
                 <a:schemeClr val="tx2"/>
               </a:solidFill>
@@ -10390,7 +11004,7 @@
           <a:lstStyle/>
           <a:p>
             <a:r>
-              <a:rPr kumimoji="1" lang="ja-JP" altLang="en-US" sz="2800" b="1" dirty="0">
+              <a:rPr kumimoji="1" lang="ja-JP" altLang="en-US" sz="2800" b="1">
                 <a:solidFill>
                   <a:schemeClr val="accent4"/>
                 </a:solidFill>
@@ -10485,7 +11099,7 @@
           <a:lstStyle/>
           <a:p>
             <a:r>
-              <a:rPr lang="ja-JP" altLang="en-US" sz="1400" b="1" dirty="0">
+              <a:rPr lang="ja-JP" altLang="en-US" sz="1400" b="1">
                 <a:solidFill>
                   <a:schemeClr val="tx2"/>
                 </a:solidFill>
@@ -10495,7 +11109,7 @@
               <a:t>カード</a:t>
             </a:r>
             <a:r>
-              <a:rPr kumimoji="1" lang="ja-JP" altLang="en-US" b="1" dirty="0">
+              <a:rPr kumimoji="1" lang="ja-JP" altLang="en-US" b="1">
                 <a:solidFill>
                   <a:schemeClr val="tx2"/>
                 </a:solidFill>
@@ -10536,7 +11150,7 @@
           <a:lstStyle/>
           <a:p>
             <a:r>
-              <a:rPr kumimoji="1" lang="ja-JP" altLang="en-US" sz="2800" b="1" dirty="0">
+              <a:rPr kumimoji="1" lang="ja-JP" altLang="en-US" sz="2800" b="1">
                 <a:solidFill>
                   <a:schemeClr val="accent4"/>
                 </a:solidFill>
@@ -10631,7 +11245,7 @@
           <a:lstStyle/>
           <a:p>
             <a:r>
-              <a:rPr lang="ja-JP" altLang="en-US" sz="1400" b="1" dirty="0">
+              <a:rPr lang="ja-JP" altLang="en-US" sz="1400" b="1">
                 <a:solidFill>
                   <a:schemeClr val="tx2"/>
                 </a:solidFill>
@@ -10641,7 +11255,7 @@
               <a:t>カード</a:t>
             </a:r>
             <a:r>
-              <a:rPr kumimoji="1" lang="ja-JP" altLang="en-US" b="1" dirty="0">
+              <a:rPr kumimoji="1" lang="ja-JP" altLang="en-US" b="1">
                 <a:solidFill>
                   <a:schemeClr val="tx2"/>
                 </a:solidFill>
@@ -10682,7 +11296,7 @@
           <a:lstStyle/>
           <a:p>
             <a:r>
-              <a:rPr kumimoji="1" lang="ja-JP" altLang="en-US" sz="2800" b="1" dirty="0">
+              <a:rPr kumimoji="1" lang="ja-JP" altLang="en-US" sz="2800" b="1">
                 <a:solidFill>
                   <a:schemeClr val="accent4"/>
                 </a:solidFill>
@@ -10761,7 +11375,7 @@
           <a:lstStyle/>
           <a:p>
             <a:r>
-              <a:rPr kumimoji="1" lang="ja-JP" altLang="en-US" dirty="0"/>
+              <a:rPr kumimoji="1" lang="ja-JP" altLang="en-US"/>
               <a:t>マスター タイトルの書式設定</a:t>
             </a:r>
           </a:p>
@@ -10800,67 +11414,67 @@
           <a:p>
             <a:pPr lvl="0"/>
             <a:r>
-              <a:rPr kumimoji="1" lang="ja-JP" altLang="en-US" dirty="0"/>
+              <a:rPr kumimoji="1" lang="ja-JP" altLang="en-US"/>
               <a:t>マスター テキストの書式設定</a:t>
             </a:r>
           </a:p>
           <a:p>
             <a:pPr lvl="1"/>
             <a:r>
-              <a:rPr kumimoji="1" lang="ja-JP" altLang="en-US" dirty="0"/>
+              <a:rPr kumimoji="1" lang="ja-JP" altLang="en-US"/>
               <a:t>第 </a:t>
             </a:r>
             <a:r>
-              <a:rPr kumimoji="1" lang="en-US" altLang="ja-JP" dirty="0"/>
+              <a:rPr kumimoji="1" lang="en-US" altLang="ja-JP"/>
               <a:t>2 </a:t>
             </a:r>
             <a:r>
-              <a:rPr kumimoji="1" lang="ja-JP" altLang="en-US" dirty="0"/>
+              <a:rPr kumimoji="1" lang="ja-JP" altLang="en-US"/>
               <a:t>レベル</a:t>
             </a:r>
           </a:p>
           <a:p>
             <a:pPr lvl="2"/>
             <a:r>
-              <a:rPr kumimoji="1" lang="ja-JP" altLang="en-US" dirty="0"/>
+              <a:rPr kumimoji="1" lang="ja-JP" altLang="en-US"/>
               <a:t>第 </a:t>
             </a:r>
             <a:r>
-              <a:rPr kumimoji="1" lang="en-US" altLang="ja-JP" dirty="0"/>
+              <a:rPr kumimoji="1" lang="en-US" altLang="ja-JP"/>
               <a:t>3 </a:t>
             </a:r>
             <a:r>
-              <a:rPr kumimoji="1" lang="ja-JP" altLang="en-US" dirty="0"/>
+              <a:rPr kumimoji="1" lang="ja-JP" altLang="en-US"/>
               <a:t>レベル</a:t>
             </a:r>
           </a:p>
           <a:p>
             <a:pPr lvl="3"/>
             <a:r>
-              <a:rPr kumimoji="1" lang="ja-JP" altLang="en-US" dirty="0"/>
+              <a:rPr kumimoji="1" lang="ja-JP" altLang="en-US"/>
               <a:t>第 </a:t>
             </a:r>
             <a:r>
-              <a:rPr kumimoji="1" lang="en-US" altLang="ja-JP" dirty="0"/>
+              <a:rPr kumimoji="1" lang="en-US" altLang="ja-JP"/>
               <a:t>4 </a:t>
             </a:r>
             <a:r>
-              <a:rPr kumimoji="1" lang="ja-JP" altLang="en-US" dirty="0"/>
+              <a:rPr kumimoji="1" lang="ja-JP" altLang="en-US"/>
               <a:t>レベル</a:t>
             </a:r>
           </a:p>
           <a:p>
             <a:pPr lvl="4"/>
             <a:r>
-              <a:rPr kumimoji="1" lang="ja-JP" altLang="en-US" dirty="0"/>
+              <a:rPr kumimoji="1" lang="ja-JP" altLang="en-US"/>
               <a:t>第 </a:t>
             </a:r>
             <a:r>
-              <a:rPr kumimoji="1" lang="en-US" altLang="ja-JP" dirty="0"/>
+              <a:rPr kumimoji="1" lang="en-US" altLang="ja-JP"/>
               <a:t>5 </a:t>
             </a:r>
             <a:r>
-              <a:rPr kumimoji="1" lang="ja-JP" altLang="en-US" dirty="0"/>
+              <a:rPr kumimoji="1" lang="ja-JP" altLang="en-US"/>
               <a:t>レベル</a:t>
             </a:r>
           </a:p>
@@ -10907,7 +11521,7 @@
           <a:p>
             <a:fld id="{F20A137C-E3B5-4111-BA28-0A9D5E6D313C}" type="datetime1">
               <a:rPr kumimoji="1" lang="ja-JP" altLang="en-US" smtClean="0"/>
-              <a:t>2026/1/20</a:t>
+              <a:t>2026/1/22</a:t>
             </a:fld>
             <a:endParaRPr kumimoji="1" lang="ja-JP" altLang="en-US"/>
           </a:p>
@@ -11001,7 +11615,7 @@
               <a:pPr algn="ctr"/>
               <a:t>‹#›</a:t>
             </a:fld>
-            <a:endParaRPr lang="ja-JP" altLang="en-US" dirty="0"/>
+            <a:endParaRPr lang="ja-JP" altLang="en-US"/>
           </a:p>
         </p:txBody>
       </p:sp>
@@ -11348,40 +11962,40 @@
           <a:lstStyle/>
           <a:p>
             <a:r>
-              <a:rPr lang="ja-JP" altLang="en-US" sz="3600" b="1" dirty="0">
+              <a:rPr lang="ja-JP" altLang="en-US" sz="3600" b="1">
                 <a:latin typeface="メイリオ" panose="020B0604030504040204" pitchFamily="50" charset="-128"/>
                 <a:ea typeface="メイリオ" panose="020B0604030504040204" pitchFamily="50" charset="-128"/>
               </a:rPr>
               <a:t>所有者優先権を保証する</a:t>
             </a:r>
             <a:br>
-              <a:rPr lang="en-US" altLang="ja-JP" sz="3600" b="1" dirty="0">
+              <a:rPr lang="en-US" altLang="ja-JP" sz="3600" b="1">
                 <a:latin typeface="メイリオ" panose="020B0604030504040204" pitchFamily="50" charset="-128"/>
                 <a:ea typeface="メイリオ" panose="020B0604030504040204" pitchFamily="50" charset="-128"/>
               </a:rPr>
             </a:br>
             <a:r>
-              <a:rPr lang="ja-JP" altLang="en-US" sz="3600" b="1" dirty="0">
+              <a:rPr lang="ja-JP" altLang="en-US" sz="3600" b="1">
                 <a:latin typeface="メイリオ" panose="020B0604030504040204" pitchFamily="50" charset="-128"/>
                 <a:ea typeface="メイリオ" panose="020B0604030504040204" pitchFamily="50" charset="-128"/>
               </a:rPr>
               <a:t>プリエンティブ方式を用いた学内</a:t>
             </a:r>
             <a:r>
-              <a:rPr lang="en-US" altLang="ja-JP" sz="3600" b="1" dirty="0">
+              <a:rPr lang="en-US" altLang="ja-JP" sz="3600" b="1">
                 <a:latin typeface="メイリオ" panose="020B0604030504040204" pitchFamily="50" charset="-128"/>
                 <a:ea typeface="メイリオ" panose="020B0604030504040204" pitchFamily="50" charset="-128"/>
               </a:rPr>
               <a:t>GPU</a:t>
             </a:r>
             <a:r>
-              <a:rPr lang="ja-JP" altLang="en-US" sz="3600" b="1" dirty="0">
+              <a:rPr lang="ja-JP" altLang="en-US" sz="3600" b="1">
                 <a:latin typeface="メイリオ" panose="020B0604030504040204" pitchFamily="50" charset="-128"/>
                 <a:ea typeface="メイリオ" panose="020B0604030504040204" pitchFamily="50" charset="-128"/>
               </a:rPr>
               <a:t>共有基盤の提案とユーザ参加行動の評価</a:t>
             </a:r>
-            <a:endParaRPr kumimoji="1" lang="ja-JP" altLang="en-US" sz="3600" dirty="0"/>
+            <a:endParaRPr kumimoji="1" lang="ja-JP" altLang="en-US" sz="3600"/>
           </a:p>
         </p:txBody>
       </p:sp>
@@ -11406,7 +12020,7 @@
           <a:bodyPr/>
           <a:lstStyle/>
           <a:p>
-            <a:endParaRPr lang="ja-JP" altLang="en-US" dirty="0"/>
+            <a:endParaRPr lang="ja-JP" altLang="en-US"/>
           </a:p>
         </p:txBody>
       </p:sp>
@@ -11431,7 +12045,7 @@
           <a:bodyPr/>
           <a:lstStyle/>
           <a:p>
-            <a:endParaRPr kumimoji="1" lang="ja-JP" altLang="en-US" dirty="0"/>
+            <a:endParaRPr kumimoji="1" lang="ja-JP" altLang="en-US"/>
           </a:p>
         </p:txBody>
       </p:sp>
@@ -11468,7 +12082,7 @@
           <a:lstStyle/>
           <a:p>
             <a:r>
-              <a:rPr kumimoji="1" lang="ja-JP" altLang="en-US" sz="2800" u="none" dirty="0"/>
+              <a:rPr kumimoji="1" lang="ja-JP" altLang="en-US" sz="2800" u="none"/>
               <a:t>下西研究室　櫻井 翔琉</a:t>
             </a:r>
           </a:p>
@@ -11509,7 +12123,7 @@
           <p:cNvPr id="2" name="タイトル 1">
             <a:extLst>
               <a:ext uri="{FF2B5EF4-FFF2-40B4-BE49-F238E27FC236}">
-                <a16:creationId xmlns:a16="http://schemas.microsoft.com/office/drawing/2014/main" id="{51DF95A4-1EAD-4201-9473-01D78AD9A399}"/>
+                <a16:creationId xmlns:a16="http://schemas.microsoft.com/office/drawing/2014/main" id="{86AB8C8D-11A8-96A5-361A-59F9257AFEB8}"/>
               </a:ext>
             </a:extLst>
           </p:cNvPr>
@@ -11526,37 +12140,9 @@
           <a:lstStyle/>
           <a:p>
             <a:r>
-              <a:rPr kumimoji="1" lang="en-US" altLang="ja-JP" dirty="0"/>
-              <a:t>RQ2 </a:t>
-            </a:r>
-            <a:r>
-              <a:rPr kumimoji="1" lang="ja-JP" altLang="en-US" dirty="0"/>
-              <a:t>シミュレーション環境</a:t>
-            </a:r>
-          </a:p>
-        </p:txBody>
-      </p:sp>
-      <p:sp>
-        <p:nvSpPr>
-          <p:cNvPr id="3" name="コンテンツ プレースホルダー 2">
-            <a:extLst>
-              <a:ext uri="{FF2B5EF4-FFF2-40B4-BE49-F238E27FC236}">
-                <a16:creationId xmlns:a16="http://schemas.microsoft.com/office/drawing/2014/main" id="{F8C9E1D8-5B52-657F-7A1E-848206807B48}"/>
-              </a:ext>
-            </a:extLst>
-          </p:cNvPr>
-          <p:cNvSpPr>
-            <a:spLocks noGrp="1"/>
-          </p:cNvSpPr>
-          <p:nvPr>
-            <p:ph idx="1"/>
-          </p:nvPr>
-        </p:nvSpPr>
-        <p:spPr/>
-        <p:txBody>
-          <a:bodyPr/>
-          <a:lstStyle/>
-          <a:p>
+              <a:rPr lang="ja-JP" altLang="en-US"/>
+              <a:t>シミュレーション結果</a:t>
+            </a:r>
             <a:endParaRPr kumimoji="1" lang="ja-JP" altLang="en-US"/>
           </a:p>
         </p:txBody>
@@ -11566,7 +12152,7 @@
           <p:cNvPr id="4" name="スライド番号プレースホルダー 3">
             <a:extLst>
               <a:ext uri="{FF2B5EF4-FFF2-40B4-BE49-F238E27FC236}">
-                <a16:creationId xmlns:a16="http://schemas.microsoft.com/office/drawing/2014/main" id="{52B39026-6217-497F-5733-7A62EBFA40A5}"/>
+                <a16:creationId xmlns:a16="http://schemas.microsoft.com/office/drawing/2014/main" id="{10E2543F-C418-7668-E296-BC1FC3AEF9E0}"/>
               </a:ext>
             </a:extLst>
           </p:cNvPr>
@@ -11587,14 +12173,409 @@
               <a:pPr/>
               <a:t>10</a:t>
             </a:fld>
-            <a:endParaRPr lang="ja-JP" altLang="en-US" dirty="0"/>
+            <a:endParaRPr lang="ja-JP" altLang="en-US"/>
+          </a:p>
+        </p:txBody>
+      </p:sp>
+      <p:pic>
+        <p:nvPicPr>
+          <p:cNvPr id="6" name="図 5">
+            <a:extLst>
+              <a:ext uri="{FF2B5EF4-FFF2-40B4-BE49-F238E27FC236}">
+                <a16:creationId xmlns:a16="http://schemas.microsoft.com/office/drawing/2014/main" id="{FC770F7D-DB3A-0F51-F2DC-47BD908C4EB3}"/>
+              </a:ext>
+            </a:extLst>
+          </p:cNvPr>
+          <p:cNvPicPr>
+            <a:picLocks noChangeAspect="1"/>
+          </p:cNvPicPr>
+          <p:nvPr/>
+        </p:nvPicPr>
+        <p:blipFill>
+          <a:blip r:embed="rId2"/>
+          <a:stretch>
+            <a:fillRect/>
+          </a:stretch>
+        </p:blipFill>
+        <p:spPr>
+          <a:xfrm>
+            <a:off x="5933516" y="1023727"/>
+            <a:ext cx="5565216" cy="5602576"/>
+          </a:xfrm>
+          <a:prstGeom prst="rect">
+            <a:avLst/>
+          </a:prstGeom>
+        </p:spPr>
+      </p:pic>
+      <p:sp>
+        <p:nvSpPr>
+          <p:cNvPr id="7" name="テキスト ボックス 6">
+            <a:extLst>
+              <a:ext uri="{FF2B5EF4-FFF2-40B4-BE49-F238E27FC236}">
+                <a16:creationId xmlns:a16="http://schemas.microsoft.com/office/drawing/2014/main" id="{6D53FC36-53EB-EFD9-7D0E-D4A01FFB676B}"/>
+              </a:ext>
+            </a:extLst>
+          </p:cNvPr>
+          <p:cNvSpPr txBox="1"/>
+          <p:nvPr/>
+        </p:nvSpPr>
+        <p:spPr>
+          <a:xfrm>
+            <a:off x="647700" y="1384300"/>
+            <a:ext cx="5285816" cy="3877985"/>
+          </a:xfrm>
+          <a:prstGeom prst="rect">
+            <a:avLst/>
+          </a:prstGeom>
+          <a:noFill/>
+        </p:spPr>
+        <p:txBody>
+          <a:bodyPr wrap="square" rtlCol="0">
+            <a:spAutoFit/>
+          </a:bodyPr>
+          <a:lstStyle/>
+          <a:p>
+            <a:pPr>
+              <a:lnSpc>
+                <a:spcPct val="150000"/>
+              </a:lnSpc>
+            </a:pPr>
+            <a:r>
+              <a:rPr lang="ja-JP" altLang="en-US" sz="2000"/>
+              <a:t>パラメータはシミュレーション１と同じ</a:t>
+            </a:r>
+            <a:endParaRPr lang="en-US" altLang="ja-JP" sz="2000"/>
+          </a:p>
+          <a:p>
+            <a:pPr>
+              <a:lnSpc>
+                <a:spcPct val="150000"/>
+              </a:lnSpc>
+            </a:pPr>
+            <a:r>
+              <a:rPr lang="ja-JP" altLang="en-US" sz="2000"/>
+              <a:t>→</a:t>
+            </a:r>
+            <a:r>
+              <a:rPr lang="ja-JP" altLang="en-US" sz="2000" b="1"/>
+              <a:t>低性能</a:t>
+            </a:r>
+            <a:r>
+              <a:rPr lang="en-US" altLang="ja-JP" sz="2000" b="1"/>
+              <a:t>GPU</a:t>
+            </a:r>
+            <a:r>
+              <a:rPr lang="ja-JP" altLang="en-US" sz="2000" b="1"/>
+              <a:t>ユーザだけ</a:t>
+            </a:r>
+            <a:r>
+              <a:rPr lang="ja-JP" altLang="en-US" sz="2000" b="1">
+                <a:solidFill>
+                  <a:schemeClr val="accent3">
+                    <a:lumMod val="75000"/>
+                  </a:schemeClr>
+                </a:solidFill>
+              </a:rPr>
+              <a:t>タスク飽和の状態</a:t>
+            </a:r>
+            <a:endParaRPr lang="en-US" altLang="ja-JP" sz="2000" b="1">
+              <a:solidFill>
+                <a:schemeClr val="accent3">
+                  <a:lumMod val="75000"/>
+                </a:schemeClr>
+              </a:solidFill>
+            </a:endParaRPr>
+          </a:p>
+          <a:p>
+            <a:pPr>
+              <a:lnSpc>
+                <a:spcPct val="150000"/>
+              </a:lnSpc>
+            </a:pPr>
+            <a:r>
+              <a:rPr lang="en-US" altLang="ja-JP" sz="2000"/>
+              <a:t>18</a:t>
+            </a:r>
+            <a:r>
+              <a:rPr lang="ja-JP" altLang="en-US" sz="2000"/>
+              <a:t>ユーザを性能別に３段階にわけ、それぞれの</a:t>
+            </a:r>
+            <a:r>
+              <a:rPr lang="ja-JP" altLang="en-US" sz="2000" b="1">
+                <a:solidFill>
+                  <a:schemeClr val="accent3">
+                    <a:lumMod val="75000"/>
+                  </a:schemeClr>
+                </a:solidFill>
+              </a:rPr>
+              <a:t>参加者数推移</a:t>
+            </a:r>
+            <a:r>
+              <a:rPr lang="ja-JP" altLang="en-US" sz="2000"/>
+              <a:t>をループごとに評価</a:t>
+            </a:r>
+            <a:endParaRPr lang="en-US" altLang="ja-JP" sz="2000"/>
+          </a:p>
+          <a:p>
+            <a:pPr>
+              <a:lnSpc>
+                <a:spcPct val="150000"/>
+              </a:lnSpc>
+            </a:pPr>
+            <a:endParaRPr lang="en-US" altLang="ja-JP"/>
+          </a:p>
+          <a:p>
+            <a:pPr>
+              <a:lnSpc>
+                <a:spcPct val="150000"/>
+              </a:lnSpc>
+            </a:pPr>
+            <a:endParaRPr lang="en-US" altLang="ja-JP"/>
+          </a:p>
+          <a:p>
+            <a:pPr>
+              <a:lnSpc>
+                <a:spcPct val="150000"/>
+              </a:lnSpc>
+            </a:pPr>
+            <a:endParaRPr lang="en-US" altLang="ja-JP"/>
+          </a:p>
+          <a:p>
+            <a:pPr>
+              <a:lnSpc>
+                <a:spcPct val="150000"/>
+              </a:lnSpc>
+            </a:pPr>
+            <a:endParaRPr lang="en-US" altLang="ja-JP"/>
+          </a:p>
+          <a:p>
+            <a:endParaRPr kumimoji="1" lang="ja-JP" altLang="en-US"/>
+          </a:p>
+        </p:txBody>
+      </p:sp>
+      <p:pic>
+        <p:nvPicPr>
+          <p:cNvPr id="8" name="図 7" descr="テーブル&#10;&#10;AI 生成コンテンツは誤りを含む可能性があります。">
+            <a:extLst>
+              <a:ext uri="{FF2B5EF4-FFF2-40B4-BE49-F238E27FC236}">
+                <a16:creationId xmlns:a16="http://schemas.microsoft.com/office/drawing/2014/main" id="{711870A2-7CA9-83FD-1644-E0A7D535178A}"/>
+              </a:ext>
+            </a:extLst>
+          </p:cNvPr>
+          <p:cNvPicPr>
+            <a:picLocks noChangeAspect="1"/>
+          </p:cNvPicPr>
+          <p:nvPr/>
+        </p:nvPicPr>
+        <p:blipFill>
+          <a:blip r:embed="rId3"/>
+          <a:srcRect l="26904" t="43834" r="27876" b="40707"/>
+          <a:stretch>
+            <a:fillRect/>
+          </a:stretch>
+        </p:blipFill>
+        <p:spPr>
+          <a:xfrm>
+            <a:off x="1727200" y="4429301"/>
+            <a:ext cx="3356195" cy="2312808"/>
+          </a:xfrm>
+          <a:prstGeom prst="rect">
+            <a:avLst/>
+          </a:prstGeom>
+        </p:spPr>
+      </p:pic>
+      <p:sp>
+        <p:nvSpPr>
+          <p:cNvPr id="9" name="吹き出し: 角を丸めた四角形 8">
+            <a:extLst>
+              <a:ext uri="{FF2B5EF4-FFF2-40B4-BE49-F238E27FC236}">
+                <a16:creationId xmlns:a16="http://schemas.microsoft.com/office/drawing/2014/main" id="{F54FDCF0-C453-9702-A3E7-809C763B461B}"/>
+              </a:ext>
+            </a:extLst>
+          </p:cNvPr>
+          <p:cNvSpPr/>
+          <p:nvPr/>
+        </p:nvSpPr>
+        <p:spPr>
+          <a:xfrm>
+            <a:off x="1586897" y="3415625"/>
+            <a:ext cx="4346619" cy="1013676"/>
+          </a:xfrm>
+          <a:prstGeom prst="wedgeRoundRectCallout">
+            <a:avLst>
+              <a:gd name="adj1" fmla="val 66755"/>
+              <a:gd name="adj2" fmla="val -92885"/>
+              <a:gd name="adj3" fmla="val 16667"/>
+            </a:avLst>
+          </a:prstGeom>
+          <a:solidFill>
+            <a:schemeClr val="bg1"/>
+          </a:solidFill>
+          <a:ln>
+            <a:solidFill>
+              <a:schemeClr val="accent3">
+                <a:lumMod val="75000"/>
+              </a:schemeClr>
+            </a:solidFill>
+          </a:ln>
+        </p:spPr>
+        <p:style>
+          <a:lnRef idx="2">
+            <a:schemeClr val="accent1">
+              <a:shade val="15000"/>
+            </a:schemeClr>
+          </a:lnRef>
+          <a:fillRef idx="1">
+            <a:schemeClr val="accent1"/>
+          </a:fillRef>
+          <a:effectRef idx="0">
+            <a:schemeClr val="accent1"/>
+          </a:effectRef>
+          <a:fontRef idx="minor">
+            <a:schemeClr val="lt1"/>
+          </a:fontRef>
+        </p:style>
+        <p:txBody>
+          <a:bodyPr rtlCol="0" anchor="ctr"/>
+          <a:lstStyle/>
+          <a:p>
+            <a:pPr>
+              <a:lnSpc>
+                <a:spcPct val="150000"/>
+              </a:lnSpc>
+            </a:pPr>
+            <a:r>
+              <a:rPr lang="ja-JP" altLang="en-US">
+                <a:solidFill>
+                  <a:schemeClr val="tx1"/>
+                </a:solidFill>
+                <a:latin typeface="メイリオ" panose="020B0604030504040204" pitchFamily="50" charset="-128"/>
+                <a:ea typeface="メイリオ" panose="020B0604030504040204" pitchFamily="50" charset="-128"/>
+              </a:rPr>
+              <a:t>「</a:t>
+            </a:r>
+            <a:r>
+              <a:rPr lang="en-US" altLang="ja-JP">
+                <a:solidFill>
+                  <a:schemeClr val="tx1"/>
+                </a:solidFill>
+                <a:latin typeface="メイリオ" panose="020B0604030504040204" pitchFamily="50" charset="-128"/>
+                <a:ea typeface="メイリオ" panose="020B0604030504040204" pitchFamily="50" charset="-128"/>
+              </a:rPr>
+              <a:t>FCFS</a:t>
+            </a:r>
+            <a:r>
+              <a:rPr lang="ja-JP" altLang="en-US">
+                <a:solidFill>
+                  <a:schemeClr val="tx1"/>
+                </a:solidFill>
+                <a:latin typeface="メイリオ" panose="020B0604030504040204" pitchFamily="50" charset="-128"/>
+                <a:ea typeface="メイリオ" panose="020B0604030504040204" pitchFamily="50" charset="-128"/>
+              </a:rPr>
+              <a:t>」、「所有者優先」では中性能・高性能ユーザーは最終的に不参加</a:t>
+            </a:r>
+            <a:endParaRPr lang="en-US" altLang="ja-JP">
+              <a:solidFill>
+                <a:schemeClr val="tx1"/>
+              </a:solidFill>
+              <a:latin typeface="メイリオ" panose="020B0604030504040204" pitchFamily="50" charset="-128"/>
+              <a:ea typeface="メイリオ" panose="020B0604030504040204" pitchFamily="50" charset="-128"/>
+            </a:endParaRPr>
+          </a:p>
+          <a:p>
+            <a:pPr algn="ctr"/>
+            <a:endParaRPr kumimoji="1" lang="ja-JP" altLang="en-US">
+              <a:solidFill>
+                <a:schemeClr val="accent3">
+                  <a:lumMod val="75000"/>
+                </a:schemeClr>
+              </a:solidFill>
+              <a:latin typeface="メイリオ" panose="020B0604030504040204" pitchFamily="50" charset="-128"/>
+              <a:ea typeface="メイリオ" panose="020B0604030504040204" pitchFamily="50" charset="-128"/>
+            </a:endParaRPr>
+          </a:p>
+        </p:txBody>
+      </p:sp>
+      <p:sp>
+        <p:nvSpPr>
+          <p:cNvPr id="10" name="吹き出し: 角を丸めた四角形 9">
+            <a:extLst>
+              <a:ext uri="{FF2B5EF4-FFF2-40B4-BE49-F238E27FC236}">
+                <a16:creationId xmlns:a16="http://schemas.microsoft.com/office/drawing/2014/main" id="{71DE01A5-1F87-13D2-22A3-7244C2BF70CC}"/>
+              </a:ext>
+            </a:extLst>
+          </p:cNvPr>
+          <p:cNvSpPr/>
+          <p:nvPr/>
+        </p:nvSpPr>
+        <p:spPr>
+          <a:xfrm>
+            <a:off x="6814184" y="5681105"/>
+            <a:ext cx="4346619" cy="597673"/>
+          </a:xfrm>
+          <a:prstGeom prst="wedgeRoundRectCallout">
+            <a:avLst>
+              <a:gd name="adj1" fmla="val -39891"/>
+              <a:gd name="adj2" fmla="val -133258"/>
+              <a:gd name="adj3" fmla="val 16667"/>
+            </a:avLst>
+          </a:prstGeom>
+          <a:solidFill>
+            <a:schemeClr val="bg1"/>
+          </a:solidFill>
+          <a:ln>
+            <a:solidFill>
+              <a:schemeClr val="accent3">
+                <a:lumMod val="75000"/>
+              </a:schemeClr>
+            </a:solidFill>
+          </a:ln>
+        </p:spPr>
+        <p:style>
+          <a:lnRef idx="2">
+            <a:schemeClr val="accent1">
+              <a:shade val="15000"/>
+            </a:schemeClr>
+          </a:lnRef>
+          <a:fillRef idx="1">
+            <a:schemeClr val="accent1"/>
+          </a:fillRef>
+          <a:effectRef idx="0">
+            <a:schemeClr val="accent1"/>
+          </a:effectRef>
+          <a:fontRef idx="minor">
+            <a:schemeClr val="lt1"/>
+          </a:fontRef>
+        </p:style>
+        <p:txBody>
+          <a:bodyPr rtlCol="0" anchor="ctr"/>
+          <a:lstStyle/>
+          <a:p>
+            <a:pPr algn="ctr"/>
+            <a:r>
+              <a:rPr lang="ja-JP" altLang="en-US">
+                <a:solidFill>
+                  <a:schemeClr val="tx1"/>
+                </a:solidFill>
+                <a:latin typeface="メイリオ" panose="020B0604030504040204" pitchFamily="50" charset="-128"/>
+                <a:ea typeface="メイリオ" panose="020B0604030504040204" pitchFamily="50" charset="-128"/>
+              </a:rPr>
+              <a:t>「プリエンプション」では、全員参加</a:t>
+            </a:r>
+            <a:endParaRPr kumimoji="1" lang="ja-JP" altLang="en-US">
+              <a:solidFill>
+                <a:schemeClr val="tx1"/>
+              </a:solidFill>
+              <a:latin typeface="メイリオ" panose="020B0604030504040204" pitchFamily="50" charset="-128"/>
+              <a:ea typeface="メイリオ" panose="020B0604030504040204" pitchFamily="50" charset="-128"/>
+            </a:endParaRPr>
           </a:p>
         </p:txBody>
       </p:sp>
     </p:spTree>
     <p:extLst>
       <p:ext uri="{BB962C8B-B14F-4D97-AF65-F5344CB8AC3E}">
-        <p14:creationId xmlns:p14="http://schemas.microsoft.com/office/powerpoint/2010/main" val="575384196"/>
+        <p14:creationId xmlns:p14="http://schemas.microsoft.com/office/powerpoint/2010/main" val="814091284"/>
       </p:ext>
     </p:extLst>
   </p:cSld>
@@ -11626,7 +12607,7 @@
           <p:cNvPr id="2" name="タイトル 1">
             <a:extLst>
               <a:ext uri="{FF2B5EF4-FFF2-40B4-BE49-F238E27FC236}">
-                <a16:creationId xmlns:a16="http://schemas.microsoft.com/office/drawing/2014/main" id="{86AB8C8D-11A8-96A5-361A-59F9257AFEB8}"/>
+                <a16:creationId xmlns:a16="http://schemas.microsoft.com/office/drawing/2014/main" id="{4EFC2CDA-0986-B2B7-C320-6B8DE47B33BA}"/>
               </a:ext>
             </a:extLst>
           </p:cNvPr>
@@ -11643,14 +12624,14 @@
           <a:lstStyle/>
           <a:p>
             <a:r>
-              <a:rPr lang="en-US" altLang="ja-JP" dirty="0"/>
-              <a:t>RQ2 </a:t>
-            </a:r>
-            <a:r>
-              <a:rPr lang="ja-JP" altLang="en-US" dirty="0"/>
-              <a:t>シミュレーション結果</a:t>
-            </a:r>
-            <a:endParaRPr kumimoji="1" lang="ja-JP" altLang="en-US" dirty="0"/>
+              <a:rPr kumimoji="1" lang="ja-JP" altLang="en-US"/>
+              <a:t>まとめと今後の</a:t>
+            </a:r>
+            <a:r>
+              <a:rPr lang="ja-JP" altLang="en-US"/>
+              <a:t>展望</a:t>
+            </a:r>
+            <a:endParaRPr kumimoji="1" lang="ja-JP" altLang="en-US"/>
           </a:p>
         </p:txBody>
       </p:sp>
@@ -11659,7 +12640,7 @@
           <p:cNvPr id="3" name="コンテンツ プレースホルダー 2">
             <a:extLst>
               <a:ext uri="{FF2B5EF4-FFF2-40B4-BE49-F238E27FC236}">
-                <a16:creationId xmlns:a16="http://schemas.microsoft.com/office/drawing/2014/main" id="{C78D26AC-AF5A-200F-16DA-147EDA531C5D}"/>
+                <a16:creationId xmlns:a16="http://schemas.microsoft.com/office/drawing/2014/main" id="{C25B94AA-472C-E1A1-1C84-B63E0A8F320E}"/>
               </a:ext>
             </a:extLst>
           </p:cNvPr>
@@ -11672,8 +12653,189 @@
         </p:nvSpPr>
         <p:spPr/>
         <p:txBody>
-          <a:bodyPr/>
+          <a:bodyPr>
+            <a:normAutofit fontScale="70000" lnSpcReduction="20000"/>
+          </a:bodyPr>
           <a:lstStyle/>
+          <a:p>
+            <a:pPr marL="0" indent="0">
+              <a:lnSpc>
+                <a:spcPct val="150000"/>
+              </a:lnSpc>
+              <a:buNone/>
+            </a:pPr>
+            <a:r>
+              <a:rPr kumimoji="1" lang="ja-JP" altLang="en-US" sz="4000" b="1">
+                <a:solidFill>
+                  <a:schemeClr val="accent3">
+                    <a:lumMod val="75000"/>
+                  </a:schemeClr>
+                </a:solidFill>
+              </a:rPr>
+              <a:t>研究の成果</a:t>
+            </a:r>
+            <a:endParaRPr kumimoji="1" lang="en-US" altLang="ja-JP" sz="4000" b="1">
+              <a:solidFill>
+                <a:schemeClr val="accent3">
+                  <a:lumMod val="75000"/>
+                </a:schemeClr>
+              </a:solidFill>
+            </a:endParaRPr>
+          </a:p>
+          <a:p>
+            <a:pPr>
+              <a:lnSpc>
+                <a:spcPct val="150000"/>
+              </a:lnSpc>
+            </a:pPr>
+            <a:r>
+              <a:rPr lang="en-US" altLang="ja-JP"/>
+              <a:t>ACP</a:t>
+            </a:r>
+            <a:r>
+              <a:rPr lang="ja-JP" altLang="en-US"/>
+              <a:t>を導入することで、低性能ユーザは</a:t>
+            </a:r>
+            <a:r>
+              <a:rPr lang="ja-JP" altLang="en-US" b="1"/>
+              <a:t>大幅に待ち時間が減少</a:t>
+            </a:r>
+            <a:endParaRPr lang="en-US" altLang="ja-JP" b="1"/>
+          </a:p>
+          <a:p>
+            <a:pPr>
+              <a:lnSpc>
+                <a:spcPct val="150000"/>
+              </a:lnSpc>
+            </a:pPr>
+            <a:r>
+              <a:rPr lang="ja-JP" altLang="en-US"/>
+              <a:t>高性能ユーザは、プリエンティブ方式によって自</a:t>
+            </a:r>
+            <a:r>
+              <a:rPr lang="en-US" altLang="ja-JP"/>
+              <a:t>GPU</a:t>
+            </a:r>
+            <a:r>
+              <a:rPr lang="ja-JP" altLang="en-US"/>
+              <a:t>の優先権を保ちつつ、他</a:t>
+            </a:r>
+            <a:r>
+              <a:rPr lang="en-US" altLang="ja-JP"/>
+              <a:t>GPU</a:t>
+            </a:r>
+            <a:r>
+              <a:rPr lang="ja-JP" altLang="en-US"/>
+              <a:t>も利用することで待ち時間が減少</a:t>
+            </a:r>
+            <a:endParaRPr lang="en-US" altLang="ja-JP"/>
+          </a:p>
+          <a:p>
+            <a:pPr>
+              <a:lnSpc>
+                <a:spcPct val="150000"/>
+              </a:lnSpc>
+            </a:pPr>
+            <a:r>
+              <a:rPr lang="ja-JP" altLang="en-US"/>
+              <a:t>システムルールを整備しないと、高性能ユーザが参加せず</a:t>
+            </a:r>
+            <a:r>
+              <a:rPr lang="en-US" altLang="ja-JP"/>
+              <a:t>ACP</a:t>
+            </a:r>
+            <a:r>
+              <a:rPr lang="ja-JP" altLang="en-US"/>
+              <a:t>が破綻する</a:t>
+            </a:r>
+            <a:endParaRPr lang="en-US" altLang="ja-JP"/>
+          </a:p>
+          <a:p>
+            <a:pPr marL="0" indent="0">
+              <a:lnSpc>
+                <a:spcPct val="150000"/>
+              </a:lnSpc>
+              <a:buNone/>
+            </a:pPr>
+            <a:r>
+              <a:rPr lang="ja-JP" altLang="en-US"/>
+              <a:t>　　　→</a:t>
+            </a:r>
+            <a:r>
+              <a:rPr lang="ja-JP" altLang="en-US" b="1">
+                <a:solidFill>
+                  <a:schemeClr val="accent3">
+                    <a:lumMod val="75000"/>
+                  </a:schemeClr>
+                </a:solidFill>
+              </a:rPr>
+              <a:t>プリエンティブ方式が必要</a:t>
+            </a:r>
+            <a:endParaRPr lang="en-US" altLang="ja-JP" b="1">
+              <a:solidFill>
+                <a:schemeClr val="accent3">
+                  <a:lumMod val="75000"/>
+                </a:schemeClr>
+              </a:solidFill>
+            </a:endParaRPr>
+          </a:p>
+          <a:p>
+            <a:pPr marL="0" indent="0">
+              <a:lnSpc>
+                <a:spcPct val="150000"/>
+              </a:lnSpc>
+              <a:buNone/>
+            </a:pPr>
+            <a:r>
+              <a:rPr lang="ja-JP" altLang="en-US" sz="4000" b="1">
+                <a:solidFill>
+                  <a:schemeClr val="accent3">
+                    <a:lumMod val="75000"/>
+                  </a:schemeClr>
+                </a:solidFill>
+              </a:rPr>
+              <a:t>今後の展望</a:t>
+            </a:r>
+            <a:endParaRPr lang="en-US" altLang="ja-JP" sz="4000" b="1">
+              <a:solidFill>
+                <a:schemeClr val="accent3">
+                  <a:lumMod val="75000"/>
+                </a:schemeClr>
+              </a:solidFill>
+            </a:endParaRPr>
+          </a:p>
+          <a:p>
+            <a:pPr>
+              <a:lnSpc>
+                <a:spcPct val="150000"/>
+              </a:lnSpc>
+            </a:pPr>
+            <a:r>
+              <a:rPr lang="ja-JP" altLang="en-US"/>
+              <a:t>タスクの与え方や複数台</a:t>
+            </a:r>
+            <a:r>
+              <a:rPr lang="en-US" altLang="ja-JP"/>
+              <a:t>GPU</a:t>
+            </a:r>
+            <a:r>
+              <a:rPr lang="ja-JP" altLang="en-US"/>
+              <a:t>などのより研究室の環境を再現して現実的なモデルの構築</a:t>
+            </a:r>
+            <a:endParaRPr lang="en-US" altLang="ja-JP"/>
+          </a:p>
+          <a:p>
+            <a:pPr>
+              <a:lnSpc>
+                <a:spcPct val="150000"/>
+              </a:lnSpc>
+            </a:pPr>
+            <a:r>
+              <a:rPr lang="ja-JP" altLang="en-US"/>
+              <a:t>ポイント制などのインセンティブの導入</a:t>
+            </a:r>
+            <a:endParaRPr lang="en-US" altLang="ja-JP"/>
+          </a:p>
           <a:p>
             <a:endParaRPr kumimoji="1" lang="ja-JP" altLang="en-US"/>
           </a:p>
@@ -11684,7 +12846,7 @@
           <p:cNvPr id="4" name="スライド番号プレースホルダー 3">
             <a:extLst>
               <a:ext uri="{FF2B5EF4-FFF2-40B4-BE49-F238E27FC236}">
-                <a16:creationId xmlns:a16="http://schemas.microsoft.com/office/drawing/2014/main" id="{10E2543F-C418-7668-E296-BC1FC3AEF9E0}"/>
+                <a16:creationId xmlns:a16="http://schemas.microsoft.com/office/drawing/2014/main" id="{D4E70AE2-5A54-1804-45EC-B0458865945C}"/>
               </a:ext>
             </a:extLst>
           </p:cNvPr>
@@ -11705,14 +12867,14 @@
               <a:pPr/>
               <a:t>11</a:t>
             </a:fld>
-            <a:endParaRPr lang="ja-JP" altLang="en-US" dirty="0"/>
+            <a:endParaRPr lang="ja-JP" altLang="en-US"/>
           </a:p>
         </p:txBody>
       </p:sp>
     </p:spTree>
     <p:extLst>
       <p:ext uri="{BB962C8B-B14F-4D97-AF65-F5344CB8AC3E}">
-        <p14:creationId xmlns:p14="http://schemas.microsoft.com/office/powerpoint/2010/main" val="814091284"/>
+        <p14:creationId xmlns:p14="http://schemas.microsoft.com/office/powerpoint/2010/main" val="1108715131"/>
       </p:ext>
     </p:extLst>
   </p:cSld>
@@ -11744,7 +12906,7 @@
           <p:cNvPr id="2" name="タイトル 1">
             <a:extLst>
               <a:ext uri="{FF2B5EF4-FFF2-40B4-BE49-F238E27FC236}">
-                <a16:creationId xmlns:a16="http://schemas.microsoft.com/office/drawing/2014/main" id="{4EFC2CDA-0986-B2B7-C320-6B8DE47B33BA}"/>
+                <a16:creationId xmlns:a16="http://schemas.microsoft.com/office/drawing/2014/main" id="{0A7CEE94-C8BD-432D-227E-4DF14238166B}"/>
               </a:ext>
             </a:extLst>
           </p:cNvPr>
@@ -11761,92 +12923,51 @@
           <a:lstStyle/>
           <a:p>
             <a:r>
-              <a:rPr kumimoji="1" lang="ja-JP" altLang="en-US" dirty="0"/>
-              <a:t>まとめと今後の</a:t>
-            </a:r>
-            <a:r>
-              <a:rPr lang="ja-JP" altLang="en-US" dirty="0"/>
-              <a:t>展望</a:t>
-            </a:r>
-            <a:endParaRPr kumimoji="1" lang="ja-JP" altLang="en-US" dirty="0"/>
+              <a:rPr kumimoji="1" lang="en-US" altLang="ja-JP"/>
+              <a:t>Appendix</a:t>
+            </a:r>
+            <a:endParaRPr kumimoji="1" lang="ja-JP" altLang="en-US"/>
           </a:p>
         </p:txBody>
       </p:sp>
-      <p:sp>
-        <p:nvSpPr>
-          <p:cNvPr id="3" name="コンテンツ プレースホルダー 2">
-            <a:extLst>
-              <a:ext uri="{FF2B5EF4-FFF2-40B4-BE49-F238E27FC236}">
-                <a16:creationId xmlns:a16="http://schemas.microsoft.com/office/drawing/2014/main" id="{C25B94AA-472C-E1A1-1C84-B63E0A8F320E}"/>
-              </a:ext>
-            </a:extLst>
-          </p:cNvPr>
-          <p:cNvSpPr>
-            <a:spLocks noGrp="1"/>
-          </p:cNvSpPr>
+      <p:pic>
+        <p:nvPicPr>
+          <p:cNvPr id="6" name="コンテンツ プレースホルダー 5" descr="グラフ, 折れ線グラフ&#10;&#10;AI 生成コンテンツは誤りを含む可能性があります。">
+            <a:extLst>
+              <a:ext uri="{FF2B5EF4-FFF2-40B4-BE49-F238E27FC236}">
+                <a16:creationId xmlns:a16="http://schemas.microsoft.com/office/drawing/2014/main" id="{545F06DE-931C-EFDC-EE0B-B643B84F27D9}"/>
+              </a:ext>
+            </a:extLst>
+          </p:cNvPr>
+          <p:cNvPicPr>
+            <a:picLocks noGrp="1" noChangeAspect="1"/>
+          </p:cNvPicPr>
           <p:nvPr>
             <p:ph idx="1"/>
           </p:nvPr>
-        </p:nvSpPr>
-        <p:spPr/>
-        <p:txBody>
-          <a:bodyPr/>
-          <a:lstStyle/>
-          <a:p>
-            <a:r>
-              <a:rPr kumimoji="1" lang="ja-JP" altLang="en-US" dirty="0"/>
-              <a:t>ぷりえんてぃぶ方式を用いたシステムは高性能な</a:t>
-            </a:r>
-            <a:r>
-              <a:rPr kumimoji="1" lang="en-US" altLang="ja-JP" dirty="0"/>
-              <a:t>GPU</a:t>
-            </a:r>
-            <a:r>
-              <a:rPr kumimoji="1" lang="ja-JP" altLang="en-US" dirty="0"/>
-              <a:t>でもメリットのあるものだとわかった</a:t>
-            </a:r>
-            <a:endParaRPr kumimoji="1" lang="en-US" altLang="ja-JP" dirty="0"/>
-          </a:p>
-          <a:p>
-            <a:r>
-              <a:rPr lang="ja-JP" altLang="en-US" dirty="0"/>
-              <a:t>しかし、少しターンアラウンドタイムが短縮できただけで、インセンティブは少ない</a:t>
-            </a:r>
-            <a:endParaRPr lang="en-US" altLang="ja-JP" dirty="0"/>
-          </a:p>
-          <a:p>
-            <a:r>
-              <a:rPr lang="ja-JP" altLang="en-US" dirty="0"/>
-              <a:t>ポイント制などのインセンティブを導入してシステムがどう変わるか</a:t>
-            </a:r>
-            <a:endParaRPr lang="en-US" altLang="ja-JP" dirty="0"/>
-          </a:p>
-          <a:p>
-            <a:r>
-              <a:rPr kumimoji="1" lang="ja-JP" altLang="en-US" dirty="0"/>
-              <a:t>複数台</a:t>
-            </a:r>
-            <a:r>
-              <a:rPr kumimoji="1" lang="en-US" altLang="ja-JP" dirty="0"/>
-              <a:t>GPU</a:t>
-            </a:r>
-            <a:r>
-              <a:rPr kumimoji="1" lang="ja-JP" altLang="en-US" dirty="0"/>
-              <a:t>などのより研究室の環境を再現して現実的なモデルの構築</a:t>
-            </a:r>
-            <a:endParaRPr kumimoji="1" lang="en-US" altLang="ja-JP" dirty="0"/>
-          </a:p>
-          <a:p>
-            <a:endParaRPr kumimoji="1" lang="ja-JP" altLang="en-US"/>
-          </a:p>
-        </p:txBody>
-      </p:sp>
+        </p:nvPicPr>
+        <p:blipFill>
+          <a:blip r:embed="rId3"/>
+          <a:stretch>
+            <a:fillRect/>
+          </a:stretch>
+        </p:blipFill>
+        <p:spPr>
+          <a:xfrm>
+            <a:off x="542278" y="1189038"/>
+            <a:ext cx="5292123" cy="5327650"/>
+          </a:xfrm>
+          <a:prstGeom prst="rect">
+            <a:avLst/>
+          </a:prstGeom>
+        </p:spPr>
+      </p:pic>
       <p:sp>
         <p:nvSpPr>
           <p:cNvPr id="4" name="スライド番号プレースホルダー 3">
             <a:extLst>
               <a:ext uri="{FF2B5EF4-FFF2-40B4-BE49-F238E27FC236}">
-                <a16:creationId xmlns:a16="http://schemas.microsoft.com/office/drawing/2014/main" id="{D4E70AE2-5A54-1804-45EC-B0458865945C}"/>
+                <a16:creationId xmlns:a16="http://schemas.microsoft.com/office/drawing/2014/main" id="{830CFFC0-DC09-BBA9-30DD-7531031AF88F}"/>
               </a:ext>
             </a:extLst>
           </p:cNvPr>
@@ -11867,1103 +12988,259 @@
               <a:pPr/>
               <a:t>12</a:t>
             </a:fld>
-            <a:endParaRPr lang="ja-JP" altLang="en-US" dirty="0"/>
+            <a:endParaRPr lang="ja-JP" altLang="en-US"/>
+          </a:p>
+        </p:txBody>
+      </p:sp>
+      <p:sp>
+        <p:nvSpPr>
+          <p:cNvPr id="10" name="吹き出し: 角を丸めた四角形 9">
+            <a:extLst>
+              <a:ext uri="{FF2B5EF4-FFF2-40B4-BE49-F238E27FC236}">
+                <a16:creationId xmlns:a16="http://schemas.microsoft.com/office/drawing/2014/main" id="{4371705F-DC47-321C-1FD8-B2BF6D9055E7}"/>
+              </a:ext>
+            </a:extLst>
+          </p:cNvPr>
+          <p:cNvSpPr/>
+          <p:nvPr/>
+        </p:nvSpPr>
+        <p:spPr>
+          <a:xfrm>
+            <a:off x="7206001" y="1511300"/>
+            <a:ext cx="4185899" cy="2087562"/>
+          </a:xfrm>
+          <a:prstGeom prst="wedgeRoundRectCallout">
+            <a:avLst>
+              <a:gd name="adj1" fmla="val -83122"/>
+              <a:gd name="adj2" fmla="val 27486"/>
+              <a:gd name="adj3" fmla="val 16667"/>
+            </a:avLst>
+          </a:prstGeom>
+          <a:solidFill>
+            <a:schemeClr val="bg1"/>
+          </a:solidFill>
+          <a:ln>
+            <a:solidFill>
+              <a:schemeClr val="accent3">
+                <a:lumMod val="75000"/>
+              </a:schemeClr>
+            </a:solidFill>
+          </a:ln>
+        </p:spPr>
+        <p:style>
+          <a:lnRef idx="2">
+            <a:schemeClr val="accent1">
+              <a:shade val="15000"/>
+            </a:schemeClr>
+          </a:lnRef>
+          <a:fillRef idx="1">
+            <a:schemeClr val="accent1"/>
+          </a:fillRef>
+          <a:effectRef idx="0">
+            <a:schemeClr val="accent1"/>
+          </a:effectRef>
+          <a:fontRef idx="minor">
+            <a:schemeClr val="lt1"/>
+          </a:fontRef>
+        </p:style>
+        <p:txBody>
+          <a:bodyPr rtlCol="0" anchor="ctr"/>
+          <a:lstStyle/>
+          <a:p>
+            <a:pPr>
+              <a:lnSpc>
+                <a:spcPct val="150000"/>
+              </a:lnSpc>
+            </a:pPr>
+            <a:r>
+              <a:rPr lang="ja-JP" altLang="en-US">
+                <a:solidFill>
+                  <a:schemeClr val="tx1"/>
+                </a:solidFill>
+              </a:rPr>
+              <a:t>エポック数を</a:t>
+            </a:r>
+            <a:r>
+              <a:rPr lang="en-US" altLang="ja-JP">
+                <a:solidFill>
+                  <a:schemeClr val="tx1"/>
+                </a:solidFill>
+              </a:rPr>
+              <a:t>10</a:t>
+            </a:r>
+            <a:r>
+              <a:rPr lang="ja-JP" altLang="en-US">
+                <a:solidFill>
+                  <a:schemeClr val="tx1"/>
+                </a:solidFill>
+              </a:rPr>
+              <a:t>→</a:t>
+            </a:r>
+            <a:r>
+              <a:rPr lang="en-US" altLang="ja-JP">
+                <a:solidFill>
+                  <a:schemeClr val="tx1"/>
+                </a:solidFill>
+              </a:rPr>
+              <a:t>200</a:t>
+            </a:r>
+            <a:r>
+              <a:rPr lang="ja-JP" altLang="en-US">
+                <a:solidFill>
+                  <a:schemeClr val="tx1"/>
+                </a:solidFill>
+              </a:rPr>
+              <a:t>（全ユーザ）</a:t>
+            </a:r>
+            <a:endParaRPr lang="en-US" altLang="ja-JP">
+              <a:solidFill>
+                <a:schemeClr val="tx1"/>
+              </a:solidFill>
+            </a:endParaRPr>
+          </a:p>
+          <a:p>
+            <a:pPr>
+              <a:lnSpc>
+                <a:spcPct val="150000"/>
+              </a:lnSpc>
+            </a:pPr>
+            <a:r>
+              <a:rPr lang="ja-JP" altLang="en-US" b="1">
+                <a:solidFill>
+                  <a:schemeClr val="tx1"/>
+                </a:solidFill>
+              </a:rPr>
+              <a:t>→全ユーザがタスク飽和状態</a:t>
+            </a:r>
+            <a:endParaRPr lang="en-US" altLang="ja-JP" b="1">
+              <a:solidFill>
+                <a:schemeClr val="tx1"/>
+              </a:solidFill>
+            </a:endParaRPr>
+          </a:p>
+          <a:p>
+            <a:pPr>
+              <a:lnSpc>
+                <a:spcPct val="150000"/>
+              </a:lnSpc>
+            </a:pPr>
+            <a:r>
+              <a:rPr lang="ja-JP" altLang="en-US" b="1">
+                <a:solidFill>
+                  <a:schemeClr val="tx1"/>
+                </a:solidFill>
+              </a:rPr>
+              <a:t>「</a:t>
+            </a:r>
+            <a:r>
+              <a:rPr lang="en-US" altLang="ja-JP" b="1">
+                <a:solidFill>
+                  <a:schemeClr val="tx1"/>
+                </a:solidFill>
+              </a:rPr>
+              <a:t>FCFS</a:t>
+            </a:r>
+            <a:r>
+              <a:rPr lang="ja-JP" altLang="en-US" b="1">
+                <a:solidFill>
+                  <a:schemeClr val="tx1"/>
+                </a:solidFill>
+              </a:rPr>
+              <a:t>」は不参加だが、</a:t>
+            </a:r>
+            <a:endParaRPr lang="en-US" altLang="ja-JP" b="1">
+              <a:solidFill>
+                <a:schemeClr val="tx1"/>
+              </a:solidFill>
+            </a:endParaRPr>
+          </a:p>
+          <a:p>
+            <a:pPr>
+              <a:lnSpc>
+                <a:spcPct val="150000"/>
+              </a:lnSpc>
+            </a:pPr>
+            <a:r>
+              <a:rPr lang="ja-JP" altLang="en-US" b="1">
+                <a:solidFill>
+                  <a:schemeClr val="tx1"/>
+                </a:solidFill>
+              </a:rPr>
+              <a:t>「所有者優先」も全員参加となる</a:t>
+            </a:r>
+            <a:endParaRPr lang="en-US" altLang="ja-JP" b="1">
+              <a:solidFill>
+                <a:schemeClr val="tx1"/>
+              </a:solidFill>
+            </a:endParaRPr>
+          </a:p>
+        </p:txBody>
+      </p:sp>
+      <p:sp>
+        <p:nvSpPr>
+          <p:cNvPr id="11" name="テキスト ボックス 10">
+            <a:extLst>
+              <a:ext uri="{FF2B5EF4-FFF2-40B4-BE49-F238E27FC236}">
+                <a16:creationId xmlns:a16="http://schemas.microsoft.com/office/drawing/2014/main" id="{1999D2C5-EBF8-C681-A231-F96EE1099F1C}"/>
+              </a:ext>
+            </a:extLst>
+          </p:cNvPr>
+          <p:cNvSpPr txBox="1"/>
+          <p:nvPr/>
+        </p:nvSpPr>
+        <p:spPr>
+          <a:xfrm>
+            <a:off x="6096000" y="4309596"/>
+            <a:ext cx="5156200" cy="646331"/>
+          </a:xfrm>
+          <a:prstGeom prst="rect">
+            <a:avLst/>
+          </a:prstGeom>
+          <a:noFill/>
+        </p:spPr>
+        <p:txBody>
+          <a:bodyPr wrap="square" rtlCol="0">
+            <a:spAutoFit/>
+          </a:bodyPr>
+          <a:lstStyle/>
+          <a:p>
+            <a:r>
+              <a:rPr kumimoji="1" lang="ja-JP" altLang="en-US" b="1">
+                <a:solidFill>
+                  <a:schemeClr val="accent3">
+                    <a:lumMod val="75000"/>
+                  </a:schemeClr>
+                </a:solidFill>
+              </a:rPr>
+              <a:t>高性能ユーザも他の</a:t>
+            </a:r>
+            <a:r>
+              <a:rPr kumimoji="1" lang="en-US" altLang="ja-JP" b="1">
+                <a:solidFill>
+                  <a:schemeClr val="accent3">
+                    <a:lumMod val="75000"/>
+                  </a:schemeClr>
+                </a:solidFill>
+              </a:rPr>
+              <a:t>GPU</a:t>
+            </a:r>
+            <a:r>
+              <a:rPr kumimoji="1" lang="ja-JP" altLang="en-US" b="1">
+                <a:solidFill>
+                  <a:schemeClr val="accent3">
+                    <a:lumMod val="75000"/>
+                  </a:schemeClr>
+                </a:solidFill>
+              </a:rPr>
+              <a:t>を利用するようになるため</a:t>
+            </a:r>
           </a:p>
         </p:txBody>
       </p:sp>
     </p:spTree>
     <p:extLst>
       <p:ext uri="{BB962C8B-B14F-4D97-AF65-F5344CB8AC3E}">
-        <p14:creationId xmlns:p14="http://schemas.microsoft.com/office/powerpoint/2010/main" val="1108715131"/>
-      </p:ext>
-    </p:extLst>
-  </p:cSld>
-  <p:clrMapOvr>
-    <a:masterClrMapping/>
-  </p:clrMapOvr>
-</p:sld>
-</file>
-
-<file path=ppt/slides/slide13.xml><?xml version="1.0" encoding="utf-8"?>
-<p:sld xmlns:a="http://schemas.openxmlformats.org/drawingml/2006/main" xmlns:r="http://schemas.openxmlformats.org/officeDocument/2006/relationships" xmlns:p="http://schemas.openxmlformats.org/presentationml/2006/main">
-  <p:cSld>
-    <p:spTree>
-      <p:nvGrpSpPr>
-        <p:cNvPr id="1" name=""/>
-        <p:cNvGrpSpPr/>
-        <p:nvPr/>
-      </p:nvGrpSpPr>
-      <p:grpSpPr>
-        <a:xfrm>
-          <a:off x="0" y="0"/>
-          <a:ext cx="0" cy="0"/>
-          <a:chOff x="0" y="0"/>
-          <a:chExt cx="0" cy="0"/>
-        </a:xfrm>
-      </p:grpSpPr>
-      <p:sp>
-        <p:nvSpPr>
-          <p:cNvPr id="2" name="タイトル 1">
-            <a:extLst>
-              <a:ext uri="{FF2B5EF4-FFF2-40B4-BE49-F238E27FC236}">
-                <a16:creationId xmlns:a16="http://schemas.microsoft.com/office/drawing/2014/main" id="{4784FD68-ED62-E78C-867B-F967C80AA95B}"/>
-              </a:ext>
-            </a:extLst>
-          </p:cNvPr>
-          <p:cNvSpPr>
-            <a:spLocks noGrp="1"/>
-          </p:cNvSpPr>
-          <p:nvPr>
-            <p:ph type="title"/>
-          </p:nvPr>
-        </p:nvSpPr>
-        <p:spPr/>
-        <p:txBody>
-          <a:bodyPr/>
-          <a:lstStyle/>
-          <a:p>
-            <a:r>
-              <a:rPr kumimoji="1" lang="en-US" altLang="ja-JP" dirty="0"/>
-              <a:t>Appendix</a:t>
-            </a:r>
-            <a:endParaRPr kumimoji="1" lang="ja-JP" altLang="en-US" dirty="0"/>
-          </a:p>
-        </p:txBody>
-      </p:sp>
-      <p:sp>
-        <p:nvSpPr>
-          <p:cNvPr id="4" name="スライド番号プレースホルダー 3">
-            <a:extLst>
-              <a:ext uri="{FF2B5EF4-FFF2-40B4-BE49-F238E27FC236}">
-                <a16:creationId xmlns:a16="http://schemas.microsoft.com/office/drawing/2014/main" id="{3DA916EE-E019-3C5C-7463-2E2A494C405B}"/>
-              </a:ext>
-            </a:extLst>
-          </p:cNvPr>
-          <p:cNvSpPr>
-            <a:spLocks noGrp="1"/>
-          </p:cNvSpPr>
-          <p:nvPr>
-            <p:ph type="sldNum" sz="quarter" idx="12"/>
-          </p:nvPr>
-        </p:nvSpPr>
-        <p:spPr/>
-        <p:txBody>
-          <a:bodyPr/>
-          <a:lstStyle/>
-          <a:p>
-            <a:fld id="{8D1BC46D-89B1-41A3-BBA1-F56BEABD0A90}" type="slidenum">
-              <a:rPr lang="ja-JP" altLang="en-US" smtClean="0"/>
-              <a:pPr/>
-              <a:t>13</a:t>
-            </a:fld>
-            <a:endParaRPr lang="ja-JP" altLang="en-US" dirty="0"/>
-          </a:p>
-        </p:txBody>
-      </p:sp>
-      <mc:AlternateContent xmlns:mc="http://schemas.openxmlformats.org/markup-compatibility/2006">
-        <mc:Choice xmlns:a14="http://schemas.microsoft.com/office/drawing/2010/main" Requires="a14">
-          <p:sp>
-            <p:nvSpPr>
-              <p:cNvPr id="8" name="Rectangle 3">
-                <a:extLst>
-                  <a:ext uri="{FF2B5EF4-FFF2-40B4-BE49-F238E27FC236}">
-                    <a16:creationId xmlns:a16="http://schemas.microsoft.com/office/drawing/2014/main" id="{6D67A5E9-B205-E747-CDAE-A3A6C8147290}"/>
-                  </a:ext>
-                </a:extLst>
-              </p:cNvPr>
-              <p:cNvSpPr>
-                <a:spLocks noGrp="1" noChangeArrowheads="1"/>
-              </p:cNvSpPr>
-              <p:nvPr>
-                <p:ph idx="1"/>
-              </p:nvPr>
-            </p:nvSpPr>
-            <p:spPr bwMode="auto">
-              <a:xfrm>
-                <a:off x="1662223" y="1262686"/>
-                <a:ext cx="5466433" cy="746936"/>
-              </a:xfrm>
-              <a:prstGeom prst="rect">
-                <a:avLst/>
-              </a:prstGeom>
-              <a:noFill/>
-              <a:ln>
-                <a:noFill/>
-              </a:ln>
-              <a:effectLst/>
-              <a:extLst>
-                <a:ext uri="{909E8E84-426E-40DD-AFC4-6F175D3DCCD1}">
-                  <a14:hiddenFill>
-                    <a:solidFill>
-                      <a:schemeClr val="accent1"/>
-                    </a:solidFill>
-                  </a14:hiddenFill>
-                </a:ext>
-                <a:ext uri="{91240B29-F687-4F45-9708-019B960494DF}">
-                  <a14:hiddenLine w="9525">
-                    <a:solidFill>
-                      <a:schemeClr val="tx1"/>
-                    </a:solidFill>
-                    <a:miter lim="800000"/>
-                    <a:headEnd/>
-                    <a:tailEnd/>
-                  </a14:hiddenLine>
-                </a:ext>
-                <a:ext uri="{AF507438-7753-43E0-B8FC-AC1667EBCBE1}">
-                  <a14:hiddenEffects>
-                    <a:effectLst>
-                      <a:outerShdw dist="35921" dir="2700000" algn="ctr" rotWithShape="0">
-                        <a:schemeClr val="bg2"/>
-                      </a:outerShdw>
-                    </a:effectLst>
-                  </a14:hiddenEffects>
-                </a:ext>
-              </a:extLst>
-            </p:spPr>
-            <p:txBody>
-              <a:bodyPr vert="horz" wrap="none" lIns="91440" tIns="0" rIns="91440" bIns="45720" numCol="1" anchor="ctr" anchorCtr="0" compatLnSpc="1">
-                <a:prstTxWarp prst="textNoShape">
-                  <a:avLst/>
-                </a:prstTxWarp>
-                <a:spAutoFit/>
-              </a:bodyPr>
-              <a:lstStyle/>
-              <a:p>
-                <a:pPr marL="0" lvl="0" indent="0" eaLnBrk="0" fontAlgn="base" hangingPunct="0">
-                  <a:lnSpc>
-                    <a:spcPct val="100000"/>
-                  </a:lnSpc>
-                  <a:spcBef>
-                    <a:spcPct val="0"/>
-                  </a:spcBef>
-                  <a:spcAft>
-                    <a:spcPct val="0"/>
-                  </a:spcAft>
-                  <a:buNone/>
-                </a:pPr>
-                <a14:m>
-                  <m:oMathPara xmlns:m="http://schemas.openxmlformats.org/officeDocument/2006/math">
-                    <m:oMathParaPr>
-                      <m:jc m:val="centerGroup"/>
-                    </m:oMathParaPr>
-                    <m:oMath xmlns:m="http://schemas.openxmlformats.org/officeDocument/2006/math">
-                      <m:sSub>
-                        <m:sSubPr>
-                          <m:ctrlPr>
-                            <a:rPr lang="en-US" altLang="ja-JP" sz="1800" i="1" dirty="0" smtClean="0">
-                              <a:latin typeface="Cambria Math" panose="02040503050406030204" pitchFamily="18" charset="0"/>
-                            </a:rPr>
-                          </m:ctrlPr>
-                        </m:sSubPr>
-                        <m:e>
-                          <m:r>
-                            <a:rPr lang="en-US" altLang="ja-JP" sz="1800" i="1" dirty="0" smtClean="0">
-                              <a:latin typeface="Cambria Math" panose="02040503050406030204" pitchFamily="18" charset="0"/>
-                            </a:rPr>
-                            <m:t>𝑇</m:t>
-                          </m:r>
-                        </m:e>
-                        <m:sub>
-                          <m:r>
-                            <a:rPr lang="en-US" altLang="ja-JP" sz="1800" i="1" dirty="0" smtClean="0">
-                              <a:latin typeface="Cambria Math" panose="02040503050406030204" pitchFamily="18" charset="0"/>
-                            </a:rPr>
-                            <m:t>𝑡𝑢𝑟𝑛𝑎𝑟𝑜𝑢𝑛𝑑</m:t>
-                          </m:r>
-                        </m:sub>
-                      </m:sSub>
-                      <m:r>
-                        <a:rPr lang="en-US" altLang="ja-JP" sz="1800" i="1" dirty="0" smtClean="0">
-                          <a:latin typeface="Cambria Math" panose="02040503050406030204" pitchFamily="18" charset="0"/>
-                        </a:rPr>
-                        <m:t>=</m:t>
-                      </m:r>
-                      <m:d>
-                        <m:dPr>
-                          <m:ctrlPr>
-                            <a:rPr lang="en-US" altLang="ja-JP" sz="1800" i="1" dirty="0" smtClean="0">
-                              <a:latin typeface="Cambria Math" panose="02040503050406030204" pitchFamily="18" charset="0"/>
-                            </a:rPr>
-                          </m:ctrlPr>
-                        </m:dPr>
-                        <m:e>
-                          <m:sSub>
-                            <m:sSubPr>
-                              <m:ctrlPr>
-                                <a:rPr lang="en-US" altLang="ja-JP" sz="1800" i="1" dirty="0" smtClean="0">
-                                  <a:latin typeface="Cambria Math" panose="02040503050406030204" pitchFamily="18" charset="0"/>
-                                </a:rPr>
-                              </m:ctrlPr>
-                            </m:sSubPr>
-                            <m:e>
-                              <m:r>
-                                <a:rPr lang="en-US" altLang="ja-JP" sz="1800" i="1" dirty="0" smtClean="0">
-                                  <a:latin typeface="Cambria Math" panose="02040503050406030204" pitchFamily="18" charset="0"/>
-                                </a:rPr>
-                                <m:t>𝑇</m:t>
-                              </m:r>
-                            </m:e>
-                            <m:sub>
-                              <m:r>
-                                <a:rPr lang="en-US" altLang="ja-JP" sz="1800" i="1" dirty="0" smtClean="0">
-                                  <a:latin typeface="Cambria Math" panose="02040503050406030204" pitchFamily="18" charset="0"/>
-                                </a:rPr>
-                                <m:t>𝑓𝑖𝑛𝑖𝑠h</m:t>
-                              </m:r>
-                            </m:sub>
-                          </m:sSub>
-                          <m:r>
-                            <a:rPr lang="en-US" altLang="ja-JP" sz="1800" i="1" dirty="0" smtClean="0">
-                              <a:latin typeface="Cambria Math" panose="02040503050406030204" pitchFamily="18" charset="0"/>
-                            </a:rPr>
-                            <m:t>−</m:t>
-                          </m:r>
-                          <m:sSub>
-                            <m:sSubPr>
-                              <m:ctrlPr>
-                                <a:rPr lang="en-US" altLang="ja-JP" sz="1800" i="1" dirty="0" smtClean="0">
-                                  <a:latin typeface="Cambria Math" panose="02040503050406030204" pitchFamily="18" charset="0"/>
-                                </a:rPr>
-                              </m:ctrlPr>
-                            </m:sSubPr>
-                            <m:e>
-                              <m:r>
-                                <a:rPr lang="en-US" altLang="ja-JP" sz="1800" i="1" dirty="0" smtClean="0">
-                                  <a:latin typeface="Cambria Math" panose="02040503050406030204" pitchFamily="18" charset="0"/>
-                                </a:rPr>
-                                <m:t>𝑇</m:t>
-                              </m:r>
-                            </m:e>
-                            <m:sub>
-                              <m:r>
-                                <a:rPr lang="en-US" altLang="ja-JP" sz="1800" i="1" dirty="0" smtClean="0">
-                                  <a:latin typeface="Cambria Math" panose="02040503050406030204" pitchFamily="18" charset="0"/>
-                                </a:rPr>
-                                <m:t>𝑛𝑜𝑤</m:t>
-                              </m:r>
-                            </m:sub>
-                          </m:sSub>
-                        </m:e>
-                      </m:d>
-                      <m:r>
-                        <a:rPr lang="en-US" altLang="ja-JP" sz="1800" i="1" dirty="0" smtClean="0">
-                          <a:latin typeface="Cambria Math" panose="02040503050406030204" pitchFamily="18" charset="0"/>
-                        </a:rPr>
-                        <m:t>+</m:t>
-                      </m:r>
-                      <m:nary>
-                        <m:naryPr>
-                          <m:chr m:val="∑"/>
-                          <m:supHide m:val="on"/>
-                          <m:ctrlPr>
-                            <a:rPr lang="en-US" altLang="ja-JP" sz="1800" i="1" dirty="0" smtClean="0">
-                              <a:latin typeface="Cambria Math" panose="02040503050406030204" pitchFamily="18" charset="0"/>
-                            </a:rPr>
-                          </m:ctrlPr>
-                        </m:naryPr>
-                        <m:sub>
-                          <m:r>
-                            <a:rPr lang="en-US" altLang="ja-JP" sz="1800" i="1" dirty="0" smtClean="0">
-                              <a:latin typeface="Cambria Math" panose="02040503050406030204" pitchFamily="18" charset="0"/>
-                            </a:rPr>
-                            <m:t>𝑘</m:t>
-                          </m:r>
-                          <m:r>
-                            <a:rPr lang="en-US" altLang="ja-JP" sz="1800" i="1" dirty="0" smtClean="0">
-                              <a:latin typeface="Cambria Math" panose="02040503050406030204" pitchFamily="18" charset="0"/>
-                            </a:rPr>
-                            <m:t>∈</m:t>
-                          </m:r>
-                          <m:r>
-                            <a:rPr lang="en-US" altLang="ja-JP" sz="1800" i="1" dirty="0" smtClean="0">
-                              <a:latin typeface="Cambria Math" panose="02040503050406030204" pitchFamily="18" charset="0"/>
-                            </a:rPr>
-                            <m:t>𝑄𝑢𝑒𝑢𝑒</m:t>
-                          </m:r>
-                        </m:sub>
-                        <m:sup/>
-                        <m:e>
-                          <m:f>
-                            <m:fPr>
-                              <m:ctrlPr>
-                                <a:rPr lang="en-US" altLang="ja-JP" sz="1800" i="1" dirty="0" smtClean="0">
-                                  <a:latin typeface="Cambria Math" panose="02040503050406030204" pitchFamily="18" charset="0"/>
-                                </a:rPr>
-                              </m:ctrlPr>
-                            </m:fPr>
-                            <m:num>
-                              <m:sSub>
-                                <m:sSubPr>
-                                  <m:ctrlPr>
-                                    <a:rPr lang="en-US" altLang="ja-JP" sz="1800" i="1" dirty="0" err="1" smtClean="0">
-                                      <a:latin typeface="Cambria Math" panose="02040503050406030204" pitchFamily="18" charset="0"/>
-                                    </a:rPr>
-                                  </m:ctrlPr>
-                                </m:sSubPr>
-                                <m:e>
-                                  <m:r>
-                                    <a:rPr lang="en-US" altLang="ja-JP" sz="1800" i="1" dirty="0" err="1">
-                                      <a:latin typeface="Cambria Math" panose="02040503050406030204" pitchFamily="18" charset="0"/>
-                                    </a:rPr>
-                                    <m:t>𝑆</m:t>
-                                  </m:r>
-                                </m:e>
-                                <m:sub>
-                                  <m:r>
-                                    <a:rPr lang="en-US" altLang="ja-JP" sz="1800" i="1" dirty="0" err="1">
-                                      <a:latin typeface="Cambria Math" panose="02040503050406030204" pitchFamily="18" charset="0"/>
-                                    </a:rPr>
-                                    <m:t>𝑘</m:t>
-                                  </m:r>
-                                </m:sub>
-                              </m:sSub>
-                            </m:num>
-                            <m:den>
-                              <m:sSub>
-                                <m:sSubPr>
-                                  <m:ctrlPr>
-                                    <a:rPr lang="en-US" altLang="ja-JP" sz="1800" i="1" dirty="0">
-                                      <a:latin typeface="Cambria Math" panose="02040503050406030204" pitchFamily="18" charset="0"/>
-                                    </a:rPr>
-                                  </m:ctrlPr>
-                                </m:sSubPr>
-                                <m:e>
-                                  <m:r>
-                                    <a:rPr lang="en-US" altLang="ja-JP" sz="1800" i="1" dirty="0">
-                                      <a:latin typeface="Cambria Math" panose="02040503050406030204" pitchFamily="18" charset="0"/>
-                                    </a:rPr>
-                                    <m:t>𝜇</m:t>
-                                  </m:r>
-                                </m:e>
-                                <m:sub>
-                                  <m:r>
-                                    <a:rPr lang="en-US" altLang="ja-JP" sz="1800" i="1" dirty="0">
-                                      <a:latin typeface="Cambria Math" panose="02040503050406030204" pitchFamily="18" charset="0"/>
-                                    </a:rPr>
-                                    <m:t>𝑒𝑓𝑓</m:t>
-                                  </m:r>
-                                </m:sub>
-                              </m:sSub>
-                            </m:den>
-                          </m:f>
-                        </m:e>
-                      </m:nary>
-                      <m:r>
-                        <a:rPr lang="en-US" altLang="ja-JP" sz="1800" i="1" dirty="0">
-                          <a:latin typeface="Cambria Math" panose="02040503050406030204" pitchFamily="18" charset="0"/>
-                        </a:rPr>
-                        <m:t>+</m:t>
-                      </m:r>
-                      <m:f>
-                        <m:fPr>
-                          <m:ctrlPr>
-                            <a:rPr lang="en-US" altLang="ja-JP" sz="1800" i="1" dirty="0">
-                              <a:latin typeface="Cambria Math" panose="02040503050406030204" pitchFamily="18" charset="0"/>
-                            </a:rPr>
-                          </m:ctrlPr>
-                        </m:fPr>
-                        <m:num>
-                          <m:sSub>
-                            <m:sSubPr>
-                              <m:ctrlPr>
-                                <a:rPr lang="en-US" altLang="ja-JP" sz="1800" i="1" dirty="0">
-                                  <a:latin typeface="Cambria Math" panose="02040503050406030204" pitchFamily="18" charset="0"/>
-                                </a:rPr>
-                              </m:ctrlPr>
-                            </m:sSubPr>
-                            <m:e>
-                              <m:r>
-                                <a:rPr lang="en-US" altLang="ja-JP" sz="1800" i="1" dirty="0">
-                                  <a:latin typeface="Cambria Math" panose="02040503050406030204" pitchFamily="18" charset="0"/>
-                                </a:rPr>
-                                <m:t>𝑆</m:t>
-                              </m:r>
-                            </m:e>
-                            <m:sub>
-                              <m:r>
-                                <a:rPr lang="en-US" altLang="ja-JP" sz="1800" i="1" dirty="0">
-                                  <a:latin typeface="Cambria Math" panose="02040503050406030204" pitchFamily="18" charset="0"/>
-                                </a:rPr>
-                                <m:t>𝑛𝑒𝑤</m:t>
-                              </m:r>
-                            </m:sub>
-                          </m:sSub>
-                        </m:num>
-                        <m:den>
-                          <m:sSub>
-                            <m:sSubPr>
-                              <m:ctrlPr>
-                                <a:rPr lang="en-US" altLang="ja-JP" sz="1800" i="1" dirty="0">
-                                  <a:latin typeface="Cambria Math" panose="02040503050406030204" pitchFamily="18" charset="0"/>
-                                </a:rPr>
-                              </m:ctrlPr>
-                            </m:sSubPr>
-                            <m:e>
-                              <m:r>
-                                <a:rPr lang="en-US" altLang="ja-JP" sz="1800" i="1" dirty="0">
-                                  <a:latin typeface="Cambria Math" panose="02040503050406030204" pitchFamily="18" charset="0"/>
-                                </a:rPr>
-                                <m:t>𝜇</m:t>
-                              </m:r>
-                            </m:e>
-                            <m:sub>
-                              <m:r>
-                                <a:rPr lang="en-US" altLang="ja-JP" sz="1800" i="1" dirty="0">
-                                  <a:latin typeface="Cambria Math" panose="02040503050406030204" pitchFamily="18" charset="0"/>
-                                </a:rPr>
-                                <m:t>𝑒𝑓𝑓</m:t>
-                              </m:r>
-                            </m:sub>
-                          </m:sSub>
-                        </m:den>
-                      </m:f>
-                    </m:oMath>
-                  </m:oMathPara>
-                </a14:m>
-                <a:endParaRPr/>
-              </a:p>
-            </p:txBody>
-          </p:sp>
-        </mc:Choice>
-        <mc:Fallback>
-          <p:sp>
-            <p:nvSpPr>
-              <p:cNvPr id="8" name="Rectangle 3">
-                <a:extLst>
-                  <a:ext uri="{FF2B5EF4-FFF2-40B4-BE49-F238E27FC236}">
-                    <a16:creationId xmlns:a16="http://schemas.microsoft.com/office/drawing/2014/main" id="{6D67A5E9-B205-E747-CDAE-A3A6C8147290}"/>
-                  </a:ext>
-                </a:extLst>
-              </p:cNvPr>
-              <p:cNvSpPr>
-                <a:spLocks noGrp="1" noRot="1" noChangeAspect="1" noMove="1" noResize="1" noEditPoints="1" noAdjustHandles="1" noChangeArrowheads="1" noChangeShapeType="1" noTextEdit="1"/>
-              </p:cNvSpPr>
-              <p:nvPr>
-                <p:ph idx="1"/>
-              </p:nvPr>
-            </p:nvSpPr>
-            <p:spPr bwMode="auto">
-              <a:xfrm>
-                <a:off x="1662223" y="1262686"/>
-                <a:ext cx="5466433" cy="746936"/>
-              </a:xfrm>
-              <a:prstGeom prst="rect">
-                <a:avLst/>
-              </a:prstGeom>
-              <a:blipFill>
-                <a:blip r:embed="rId2"/>
-                <a:stretch>
-                  <a:fillRect r="-1004"/>
-                </a:stretch>
-              </a:blipFill>
-              <a:ln>
-                <a:noFill/>
-              </a:ln>
-              <a:effectLst/>
-              <a:extLst>
-                <a:ext uri="{909E8E84-426E-40DD-AFC4-6F175D3DCCD1}">
-                  <a14:hiddenFill xmlns:a14="http://schemas.microsoft.com/office/drawing/2010/main">
-                    <a:solidFill>
-                      <a:schemeClr val="accent1"/>
-                    </a:solidFill>
-                  </a14:hiddenFill>
-                </a:ext>
-                <a:ext uri="{91240B29-F687-4F45-9708-019B960494DF}">
-                  <a14:hiddenLine xmlns:a14="http://schemas.microsoft.com/office/drawing/2010/main" w="9525">
-                    <a:solidFill>
-                      <a:schemeClr val="tx1"/>
-                    </a:solidFill>
-                    <a:miter lim="800000"/>
-                    <a:headEnd/>
-                    <a:tailEnd/>
-                  </a14:hiddenLine>
-                </a:ext>
-                <a:ext uri="{AF507438-7753-43E0-B8FC-AC1667EBCBE1}">
-                  <a14:hiddenEffects xmlns:a14="http://schemas.microsoft.com/office/drawing/2010/main">
-                    <a:effectLst>
-                      <a:outerShdw dist="35921" dir="2700000" algn="ctr" rotWithShape="0">
-                        <a:schemeClr val="bg2"/>
-                      </a:outerShdw>
-                    </a:effectLst>
-                  </a14:hiddenEffects>
-                </a:ext>
-              </a:extLst>
-            </p:spPr>
-            <p:txBody>
-              <a:bodyPr/>
-              <a:lstStyle/>
-              <a:p>
-                <a:r>
-                  <a:rPr lang="ja-JP" altLang="en-US">
-                    <a:noFill/>
-                  </a:rPr>
-                  <a:t> </a:t>
-                </a:r>
-              </a:p>
-            </p:txBody>
-          </p:sp>
-        </mc:Fallback>
-      </mc:AlternateContent>
-      <mc:AlternateContent xmlns:mc="http://schemas.openxmlformats.org/markup-compatibility/2006">
-        <mc:Choice xmlns:a14="http://schemas.microsoft.com/office/drawing/2010/main" Requires="a14">
-          <p:sp>
-            <p:nvSpPr>
-              <p:cNvPr id="9" name="テキスト ボックス 8">
-                <a:extLst>
-                  <a:ext uri="{FF2B5EF4-FFF2-40B4-BE49-F238E27FC236}">
-                    <a16:creationId xmlns:a16="http://schemas.microsoft.com/office/drawing/2014/main" id="{4767024B-45F0-84FF-5784-44921D6318D2}"/>
-                  </a:ext>
-                </a:extLst>
-              </p:cNvPr>
-              <p:cNvSpPr txBox="1"/>
-              <p:nvPr/>
-            </p:nvSpPr>
-            <p:spPr>
-              <a:xfrm>
-                <a:off x="1788928" y="2009622"/>
-                <a:ext cx="1853713" cy="519309"/>
-              </a:xfrm>
-              <a:prstGeom prst="rect">
-                <a:avLst/>
-              </a:prstGeom>
-              <a:noFill/>
-            </p:spPr>
-            <p:txBody>
-              <a:bodyPr wrap="none" lIns="0" tIns="0" rIns="0" bIns="0" rtlCol="0">
-                <a:spAutoFit/>
-              </a:bodyPr>
-              <a:lstStyle/>
-              <a:p>
-                <a:pPr/>
-                <a14:m>
-                  <m:oMathPara xmlns:m="http://schemas.openxmlformats.org/officeDocument/2006/math">
-                    <m:oMathParaPr>
-                      <m:jc m:val="centerGroup"/>
-                    </m:oMathParaPr>
-                    <m:oMath xmlns:m="http://schemas.openxmlformats.org/officeDocument/2006/math">
-                      <m:sSub>
-                        <m:sSubPr>
-                          <m:ctrlPr>
-                            <a:rPr lang="en-US" altLang="ja-JP" i="1" smtClean="0">
-                              <a:latin typeface="Cambria Math" panose="02040503050406030204" pitchFamily="18" charset="0"/>
-                            </a:rPr>
-                          </m:ctrlPr>
-                        </m:sSubPr>
-                        <m:e>
-                          <m:r>
-                            <a:rPr lang="en-US" altLang="ja-JP" i="1">
-                              <a:latin typeface="Cambria Math" panose="02040503050406030204" pitchFamily="18" charset="0"/>
-                            </a:rPr>
-                            <m:t>𝜇</m:t>
-                          </m:r>
-                        </m:e>
-                        <m:sub>
-                          <m:r>
-                            <a:rPr lang="en-US" altLang="ja-JP" i="1">
-                              <a:latin typeface="Cambria Math" panose="02040503050406030204" pitchFamily="18" charset="0"/>
-                            </a:rPr>
-                            <m:t>𝑒𝑓𝑓</m:t>
-                          </m:r>
-                        </m:sub>
-                      </m:sSub>
-                      <m:r>
-                        <a:rPr lang="en-US" altLang="ja-JP">
-                          <a:latin typeface="Cambria Math" panose="02040503050406030204" pitchFamily="18" charset="0"/>
-                        </a:rPr>
-                        <m:t>=</m:t>
-                      </m:r>
-                      <m:f>
-                        <m:fPr>
-                          <m:ctrlPr>
-                            <a:rPr lang="en-US" altLang="ja-JP" i="1">
-                              <a:latin typeface="Cambria Math" panose="02040503050406030204" pitchFamily="18" charset="0"/>
-                            </a:rPr>
-                          </m:ctrlPr>
-                        </m:fPr>
-                        <m:num>
-                          <m:sSub>
-                            <m:sSubPr>
-                              <m:ctrlPr>
-                                <a:rPr lang="en-US" altLang="ja-JP" i="1">
-                                  <a:latin typeface="Cambria Math" panose="02040503050406030204" pitchFamily="18" charset="0"/>
-                                </a:rPr>
-                              </m:ctrlPr>
-                            </m:sSubPr>
-                            <m:e>
-                              <m:r>
-                                <a:rPr lang="en-US" altLang="ja-JP" i="1">
-                                  <a:latin typeface="Cambria Math" panose="02040503050406030204" pitchFamily="18" charset="0"/>
-                                </a:rPr>
-                                <m:t>𝜇</m:t>
-                              </m:r>
-                            </m:e>
-                            <m:sub>
-                              <m:r>
-                                <a:rPr lang="en-US" altLang="ja-JP" i="1">
-                                  <a:latin typeface="Cambria Math" panose="02040503050406030204" pitchFamily="18" charset="0"/>
-                                </a:rPr>
-                                <m:t>𝑏𝑎𝑠𝑒</m:t>
-                              </m:r>
-                            </m:sub>
-                          </m:sSub>
-                        </m:num>
-                        <m:den>
-                          <m:r>
-                            <a:rPr lang="en-US" altLang="ja-JP">
-                              <a:latin typeface="Cambria Math" panose="02040503050406030204" pitchFamily="18" charset="0"/>
-                            </a:rPr>
-                            <m:t>1+</m:t>
-                          </m:r>
-                          <m:sSub>
-                            <m:sSubPr>
-                              <m:ctrlPr>
-                                <a:rPr lang="en-US" altLang="ja-JP" i="1">
-                                  <a:latin typeface="Cambria Math" panose="02040503050406030204" pitchFamily="18" charset="0"/>
-                                </a:rPr>
-                              </m:ctrlPr>
-                            </m:sSubPr>
-                            <m:e>
-                              <m:r>
-                                <a:rPr lang="en-US" altLang="ja-JP" i="1">
-                                  <a:latin typeface="Cambria Math" panose="02040503050406030204" pitchFamily="18" charset="0"/>
-                                </a:rPr>
-                                <m:t>𝜌</m:t>
-                              </m:r>
-                            </m:e>
-                            <m:sub>
-                              <m:r>
-                                <a:rPr lang="en-US" altLang="ja-JP" i="1">
-                                  <a:latin typeface="Cambria Math" panose="02040503050406030204" pitchFamily="18" charset="0"/>
-                                </a:rPr>
-                                <m:t>𝑜𝑤𝑛𝑒𝑟</m:t>
-                              </m:r>
-                            </m:sub>
-                          </m:sSub>
-                        </m:den>
-                      </m:f>
-                    </m:oMath>
-                  </m:oMathPara>
-                </a14:m>
-                <a:endParaRPr/>
-              </a:p>
-            </p:txBody>
-          </p:sp>
-        </mc:Choice>
-        <mc:Fallback>
-          <p:sp>
-            <p:nvSpPr>
-              <p:cNvPr id="9" name="テキスト ボックス 8">
-                <a:extLst>
-                  <a:ext uri="{FF2B5EF4-FFF2-40B4-BE49-F238E27FC236}">
-                    <a16:creationId xmlns:a16="http://schemas.microsoft.com/office/drawing/2014/main" id="{4767024B-45F0-84FF-5784-44921D6318D2}"/>
-                  </a:ext>
-                </a:extLst>
-              </p:cNvPr>
-              <p:cNvSpPr txBox="1">
-                <a:spLocks noRot="1" noChangeAspect="1" noMove="1" noResize="1" noEditPoints="1" noAdjustHandles="1" noChangeArrowheads="1" noChangeShapeType="1" noTextEdit="1"/>
-              </p:cNvSpPr>
-              <p:nvPr/>
-            </p:nvSpPr>
-            <p:spPr>
-              <a:xfrm>
-                <a:off x="1788928" y="2009622"/>
-                <a:ext cx="1853713" cy="519309"/>
-              </a:xfrm>
-              <a:prstGeom prst="rect">
-                <a:avLst/>
-              </a:prstGeom>
-              <a:blipFill>
-                <a:blip r:embed="rId3"/>
-                <a:stretch>
-                  <a:fillRect/>
-                </a:stretch>
-              </a:blipFill>
-            </p:spPr>
-            <p:txBody>
-              <a:bodyPr/>
-              <a:lstStyle/>
-              <a:p>
-                <a:r>
-                  <a:rPr lang="ja-JP" altLang="en-US">
-                    <a:noFill/>
-                  </a:rPr>
-                  <a:t> </a:t>
-                </a:r>
-              </a:p>
-            </p:txBody>
-          </p:sp>
-        </mc:Fallback>
-      </mc:AlternateContent>
-      <mc:AlternateContent xmlns:mc="http://schemas.openxmlformats.org/markup-compatibility/2006">
-        <mc:Choice xmlns:a14="http://schemas.microsoft.com/office/drawing/2010/main" Requires="a14">
-          <p:sp>
-            <p:nvSpPr>
-              <p:cNvPr id="11" name="テキスト ボックス 10">
-                <a:extLst>
-                  <a:ext uri="{FF2B5EF4-FFF2-40B4-BE49-F238E27FC236}">
-                    <a16:creationId xmlns:a16="http://schemas.microsoft.com/office/drawing/2014/main" id="{A7920D54-33A3-74E4-A656-FD3865C6D774}"/>
-                  </a:ext>
-                </a:extLst>
-              </p:cNvPr>
-              <p:cNvSpPr txBox="1"/>
-              <p:nvPr/>
-            </p:nvSpPr>
-            <p:spPr>
-              <a:xfrm>
-                <a:off x="1468622" y="3796398"/>
-                <a:ext cx="6095114" cy="720582"/>
-              </a:xfrm>
-              <a:prstGeom prst="rect">
-                <a:avLst/>
-              </a:prstGeom>
-              <a:noFill/>
-            </p:spPr>
-            <p:txBody>
-              <a:bodyPr wrap="square">
-                <a:spAutoFit/>
-              </a:bodyPr>
-              <a:lstStyle/>
-              <a:p>
-                <a:pPr algn="ctr">
-                  <a:buNone/>
-                </a:pPr>
-                <a14:m>
-                  <m:oMathPara xmlns:m="http://schemas.openxmlformats.org/officeDocument/2006/math">
-                    <m:oMathParaPr>
-                      <m:jc m:val="centerGroup"/>
-                    </m:oMathParaPr>
-                    <m:oMath xmlns:m="http://schemas.openxmlformats.org/officeDocument/2006/math">
-                      <m:sSub>
-                        <m:sSubPr>
-                          <m:ctrlPr>
-                            <a:rPr lang="en-US" altLang="ja-JP" i="1" dirty="0" smtClean="0">
-                              <a:effectLst/>
-                              <a:latin typeface="Cambria Math" panose="02040503050406030204" pitchFamily="18" charset="0"/>
-                            </a:rPr>
-                          </m:ctrlPr>
-                        </m:sSubPr>
-                        <m:e>
-                          <m:r>
-                            <a:rPr lang="en-US" altLang="ja-JP" i="1" dirty="0" smtClean="0">
-                              <a:effectLst/>
-                              <a:latin typeface="Cambria Math" panose="02040503050406030204" pitchFamily="18" charset="0"/>
-                            </a:rPr>
-                            <m:t>𝑃</m:t>
-                          </m:r>
-                        </m:e>
-                        <m:sub>
-                          <m:r>
-                            <a:rPr lang="en-US" altLang="ja-JP" i="1" dirty="0" smtClean="0">
-                              <a:effectLst/>
-                              <a:latin typeface="Cambria Math" panose="02040503050406030204" pitchFamily="18" charset="0"/>
-                            </a:rPr>
-                            <m:t>𝑖𝑛𝑡𝑒𝑟𝑟𝑢𝑝𝑡𝑖𝑜𝑛</m:t>
-                          </m:r>
-                        </m:sub>
-                      </m:sSub>
-                      <m:r>
-                        <a:rPr lang="en-US" altLang="ja-JP" i="1" dirty="0" smtClean="0">
-                          <a:effectLst/>
-                          <a:latin typeface="Cambria Math" panose="02040503050406030204" pitchFamily="18" charset="0"/>
-                        </a:rPr>
-                        <m:t>=</m:t>
-                      </m:r>
-                      <m:d>
-                        <m:dPr>
-                          <m:ctrlPr>
-                            <a:rPr lang="en-US" altLang="ja-JP" i="1" dirty="0" smtClean="0">
-                              <a:effectLst/>
-                              <a:latin typeface="Cambria Math" panose="02040503050406030204" pitchFamily="18" charset="0"/>
-                            </a:rPr>
-                          </m:ctrlPr>
-                        </m:dPr>
-                        <m:e>
-                          <m:sSub>
-                            <m:sSubPr>
-                              <m:ctrlPr>
-                                <a:rPr lang="en-US" altLang="ja-JP" i="1" dirty="0" smtClean="0">
-                                  <a:effectLst/>
-                                  <a:latin typeface="Cambria Math" panose="02040503050406030204" pitchFamily="18" charset="0"/>
-                                </a:rPr>
-                              </m:ctrlPr>
-                            </m:sSubPr>
-                            <m:e>
-                              <m:r>
-                                <a:rPr lang="en-US" altLang="ja-JP" i="1" dirty="0" smtClean="0">
-                                  <a:effectLst/>
-                                  <a:latin typeface="Cambria Math" panose="02040503050406030204" pitchFamily="18" charset="0"/>
-                                </a:rPr>
-                                <m:t>𝜆</m:t>
-                              </m:r>
-                            </m:e>
-                            <m:sub>
-                              <m:r>
-                                <a:rPr lang="en-US" altLang="ja-JP" i="1" dirty="0" smtClean="0">
-                                  <a:effectLst/>
-                                  <a:latin typeface="Cambria Math" panose="02040503050406030204" pitchFamily="18" charset="0"/>
-                                </a:rPr>
-                                <m:t>𝑜𝑤𝑛𝑒𝑟</m:t>
-                              </m:r>
-                            </m:sub>
-                          </m:sSub>
-                          <m:r>
-                            <a:rPr lang="en-US" altLang="ja-JP" i="1" dirty="0" smtClean="0">
-                              <a:effectLst/>
-                              <a:latin typeface="Cambria Math" panose="02040503050406030204" pitchFamily="18" charset="0"/>
-                            </a:rPr>
-                            <m:t>⋅</m:t>
-                          </m:r>
-                          <m:f>
-                            <m:fPr>
-                              <m:ctrlPr>
-                                <a:rPr lang="en-US" altLang="ja-JP" i="1" dirty="0">
-                                  <a:effectLst/>
-                                  <a:latin typeface="Cambria Math" panose="02040503050406030204" pitchFamily="18" charset="0"/>
-                                </a:rPr>
-                              </m:ctrlPr>
-                            </m:fPr>
-                            <m:num>
-                              <m:sSub>
-                                <m:sSubPr>
-                                  <m:ctrlPr>
-                                    <a:rPr lang="en-US" altLang="ja-JP" i="1" dirty="0">
-                                      <a:effectLst/>
-                                      <a:latin typeface="Cambria Math" panose="02040503050406030204" pitchFamily="18" charset="0"/>
-                                    </a:rPr>
-                                  </m:ctrlPr>
-                                </m:sSubPr>
-                                <m:e>
-                                  <m:r>
-                                    <a:rPr lang="en-US" altLang="ja-JP" i="1" dirty="0">
-                                      <a:effectLst/>
-                                      <a:latin typeface="Cambria Math" panose="02040503050406030204" pitchFamily="18" charset="0"/>
-                                    </a:rPr>
-                                    <m:t>𝑆</m:t>
-                                  </m:r>
-                                </m:e>
-                                <m:sub>
-                                  <m:r>
-                                    <a:rPr lang="en-US" altLang="ja-JP" i="1" dirty="0">
-                                      <a:effectLst/>
-                                      <a:latin typeface="Cambria Math" panose="02040503050406030204" pitchFamily="18" charset="0"/>
-                                    </a:rPr>
-                                    <m:t>𝑛𝑒𝑤</m:t>
-                                  </m:r>
-                                </m:sub>
-                              </m:sSub>
-                            </m:num>
-                            <m:den>
-                              <m:sSub>
-                                <m:sSubPr>
-                                  <m:ctrlPr>
-                                    <a:rPr lang="en-US" altLang="ja-JP" i="1" dirty="0">
-                                      <a:effectLst/>
-                                      <a:latin typeface="Cambria Math" panose="02040503050406030204" pitchFamily="18" charset="0"/>
-                                    </a:rPr>
-                                  </m:ctrlPr>
-                                </m:sSubPr>
-                                <m:e>
-                                  <m:r>
-                                    <a:rPr lang="en-US" altLang="ja-JP" i="1" dirty="0">
-                                      <a:effectLst/>
-                                      <a:latin typeface="Cambria Math" panose="02040503050406030204" pitchFamily="18" charset="0"/>
-                                    </a:rPr>
-                                    <m:t>𝜇</m:t>
-                                  </m:r>
-                                </m:e>
-                                <m:sub>
-                                  <m:r>
-                                    <a:rPr lang="en-US" altLang="ja-JP" i="1" dirty="0">
-                                      <a:effectLst/>
-                                      <a:latin typeface="Cambria Math" panose="02040503050406030204" pitchFamily="18" charset="0"/>
-                                    </a:rPr>
-                                    <m:t>𝑒𝑓𝑓</m:t>
-                                  </m:r>
-                                </m:sub>
-                              </m:sSub>
-                            </m:den>
-                          </m:f>
-                        </m:e>
-                      </m:d>
-                      <m:r>
-                        <a:rPr lang="en-US" altLang="ja-JP" i="1" dirty="0">
-                          <a:effectLst/>
-                          <a:latin typeface="Cambria Math" panose="02040503050406030204" pitchFamily="18" charset="0"/>
-                        </a:rPr>
-                        <m:t>⋅</m:t>
-                      </m:r>
-                      <m:d>
-                        <m:dPr>
-                          <m:ctrlPr>
-                            <a:rPr lang="en-US" altLang="ja-JP" i="1" dirty="0">
-                              <a:effectLst/>
-                              <a:latin typeface="Cambria Math" panose="02040503050406030204" pitchFamily="18" charset="0"/>
-                            </a:rPr>
-                          </m:ctrlPr>
-                        </m:dPr>
-                        <m:e>
-                          <m:f>
-                            <m:fPr>
-                              <m:ctrlPr>
-                                <a:rPr lang="en-US" altLang="ja-JP" i="1" dirty="0">
-                                  <a:effectLst/>
-                                  <a:latin typeface="Cambria Math" panose="02040503050406030204" pitchFamily="18" charset="0"/>
-                                </a:rPr>
-                              </m:ctrlPr>
-                            </m:fPr>
-                            <m:num>
-                              <m:sSub>
-                                <m:sSubPr>
-                                  <m:ctrlPr>
-                                    <a:rPr lang="en-US" altLang="ja-JP" i="1" dirty="0">
-                                      <a:effectLst/>
-                                      <a:latin typeface="Cambria Math" panose="02040503050406030204" pitchFamily="18" charset="0"/>
-                                    </a:rPr>
-                                  </m:ctrlPr>
-                                </m:sSubPr>
-                                <m:e>
-                                  <m:r>
-                                    <a:rPr lang="en-US" altLang="ja-JP" i="1" dirty="0">
-                                      <a:effectLst/>
-                                      <a:latin typeface="Cambria Math" panose="02040503050406030204" pitchFamily="18" charset="0"/>
-                                    </a:rPr>
-                                    <m:t>𝑆</m:t>
-                                  </m:r>
-                                </m:e>
-                                <m:sub>
-                                  <m:r>
-                                    <a:rPr lang="en-US" altLang="ja-JP" i="1" dirty="0">
-                                      <a:effectLst/>
-                                      <a:latin typeface="Cambria Math" panose="02040503050406030204" pitchFamily="18" charset="0"/>
-                                    </a:rPr>
-                                    <m:t>𝑜𝑤𝑛𝑒𝑟</m:t>
-                                  </m:r>
-                                </m:sub>
-                              </m:sSub>
-                            </m:num>
-                            <m:den>
-                              <m:sSub>
-                                <m:sSubPr>
-                                  <m:ctrlPr>
-                                    <a:rPr lang="en-US" altLang="ja-JP" i="1" dirty="0">
-                                      <a:effectLst/>
-                                      <a:latin typeface="Cambria Math" panose="02040503050406030204" pitchFamily="18" charset="0"/>
-                                    </a:rPr>
-                                  </m:ctrlPr>
-                                </m:sSubPr>
-                                <m:e>
-                                  <m:r>
-                                    <a:rPr lang="en-US" altLang="ja-JP" i="1" dirty="0">
-                                      <a:effectLst/>
-                                      <a:latin typeface="Cambria Math" panose="02040503050406030204" pitchFamily="18" charset="0"/>
-                                    </a:rPr>
-                                    <m:t>𝜇</m:t>
-                                  </m:r>
-                                </m:e>
-                                <m:sub>
-                                  <m:r>
-                                    <a:rPr lang="en-US" altLang="ja-JP" i="1" dirty="0">
-                                      <a:effectLst/>
-                                      <a:latin typeface="Cambria Math" panose="02040503050406030204" pitchFamily="18" charset="0"/>
-                                    </a:rPr>
-                                    <m:t>𝑏𝑎𝑠𝑒</m:t>
-                                  </m:r>
-                                </m:sub>
-                              </m:sSub>
-                            </m:den>
-                          </m:f>
-                          <m:r>
-                            <a:rPr lang="en-US" altLang="ja-JP" i="1" dirty="0">
-                              <a:effectLst/>
-                              <a:latin typeface="Cambria Math" panose="02040503050406030204" pitchFamily="18" charset="0"/>
-                            </a:rPr>
-                            <m:t>⋅</m:t>
-                          </m:r>
-                          <m:d>
-                            <m:dPr>
-                              <m:ctrlPr>
-                                <a:rPr lang="en-US" altLang="ja-JP" i="1" dirty="0">
-                                  <a:effectLst/>
-                                  <a:latin typeface="Cambria Math" panose="02040503050406030204" pitchFamily="18" charset="0"/>
-                                </a:rPr>
-                              </m:ctrlPr>
-                            </m:dPr>
-                            <m:e>
-                              <m:r>
-                                <a:rPr lang="en-US" altLang="ja-JP" i="1" dirty="0">
-                                  <a:effectLst/>
-                                  <a:latin typeface="Cambria Math" panose="02040503050406030204" pitchFamily="18" charset="0"/>
-                                </a:rPr>
-                                <m:t>1+</m:t>
-                              </m:r>
-                              <m:r>
-                                <a:rPr lang="en-US" altLang="ja-JP" i="1" dirty="0">
-                                  <a:effectLst/>
-                                  <a:latin typeface="Cambria Math" panose="02040503050406030204" pitchFamily="18" charset="0"/>
-                                </a:rPr>
-                                <m:t>𝛼</m:t>
-                              </m:r>
-                            </m:e>
-                          </m:d>
-                        </m:e>
-                      </m:d>
-                    </m:oMath>
-                  </m:oMathPara>
-                </a14:m>
-                <a:endParaRPr/>
-              </a:p>
-            </p:txBody>
-          </p:sp>
-        </mc:Choice>
-        <mc:Fallback>
-          <p:sp>
-            <p:nvSpPr>
-              <p:cNvPr id="11" name="テキスト ボックス 10">
-                <a:extLst>
-                  <a:ext uri="{FF2B5EF4-FFF2-40B4-BE49-F238E27FC236}">
-                    <a16:creationId xmlns:a16="http://schemas.microsoft.com/office/drawing/2014/main" id="{A7920D54-33A3-74E4-A656-FD3865C6D774}"/>
-                  </a:ext>
-                </a:extLst>
-              </p:cNvPr>
-              <p:cNvSpPr txBox="1">
-                <a:spLocks noRot="1" noChangeAspect="1" noMove="1" noResize="1" noEditPoints="1" noAdjustHandles="1" noChangeArrowheads="1" noChangeShapeType="1" noTextEdit="1"/>
-              </p:cNvSpPr>
-              <p:nvPr/>
-            </p:nvSpPr>
-            <p:spPr>
-              <a:xfrm>
-                <a:off x="1468622" y="3796398"/>
-                <a:ext cx="6095114" cy="720582"/>
-              </a:xfrm>
-              <a:prstGeom prst="rect">
-                <a:avLst/>
-              </a:prstGeom>
-              <a:blipFill>
-                <a:blip r:embed="rId4"/>
-                <a:stretch>
-                  <a:fillRect b="-5932"/>
-                </a:stretch>
-              </a:blipFill>
-            </p:spPr>
-            <p:txBody>
-              <a:bodyPr/>
-              <a:lstStyle/>
-              <a:p>
-                <a:r>
-                  <a:rPr lang="ja-JP" altLang="en-US">
-                    <a:noFill/>
-                  </a:rPr>
-                  <a:t> </a:t>
-                </a:r>
-              </a:p>
-            </p:txBody>
-          </p:sp>
-        </mc:Fallback>
-      </mc:AlternateContent>
-    </p:spTree>
-    <p:extLst>
-      <p:ext uri="{BB962C8B-B14F-4D97-AF65-F5344CB8AC3E}">
-        <p14:creationId xmlns:p14="http://schemas.microsoft.com/office/powerpoint/2010/main" val="1870586370"/>
+        <p14:creationId xmlns:p14="http://schemas.microsoft.com/office/powerpoint/2010/main" val="174713650"/>
       </p:ext>
     </p:extLst>
   </p:cSld>
@@ -13158,13 +13435,13 @@
           <a:lstStyle/>
           <a:p>
             <a:r>
-              <a:rPr lang="ja-JP" altLang="en-US" b="1" dirty="0">
+              <a:rPr lang="ja-JP" altLang="en-US" b="1">
                 <a:latin typeface="メイリオ" panose="020B0604030504040204" pitchFamily="50" charset="-128"/>
                 <a:ea typeface="メイリオ" panose="020B0604030504040204" pitchFamily="50" charset="-128"/>
               </a:rPr>
               <a:t>背景</a:t>
             </a:r>
-            <a:endParaRPr kumimoji="1" lang="ja-JP" altLang="en-US" dirty="0"/>
+            <a:endParaRPr kumimoji="1" lang="ja-JP" altLang="en-US"/>
           </a:p>
         </p:txBody>
       </p:sp>
@@ -13201,7 +13478,7 @@
               <a:buNone/>
             </a:pPr>
             <a:r>
-              <a:rPr lang="en-US" altLang="ja-JP" b="1" u="sng" dirty="0">
+              <a:rPr lang="en-US" altLang="ja-JP" b="1" u="sng">
                 <a:solidFill>
                   <a:schemeClr val="accent3">
                     <a:lumMod val="75000"/>
@@ -13212,7 +13489,7 @@
               <a:t>GPU</a:t>
             </a:r>
             <a:r>
-              <a:rPr lang="ja-JP" altLang="en-US" b="1" u="sng" dirty="0">
+              <a:rPr lang="ja-JP" altLang="en-US" b="1" u="sng">
                 <a:solidFill>
                   <a:schemeClr val="accent3">
                     <a:lumMod val="75000"/>
@@ -13222,7 +13499,7 @@
               </a:rPr>
               <a:t>の需要増加</a:t>
             </a:r>
-            <a:endParaRPr lang="en-US" altLang="ja-JP" b="1" u="sng" dirty="0">
+            <a:endParaRPr lang="en-US" altLang="ja-JP" b="1" u="sng">
               <a:solidFill>
                 <a:schemeClr val="accent3">
                   <a:lumMod val="75000"/>
@@ -13239,45 +13516,45 @@
               <a:buNone/>
             </a:pPr>
             <a:r>
-              <a:rPr lang="en-US" altLang="ja-JP" sz="2000" dirty="0"/>
+              <a:rPr lang="en-US" altLang="ja-JP" sz="2000"/>
               <a:t>AI</a:t>
             </a:r>
             <a:r>
-              <a:rPr lang="ja-JP" altLang="en-US" sz="2000" dirty="0"/>
+              <a:rPr lang="ja-JP" altLang="en-US" sz="2000"/>
               <a:t>・データサイエンス分野の発展に伴い、</a:t>
             </a:r>
             <a:r>
-              <a:rPr lang="en-US" altLang="ja-JP" sz="2000" dirty="0"/>
+              <a:rPr lang="en-US" altLang="ja-JP" sz="2000"/>
               <a:t>GPU</a:t>
             </a:r>
             <a:r>
-              <a:rPr lang="ja-JP" altLang="en-US" sz="2000" dirty="0"/>
+              <a:rPr lang="ja-JP" altLang="en-US" sz="2000"/>
               <a:t>需要は年々増加している。</a:t>
             </a:r>
             <a:br>
-              <a:rPr lang="ja-JP" altLang="en-US" sz="2000" dirty="0"/>
+              <a:rPr lang="ja-JP" altLang="en-US" sz="2000"/>
             </a:br>
             <a:r>
-              <a:rPr lang="ja-JP" altLang="en-US" sz="2000" dirty="0"/>
+              <a:rPr lang="ja-JP" altLang="en-US" sz="2000"/>
               <a:t>特にデータセンター向け</a:t>
             </a:r>
             <a:r>
-              <a:rPr lang="en-US" altLang="ja-JP" sz="2000" dirty="0"/>
+              <a:rPr lang="en-US" altLang="ja-JP" sz="2000"/>
               <a:t>GPU</a:t>
             </a:r>
             <a:r>
-              <a:rPr lang="ja-JP" altLang="en-US" sz="2000" dirty="0"/>
+              <a:rPr lang="ja-JP" altLang="en-US" sz="2000"/>
               <a:t>市場は、今後も高い成長率で拡大すると予測されている</a:t>
             </a:r>
             <a:r>
-              <a:rPr lang="en-US" altLang="ja-JP" sz="2000" dirty="0"/>
+              <a:rPr lang="en-US" altLang="ja-JP" sz="2000"/>
               <a:t>¹</a:t>
             </a:r>
             <a:r>
-              <a:rPr lang="ja-JP" altLang="en-US" sz="2000" dirty="0"/>
+              <a:rPr lang="ja-JP" altLang="en-US" sz="2000"/>
               <a:t>。</a:t>
             </a:r>
-            <a:endParaRPr lang="en-US" altLang="ja-JP" sz="2000" dirty="0"/>
+            <a:endParaRPr lang="en-US" altLang="ja-JP" sz="2000"/>
           </a:p>
           <a:p>
             <a:pPr marL="0" indent="0">
@@ -13287,7 +13564,7 @@
               <a:buNone/>
             </a:pPr>
             <a:r>
-              <a:rPr lang="en-US" altLang="ja-JP" b="1" u="sng" dirty="0">
+              <a:rPr lang="en-US" altLang="ja-JP" b="1" u="sng">
                 <a:solidFill>
                   <a:schemeClr val="accent3">
                     <a:lumMod val="75000"/>
@@ -13297,7 +13574,7 @@
               <a:t>GPU</a:t>
             </a:r>
             <a:r>
-              <a:rPr lang="ja-JP" altLang="en-US" b="1" u="sng" dirty="0">
+              <a:rPr lang="ja-JP" altLang="en-US" b="1" u="sng">
                 <a:solidFill>
                   <a:schemeClr val="accent3">
                     <a:lumMod val="75000"/>
@@ -13306,7 +13583,7 @@
               </a:rPr>
               <a:t>資源の高価さ・調達困難性</a:t>
             </a:r>
-            <a:endParaRPr lang="en-US" altLang="ja-JP" b="1" u="sng" dirty="0">
+            <a:endParaRPr lang="en-US" altLang="ja-JP" b="1" u="sng">
               <a:solidFill>
                 <a:schemeClr val="accent3">
                   <a:lumMod val="75000"/>
@@ -13322,46 +13599,46 @@
               <a:buNone/>
             </a:pPr>
             <a:r>
-              <a:rPr lang="ja-JP" altLang="en-US" sz="2000" dirty="0"/>
+              <a:rPr lang="ja-JP" altLang="en-US" sz="2000"/>
               <a:t>高性能</a:t>
             </a:r>
             <a:r>
-              <a:rPr lang="en-US" altLang="ja-JP" sz="2000" dirty="0"/>
+              <a:rPr lang="en-US" altLang="ja-JP" sz="2000"/>
               <a:t>GPU</a:t>
             </a:r>
             <a:r>
-              <a:rPr lang="ja-JP" altLang="en-US" sz="2000" dirty="0"/>
+              <a:rPr lang="ja-JP" altLang="en-US" sz="2000"/>
               <a:t>は製造コストが高く、また</a:t>
             </a:r>
             <a:r>
-              <a:rPr lang="en-US" altLang="ja-JP" sz="2000" dirty="0"/>
+              <a:rPr lang="en-US" altLang="ja-JP" sz="2000"/>
               <a:t>AI</a:t>
             </a:r>
             <a:r>
-              <a:rPr lang="ja-JP" altLang="en-US" sz="2000" dirty="0"/>
+              <a:rPr lang="ja-JP" altLang="en-US" sz="2000"/>
               <a:t>用途の需要集中により供給が逼迫している</a:t>
             </a:r>
             <a:r>
-              <a:rPr lang="en-US" altLang="ja-JP" sz="2000" dirty="0"/>
+              <a:rPr lang="en-US" altLang="ja-JP" sz="2000"/>
               <a:t>²</a:t>
             </a:r>
             <a:r>
-              <a:rPr lang="ja-JP" altLang="en-US" sz="2000" dirty="0"/>
+              <a:rPr lang="ja-JP" altLang="en-US" sz="2000"/>
               <a:t>。</a:t>
             </a:r>
             <a:br>
-              <a:rPr lang="ja-JP" altLang="en-US" sz="2000" dirty="0"/>
+              <a:rPr lang="ja-JP" altLang="en-US" sz="2000"/>
             </a:br>
             <a:r>
-              <a:rPr lang="ja-JP" altLang="en-US" sz="2000" dirty="0"/>
+              <a:rPr lang="ja-JP" altLang="en-US" sz="2000"/>
               <a:t>→　研究機関や大学において、必要な時に十分な</a:t>
             </a:r>
             <a:r>
-              <a:rPr lang="en-US" altLang="ja-JP" sz="2000" dirty="0"/>
+              <a:rPr lang="en-US" altLang="ja-JP" sz="2000"/>
               <a:t>GPU</a:t>
             </a:r>
             <a:r>
-              <a:rPr lang="ja-JP" altLang="en-US" sz="2000" dirty="0"/>
+              <a:rPr lang="ja-JP" altLang="en-US" sz="2000"/>
               <a:t>資源を確保することは困難。</a:t>
             </a:r>
           </a:p>
@@ -13393,7 +13670,7 @@
               <a:pPr/>
               <a:t>2</a:t>
             </a:fld>
-            <a:endParaRPr lang="ja-JP" altLang="en-US" dirty="0"/>
+            <a:endParaRPr lang="ja-JP" altLang="en-US"/>
           </a:p>
         </p:txBody>
       </p:sp>
@@ -13427,23 +13704,23 @@
           <a:p>
             <a:pPr algn="ctr"/>
             <a:r>
-              <a:rPr kumimoji="1" lang="ja-JP" altLang="en-US" sz="3200" b="1" dirty="0"/>
+              <a:rPr kumimoji="1" lang="ja-JP" altLang="en-US" sz="3200" b="1"/>
               <a:t>学内</a:t>
             </a:r>
             <a:r>
-              <a:rPr kumimoji="1" lang="en-US" altLang="ja-JP" sz="3200" b="1" dirty="0"/>
+              <a:rPr kumimoji="1" lang="en-US" altLang="ja-JP" sz="3200" b="1"/>
               <a:t>GPU</a:t>
             </a:r>
             <a:r>
-              <a:rPr kumimoji="1" lang="ja-JP" altLang="en-US" sz="3200" b="1" dirty="0"/>
+              <a:rPr kumimoji="1" lang="ja-JP" altLang="en-US" sz="3200" b="1"/>
               <a:t>共有基盤</a:t>
             </a:r>
-            <a:endParaRPr kumimoji="1" lang="en-US" altLang="ja-JP" sz="3200" b="1" dirty="0"/>
+            <a:endParaRPr kumimoji="1" lang="en-US" altLang="ja-JP" sz="3200" b="1"/>
           </a:p>
           <a:p>
             <a:pPr algn="ctr"/>
             <a:r>
-              <a:rPr lang="ja-JP" altLang="en-US" sz="3200" b="1" dirty="0">
+              <a:rPr lang="ja-JP" altLang="en-US" sz="3200" b="1">
                 <a:solidFill>
                   <a:schemeClr val="accent3">
                     <a:lumMod val="75000"/>
@@ -13453,17 +13730,17 @@
               <a:t>「</a:t>
             </a:r>
             <a:r>
-              <a:rPr lang="en-US" altLang="ja-JP" sz="3200" b="1" dirty="0"/>
+              <a:rPr lang="en-US" altLang="ja-JP" sz="3200" b="1"/>
               <a:t>Air Computing Pool</a:t>
             </a:r>
             <a:r>
-              <a:rPr lang="ja-JP" altLang="en-US" sz="3200" b="1" dirty="0"/>
+              <a:rPr lang="ja-JP" altLang="en-US" sz="3200" b="1"/>
               <a:t>」を検討</a:t>
             </a:r>
-            <a:endParaRPr lang="en-US" altLang="ja-JP" sz="3200" b="1" dirty="0"/>
-          </a:p>
-          <a:p>
-            <a:endParaRPr kumimoji="1" lang="ja-JP" altLang="en-US" dirty="0"/>
+            <a:endParaRPr lang="en-US" altLang="ja-JP" sz="3200" b="1"/>
+          </a:p>
+          <a:p>
+            <a:endParaRPr kumimoji="1" lang="ja-JP" altLang="en-US"/>
           </a:p>
         </p:txBody>
       </p:sp>
@@ -13496,7 +13773,7 @@
           <a:lstStyle/>
           <a:p>
             <a:r>
-              <a:rPr lang="en-US" altLang="ja-JP" sz="1200" dirty="0">
+              <a:rPr lang="en-US" altLang="ja-JP" sz="1200">
                 <a:latin typeface="メイリオ" panose="020B0604030504040204" pitchFamily="50" charset="-128"/>
                 <a:ea typeface="メイリオ" panose="020B0604030504040204" pitchFamily="50" charset="-128"/>
               </a:rPr>
@@ -13505,17 +13782,17 @@
           </a:p>
           <a:p>
             <a:r>
-              <a:rPr lang="en-US" altLang="ja-JP" sz="1200" dirty="0">
+              <a:rPr lang="en-US" altLang="ja-JP" sz="1200">
                 <a:latin typeface="メイリオ" panose="020B0604030504040204" pitchFamily="50" charset="-128"/>
                 <a:ea typeface="メイリオ" panose="020B0604030504040204" pitchFamily="50" charset="-128"/>
               </a:rPr>
               <a:t>[2] PC Gamer, AI demand is keeping GPU and memory prices high, 2024</a:t>
             </a:r>
             <a:r>
-              <a:rPr lang="en-US" altLang="ja-JP" dirty="0"/>
+              <a:rPr lang="en-US" altLang="ja-JP"/>
               <a:t>.</a:t>
             </a:r>
-            <a:endParaRPr kumimoji="1" lang="ja-JP" altLang="en-US" dirty="0"/>
+            <a:endParaRPr kumimoji="1" lang="ja-JP" altLang="en-US"/>
           </a:p>
         </p:txBody>
       </p:sp>
@@ -13564,12 +13841,12 @@
           <p:nvPr/>
         </p:nvPicPr>
         <p:blipFill>
-          <a:blip r:embed="rId2">
+          <a:blip r:embed="rId3">
             <a:lum bright="70000" contrast="-70000"/>
             <a:extLst>
               <a:ext uri="{BEBA8EAE-BF5A-486C-A8C5-ECC9F3942E4B}">
                 <a14:imgProps xmlns:a14="http://schemas.microsoft.com/office/drawing/2010/main">
-                  <a14:imgLayer r:embed="rId3">
+                  <a14:imgLayer r:embed="rId4">
                     <a14:imgEffect>
                       <a14:saturation sat="40000"/>
                     </a14:imgEffect>
@@ -13616,12 +13893,12 @@
           <p:nvPr/>
         </p:nvPicPr>
         <p:blipFill>
-          <a:blip r:embed="rId2">
+          <a:blip r:embed="rId3">
             <a:lum bright="70000" contrast="-70000"/>
             <a:extLst>
               <a:ext uri="{BEBA8EAE-BF5A-486C-A8C5-ECC9F3942E4B}">
                 <a14:imgProps xmlns:a14="http://schemas.microsoft.com/office/drawing/2010/main">
-                  <a14:imgLayer r:embed="rId3">
+                  <a14:imgLayer r:embed="rId4">
                     <a14:imgEffect>
                       <a14:saturation sat="40000"/>
                     </a14:imgEffect>
@@ -13675,14 +13952,14 @@
           <a:lstStyle/>
           <a:p>
             <a:r>
-              <a:rPr lang="en-US" altLang="ja-JP" dirty="0"/>
+              <a:rPr lang="en-US" altLang="ja-JP"/>
               <a:t>“ACP”</a:t>
             </a:r>
             <a:r>
-              <a:rPr lang="ja-JP" altLang="en-US" dirty="0"/>
+              <a:rPr lang="ja-JP" altLang="en-US"/>
               <a:t>とは</a:t>
             </a:r>
-            <a:endParaRPr kumimoji="1" lang="ja-JP" altLang="en-US" dirty="0"/>
+            <a:endParaRPr kumimoji="1" lang="ja-JP" altLang="en-US"/>
           </a:p>
         </p:txBody>
       </p:sp>
@@ -13712,7 +13989,7 @@
               <a:pPr/>
               <a:t>3</a:t>
             </a:fld>
-            <a:endParaRPr lang="ja-JP" altLang="en-US" dirty="0"/>
+            <a:endParaRPr lang="ja-JP" altLang="en-US"/>
           </a:p>
         </p:txBody>
       </p:sp>
@@ -13731,12 +14008,12 @@
           <p:nvPr/>
         </p:nvPicPr>
         <p:blipFill>
-          <a:blip r:embed="rId2">
+          <a:blip r:embed="rId3">
             <a:lum bright="70000" contrast="-70000"/>
             <a:extLst>
               <a:ext uri="{BEBA8EAE-BF5A-486C-A8C5-ECC9F3942E4B}">
                 <a14:imgProps xmlns:a14="http://schemas.microsoft.com/office/drawing/2010/main">
-                  <a14:imgLayer r:embed="rId3">
+                  <a14:imgLayer r:embed="rId4">
                     <a14:imgEffect>
                       <a14:saturation sat="40000"/>
                     </a14:imgEffect>
@@ -13919,7 +14196,7 @@
           <a:lstStyle/>
           <a:p>
             <a:pPr algn="ctr"/>
-            <a:endParaRPr kumimoji="1" lang="ja-JP" altLang="en-US" sz="2000" dirty="0">
+            <a:endParaRPr kumimoji="1" lang="ja-JP" altLang="en-US" sz="2000">
               <a:solidFill>
                 <a:srgbClr val="FF0000"/>
               </a:solidFill>
@@ -13942,7 +14219,7 @@
           <p:nvPr/>
         </p:nvPicPr>
         <p:blipFill>
-          <a:blip r:embed="rId4">
+          <a:blip r:embed="rId5">
             <a:extLst>
               <a:ext uri="{28A0092B-C50C-407E-A947-70E740481C1C}">
                 <a14:useLocalDpi xmlns:a14="http://schemas.microsoft.com/office/drawing/2010/main" val="0"/>
@@ -13989,7 +14266,7 @@
           <p:nvPr/>
         </p:nvPicPr>
         <p:blipFill>
-          <a:blip r:embed="rId5">
+          <a:blip r:embed="rId6">
             <a:extLst>
               <a:ext uri="{28A0092B-C50C-407E-A947-70E740481C1C}">
                 <a14:useLocalDpi xmlns:a14="http://schemas.microsoft.com/office/drawing/2010/main" val="0"/>
@@ -14036,7 +14313,7 @@
           <p:nvPr/>
         </p:nvPicPr>
         <p:blipFill>
-          <a:blip r:embed="rId5">
+          <a:blip r:embed="rId6">
             <a:extLst>
               <a:ext uri="{28A0092B-C50C-407E-A947-70E740481C1C}">
                 <a14:useLocalDpi xmlns:a14="http://schemas.microsoft.com/office/drawing/2010/main" val="0"/>
@@ -14083,7 +14360,7 @@
           <p:nvPr/>
         </p:nvPicPr>
         <p:blipFill>
-          <a:blip r:embed="rId5">
+          <a:blip r:embed="rId6">
             <a:extLst>
               <a:ext uri="{28A0092B-C50C-407E-A947-70E740481C1C}">
                 <a14:useLocalDpi xmlns:a14="http://schemas.microsoft.com/office/drawing/2010/main" val="0"/>
@@ -14130,7 +14407,7 @@
           <p:nvPr/>
         </p:nvPicPr>
         <p:blipFill>
-          <a:blip r:embed="rId5">
+          <a:blip r:embed="rId6">
             <a:extLst>
               <a:ext uri="{28A0092B-C50C-407E-A947-70E740481C1C}">
                 <a14:useLocalDpi xmlns:a14="http://schemas.microsoft.com/office/drawing/2010/main" val="0"/>
@@ -14223,7 +14500,7 @@
           <a:lstStyle/>
           <a:p>
             <a:pPr algn="ctr"/>
-            <a:endParaRPr kumimoji="1" lang="ja-JP" altLang="en-US" sz="2000" dirty="0">
+            <a:endParaRPr kumimoji="1" lang="ja-JP" altLang="en-US" sz="2000">
               <a:solidFill>
                 <a:srgbClr val="FF0000"/>
               </a:solidFill>
@@ -14261,13 +14538,13 @@
           <a:p>
             <a:pPr algn="ctr"/>
             <a:r>
-              <a:rPr kumimoji="1" lang="ja-JP" altLang="en-US" sz="2800" dirty="0">
+              <a:rPr kumimoji="1" lang="ja-JP" altLang="en-US" sz="2800">
                 <a:latin typeface="メイリオ" panose="020B0604030504040204" pitchFamily="50" charset="-128"/>
                 <a:ea typeface="メイリオ" panose="020B0604030504040204" pitchFamily="50" charset="-128"/>
               </a:rPr>
               <a:t>計算資源が</a:t>
             </a:r>
-            <a:endParaRPr kumimoji="1" lang="en-US" altLang="ja-JP" sz="2800" dirty="0">
+            <a:endParaRPr kumimoji="1" lang="en-US" altLang="ja-JP" sz="2800">
               <a:latin typeface="メイリオ" panose="020B0604030504040204" pitchFamily="50" charset="-128"/>
               <a:ea typeface="メイリオ" panose="020B0604030504040204" pitchFamily="50" charset="-128"/>
             </a:endParaRPr>
@@ -14275,7 +14552,7 @@
           <a:p>
             <a:pPr algn="ctr"/>
             <a:r>
-              <a:rPr kumimoji="1" lang="ja-JP" altLang="en-US" sz="2800" dirty="0">
+              <a:rPr kumimoji="1" lang="ja-JP" altLang="en-US" sz="2800">
                 <a:latin typeface="メイリオ" panose="020B0604030504040204" pitchFamily="50" charset="-128"/>
                 <a:ea typeface="メイリオ" panose="020B0604030504040204" pitchFamily="50" charset="-128"/>
               </a:rPr>
@@ -14314,13 +14591,13 @@
           <a:p>
             <a:pPr algn="ctr"/>
             <a:r>
-              <a:rPr kumimoji="1" lang="ja-JP" altLang="en-US" sz="2800" dirty="0">
+              <a:rPr kumimoji="1" lang="ja-JP" altLang="en-US" sz="2800">
                 <a:latin typeface="メイリオ" panose="020B0604030504040204" pitchFamily="50" charset="-128"/>
                 <a:ea typeface="メイリオ" panose="020B0604030504040204" pitchFamily="50" charset="-128"/>
               </a:rPr>
               <a:t>計算資源が</a:t>
             </a:r>
-            <a:endParaRPr kumimoji="1" lang="en-US" altLang="ja-JP" sz="2800" dirty="0">
+            <a:endParaRPr kumimoji="1" lang="en-US" altLang="ja-JP" sz="2800">
               <a:latin typeface="メイリオ" panose="020B0604030504040204" pitchFamily="50" charset="-128"/>
               <a:ea typeface="メイリオ" panose="020B0604030504040204" pitchFamily="50" charset="-128"/>
             </a:endParaRPr>
@@ -14328,7 +14605,7 @@
           <a:p>
             <a:pPr algn="ctr"/>
             <a:r>
-              <a:rPr kumimoji="1" lang="ja-JP" altLang="en-US" sz="2800" dirty="0">
+              <a:rPr kumimoji="1" lang="ja-JP" altLang="en-US" sz="2800">
                 <a:latin typeface="メイリオ" panose="020B0604030504040204" pitchFamily="50" charset="-128"/>
                 <a:ea typeface="メイリオ" panose="020B0604030504040204" pitchFamily="50" charset="-128"/>
               </a:rPr>
@@ -14366,7 +14643,7 @@
           <a:lstStyle/>
           <a:p>
             <a:r>
-              <a:rPr lang="en-US" altLang="ja-JP" sz="3600" b="1" dirty="0">
+              <a:rPr lang="en-US" altLang="ja-JP" sz="3600" b="1">
                 <a:solidFill>
                   <a:schemeClr val="accent3">
                     <a:lumMod val="75000"/>
@@ -14375,7 +14652,7 @@
               </a:rPr>
               <a:t>“Air Computing Pool”</a:t>
             </a:r>
-            <a:endParaRPr kumimoji="1" lang="ja-JP" altLang="en-US" sz="3600" b="1" dirty="0">
+            <a:endParaRPr kumimoji="1" lang="ja-JP" altLang="en-US" sz="3600" b="1">
               <a:solidFill>
                 <a:schemeClr val="accent3">
                   <a:lumMod val="75000"/>
@@ -14414,7 +14691,7 @@
           <a:lstStyle/>
           <a:p>
             <a:r>
-              <a:rPr kumimoji="1" lang="ja-JP" altLang="en-US" sz="3200" dirty="0">
+              <a:rPr kumimoji="1" lang="ja-JP" altLang="en-US" sz="3200">
                 <a:solidFill>
                   <a:schemeClr val="tx2"/>
                 </a:solidFill>
@@ -14439,7 +14716,7 @@
           <p:nvPr/>
         </p:nvPicPr>
         <p:blipFill>
-          <a:blip r:embed="rId5">
+          <a:blip r:embed="rId6">
             <a:extLst>
               <a:ext uri="{28A0092B-C50C-407E-A947-70E740481C1C}">
                 <a14:useLocalDpi xmlns:a14="http://schemas.microsoft.com/office/drawing/2010/main" val="0"/>
@@ -14486,7 +14763,7 @@
           <p:nvPr/>
         </p:nvPicPr>
         <p:blipFill>
-          <a:blip r:embed="rId5">
+          <a:blip r:embed="rId6">
             <a:extLst>
               <a:ext uri="{28A0092B-C50C-407E-A947-70E740481C1C}">
                 <a14:useLocalDpi xmlns:a14="http://schemas.microsoft.com/office/drawing/2010/main" val="0"/>
@@ -14533,7 +14810,7 @@
           <p:nvPr/>
         </p:nvPicPr>
         <p:blipFill>
-          <a:blip r:embed="rId5">
+          <a:blip r:embed="rId6">
             <a:alphaModFix/>
             <a:extLst>
               <a:ext uri="{28A0092B-C50C-407E-A947-70E740481C1C}">
@@ -14627,7 +14904,7 @@
           <a:lstStyle/>
           <a:p>
             <a:pPr algn="ctr"/>
-            <a:endParaRPr kumimoji="1" lang="ja-JP" altLang="en-US" dirty="0"/>
+            <a:endParaRPr kumimoji="1" lang="ja-JP" altLang="en-US"/>
           </a:p>
         </p:txBody>
       </p:sp>
@@ -14681,7 +14958,7 @@
           <a:lstStyle/>
           <a:p>
             <a:pPr algn="ctr"/>
-            <a:endParaRPr kumimoji="1" lang="ja-JP" altLang="en-US" dirty="0"/>
+            <a:endParaRPr kumimoji="1" lang="ja-JP" altLang="en-US"/>
           </a:p>
         </p:txBody>
       </p:sp>
@@ -14700,7 +14977,7 @@
           <p:nvPr/>
         </p:nvPicPr>
         <p:blipFill>
-          <a:blip r:embed="rId5">
+          <a:blip r:embed="rId6">
             <a:extLst>
               <a:ext uri="{28A0092B-C50C-407E-A947-70E740481C1C}">
                 <a14:useLocalDpi xmlns:a14="http://schemas.microsoft.com/office/drawing/2010/main" val="0"/>
@@ -14782,7 +15059,7 @@
           <a:lstStyle/>
           <a:p>
             <a:pPr algn="ctr"/>
-            <a:endParaRPr kumimoji="1" lang="ja-JP" altLang="en-US" dirty="0"/>
+            <a:endParaRPr kumimoji="1" lang="ja-JP" altLang="en-US"/>
           </a:p>
         </p:txBody>
       </p:sp>
@@ -14932,7 +15209,7 @@
           <a:lstStyle/>
           <a:p>
             <a:pPr algn="ctr"/>
-            <a:endParaRPr kumimoji="1" lang="ja-JP" altLang="en-US" dirty="0"/>
+            <a:endParaRPr kumimoji="1" lang="ja-JP" altLang="en-US"/>
           </a:p>
         </p:txBody>
       </p:sp>
@@ -14951,12 +15228,12 @@
           <p:nvPr/>
         </p:nvPicPr>
         <p:blipFill>
-          <a:blip r:embed="rId2">
+          <a:blip r:embed="rId3">
             <a:lum bright="70000" contrast="-70000"/>
             <a:extLst>
               <a:ext uri="{BEBA8EAE-BF5A-486C-A8C5-ECC9F3942E4B}">
                 <a14:imgProps xmlns:a14="http://schemas.microsoft.com/office/drawing/2010/main">
-                  <a14:imgLayer r:embed="rId3">
+                  <a14:imgLayer r:embed="rId4">
                     <a14:imgEffect>
                       <a14:saturation sat="40000"/>
                     </a14:imgEffect>
@@ -15003,7 +15280,7 @@
           <p:nvPr/>
         </p:nvPicPr>
         <p:blipFill>
-          <a:blip r:embed="rId5">
+          <a:blip r:embed="rId6">
             <a:extLst>
               <a:ext uri="{28A0092B-C50C-407E-A947-70E740481C1C}">
                 <a14:useLocalDpi xmlns:a14="http://schemas.microsoft.com/office/drawing/2010/main" val="0"/>
@@ -15050,7 +15327,7 @@
           <p:nvPr/>
         </p:nvPicPr>
         <p:blipFill>
-          <a:blip r:embed="rId5">
+          <a:blip r:embed="rId6">
             <a:extLst>
               <a:ext uri="{28A0092B-C50C-407E-A947-70E740481C1C}">
                 <a14:useLocalDpi xmlns:a14="http://schemas.microsoft.com/office/drawing/2010/main" val="0"/>
@@ -15134,13 +15411,13 @@
           <a:lstStyle/>
           <a:p>
             <a:r>
-              <a:rPr lang="ja-JP" altLang="en-US" b="1" dirty="0">
+              <a:rPr lang="ja-JP" altLang="en-US" b="1">
                 <a:latin typeface="メイリオ" panose="020B0604030504040204" pitchFamily="50" charset="-128"/>
                 <a:ea typeface="メイリオ" panose="020B0604030504040204" pitchFamily="50" charset="-128"/>
               </a:rPr>
               <a:t>研究目的と課題</a:t>
             </a:r>
-            <a:endParaRPr kumimoji="1" lang="ja-JP" altLang="en-US" dirty="0"/>
+            <a:endParaRPr kumimoji="1" lang="ja-JP" altLang="en-US"/>
           </a:p>
         </p:txBody>
       </p:sp>
@@ -15170,7 +15447,7 @@
               <a:pPr/>
               <a:t>4</a:t>
             </a:fld>
-            <a:endParaRPr lang="ja-JP" altLang="en-US" dirty="0"/>
+            <a:endParaRPr lang="ja-JP" altLang="en-US"/>
           </a:p>
         </p:txBody>
       </p:sp>
@@ -15206,7 +15483,7 @@
               <a:buNone/>
             </a:pPr>
             <a:r>
-              <a:rPr kumimoji="1" lang="ja-JP" altLang="en-US" b="1" dirty="0">
+              <a:rPr kumimoji="1" lang="ja-JP" altLang="en-US" b="1">
                 <a:solidFill>
                   <a:schemeClr val="accent3">
                     <a:lumMod val="75000"/>
@@ -15216,7 +15493,7 @@
               <a:t>高性能な</a:t>
             </a:r>
             <a:r>
-              <a:rPr kumimoji="1" lang="en-US" altLang="ja-JP" b="1" dirty="0">
+              <a:rPr kumimoji="1" lang="en-US" altLang="ja-JP" b="1">
                 <a:solidFill>
                   <a:schemeClr val="accent3">
                     <a:lumMod val="75000"/>
@@ -15226,7 +15503,7 @@
               <a:t>GPU</a:t>
             </a:r>
             <a:r>
-              <a:rPr kumimoji="1" lang="ja-JP" altLang="en-US" b="1" dirty="0">
+              <a:rPr kumimoji="1" lang="ja-JP" altLang="en-US" b="1">
                 <a:solidFill>
                   <a:schemeClr val="accent3">
                     <a:lumMod val="75000"/>
@@ -15235,7 +15512,7 @@
               </a:rPr>
               <a:t>を所有するユーザも得をするシステムを作る</a:t>
             </a:r>
-            <a:endParaRPr kumimoji="1" lang="en-US" altLang="ja-JP" b="1" dirty="0">
+            <a:endParaRPr kumimoji="1" lang="en-US" altLang="ja-JP" b="1">
               <a:solidFill>
                 <a:schemeClr val="accent3">
                   <a:lumMod val="75000"/>
@@ -15247,7 +15524,7 @@
             <a:pPr marL="0" indent="0">
               <a:buNone/>
             </a:pPr>
-            <a:endParaRPr kumimoji="1" lang="ja-JP" altLang="en-US" dirty="0"/>
+            <a:endParaRPr kumimoji="1" lang="ja-JP" altLang="en-US"/>
           </a:p>
         </p:txBody>
       </p:sp>
@@ -15285,7 +15562,7 @@
               </a:lnSpc>
             </a:pPr>
             <a:r>
-              <a:rPr lang="ja-JP" altLang="en-US" sz="2800" b="1" dirty="0">
+              <a:rPr lang="ja-JP" altLang="en-US" sz="2800" b="1">
                 <a:solidFill>
                   <a:schemeClr val="accent3">
                     <a:lumMod val="75000"/>
@@ -15295,7 +15572,7 @@
               <a:t>目的：</a:t>
             </a:r>
             <a:r>
-              <a:rPr lang="ja-JP" altLang="en-US" sz="2800" b="1" u="sng" dirty="0">
+              <a:rPr lang="ja-JP" altLang="en-US" sz="2800" b="1" u="sng">
                 <a:solidFill>
                   <a:schemeClr val="accent3">
                     <a:lumMod val="75000"/>
@@ -15305,7 +15582,7 @@
               <a:t>「</a:t>
             </a:r>
             <a:r>
-              <a:rPr lang="en-US" altLang="ja-JP" sz="2800" b="1" u="sng" dirty="0">
+              <a:rPr lang="en-US" altLang="ja-JP" sz="2800" b="1" u="sng">
                 <a:solidFill>
                   <a:schemeClr val="accent3">
                     <a:lumMod val="75000"/>
@@ -15315,7 +15592,7 @@
               <a:t>ACP</a:t>
             </a:r>
             <a:r>
-              <a:rPr lang="ja-JP" altLang="en-US" sz="2800" b="1" u="sng" dirty="0">
+              <a:rPr lang="ja-JP" altLang="en-US" sz="2800" b="1" u="sng">
                 <a:solidFill>
                   <a:schemeClr val="accent3">
                     <a:lumMod val="75000"/>
@@ -15324,7 +15601,7 @@
               </a:rPr>
               <a:t>」の普及と持続的な運用</a:t>
             </a:r>
-            <a:endParaRPr lang="en-US" altLang="ja-JP" sz="2800" b="1" u="sng" dirty="0">
+            <a:endParaRPr lang="en-US" altLang="ja-JP" sz="2800" b="1" u="sng">
               <a:solidFill>
                 <a:schemeClr val="accent3">
                   <a:lumMod val="75000"/>
@@ -15339,22 +15616,22 @@
               </a:lnSpc>
             </a:pPr>
             <a:r>
-              <a:rPr lang="en-US" altLang="ja-JP" sz="2000" dirty="0"/>
+              <a:rPr lang="en-US" altLang="ja-JP" sz="2000"/>
               <a:t>GPU</a:t>
             </a:r>
             <a:r>
-              <a:rPr lang="ja-JP" altLang="en-US" sz="2000" dirty="0"/>
+              <a:rPr lang="ja-JP" altLang="en-US" sz="2000"/>
               <a:t>を保有するユーザー同士の</a:t>
             </a:r>
             <a:r>
-              <a:rPr lang="ja-JP" altLang="en-US" sz="2000" b="1" dirty="0"/>
+              <a:rPr lang="ja-JP" altLang="en-US" sz="2000" b="1"/>
               <a:t>新しい形態の共有サービス</a:t>
             </a:r>
             <a:r>
-              <a:rPr lang="ja-JP" altLang="en-US" sz="2000" dirty="0"/>
+              <a:rPr lang="ja-JP" altLang="en-US" sz="2000"/>
               <a:t>において、普及・</a:t>
             </a:r>
-            <a:endParaRPr lang="en-US" altLang="ja-JP" sz="2000" dirty="0"/>
+            <a:endParaRPr lang="en-US" altLang="ja-JP" sz="2000"/>
           </a:p>
           <a:p>
             <a:pPr>
@@ -15363,10 +15640,10 @@
               </a:lnSpc>
             </a:pPr>
             <a:r>
-              <a:rPr lang="ja-JP" altLang="en-US" sz="2000" dirty="0"/>
+              <a:rPr lang="ja-JP" altLang="en-US" sz="2000"/>
               <a:t>持続が可能となる運用ルールを構築すること。</a:t>
             </a:r>
-            <a:endParaRPr lang="en-US" altLang="ja-JP" sz="2000" dirty="0"/>
+            <a:endParaRPr lang="en-US" altLang="ja-JP" sz="2000"/>
           </a:p>
           <a:p>
             <a:pPr>
@@ -15375,7 +15652,7 @@
               </a:lnSpc>
             </a:pPr>
             <a:r>
-              <a:rPr lang="ja-JP" altLang="en-US" sz="2800" b="1" dirty="0">
+              <a:rPr lang="ja-JP" altLang="en-US" sz="2800" b="1">
                 <a:solidFill>
                   <a:schemeClr val="accent3">
                     <a:lumMod val="75000"/>
@@ -15385,7 +15662,7 @@
               <a:t>課題：</a:t>
             </a:r>
             <a:r>
-              <a:rPr lang="ja-JP" altLang="en-US" sz="2800" b="1" u="sng" dirty="0">
+              <a:rPr lang="ja-JP" altLang="en-US" sz="2800" b="1" u="sng">
                 <a:solidFill>
                   <a:schemeClr val="accent3">
                     <a:lumMod val="75000"/>
@@ -15395,7 +15672,7 @@
               <a:t>高性能な</a:t>
             </a:r>
             <a:r>
-              <a:rPr lang="en-US" altLang="ja-JP" sz="2800" b="1" u="sng" dirty="0">
+              <a:rPr lang="en-US" altLang="ja-JP" sz="2800" b="1" u="sng">
                 <a:solidFill>
                   <a:schemeClr val="accent3">
                     <a:lumMod val="75000"/>
@@ -15405,7 +15682,7 @@
               <a:t>GPU</a:t>
             </a:r>
             <a:r>
-              <a:rPr lang="ja-JP" altLang="en-US" sz="2800" b="1" u="sng" dirty="0">
+              <a:rPr lang="ja-JP" altLang="en-US" sz="2800" b="1" u="sng">
                 <a:solidFill>
                   <a:schemeClr val="accent3">
                     <a:lumMod val="75000"/>
@@ -15414,7 +15691,7 @@
               </a:rPr>
               <a:t>の貸し手が参加しにくい</a:t>
             </a:r>
-            <a:endParaRPr lang="en-US" altLang="ja-JP" sz="2800" b="1" u="sng" dirty="0">
+            <a:endParaRPr lang="en-US" altLang="ja-JP" sz="2800" b="1" u="sng">
               <a:solidFill>
                 <a:schemeClr val="accent3">
                   <a:lumMod val="75000"/>
@@ -15429,10 +15706,10 @@
               </a:lnSpc>
             </a:pPr>
             <a:r>
-              <a:rPr lang="ja-JP" altLang="en-US" sz="2000" dirty="0"/>
+              <a:rPr lang="ja-JP" altLang="en-US" sz="2000"/>
               <a:t>既存の商用シェアリングサービスは、事業者が資源を提供するため貸し手を必要としない。</a:t>
             </a:r>
-            <a:endParaRPr lang="en-US" altLang="ja-JP" sz="2000" dirty="0"/>
+            <a:endParaRPr lang="en-US" altLang="ja-JP" sz="2000"/>
           </a:p>
           <a:p>
             <a:pPr>
@@ -15441,34 +15718,34 @@
               </a:lnSpc>
             </a:pPr>
             <a:r>
-              <a:rPr lang="en-US" altLang="ja-JP" sz="2000" dirty="0"/>
+              <a:rPr lang="en-US" altLang="ja-JP" sz="2000"/>
               <a:t>ACP</a:t>
             </a:r>
             <a:r>
-              <a:rPr lang="ja-JP" altLang="en-US" sz="2000" dirty="0"/>
+              <a:rPr lang="ja-JP" altLang="en-US" sz="2000"/>
               <a:t>は</a:t>
             </a:r>
             <a:r>
-              <a:rPr lang="ja-JP" altLang="en-US" sz="2000" b="1" dirty="0"/>
+              <a:rPr lang="ja-JP" altLang="en-US" sz="2000" b="1"/>
               <a:t>学内ユーザ自身（借り手）</a:t>
             </a:r>
             <a:r>
-              <a:rPr lang="ja-JP" altLang="en-US" sz="2000" dirty="0"/>
+              <a:rPr lang="ja-JP" altLang="en-US" sz="2000"/>
               <a:t>が</a:t>
             </a:r>
             <a:r>
-              <a:rPr lang="en-US" altLang="ja-JP" sz="2000" b="1" dirty="0"/>
+              <a:rPr lang="en-US" altLang="ja-JP" sz="2000" b="1"/>
               <a:t>GPU</a:t>
             </a:r>
             <a:r>
-              <a:rPr lang="ja-JP" altLang="en-US" sz="2000" b="1" dirty="0"/>
+              <a:rPr lang="ja-JP" altLang="en-US" sz="2000" b="1"/>
               <a:t>の貸し手</a:t>
             </a:r>
             <a:r>
-              <a:rPr lang="ja-JP" altLang="en-US" sz="2000" dirty="0"/>
+              <a:rPr lang="ja-JP" altLang="en-US" sz="2000"/>
               <a:t>となるためシステムを成り立たせるには</a:t>
             </a:r>
-            <a:endParaRPr lang="en-US" altLang="ja-JP" sz="2000" dirty="0"/>
+            <a:endParaRPr lang="en-US" altLang="ja-JP" sz="2000"/>
           </a:p>
           <a:p>
             <a:pPr>
@@ -15477,25 +15754,25 @@
               </a:lnSpc>
             </a:pPr>
             <a:r>
-              <a:rPr lang="ja-JP" altLang="en-US" sz="2000" dirty="0"/>
+              <a:rPr lang="ja-JP" altLang="en-US" sz="2000"/>
               <a:t>貸し手の存在が不可欠だが、</a:t>
             </a:r>
             <a:r>
-              <a:rPr lang="ja-JP" altLang="en-US" sz="2000" b="1" dirty="0"/>
+              <a:rPr lang="ja-JP" altLang="en-US" sz="2000" b="1"/>
               <a:t>高性能な</a:t>
             </a:r>
             <a:r>
-              <a:rPr lang="en-US" altLang="ja-JP" sz="2000" b="1" dirty="0"/>
+              <a:rPr lang="en-US" altLang="ja-JP" sz="2000" b="1"/>
               <a:t>GPU</a:t>
             </a:r>
             <a:r>
-              <a:rPr lang="ja-JP" altLang="en-US" sz="2000" b="1" dirty="0"/>
+              <a:rPr lang="ja-JP" altLang="en-US" sz="2000" b="1"/>
               <a:t>は人気　→</a:t>
             </a:r>
-            <a:endParaRPr lang="ja-JP" altLang="en-US" sz="2000" b="1" u="sng" dirty="0"/>
-          </a:p>
-          <a:p>
-            <a:endParaRPr kumimoji="1" lang="ja-JP" altLang="en-US" dirty="0"/>
+            <a:endParaRPr lang="ja-JP" altLang="en-US" sz="2000" b="1" u="sng"/>
+          </a:p>
+          <a:p>
+            <a:endParaRPr kumimoji="1" lang="ja-JP" altLang="en-US"/>
           </a:p>
         </p:txBody>
       </p:sp>
@@ -15549,7 +15826,7 @@
           <a:lstStyle/>
           <a:p>
             <a:pPr algn="ctr"/>
-            <a:endParaRPr kumimoji="1" lang="ja-JP" altLang="en-US" dirty="0"/>
+            <a:endParaRPr kumimoji="1" lang="ja-JP" altLang="en-US"/>
           </a:p>
         </p:txBody>
       </p:sp>
@@ -15698,13 +15975,13 @@
           <a:lstStyle/>
           <a:p>
             <a:r>
-              <a:rPr lang="ja-JP" altLang="en-US" b="1" dirty="0">
+              <a:rPr lang="ja-JP" altLang="en-US" b="1">
                 <a:latin typeface="メイリオ" panose="020B0604030504040204" pitchFamily="50" charset="-128"/>
                 <a:ea typeface="メイリオ" panose="020B0604030504040204" pitchFamily="50" charset="-128"/>
               </a:rPr>
               <a:t>提案手法</a:t>
             </a:r>
-            <a:endParaRPr kumimoji="1" lang="ja-JP" altLang="en-US" dirty="0"/>
+            <a:endParaRPr kumimoji="1" lang="ja-JP" altLang="en-US"/>
           </a:p>
         </p:txBody>
       </p:sp>
@@ -15734,7 +16011,7 @@
               <a:pPr/>
               <a:t>5</a:t>
             </a:fld>
-            <a:endParaRPr lang="ja-JP" altLang="en-US" dirty="0"/>
+            <a:endParaRPr lang="ja-JP" altLang="en-US"/>
           </a:p>
         </p:txBody>
       </p:sp>
@@ -16025,7 +16302,7 @@
               <a:tabLst/>
             </a:pPr>
             <a:r>
-              <a:rPr kumimoji="0" lang="ja-JP" altLang="en-US" b="1" i="0" u="none" strike="noStrike" cap="none" normalizeH="0" baseline="0" dirty="0">
+              <a:rPr kumimoji="0" lang="ja-JP" altLang="en-US" b="1" i="0" u="none" strike="noStrike" cap="none" normalizeH="0" baseline="0">
                 <a:ln>
                   <a:noFill/>
                 </a:ln>
@@ -16038,7 +16315,7 @@
               <a:t>２</a:t>
             </a:r>
             <a:r>
-              <a:rPr kumimoji="0" lang="en-US" altLang="ja-JP" b="1" i="0" u="none" strike="noStrike" cap="none" normalizeH="0" baseline="0" dirty="0">
+              <a:rPr kumimoji="0" lang="en-US" altLang="ja-JP" b="1" i="0" u="none" strike="noStrike" cap="none" normalizeH="0" baseline="0">
                 <a:ln>
                   <a:noFill/>
                 </a:ln>
@@ -16051,7 +16328,7 @@
               <a:t>. </a:t>
             </a:r>
             <a:r>
-              <a:rPr kumimoji="0" lang="ja-JP" altLang="ja-JP" b="1" i="0" u="none" strike="noStrike" cap="none" normalizeH="0" baseline="0" dirty="0">
+              <a:rPr kumimoji="0" lang="ja-JP" altLang="ja-JP" b="1" i="0" u="none" strike="noStrike" cap="none" normalizeH="0" baseline="0">
                 <a:ln>
                   <a:noFill/>
                 </a:ln>
@@ -16063,7 +16340,7 @@
               </a:rPr>
               <a:t>プリエンプション</a:t>
             </a:r>
-            <a:endParaRPr kumimoji="0" lang="ja-JP" altLang="ja-JP" sz="2400" b="1" i="0" u="none" strike="noStrike" cap="none" normalizeH="0" baseline="0" dirty="0">
+            <a:endParaRPr kumimoji="0" lang="ja-JP" altLang="ja-JP" sz="2400" b="1" i="0" u="none" strike="noStrike" cap="none" normalizeH="0" baseline="0">
               <a:ln>
                 <a:noFill/>
               </a:ln>
@@ -16111,7 +16388,7 @@
           <a:p>
             <a:pPr algn="ctr"/>
             <a:r>
-              <a:rPr lang="ja-JP" altLang="en-US" sz="3600" b="1" dirty="0">
+              <a:rPr lang="ja-JP" altLang="en-US" sz="3600" b="1">
                 <a:solidFill>
                   <a:schemeClr val="accent1">
                     <a:lumMod val="50000"/>
@@ -16123,7 +16400,7 @@
               <a:t>所有者優先権を保証するプリエンティブ方式を用いた学内</a:t>
             </a:r>
             <a:r>
-              <a:rPr lang="en-US" altLang="ja-JP" sz="3600" b="1" dirty="0">
+              <a:rPr lang="en-US" altLang="ja-JP" sz="3600" b="1">
                 <a:solidFill>
                   <a:schemeClr val="accent1">
                     <a:lumMod val="50000"/>
@@ -16135,7 +16412,7 @@
               <a:t>GPU</a:t>
             </a:r>
             <a:r>
-              <a:rPr lang="ja-JP" altLang="en-US" sz="3600" b="1" dirty="0">
+              <a:rPr lang="ja-JP" altLang="en-US" sz="3600" b="1">
                 <a:solidFill>
                   <a:schemeClr val="accent1">
                     <a:lumMod val="50000"/>
@@ -16146,7 +16423,7 @@
               </a:rPr>
               <a:t>共有基盤</a:t>
             </a:r>
-            <a:endParaRPr kumimoji="1" lang="ja-JP" altLang="en-US" sz="3600" dirty="0">
+            <a:endParaRPr kumimoji="1" lang="ja-JP" altLang="en-US" sz="3600">
               <a:solidFill>
                 <a:schemeClr val="accent1">
                   <a:lumMod val="50000"/>
@@ -16185,24 +16462,24 @@
           <a:lstStyle/>
           <a:p>
             <a:r>
-              <a:rPr lang="ja-JP" altLang="en-US" sz="2800" b="1" dirty="0">
+              <a:rPr lang="ja-JP" altLang="en-US" sz="2800" b="1">
                 <a:latin typeface="Arial" panose="020B0604020202020204" pitchFamily="34" charset="0"/>
               </a:rPr>
               <a:t>１</a:t>
             </a:r>
             <a:r>
-              <a:rPr lang="en-US" altLang="ja-JP" sz="2800" b="1" dirty="0">
+              <a:rPr lang="en-US" altLang="ja-JP" sz="2800" b="1">
                 <a:latin typeface="Arial" panose="020B0604020202020204" pitchFamily="34" charset="0"/>
               </a:rPr>
               <a:t>. </a:t>
             </a:r>
             <a:r>
-              <a:rPr lang="ja-JP" altLang="ja-JP" sz="2800" b="1" dirty="0">
+              <a:rPr lang="ja-JP" altLang="ja-JP" sz="2800" b="1">
                 <a:latin typeface="Arial" panose="020B0604020202020204" pitchFamily="34" charset="0"/>
               </a:rPr>
               <a:t>所有者優先</a:t>
             </a:r>
-            <a:endParaRPr lang="en-US" altLang="ja-JP" sz="2800" b="1" dirty="0">
+            <a:endParaRPr lang="en-US" altLang="ja-JP" sz="2800" b="1">
               <a:latin typeface="Arial" panose="020B0604020202020204" pitchFamily="34" charset="0"/>
             </a:endParaRPr>
           </a:p>
@@ -16253,7 +16530,7 @@
           <a:lstStyle/>
           <a:p>
             <a:pPr algn="ctr"/>
-            <a:endParaRPr kumimoji="1" lang="ja-JP" altLang="en-US" dirty="0"/>
+            <a:endParaRPr kumimoji="1" lang="ja-JP" altLang="en-US"/>
           </a:p>
         </p:txBody>
       </p:sp>
@@ -16287,14 +16564,14 @@
           <a:p>
             <a:pPr algn="ctr"/>
             <a:r>
-              <a:rPr kumimoji="1" lang="ja-JP" altLang="en-US" sz="1200" dirty="0">
+              <a:rPr kumimoji="1" lang="ja-JP" altLang="en-US" sz="1200">
                 <a:solidFill>
                   <a:schemeClr val="bg1"/>
                 </a:solidFill>
               </a:rPr>
               <a:t>実行中</a:t>
             </a:r>
-            <a:endParaRPr kumimoji="1" lang="en-US" altLang="ja-JP" sz="1200" dirty="0">
+            <a:endParaRPr kumimoji="1" lang="en-US" altLang="ja-JP" sz="1200">
               <a:solidFill>
                 <a:schemeClr val="bg1"/>
               </a:solidFill>
@@ -16303,7 +16580,7 @@
           <a:p>
             <a:pPr algn="ctr"/>
             <a:r>
-              <a:rPr kumimoji="1" lang="ja-JP" altLang="en-US" sz="1200" dirty="0">
+              <a:rPr kumimoji="1" lang="ja-JP" altLang="en-US" sz="1200">
                 <a:solidFill>
                   <a:schemeClr val="bg1"/>
                 </a:solidFill>
@@ -16358,7 +16635,7 @@
           <a:lstStyle/>
           <a:p>
             <a:pPr algn="ctr"/>
-            <a:endParaRPr kumimoji="1" lang="ja-JP" altLang="en-US" dirty="0"/>
+            <a:endParaRPr kumimoji="1" lang="ja-JP" altLang="en-US"/>
           </a:p>
         </p:txBody>
       </p:sp>
@@ -16407,7 +16684,7 @@
           <a:lstStyle/>
           <a:p>
             <a:pPr algn="ctr"/>
-            <a:endParaRPr kumimoji="1" lang="ja-JP" altLang="en-US" dirty="0"/>
+            <a:endParaRPr kumimoji="1" lang="ja-JP" altLang="en-US"/>
           </a:p>
         </p:txBody>
       </p:sp>
@@ -16456,7 +16733,7 @@
           <a:lstStyle/>
           <a:p>
             <a:pPr algn="ctr"/>
-            <a:endParaRPr kumimoji="1" lang="ja-JP" altLang="en-US" dirty="0"/>
+            <a:endParaRPr kumimoji="1" lang="ja-JP" altLang="en-US"/>
           </a:p>
         </p:txBody>
       </p:sp>
@@ -16489,10 +16766,10 @@
           <a:lstStyle/>
           <a:p>
             <a:r>
-              <a:rPr kumimoji="1" lang="en-US" altLang="ja-JP" sz="3600" dirty="0"/>
+              <a:rPr kumimoji="1" lang="en-US" altLang="ja-JP" sz="3600"/>
               <a:t>….</a:t>
             </a:r>
-            <a:endParaRPr kumimoji="1" lang="ja-JP" altLang="en-US" sz="3600" dirty="0"/>
+            <a:endParaRPr kumimoji="1" lang="ja-JP" altLang="en-US" sz="3600"/>
           </a:p>
         </p:txBody>
       </p:sp>
@@ -16541,7 +16818,7 @@
           <a:lstStyle/>
           <a:p>
             <a:pPr algn="ctr"/>
-            <a:endParaRPr kumimoji="1" lang="ja-JP" altLang="en-US" dirty="0"/>
+            <a:endParaRPr kumimoji="1" lang="ja-JP" altLang="en-US"/>
           </a:p>
         </p:txBody>
       </p:sp>
@@ -16590,7 +16867,7 @@
           <a:lstStyle/>
           <a:p>
             <a:pPr algn="ctr"/>
-            <a:endParaRPr kumimoji="1" lang="ja-JP" altLang="en-US" dirty="0"/>
+            <a:endParaRPr kumimoji="1" lang="ja-JP" altLang="en-US"/>
           </a:p>
         </p:txBody>
       </p:sp>
@@ -16639,7 +16916,7 @@
           <a:lstStyle/>
           <a:p>
             <a:pPr algn="ctr"/>
-            <a:endParaRPr kumimoji="1" lang="ja-JP" altLang="en-US" dirty="0"/>
+            <a:endParaRPr kumimoji="1" lang="ja-JP" altLang="en-US"/>
           </a:p>
         </p:txBody>
       </p:sp>
@@ -16673,14 +16950,14 @@
           <a:p>
             <a:pPr algn="ctr"/>
             <a:r>
-              <a:rPr kumimoji="1" lang="ja-JP" altLang="en-US" sz="1200" dirty="0">
+              <a:rPr kumimoji="1" lang="ja-JP" altLang="en-US" sz="1200">
                 <a:solidFill>
                   <a:schemeClr val="bg1"/>
                 </a:solidFill>
               </a:rPr>
               <a:t>タスク</a:t>
             </a:r>
-            <a:endParaRPr kumimoji="1" lang="en-US" altLang="ja-JP" sz="1200" dirty="0">
+            <a:endParaRPr kumimoji="1" lang="en-US" altLang="ja-JP" sz="1200">
               <a:solidFill>
                 <a:schemeClr val="bg1"/>
               </a:solidFill>
@@ -16689,14 +16966,14 @@
           <a:p>
             <a:pPr algn="ctr"/>
             <a:r>
-              <a:rPr kumimoji="1" lang="en-US" altLang="ja-JP" sz="1200" dirty="0">
+              <a:rPr kumimoji="1" lang="en-US" altLang="ja-JP" sz="1200">
                 <a:solidFill>
                   <a:schemeClr val="bg1"/>
                 </a:solidFill>
               </a:rPr>
               <a:t>1</a:t>
             </a:r>
-            <a:endParaRPr kumimoji="1" lang="ja-JP" altLang="en-US" sz="1200" dirty="0">
+            <a:endParaRPr kumimoji="1" lang="ja-JP" altLang="en-US" sz="1200">
               <a:solidFill>
                 <a:schemeClr val="bg1"/>
               </a:solidFill>
@@ -16734,14 +17011,14 @@
           <a:p>
             <a:pPr algn="ctr"/>
             <a:r>
-              <a:rPr kumimoji="1" lang="ja-JP" altLang="en-US" sz="1200" dirty="0">
+              <a:rPr kumimoji="1" lang="ja-JP" altLang="en-US" sz="1200">
                 <a:solidFill>
                   <a:schemeClr val="bg1"/>
                 </a:solidFill>
               </a:rPr>
               <a:t>タスク</a:t>
             </a:r>
-            <a:endParaRPr kumimoji="1" lang="en-US" altLang="ja-JP" sz="1200" dirty="0">
+            <a:endParaRPr kumimoji="1" lang="en-US" altLang="ja-JP" sz="1200">
               <a:solidFill>
                 <a:schemeClr val="bg1"/>
               </a:solidFill>
@@ -16750,14 +17027,14 @@
           <a:p>
             <a:pPr algn="ctr"/>
             <a:r>
-              <a:rPr kumimoji="1" lang="en-US" altLang="ja-JP" sz="1200" dirty="0">
+              <a:rPr kumimoji="1" lang="en-US" altLang="ja-JP" sz="1200">
                 <a:solidFill>
                   <a:schemeClr val="bg1"/>
                 </a:solidFill>
               </a:rPr>
               <a:t>2</a:t>
             </a:r>
-            <a:endParaRPr kumimoji="1" lang="ja-JP" altLang="en-US" sz="1200" dirty="0">
+            <a:endParaRPr kumimoji="1" lang="ja-JP" altLang="en-US" sz="1200">
               <a:solidFill>
                 <a:schemeClr val="bg1"/>
               </a:solidFill>
@@ -16795,14 +17072,14 @@
           <a:p>
             <a:pPr algn="ctr"/>
             <a:r>
-              <a:rPr kumimoji="1" lang="ja-JP" altLang="en-US" sz="1200" dirty="0">
+              <a:rPr kumimoji="1" lang="ja-JP" altLang="en-US" sz="1200">
                 <a:solidFill>
                   <a:schemeClr val="bg1"/>
                 </a:solidFill>
               </a:rPr>
               <a:t>タスク</a:t>
             </a:r>
-            <a:endParaRPr kumimoji="1" lang="en-US" altLang="ja-JP" sz="1200" dirty="0">
+            <a:endParaRPr kumimoji="1" lang="en-US" altLang="ja-JP" sz="1200">
               <a:solidFill>
                 <a:schemeClr val="bg1"/>
               </a:solidFill>
@@ -16811,14 +17088,14 @@
           <a:p>
             <a:pPr algn="ctr"/>
             <a:r>
-              <a:rPr kumimoji="1" lang="en-US" altLang="ja-JP" sz="1200" dirty="0">
+              <a:rPr kumimoji="1" lang="en-US" altLang="ja-JP" sz="1200">
                 <a:solidFill>
                   <a:schemeClr val="bg1"/>
                 </a:solidFill>
               </a:rPr>
               <a:t>3</a:t>
             </a:r>
-            <a:endParaRPr kumimoji="1" lang="ja-JP" altLang="en-US" sz="1200" dirty="0">
+            <a:endParaRPr kumimoji="1" lang="ja-JP" altLang="en-US" sz="1200">
               <a:solidFill>
                 <a:schemeClr val="bg1"/>
               </a:solidFill>
@@ -16856,14 +17133,14 @@
           <a:p>
             <a:pPr algn="ctr"/>
             <a:r>
-              <a:rPr kumimoji="1" lang="ja-JP" altLang="en-US" sz="1200" dirty="0">
+              <a:rPr kumimoji="1" lang="ja-JP" altLang="en-US" sz="1200">
                 <a:solidFill>
                   <a:schemeClr val="bg1"/>
                 </a:solidFill>
               </a:rPr>
               <a:t>タスク</a:t>
             </a:r>
-            <a:endParaRPr kumimoji="1" lang="en-US" altLang="ja-JP" sz="1200" dirty="0">
+            <a:endParaRPr kumimoji="1" lang="en-US" altLang="ja-JP" sz="1200">
               <a:solidFill>
                 <a:schemeClr val="bg1"/>
               </a:solidFill>
@@ -16872,14 +17149,14 @@
           <a:p>
             <a:pPr algn="ctr"/>
             <a:r>
-              <a:rPr kumimoji="1" lang="en-US" altLang="ja-JP" sz="1200" dirty="0">
+              <a:rPr kumimoji="1" lang="en-US" altLang="ja-JP" sz="1200">
                 <a:solidFill>
                   <a:schemeClr val="bg1"/>
                 </a:solidFill>
               </a:rPr>
               <a:t>10</a:t>
             </a:r>
-            <a:endParaRPr kumimoji="1" lang="ja-JP" altLang="en-US" sz="1200" dirty="0">
+            <a:endParaRPr kumimoji="1" lang="ja-JP" altLang="en-US" sz="1200">
               <a:solidFill>
                 <a:schemeClr val="bg1"/>
               </a:solidFill>
@@ -16917,14 +17194,14 @@
           <a:p>
             <a:pPr algn="ctr"/>
             <a:r>
-              <a:rPr kumimoji="1" lang="ja-JP" altLang="en-US" sz="1200" dirty="0">
+              <a:rPr kumimoji="1" lang="ja-JP" altLang="en-US" sz="1200">
                 <a:solidFill>
                   <a:schemeClr val="bg1"/>
                 </a:solidFill>
               </a:rPr>
               <a:t>タスク</a:t>
             </a:r>
-            <a:endParaRPr kumimoji="1" lang="en-US" altLang="ja-JP" sz="1200" dirty="0">
+            <a:endParaRPr kumimoji="1" lang="en-US" altLang="ja-JP" sz="1200">
               <a:solidFill>
                 <a:schemeClr val="bg1"/>
               </a:solidFill>
@@ -16933,14 +17210,14 @@
           <a:p>
             <a:pPr algn="ctr"/>
             <a:r>
-              <a:rPr kumimoji="1" lang="en-US" altLang="ja-JP" sz="1200" dirty="0">
+              <a:rPr kumimoji="1" lang="en-US" altLang="ja-JP" sz="1200">
                 <a:solidFill>
                   <a:schemeClr val="bg1"/>
                 </a:solidFill>
               </a:rPr>
               <a:t>11</a:t>
             </a:r>
-            <a:endParaRPr kumimoji="1" lang="ja-JP" altLang="en-US" sz="1200" dirty="0">
+            <a:endParaRPr kumimoji="1" lang="ja-JP" altLang="en-US" sz="1200">
               <a:solidFill>
                 <a:schemeClr val="bg1"/>
               </a:solidFill>
@@ -16978,14 +17255,14 @@
           <a:p>
             <a:pPr algn="ctr"/>
             <a:r>
-              <a:rPr kumimoji="1" lang="ja-JP" altLang="en-US" sz="1200" dirty="0">
+              <a:rPr kumimoji="1" lang="ja-JP" altLang="en-US" sz="1200">
                 <a:solidFill>
                   <a:schemeClr val="bg1"/>
                 </a:solidFill>
               </a:rPr>
               <a:t>所有者</a:t>
             </a:r>
-            <a:endParaRPr kumimoji="1" lang="en-US" altLang="ja-JP" sz="1200" dirty="0">
+            <a:endParaRPr kumimoji="1" lang="en-US" altLang="ja-JP" sz="1200">
               <a:solidFill>
                 <a:schemeClr val="bg1"/>
               </a:solidFill>
@@ -16994,14 +17271,14 @@
           <a:p>
             <a:pPr algn="ctr"/>
             <a:r>
-              <a:rPr kumimoji="1" lang="ja-JP" altLang="en-US" sz="1200" dirty="0">
+              <a:rPr kumimoji="1" lang="ja-JP" altLang="en-US" sz="1200">
                 <a:solidFill>
                   <a:schemeClr val="bg1"/>
                 </a:solidFill>
               </a:rPr>
               <a:t>タスク１</a:t>
             </a:r>
-            <a:endParaRPr kumimoji="1" lang="en-US" altLang="ja-JP" sz="1200" dirty="0">
+            <a:endParaRPr kumimoji="1" lang="en-US" altLang="ja-JP" sz="1200">
               <a:solidFill>
                 <a:schemeClr val="bg1"/>
               </a:solidFill>
@@ -17054,7 +17331,7 @@
           <a:lstStyle/>
           <a:p>
             <a:pPr algn="ctr"/>
-            <a:endParaRPr kumimoji="1" lang="ja-JP" altLang="en-US" dirty="0"/>
+            <a:endParaRPr kumimoji="1" lang="ja-JP" altLang="en-US"/>
           </a:p>
         </p:txBody>
       </p:sp>
@@ -17103,7 +17380,7 @@
           <a:lstStyle/>
           <a:p>
             <a:pPr algn="ctr"/>
-            <a:endParaRPr kumimoji="1" lang="ja-JP" altLang="en-US" dirty="0"/>
+            <a:endParaRPr kumimoji="1" lang="ja-JP" altLang="en-US"/>
           </a:p>
         </p:txBody>
       </p:sp>
@@ -17137,10 +17414,10 @@
           <a:p>
             <a:pPr algn="ctr"/>
             <a:r>
-              <a:rPr kumimoji="1" lang="ja-JP" altLang="en-US" sz="1600" b="1" dirty="0"/>
+              <a:rPr kumimoji="1" lang="ja-JP" altLang="en-US" sz="1600" b="1"/>
               <a:t>所有者タスク</a:t>
             </a:r>
-            <a:endParaRPr kumimoji="1" lang="en-US" altLang="ja-JP" sz="1600" b="1" dirty="0">
+            <a:endParaRPr kumimoji="1" lang="en-US" altLang="ja-JP" sz="1600" b="1">
               <a:solidFill>
                 <a:schemeClr val="bg1"/>
               </a:solidFill>
@@ -17178,10 +17455,10 @@
           <a:p>
             <a:pPr algn="ctr"/>
             <a:r>
-              <a:rPr kumimoji="1" lang="ja-JP" altLang="en-US" sz="1600" b="1" dirty="0"/>
+              <a:rPr kumimoji="1" lang="ja-JP" altLang="en-US" sz="1600" b="1"/>
               <a:t>ユーザータスク</a:t>
             </a:r>
-            <a:endParaRPr kumimoji="1" lang="en-US" altLang="ja-JP" sz="1600" b="1" dirty="0">
+            <a:endParaRPr kumimoji="1" lang="en-US" altLang="ja-JP" sz="1600" b="1">
               <a:solidFill>
                 <a:schemeClr val="bg1"/>
               </a:solidFill>
@@ -17303,7 +17580,7 @@
           <a:lstStyle/>
           <a:p>
             <a:r>
-              <a:rPr kumimoji="1" lang="ja-JP" altLang="en-US" sz="2000" b="1" dirty="0">
+              <a:rPr kumimoji="1" lang="ja-JP" altLang="en-US" sz="2000" b="1">
                 <a:solidFill>
                   <a:schemeClr val="bg1"/>
                 </a:solidFill>
@@ -17412,7 +17689,7 @@
           <a:lstStyle/>
           <a:p>
             <a:pPr algn="ctr"/>
-            <a:endParaRPr kumimoji="1" lang="ja-JP" altLang="en-US" dirty="0"/>
+            <a:endParaRPr kumimoji="1" lang="ja-JP" altLang="en-US"/>
           </a:p>
         </p:txBody>
       </p:sp>
@@ -17446,14 +17723,14 @@
           <a:p>
             <a:pPr algn="ctr"/>
             <a:r>
-              <a:rPr kumimoji="1" lang="ja-JP" altLang="en-US" sz="1200" dirty="0">
+              <a:rPr kumimoji="1" lang="ja-JP" altLang="en-US" sz="1200">
                 <a:solidFill>
                   <a:schemeClr val="bg1"/>
                 </a:solidFill>
               </a:rPr>
               <a:t>実行中</a:t>
             </a:r>
-            <a:endParaRPr kumimoji="1" lang="en-US" altLang="ja-JP" sz="1200" dirty="0">
+            <a:endParaRPr kumimoji="1" lang="en-US" altLang="ja-JP" sz="1200">
               <a:solidFill>
                 <a:schemeClr val="bg1"/>
               </a:solidFill>
@@ -17462,7 +17739,7 @@
           <a:p>
             <a:pPr algn="ctr"/>
             <a:r>
-              <a:rPr kumimoji="1" lang="ja-JP" altLang="en-US" sz="1200" dirty="0">
+              <a:rPr kumimoji="1" lang="ja-JP" altLang="en-US" sz="1200">
                 <a:solidFill>
                   <a:schemeClr val="bg1"/>
                 </a:solidFill>
@@ -17517,7 +17794,7 @@
           <a:lstStyle/>
           <a:p>
             <a:pPr algn="ctr"/>
-            <a:endParaRPr kumimoji="1" lang="ja-JP" altLang="en-US" dirty="0"/>
+            <a:endParaRPr kumimoji="1" lang="ja-JP" altLang="en-US"/>
           </a:p>
         </p:txBody>
       </p:sp>
@@ -17566,7 +17843,7 @@
           <a:lstStyle/>
           <a:p>
             <a:pPr algn="ctr"/>
-            <a:endParaRPr kumimoji="1" lang="ja-JP" altLang="en-US" dirty="0"/>
+            <a:endParaRPr kumimoji="1" lang="ja-JP" altLang="en-US"/>
           </a:p>
         </p:txBody>
       </p:sp>
@@ -17615,7 +17892,7 @@
           <a:lstStyle/>
           <a:p>
             <a:pPr algn="ctr"/>
-            <a:endParaRPr kumimoji="1" lang="ja-JP" altLang="en-US" dirty="0"/>
+            <a:endParaRPr kumimoji="1" lang="ja-JP" altLang="en-US"/>
           </a:p>
         </p:txBody>
       </p:sp>
@@ -17648,10 +17925,10 @@
           <a:lstStyle/>
           <a:p>
             <a:r>
-              <a:rPr kumimoji="1" lang="en-US" altLang="ja-JP" sz="3600" dirty="0"/>
+              <a:rPr kumimoji="1" lang="en-US" altLang="ja-JP" sz="3600"/>
               <a:t>….</a:t>
             </a:r>
-            <a:endParaRPr kumimoji="1" lang="ja-JP" altLang="en-US" sz="3600" dirty="0"/>
+            <a:endParaRPr kumimoji="1" lang="ja-JP" altLang="en-US" sz="3600"/>
           </a:p>
         </p:txBody>
       </p:sp>
@@ -17700,7 +17977,7 @@
           <a:lstStyle/>
           <a:p>
             <a:pPr algn="ctr"/>
-            <a:endParaRPr kumimoji="1" lang="ja-JP" altLang="en-US" dirty="0"/>
+            <a:endParaRPr kumimoji="1" lang="ja-JP" altLang="en-US"/>
           </a:p>
         </p:txBody>
       </p:sp>
@@ -17749,7 +18026,7 @@
           <a:lstStyle/>
           <a:p>
             <a:pPr algn="ctr"/>
-            <a:endParaRPr kumimoji="1" lang="ja-JP" altLang="en-US" dirty="0"/>
+            <a:endParaRPr kumimoji="1" lang="ja-JP" altLang="en-US"/>
           </a:p>
         </p:txBody>
       </p:sp>
@@ -17798,7 +18075,7 @@
           <a:lstStyle/>
           <a:p>
             <a:pPr algn="ctr"/>
-            <a:endParaRPr kumimoji="1" lang="ja-JP" altLang="en-US" dirty="0"/>
+            <a:endParaRPr kumimoji="1" lang="ja-JP" altLang="en-US"/>
           </a:p>
         </p:txBody>
       </p:sp>
@@ -17832,14 +18109,14 @@
           <a:p>
             <a:pPr algn="ctr"/>
             <a:r>
-              <a:rPr kumimoji="1" lang="ja-JP" altLang="en-US" sz="1200" dirty="0">
+              <a:rPr kumimoji="1" lang="ja-JP" altLang="en-US" sz="1200">
                 <a:solidFill>
                   <a:schemeClr val="bg1"/>
                 </a:solidFill>
               </a:rPr>
               <a:t>タスク</a:t>
             </a:r>
-            <a:endParaRPr kumimoji="1" lang="en-US" altLang="ja-JP" sz="1200" dirty="0">
+            <a:endParaRPr kumimoji="1" lang="en-US" altLang="ja-JP" sz="1200">
               <a:solidFill>
                 <a:schemeClr val="bg1"/>
               </a:solidFill>
@@ -17848,14 +18125,14 @@
           <a:p>
             <a:pPr algn="ctr"/>
             <a:r>
-              <a:rPr kumimoji="1" lang="en-US" altLang="ja-JP" sz="1200" dirty="0">
+              <a:rPr kumimoji="1" lang="en-US" altLang="ja-JP" sz="1200">
                 <a:solidFill>
                   <a:schemeClr val="bg1"/>
                 </a:solidFill>
               </a:rPr>
               <a:t>1</a:t>
             </a:r>
-            <a:endParaRPr kumimoji="1" lang="ja-JP" altLang="en-US" sz="1200" dirty="0">
+            <a:endParaRPr kumimoji="1" lang="ja-JP" altLang="en-US" sz="1200">
               <a:solidFill>
                 <a:schemeClr val="bg1"/>
               </a:solidFill>
@@ -17893,14 +18170,14 @@
           <a:p>
             <a:pPr algn="ctr"/>
             <a:r>
-              <a:rPr kumimoji="1" lang="ja-JP" altLang="en-US" sz="1200" dirty="0">
+              <a:rPr kumimoji="1" lang="ja-JP" altLang="en-US" sz="1200">
                 <a:solidFill>
                   <a:schemeClr val="bg1"/>
                 </a:solidFill>
               </a:rPr>
               <a:t>タスク</a:t>
             </a:r>
-            <a:endParaRPr kumimoji="1" lang="en-US" altLang="ja-JP" sz="1200" dirty="0">
+            <a:endParaRPr kumimoji="1" lang="en-US" altLang="ja-JP" sz="1200">
               <a:solidFill>
                 <a:schemeClr val="bg1"/>
               </a:solidFill>
@@ -17909,14 +18186,14 @@
           <a:p>
             <a:pPr algn="ctr"/>
             <a:r>
-              <a:rPr kumimoji="1" lang="en-US" altLang="ja-JP" sz="1200" dirty="0">
+              <a:rPr kumimoji="1" lang="en-US" altLang="ja-JP" sz="1200">
                 <a:solidFill>
                   <a:schemeClr val="bg1"/>
                 </a:solidFill>
               </a:rPr>
               <a:t>2</a:t>
             </a:r>
-            <a:endParaRPr kumimoji="1" lang="ja-JP" altLang="en-US" sz="1200" dirty="0">
+            <a:endParaRPr kumimoji="1" lang="ja-JP" altLang="en-US" sz="1200">
               <a:solidFill>
                 <a:schemeClr val="bg1"/>
               </a:solidFill>
@@ -17954,14 +18231,14 @@
           <a:p>
             <a:pPr algn="ctr"/>
             <a:r>
-              <a:rPr kumimoji="1" lang="ja-JP" altLang="en-US" sz="1200" dirty="0">
+              <a:rPr kumimoji="1" lang="ja-JP" altLang="en-US" sz="1200">
                 <a:solidFill>
                   <a:schemeClr val="bg1"/>
                 </a:solidFill>
               </a:rPr>
               <a:t>タスク</a:t>
             </a:r>
-            <a:endParaRPr kumimoji="1" lang="en-US" altLang="ja-JP" sz="1200" dirty="0">
+            <a:endParaRPr kumimoji="1" lang="en-US" altLang="ja-JP" sz="1200">
               <a:solidFill>
                 <a:schemeClr val="bg1"/>
               </a:solidFill>
@@ -17970,14 +18247,14 @@
           <a:p>
             <a:pPr algn="ctr"/>
             <a:r>
-              <a:rPr kumimoji="1" lang="en-US" altLang="ja-JP" sz="1200" dirty="0">
+              <a:rPr kumimoji="1" lang="en-US" altLang="ja-JP" sz="1200">
                 <a:solidFill>
                   <a:schemeClr val="bg1"/>
                 </a:solidFill>
               </a:rPr>
               <a:t>3</a:t>
             </a:r>
-            <a:endParaRPr kumimoji="1" lang="ja-JP" altLang="en-US" sz="1200" dirty="0">
+            <a:endParaRPr kumimoji="1" lang="ja-JP" altLang="en-US" sz="1200">
               <a:solidFill>
                 <a:schemeClr val="bg1"/>
               </a:solidFill>
@@ -18015,14 +18292,14 @@
           <a:p>
             <a:pPr algn="ctr"/>
             <a:r>
-              <a:rPr kumimoji="1" lang="ja-JP" altLang="en-US" sz="1200" dirty="0">
+              <a:rPr kumimoji="1" lang="ja-JP" altLang="en-US" sz="1200">
                 <a:solidFill>
                   <a:schemeClr val="bg1"/>
                 </a:solidFill>
               </a:rPr>
               <a:t>タスク</a:t>
             </a:r>
-            <a:endParaRPr kumimoji="1" lang="en-US" altLang="ja-JP" sz="1200" dirty="0">
+            <a:endParaRPr kumimoji="1" lang="en-US" altLang="ja-JP" sz="1200">
               <a:solidFill>
                 <a:schemeClr val="bg1"/>
               </a:solidFill>
@@ -18031,14 +18308,14 @@
           <a:p>
             <a:pPr algn="ctr"/>
             <a:r>
-              <a:rPr kumimoji="1" lang="en-US" altLang="ja-JP" sz="1200" dirty="0">
+              <a:rPr kumimoji="1" lang="en-US" altLang="ja-JP" sz="1200">
                 <a:solidFill>
                   <a:schemeClr val="bg1"/>
                 </a:solidFill>
               </a:rPr>
               <a:t>10</a:t>
             </a:r>
-            <a:endParaRPr kumimoji="1" lang="ja-JP" altLang="en-US" sz="1200" dirty="0">
+            <a:endParaRPr kumimoji="1" lang="ja-JP" altLang="en-US" sz="1200">
               <a:solidFill>
                 <a:schemeClr val="bg1"/>
               </a:solidFill>
@@ -18076,14 +18353,14 @@
           <a:p>
             <a:pPr algn="ctr"/>
             <a:r>
-              <a:rPr kumimoji="1" lang="ja-JP" altLang="en-US" sz="1200" dirty="0">
+              <a:rPr kumimoji="1" lang="ja-JP" altLang="en-US" sz="1200">
                 <a:solidFill>
                   <a:schemeClr val="bg1"/>
                 </a:solidFill>
               </a:rPr>
               <a:t>タスク</a:t>
             </a:r>
-            <a:endParaRPr kumimoji="1" lang="en-US" altLang="ja-JP" sz="1200" dirty="0">
+            <a:endParaRPr kumimoji="1" lang="en-US" altLang="ja-JP" sz="1200">
               <a:solidFill>
                 <a:schemeClr val="bg1"/>
               </a:solidFill>
@@ -18092,14 +18369,14 @@
           <a:p>
             <a:pPr algn="ctr"/>
             <a:r>
-              <a:rPr kumimoji="1" lang="en-US" altLang="ja-JP" sz="1200" dirty="0">
+              <a:rPr kumimoji="1" lang="en-US" altLang="ja-JP" sz="1200">
                 <a:solidFill>
                   <a:schemeClr val="bg1"/>
                 </a:solidFill>
               </a:rPr>
               <a:t>11</a:t>
             </a:r>
-            <a:endParaRPr kumimoji="1" lang="ja-JP" altLang="en-US" sz="1200" dirty="0">
+            <a:endParaRPr kumimoji="1" lang="ja-JP" altLang="en-US" sz="1200">
               <a:solidFill>
                 <a:schemeClr val="bg1"/>
               </a:solidFill>
@@ -18137,14 +18414,14 @@
           <a:p>
             <a:pPr algn="ctr"/>
             <a:r>
-              <a:rPr kumimoji="1" lang="ja-JP" altLang="en-US" sz="1200" dirty="0">
+              <a:rPr kumimoji="1" lang="ja-JP" altLang="en-US" sz="1200">
                 <a:solidFill>
                   <a:schemeClr val="bg1"/>
                 </a:solidFill>
               </a:rPr>
               <a:t>所有者</a:t>
             </a:r>
-            <a:endParaRPr kumimoji="1" lang="en-US" altLang="ja-JP" sz="1200" dirty="0">
+            <a:endParaRPr kumimoji="1" lang="en-US" altLang="ja-JP" sz="1200">
               <a:solidFill>
                 <a:schemeClr val="bg1"/>
               </a:solidFill>
@@ -18153,14 +18430,14 @@
           <a:p>
             <a:pPr algn="ctr"/>
             <a:r>
-              <a:rPr kumimoji="1" lang="ja-JP" altLang="en-US" sz="1200" dirty="0">
+              <a:rPr kumimoji="1" lang="ja-JP" altLang="en-US" sz="1200">
                 <a:solidFill>
                   <a:schemeClr val="bg1"/>
                 </a:solidFill>
               </a:rPr>
               <a:t>タスク１</a:t>
             </a:r>
-            <a:endParaRPr kumimoji="1" lang="en-US" altLang="ja-JP" sz="1200" dirty="0">
+            <a:endParaRPr kumimoji="1" lang="en-US" altLang="ja-JP" sz="1200">
               <a:solidFill>
                 <a:schemeClr val="bg1"/>
               </a:solidFill>
@@ -18213,7 +18490,7 @@
           <a:lstStyle/>
           <a:p>
             <a:pPr algn="ctr"/>
-            <a:endParaRPr kumimoji="1" lang="ja-JP" altLang="en-US" dirty="0"/>
+            <a:endParaRPr kumimoji="1" lang="ja-JP" altLang="en-US"/>
           </a:p>
         </p:txBody>
       </p:sp>
@@ -18262,7 +18539,7 @@
           <a:lstStyle/>
           <a:p>
             <a:pPr algn="ctr"/>
-            <a:endParaRPr kumimoji="1" lang="ja-JP" altLang="en-US" dirty="0"/>
+            <a:endParaRPr kumimoji="1" lang="ja-JP" altLang="en-US"/>
           </a:p>
         </p:txBody>
       </p:sp>
@@ -18296,10 +18573,10 @@
           <a:p>
             <a:pPr algn="ctr"/>
             <a:r>
-              <a:rPr kumimoji="1" lang="ja-JP" altLang="en-US" sz="1600" b="1" dirty="0"/>
+              <a:rPr kumimoji="1" lang="ja-JP" altLang="en-US" sz="1600" b="1"/>
               <a:t>所有者タスク</a:t>
             </a:r>
-            <a:endParaRPr kumimoji="1" lang="en-US" altLang="ja-JP" sz="1600" b="1" dirty="0">
+            <a:endParaRPr kumimoji="1" lang="en-US" altLang="ja-JP" sz="1600" b="1">
               <a:solidFill>
                 <a:schemeClr val="bg1"/>
               </a:solidFill>
@@ -18337,10 +18614,10 @@
           <a:p>
             <a:pPr algn="ctr"/>
             <a:r>
-              <a:rPr kumimoji="1" lang="ja-JP" altLang="en-US" sz="1600" b="1" dirty="0"/>
+              <a:rPr kumimoji="1" lang="ja-JP" altLang="en-US" sz="1600" b="1"/>
               <a:t>ユーザータスク</a:t>
             </a:r>
-            <a:endParaRPr kumimoji="1" lang="en-US" altLang="ja-JP" sz="1600" b="1" dirty="0">
+            <a:endParaRPr kumimoji="1" lang="en-US" altLang="ja-JP" sz="1600" b="1">
               <a:solidFill>
                 <a:schemeClr val="bg1"/>
               </a:solidFill>
@@ -18463,7 +18740,7 @@
           <a:lstStyle/>
           <a:p>
             <a:r>
-              <a:rPr kumimoji="1" lang="ja-JP" altLang="en-US" sz="2000" b="1" dirty="0">
+              <a:rPr kumimoji="1" lang="ja-JP" altLang="en-US" sz="2000" b="1">
                 <a:solidFill>
                   <a:schemeClr val="bg1"/>
                 </a:solidFill>
@@ -18635,10 +18912,10 @@
           <a:lstStyle/>
           <a:p>
             <a:r>
-              <a:rPr lang="ja-JP" altLang="en-US" b="1" dirty="0"/>
+              <a:rPr lang="ja-JP" altLang="en-US" b="1"/>
               <a:t>割り込み機能がタスクの待ち時間に与える影響</a:t>
             </a:r>
-            <a:endParaRPr kumimoji="1" lang="ja-JP" altLang="en-US" dirty="0"/>
+            <a:endParaRPr kumimoji="1" lang="ja-JP" altLang="en-US"/>
           </a:p>
         </p:txBody>
       </p:sp>
@@ -18668,7 +18945,7 @@
               <a:pPr/>
               <a:t>6</a:t>
             </a:fld>
-            <a:endParaRPr lang="ja-JP" altLang="en-US" dirty="0"/>
+            <a:endParaRPr lang="ja-JP" altLang="en-US"/>
           </a:p>
         </p:txBody>
       </p:sp>
@@ -18905,7 +19182,7 @@
               <a:buNone/>
             </a:pPr>
             <a:r>
-              <a:rPr lang="ja-JP" altLang="en-US" b="1" dirty="0">
+              <a:rPr lang="ja-JP" altLang="en-US" b="1">
                 <a:solidFill>
                   <a:schemeClr val="accent3">
                     <a:lumMod val="75000"/>
@@ -18914,7 +19191,7 @@
               </a:rPr>
               <a:t>提案手法のシナリオで各ユーザーのタスク完了時間がどう影響するのか</a:t>
             </a:r>
-            <a:endParaRPr lang="en-US" altLang="ja-JP" b="1" dirty="0">
+            <a:endParaRPr lang="en-US" altLang="ja-JP" b="1">
               <a:solidFill>
                 <a:schemeClr val="accent3">
                   <a:lumMod val="75000"/>
@@ -18928,10 +19205,10 @@
               <a:buNone/>
             </a:pPr>
             <a:r>
-              <a:rPr lang="ja-JP" altLang="en-US" sz="2000" b="1" dirty="0"/>
+              <a:rPr lang="ja-JP" altLang="en-US" sz="2000" b="1"/>
               <a:t>① 共有なし </a:t>
             </a:r>
-            <a:endParaRPr lang="en-US" altLang="ja-JP" sz="2000" b="1" dirty="0"/>
+            <a:endParaRPr lang="en-US" altLang="ja-JP" sz="2000" b="1"/>
           </a:p>
           <a:p>
             <a:pPr marL="0" indent="0">
@@ -18939,22 +19216,22 @@
               <a:buNone/>
             </a:pPr>
             <a:r>
-              <a:rPr lang="en-US" altLang="ja-JP" sz="2000" dirty="0"/>
+              <a:rPr lang="en-US" altLang="ja-JP" sz="2000"/>
               <a:t>	</a:t>
             </a:r>
             <a:r>
-              <a:rPr lang="ja-JP" altLang="en-US" sz="2000" dirty="0"/>
+              <a:rPr lang="ja-JP" altLang="en-US" sz="2000"/>
               <a:t>各ユーザーが自分の</a:t>
             </a:r>
             <a:r>
-              <a:rPr lang="en-US" altLang="ja-JP" sz="2000" dirty="0"/>
+              <a:rPr lang="en-US" altLang="ja-JP" sz="2000"/>
               <a:t>GPU</a:t>
             </a:r>
             <a:r>
-              <a:rPr lang="ja-JP" altLang="en-US" sz="2000" dirty="0"/>
+              <a:rPr lang="ja-JP" altLang="en-US" sz="2000"/>
               <a:t>のみを使用する</a:t>
             </a:r>
-            <a:endParaRPr lang="en-US" altLang="ja-JP" sz="2000" dirty="0"/>
+            <a:endParaRPr lang="en-US" altLang="ja-JP" sz="2000"/>
           </a:p>
           <a:p>
             <a:pPr marL="0" indent="0">
@@ -18962,22 +19239,22 @@
               <a:buNone/>
             </a:pPr>
             <a:r>
-              <a:rPr lang="ja-JP" altLang="en-US" sz="2000" b="1" dirty="0"/>
+              <a:rPr lang="ja-JP" altLang="en-US" sz="2000" b="1"/>
               <a:t>② </a:t>
             </a:r>
             <a:r>
-              <a:rPr lang="en-US" altLang="ja-JP" sz="2000" b="1" dirty="0"/>
+              <a:rPr lang="en-US" altLang="ja-JP" sz="2000" b="1"/>
               <a:t>FCFS</a:t>
             </a:r>
             <a:r>
-              <a:rPr lang="ja-JP" altLang="en-US" sz="2000" b="1" dirty="0"/>
+              <a:rPr lang="ja-JP" altLang="en-US" sz="2000" b="1"/>
               <a:t>（先着順</a:t>
             </a:r>
             <a:r>
-              <a:rPr lang="ja-JP" altLang="en-US" sz="2000" dirty="0"/>
+              <a:rPr lang="ja-JP" altLang="en-US" sz="2000"/>
               <a:t>）</a:t>
             </a:r>
-            <a:endParaRPr lang="en-US" altLang="ja-JP" sz="2000" dirty="0"/>
+            <a:endParaRPr lang="en-US" altLang="ja-JP" sz="2000"/>
           </a:p>
           <a:p>
             <a:pPr marL="0" indent="0">
@@ -18985,30 +19262,30 @@
               <a:buNone/>
             </a:pPr>
             <a:r>
-              <a:rPr lang="en-US" altLang="ja-JP" sz="2000" dirty="0"/>
+              <a:rPr lang="en-US" altLang="ja-JP" sz="2000"/>
               <a:t>	</a:t>
             </a:r>
             <a:r>
-              <a:rPr lang="ja-JP" altLang="en-US" sz="2000" dirty="0"/>
+              <a:rPr lang="ja-JP" altLang="en-US" sz="2000"/>
               <a:t>全員が</a:t>
             </a:r>
             <a:r>
-              <a:rPr lang="en-US" altLang="ja-JP" sz="2000" dirty="0"/>
+              <a:rPr lang="en-US" altLang="ja-JP" sz="2000"/>
               <a:t>ACP</a:t>
             </a:r>
             <a:r>
-              <a:rPr lang="ja-JP" altLang="en-US" sz="2000" dirty="0"/>
+              <a:rPr lang="ja-JP" altLang="en-US" sz="2000"/>
               <a:t>上の全</a:t>
             </a:r>
             <a:r>
-              <a:rPr lang="en-US" altLang="ja-JP" sz="2000" dirty="0"/>
+              <a:rPr lang="en-US" altLang="ja-JP" sz="2000"/>
               <a:t>GPU</a:t>
             </a:r>
             <a:r>
-              <a:rPr lang="ja-JP" altLang="en-US" sz="2000" dirty="0"/>
+              <a:rPr lang="ja-JP" altLang="en-US" sz="2000"/>
               <a:t>を平等に利用</a:t>
             </a:r>
-            <a:endParaRPr lang="en-US" altLang="ja-JP" sz="2000" dirty="0"/>
+            <a:endParaRPr lang="en-US" altLang="ja-JP" sz="2000"/>
           </a:p>
           <a:p>
             <a:pPr marL="0" indent="0">
@@ -19016,10 +19293,10 @@
               <a:buNone/>
             </a:pPr>
             <a:r>
-              <a:rPr lang="ja-JP" altLang="en-US" sz="2000" b="1" dirty="0"/>
+              <a:rPr lang="ja-JP" altLang="en-US" sz="2000" b="1"/>
               <a:t>③ 所有者優先 </a:t>
             </a:r>
-            <a:endParaRPr lang="en-US" altLang="ja-JP" sz="2000" b="1" dirty="0"/>
+            <a:endParaRPr lang="en-US" altLang="ja-JP" sz="2000" b="1"/>
           </a:p>
           <a:p>
             <a:pPr marL="0" indent="0">
@@ -19027,35 +19304,35 @@
               <a:buNone/>
             </a:pPr>
             <a:r>
-              <a:rPr lang="en-US" altLang="ja-JP" sz="2000" dirty="0"/>
+              <a:rPr lang="en-US" altLang="ja-JP" sz="2000"/>
               <a:t>	</a:t>
             </a:r>
             <a:r>
-              <a:rPr lang="ja-JP" altLang="en-US" sz="2000" dirty="0"/>
+              <a:rPr lang="ja-JP" altLang="en-US" sz="2000"/>
               <a:t>自分の</a:t>
             </a:r>
             <a:r>
-              <a:rPr lang="en-US" altLang="ja-JP" sz="2000" dirty="0"/>
+              <a:rPr lang="en-US" altLang="ja-JP" sz="2000"/>
               <a:t>GPU</a:t>
             </a:r>
             <a:r>
-              <a:rPr lang="ja-JP" altLang="en-US" sz="2000" dirty="0"/>
+              <a:rPr lang="ja-JP" altLang="en-US" sz="2000"/>
               <a:t>を使う場合は、割り込んで優先して使える（他人の</a:t>
             </a:r>
             <a:r>
-              <a:rPr lang="en-US" altLang="ja-JP" sz="2000" dirty="0"/>
+              <a:rPr lang="en-US" altLang="ja-JP" sz="2000"/>
               <a:t>GPU</a:t>
             </a:r>
             <a:r>
-              <a:rPr lang="ja-JP" altLang="en-US" sz="2000" dirty="0"/>
+              <a:rPr lang="ja-JP" altLang="en-US" sz="2000"/>
               <a:t>は、</a:t>
             </a:r>
             <a:r>
-              <a:rPr lang="en-US" altLang="ja-JP" sz="2000" dirty="0"/>
+              <a:rPr lang="en-US" altLang="ja-JP" sz="2000"/>
               <a:t>FCFS</a:t>
             </a:r>
             <a:r>
-              <a:rPr lang="ja-JP" altLang="en-US" sz="2000" dirty="0"/>
+              <a:rPr lang="ja-JP" altLang="en-US" sz="2000"/>
               <a:t>）</a:t>
             </a:r>
           </a:p>
@@ -19065,10 +19342,10 @@
               <a:buNone/>
             </a:pPr>
             <a:r>
-              <a:rPr lang="ja-JP" altLang="en-US" sz="2000" b="1" dirty="0"/>
+              <a:rPr lang="ja-JP" altLang="en-US" sz="2000" b="1"/>
               <a:t>④ プリエンプション </a:t>
             </a:r>
-            <a:endParaRPr lang="en-US" altLang="ja-JP" sz="2000" b="1" dirty="0"/>
+            <a:endParaRPr lang="en-US" altLang="ja-JP" sz="2000" b="1"/>
           </a:p>
           <a:p>
             <a:pPr marL="0" indent="0">
@@ -19076,38 +19353,38 @@
               <a:buNone/>
             </a:pPr>
             <a:r>
-              <a:rPr lang="en-US" altLang="ja-JP" sz="2000" dirty="0"/>
+              <a:rPr lang="en-US" altLang="ja-JP" sz="2000"/>
               <a:t>	</a:t>
             </a:r>
             <a:r>
-              <a:rPr lang="ja-JP" altLang="en-US" sz="2000" dirty="0"/>
+              <a:rPr lang="ja-JP" altLang="en-US" sz="2000"/>
               <a:t>自分の</a:t>
             </a:r>
             <a:r>
-              <a:rPr lang="en-US" altLang="ja-JP" sz="2000" dirty="0"/>
+              <a:rPr lang="en-US" altLang="ja-JP" sz="2000"/>
               <a:t>GPU </a:t>
             </a:r>
             <a:r>
-              <a:rPr lang="ja-JP" altLang="en-US" sz="2000" dirty="0"/>
+              <a:rPr lang="ja-JP" altLang="en-US" sz="2000"/>
               <a:t>を使う場合は、他人のタスクを途中切断（他人の</a:t>
             </a:r>
             <a:r>
-              <a:rPr lang="en-US" altLang="ja-JP" sz="2000" dirty="0"/>
+              <a:rPr lang="en-US" altLang="ja-JP" sz="2000"/>
               <a:t>GPU</a:t>
             </a:r>
             <a:r>
-              <a:rPr lang="ja-JP" altLang="en-US" sz="2000" dirty="0"/>
+              <a:rPr lang="ja-JP" altLang="en-US" sz="2000"/>
               <a:t>は、</a:t>
             </a:r>
             <a:r>
-              <a:rPr lang="en-US" altLang="ja-JP" sz="2000" dirty="0"/>
+              <a:rPr lang="en-US" altLang="ja-JP" sz="2000"/>
               <a:t>FCFS</a:t>
             </a:r>
             <a:r>
-              <a:rPr lang="ja-JP" altLang="en-US" sz="2000" dirty="0"/>
+              <a:rPr lang="ja-JP" altLang="en-US" sz="2000"/>
               <a:t>）</a:t>
             </a:r>
-            <a:endParaRPr lang="en-US" altLang="ja-JP" sz="2000" dirty="0"/>
+            <a:endParaRPr lang="en-US" altLang="ja-JP" sz="2000"/>
           </a:p>
           <a:p>
             <a:pPr marL="0" indent="0">
@@ -19115,33 +19392,33 @@
               <a:buNone/>
             </a:pPr>
             <a:r>
-              <a:rPr lang="ja-JP" altLang="en-US" sz="2000" dirty="0"/>
+              <a:rPr lang="ja-JP" altLang="en-US" sz="2000"/>
               <a:t>　</a:t>
             </a:r>
             <a:r>
-              <a:rPr lang="en-US" altLang="ja-JP" sz="2000" dirty="0"/>
+              <a:rPr lang="en-US" altLang="ja-JP" sz="2000"/>
               <a:t>	</a:t>
             </a:r>
             <a:r>
-              <a:rPr lang="ja-JP" altLang="en-US" sz="2000" dirty="0"/>
+              <a:rPr lang="ja-JP" altLang="en-US" sz="2000"/>
               <a:t>途中切断されたタスクはマイグレーション </a:t>
             </a:r>
             <a:r>
-              <a:rPr lang="en-US" altLang="ja-JP" sz="2000" dirty="0"/>
+              <a:rPr lang="en-US" altLang="ja-JP" sz="2000"/>
               <a:t>or </a:t>
             </a:r>
             <a:r>
-              <a:rPr lang="ja-JP" altLang="en-US" sz="2000" dirty="0"/>
+              <a:rPr lang="ja-JP" altLang="en-US" sz="2000"/>
               <a:t>待機</a:t>
             </a:r>
-            <a:endParaRPr lang="en-US" altLang="ja-JP" sz="2000" dirty="0"/>
+            <a:endParaRPr lang="en-US" altLang="ja-JP" sz="2000"/>
           </a:p>
           <a:p>
             <a:pPr marL="0" indent="0">
               <a:buFont typeface="Arial" panose="020B0604020202020204" pitchFamily="34" charset="0"/>
               <a:buNone/>
             </a:pPr>
-            <a:endParaRPr lang="en-US" altLang="ja-JP" sz="2000" dirty="0"/>
+            <a:endParaRPr lang="en-US" altLang="ja-JP" sz="2000"/>
           </a:p>
           <a:p>
             <a:pPr marL="0" indent="0">
@@ -19149,18 +19426,18 @@
               <a:buNone/>
             </a:pPr>
             <a:r>
-              <a:rPr lang="ja-JP" altLang="en-US" sz="2400" dirty="0"/>
+              <a:rPr lang="ja-JP" altLang="en-US" sz="2400"/>
               <a:t>予測完了時間を効用式として、最短の</a:t>
             </a:r>
             <a:r>
-              <a:rPr lang="en-US" altLang="ja-JP" sz="2400" dirty="0"/>
+              <a:rPr lang="en-US" altLang="ja-JP" sz="2400"/>
               <a:t>GPU</a:t>
             </a:r>
             <a:r>
-              <a:rPr lang="ja-JP" altLang="en-US" sz="2400" dirty="0"/>
+              <a:rPr lang="ja-JP" altLang="en-US" sz="2400"/>
               <a:t>を選択してタスクを処理する</a:t>
             </a:r>
-            <a:endParaRPr lang="en-US" altLang="ja-JP" sz="2400" dirty="0"/>
+            <a:endParaRPr lang="en-US" altLang="ja-JP" sz="2400"/>
           </a:p>
           <a:p>
             <a:pPr marL="0" indent="0">
@@ -19168,11 +19445,11 @@
               <a:buNone/>
             </a:pPr>
             <a:r>
-              <a:rPr lang="ja-JP" altLang="en-US" sz="2400" dirty="0"/>
+              <a:rPr lang="ja-JP" altLang="en-US" sz="2400"/>
               <a:t>全員参加条件下での</a:t>
             </a:r>
             <a:r>
-              <a:rPr lang="ja-JP" altLang="en-US" sz="2400" b="1" u="sng" dirty="0">
+              <a:rPr lang="ja-JP" altLang="en-US" sz="2400" b="1" u="sng">
                 <a:solidFill>
                   <a:schemeClr val="accent3">
                     <a:lumMod val="75000"/>
@@ -19182,14 +19459,14 @@
               <a:t>ユーザーごとの平均ターンアラウンドタイム</a:t>
             </a:r>
             <a:r>
-              <a:rPr lang="ja-JP" altLang="en-US" sz="2400" dirty="0"/>
+              <a:rPr lang="ja-JP" altLang="en-US" sz="2400"/>
               <a:t>を評価</a:t>
             </a:r>
             <a:r>
-              <a:rPr lang="en-US" altLang="ja-JP" sz="2400" dirty="0"/>
+              <a:rPr lang="en-US" altLang="ja-JP" sz="2400"/>
               <a:t>	</a:t>
             </a:r>
-            <a:endParaRPr lang="ja-JP" altLang="en-US" sz="2400" dirty="0"/>
+            <a:endParaRPr lang="ja-JP" altLang="en-US" sz="2400"/>
           </a:p>
         </p:txBody>
       </p:sp>
@@ -19299,7 +19576,7 @@
           <a:lstStyle/>
           <a:p>
             <a:r>
-              <a:rPr kumimoji="1" lang="ja-JP" altLang="en-US" dirty="0"/>
+              <a:rPr kumimoji="1" lang="ja-JP" altLang="en-US"/>
               <a:t>シミュレーション環境</a:t>
             </a:r>
           </a:p>
@@ -19331,7 +19608,7 @@
               <a:pPr/>
               <a:t>7</a:t>
             </a:fld>
-            <a:endParaRPr lang="ja-JP" altLang="en-US" dirty="0"/>
+            <a:endParaRPr lang="ja-JP" altLang="en-US"/>
           </a:p>
         </p:txBody>
       </p:sp>
@@ -19371,7 +19648,7 @@
               <a:buNone/>
             </a:pPr>
             <a:r>
-              <a:rPr lang="en-US" altLang="ja-JP" sz="2400" b="1" dirty="0">
+              <a:rPr lang="en-US" altLang="ja-JP" sz="2400" b="1">
                 <a:solidFill>
                   <a:schemeClr val="accent3">
                     <a:lumMod val="75000"/>
@@ -19381,7 +19658,7 @@
               <a:t>M/M/k </a:t>
             </a:r>
             <a:r>
-              <a:rPr lang="ja-JP" altLang="en-US" sz="2400" b="1" dirty="0">
+              <a:rPr lang="ja-JP" altLang="en-US" sz="2400" b="1">
                 <a:solidFill>
                   <a:schemeClr val="accent3">
                     <a:lumMod val="75000"/>
@@ -19390,7 +19667,7 @@
               </a:rPr>
               <a:t>待ち行列モデルによるシミュレーション</a:t>
             </a:r>
-            <a:endParaRPr lang="en-US" altLang="ja-JP" sz="2400" b="1" dirty="0">
+            <a:endParaRPr lang="en-US" altLang="ja-JP" sz="2400" b="1">
               <a:solidFill>
                 <a:schemeClr val="accent3">
                   <a:lumMod val="75000"/>
@@ -19405,30 +19682,30 @@
               </a:lnSpc>
             </a:pPr>
             <a:r>
-              <a:rPr lang="ja-JP" altLang="en-US" sz="2400" dirty="0"/>
+              <a:rPr lang="ja-JP" altLang="en-US" sz="2400"/>
               <a:t>ユーザー数：</a:t>
             </a:r>
             <a:r>
-              <a:rPr lang="en-US" altLang="ja-JP" sz="2400" b="1" dirty="0"/>
+              <a:rPr lang="en-US" altLang="ja-JP" sz="2400" b="1"/>
               <a:t>18</a:t>
             </a:r>
             <a:r>
-              <a:rPr lang="ja-JP" altLang="en-US" sz="2400" b="1" dirty="0"/>
+              <a:rPr lang="ja-JP" altLang="en-US" sz="2400" b="1"/>
               <a:t>人</a:t>
             </a:r>
             <a:r>
-              <a:rPr lang="ja-JP" altLang="en-US" sz="2400" dirty="0"/>
+              <a:rPr lang="ja-JP" altLang="en-US" sz="2400"/>
               <a:t>（</a:t>
             </a:r>
             <a:r>
-              <a:rPr lang="en-US" altLang="ja-JP" sz="2400" dirty="0"/>
+              <a:rPr lang="en-US" altLang="ja-JP" sz="2400"/>
               <a:t>GPU</a:t>
             </a:r>
             <a:r>
-              <a:rPr lang="ja-JP" altLang="en-US" sz="2400" dirty="0"/>
+              <a:rPr lang="ja-JP" altLang="en-US" sz="2400"/>
               <a:t>サーバ各１台）</a:t>
             </a:r>
-            <a:endParaRPr lang="en-US" altLang="ja-JP" sz="2400" dirty="0"/>
+            <a:endParaRPr lang="en-US" altLang="ja-JP" sz="2400"/>
           </a:p>
           <a:p>
             <a:pPr>
@@ -19437,56 +19714,56 @@
               </a:lnSpc>
             </a:pPr>
             <a:r>
-              <a:rPr kumimoji="1" lang="en-US" altLang="ja-JP" sz="2400" dirty="0"/>
+              <a:rPr kumimoji="1" lang="en-US" altLang="ja-JP" sz="2400"/>
               <a:t>GPU</a:t>
             </a:r>
             <a:r>
-              <a:rPr kumimoji="1" lang="ja-JP" altLang="en-US" sz="2400" dirty="0"/>
+              <a:rPr kumimoji="1" lang="ja-JP" altLang="en-US" sz="2400"/>
               <a:t>性能：</a:t>
             </a:r>
             <a:r>
-              <a:rPr kumimoji="1" lang="ja-JP" altLang="en-US" sz="2400" b="1" dirty="0"/>
+              <a:rPr kumimoji="1" lang="ja-JP" altLang="en-US" sz="2400" b="1"/>
               <a:t>９段階</a:t>
             </a:r>
-            <a:endParaRPr kumimoji="1" lang="en-US" altLang="ja-JP" sz="2400" b="1" dirty="0"/>
-          </a:p>
-          <a:p>
-            <a:r>
-              <a:rPr lang="ja-JP" altLang="en-US" sz="2400" dirty="0"/>
+            <a:endParaRPr kumimoji="1" lang="en-US" altLang="ja-JP" sz="2400" b="1"/>
+          </a:p>
+          <a:p>
+            <a:r>
+              <a:rPr lang="ja-JP" altLang="en-US" sz="2400"/>
               <a:t>タスク：</a:t>
             </a:r>
             <a:r>
-              <a:rPr lang="en-US" altLang="ja-JP" sz="2400" dirty="0"/>
+              <a:rPr lang="en-US" altLang="ja-JP" sz="2400"/>
               <a:t>YOLOv7</a:t>
             </a:r>
             <a:r>
-              <a:rPr lang="ja-JP" altLang="en-US" sz="2400" dirty="0"/>
+              <a:rPr lang="ja-JP" altLang="en-US" sz="2400"/>
               <a:t>学習タスクを想定</a:t>
             </a:r>
-            <a:endParaRPr lang="en-US" altLang="ja-JP" sz="2400" dirty="0"/>
+            <a:endParaRPr lang="en-US" altLang="ja-JP" sz="2400"/>
           </a:p>
           <a:p>
             <a:pPr marL="0" indent="0">
               <a:buNone/>
             </a:pPr>
             <a:r>
-              <a:rPr lang="en-US" altLang="ja-JP" sz="2000" dirty="0"/>
+              <a:rPr lang="en-US" altLang="ja-JP" sz="2000"/>
               <a:t> </a:t>
             </a:r>
             <a:r>
-              <a:rPr lang="ja-JP" altLang="en-US" sz="2000" dirty="0"/>
+              <a:rPr lang="ja-JP" altLang="en-US" sz="2000"/>
               <a:t> </a:t>
             </a:r>
             <a:r>
-              <a:rPr lang="en-US" altLang="ja-JP" sz="2000" dirty="0"/>
+              <a:rPr lang="en-US" altLang="ja-JP" sz="2000"/>
               <a:t>- </a:t>
             </a:r>
             <a:r>
-              <a:rPr lang="ja-JP" altLang="en-US" sz="2000" dirty="0"/>
+              <a:rPr lang="ja-JP" altLang="en-US" sz="2000"/>
               <a:t>画像１枚当たり平均</a:t>
             </a:r>
             <a:r>
-              <a:rPr lang="en-US" altLang="ja-JP" sz="2000" b="1" dirty="0"/>
+              <a:rPr lang="en-US" altLang="ja-JP" sz="2000" b="1"/>
               <a:t>0.360TFLOPs</a:t>
             </a:r>
           </a:p>
@@ -19495,86 +19772,86 @@
               <a:buNone/>
             </a:pPr>
             <a:r>
-              <a:rPr lang="en-US" altLang="ja-JP" sz="2000" dirty="0"/>
+              <a:rPr lang="en-US" altLang="ja-JP" sz="2000"/>
               <a:t>  - ID</a:t>
             </a:r>
             <a:r>
-              <a:rPr lang="ja-JP" altLang="en-US" sz="2000" dirty="0"/>
+              <a:rPr lang="ja-JP" altLang="en-US" sz="2000"/>
               <a:t> </a:t>
             </a:r>
             <a:r>
-              <a:rPr lang="en-US" altLang="ja-JP" sz="2000" dirty="0"/>
+              <a:rPr lang="en-US" altLang="ja-JP" sz="2000"/>
               <a:t>0~8</a:t>
             </a:r>
             <a:r>
-              <a:rPr lang="ja-JP" altLang="en-US" sz="2000" dirty="0"/>
+              <a:rPr lang="ja-JP" altLang="en-US" sz="2000"/>
               <a:t>　→　軽量タスク（バッチ数 </a:t>
             </a:r>
             <a:r>
-              <a:rPr lang="en-US" altLang="ja-JP" sz="2000" b="1" dirty="0"/>
+              <a:rPr lang="en-US" altLang="ja-JP" sz="2000" b="1"/>
               <a:t>1000</a:t>
             </a:r>
             <a:r>
-              <a:rPr lang="ja-JP" altLang="en-US" sz="2000" dirty="0"/>
+              <a:rPr lang="ja-JP" altLang="en-US" sz="2000"/>
               <a:t>）</a:t>
             </a:r>
-            <a:endParaRPr lang="en-US" altLang="ja-JP" sz="2000" dirty="0"/>
+            <a:endParaRPr lang="en-US" altLang="ja-JP" sz="2000"/>
           </a:p>
           <a:p>
             <a:pPr marL="0" indent="0">
               <a:buNone/>
             </a:pPr>
             <a:r>
-              <a:rPr lang="en-US" altLang="ja-JP" sz="2000" dirty="0"/>
+              <a:rPr lang="en-US" altLang="ja-JP" sz="2000"/>
               <a:t>  - ID</a:t>
             </a:r>
             <a:r>
-              <a:rPr lang="ja-JP" altLang="en-US" sz="2000" dirty="0"/>
+              <a:rPr lang="ja-JP" altLang="en-US" sz="2000"/>
               <a:t> </a:t>
             </a:r>
             <a:r>
-              <a:rPr lang="en-US" altLang="ja-JP" sz="2000" dirty="0"/>
+              <a:rPr lang="en-US" altLang="ja-JP" sz="2000"/>
               <a:t>9~17</a:t>
             </a:r>
             <a:r>
-              <a:rPr lang="ja-JP" altLang="en-US" sz="2000" dirty="0"/>
+              <a:rPr lang="ja-JP" altLang="en-US" sz="2000"/>
               <a:t>  →　重量タスク（バッチ数 </a:t>
             </a:r>
             <a:r>
-              <a:rPr lang="en-US" altLang="ja-JP" sz="2000" b="1" dirty="0"/>
+              <a:rPr lang="en-US" altLang="ja-JP" sz="2000" b="1"/>
               <a:t>2000</a:t>
             </a:r>
             <a:r>
-              <a:rPr lang="ja-JP" altLang="en-US" sz="2400" dirty="0"/>
+              <a:rPr lang="ja-JP" altLang="en-US" sz="2400"/>
               <a:t>）</a:t>
             </a:r>
-            <a:endParaRPr lang="en-US" altLang="ja-JP" sz="2400" dirty="0"/>
+            <a:endParaRPr lang="en-US" altLang="ja-JP" sz="2400"/>
           </a:p>
           <a:p>
             <a:pPr marL="0" indent="0">
               <a:buNone/>
             </a:pPr>
             <a:r>
-              <a:rPr lang="ja-JP" altLang="en-US" sz="2000" dirty="0"/>
+              <a:rPr lang="ja-JP" altLang="en-US" sz="2000"/>
               <a:t>  </a:t>
             </a:r>
             <a:r>
-              <a:rPr lang="en-US" altLang="ja-JP" sz="2000" dirty="0"/>
+              <a:rPr lang="en-US" altLang="ja-JP" sz="2000"/>
               <a:t>-</a:t>
             </a:r>
             <a:r>
-              <a:rPr lang="ja-JP" altLang="en-US" sz="2000" dirty="0"/>
+              <a:rPr lang="ja-JP" altLang="en-US" sz="2000"/>
               <a:t> エポック数 ：</a:t>
             </a:r>
             <a:r>
-              <a:rPr lang="en-US" altLang="ja-JP" sz="2000" b="1" dirty="0"/>
+              <a:rPr lang="en-US" altLang="ja-JP" sz="2000" b="1"/>
               <a:t>10</a:t>
             </a:r>
             <a:r>
-              <a:rPr lang="ja-JP" altLang="en-US" sz="2000" dirty="0"/>
+              <a:rPr lang="ja-JP" altLang="en-US" sz="2000"/>
               <a:t>（均一）</a:t>
             </a:r>
-            <a:endParaRPr lang="en-US" altLang="ja-JP" sz="2000" dirty="0"/>
+            <a:endParaRPr lang="en-US" altLang="ja-JP" sz="2000"/>
           </a:p>
           <a:p>
             <a:pPr>
@@ -19583,11 +19860,11 @@
               </a:lnSpc>
             </a:pPr>
             <a:r>
-              <a:rPr lang="ja-JP" altLang="en-US" sz="2400" dirty="0"/>
+              <a:rPr lang="ja-JP" altLang="en-US" sz="2400"/>
               <a:t>タスク到着率：</a:t>
             </a:r>
             <a:r>
-              <a:rPr lang="en-US" altLang="ja-JP" sz="2400" dirty="0"/>
+              <a:rPr lang="en-US" altLang="ja-JP" sz="2400"/>
               <a:t>0.005</a:t>
             </a:r>
           </a:p>
@@ -19596,22 +19873,22 @@
               <a:buNone/>
             </a:pPr>
             <a:r>
-              <a:rPr lang="ja-JP" altLang="en-US" sz="2400" dirty="0"/>
+              <a:rPr lang="ja-JP" altLang="en-US" sz="2400"/>
               <a:t>  →　</a:t>
             </a:r>
             <a:r>
-              <a:rPr lang="ja-JP" altLang="en-US" sz="2400" b="1" dirty="0"/>
+              <a:rPr lang="ja-JP" altLang="en-US" sz="2400" b="1"/>
               <a:t>平均</a:t>
             </a:r>
             <a:r>
-              <a:rPr lang="en-US" altLang="ja-JP" sz="2400" b="1" dirty="0"/>
+              <a:rPr lang="en-US" altLang="ja-JP" sz="2400" b="1"/>
               <a:t>200</a:t>
             </a:r>
             <a:r>
-              <a:rPr lang="ja-JP" altLang="en-US" sz="2400" b="1" dirty="0"/>
+              <a:rPr lang="ja-JP" altLang="en-US" sz="2400" b="1"/>
               <a:t>秒に１回</a:t>
             </a:r>
-            <a:endParaRPr lang="en-US" altLang="ja-JP" sz="2400" b="1" dirty="0"/>
+            <a:endParaRPr lang="en-US" altLang="ja-JP" sz="2400" b="1"/>
           </a:p>
           <a:p>
             <a:pPr marL="0" indent="0">
@@ -19621,18 +19898,18 @@
               <a:buNone/>
             </a:pPr>
             <a:r>
-              <a:rPr lang="ja-JP" altLang="en-US" sz="2400" dirty="0"/>
+              <a:rPr lang="ja-JP" altLang="en-US" sz="2400"/>
               <a:t>総シミュレーション時間：</a:t>
             </a:r>
             <a:r>
-              <a:rPr lang="en-US" altLang="ja-JP" sz="2400" b="1" dirty="0"/>
+              <a:rPr lang="en-US" altLang="ja-JP" sz="2400" b="1"/>
               <a:t>24</a:t>
             </a:r>
             <a:r>
-              <a:rPr lang="ja-JP" altLang="en-US" sz="2400" b="1" dirty="0"/>
+              <a:rPr lang="ja-JP" altLang="en-US" sz="2400" b="1"/>
               <a:t>時間</a:t>
             </a:r>
-            <a:endParaRPr lang="en-US" altLang="ja-JP" sz="2400" b="1" dirty="0"/>
+            <a:endParaRPr lang="en-US" altLang="ja-JP" sz="2400" b="1"/>
           </a:p>
         </p:txBody>
       </p:sp>
@@ -19651,7 +19928,7 @@
           <p:nvPr/>
         </p:nvPicPr>
         <p:blipFill>
-          <a:blip r:embed="rId2"/>
+          <a:blip r:embed="rId3"/>
           <a:srcRect l="27228" t="43333" r="26482" b="40556"/>
           <a:stretch>
             <a:fillRect/>
@@ -19712,7 +19989,7 @@
           <p:nvPr/>
         </p:nvPicPr>
         <p:blipFill>
-          <a:blip r:embed="rId2"/>
+          <a:blip r:embed="rId3"/>
           <a:stretch>
             <a:fillRect/>
           </a:stretch>
@@ -19756,10 +20033,10 @@
           <a:lstStyle/>
           <a:p>
             <a:r>
-              <a:rPr lang="ja-JP" altLang="en-US" sz="2600" dirty="0"/>
+              <a:rPr lang="ja-JP" altLang="en-US" sz="2600"/>
               <a:t>シミュレーション結果</a:t>
             </a:r>
-            <a:endParaRPr kumimoji="1" lang="ja-JP" altLang="en-US" sz="2600" dirty="0"/>
+            <a:endParaRPr kumimoji="1" lang="ja-JP" altLang="en-US" sz="2600"/>
           </a:p>
         </p:txBody>
       </p:sp>
@@ -19872,7 +20149,7 @@
           <a:p>
             <a:pPr algn="ctr"/>
             <a:r>
-              <a:rPr lang="ja-JP" altLang="en-US" sz="2000" dirty="0">
+              <a:rPr lang="ja-JP" altLang="en-US" sz="2000">
                 <a:solidFill>
                   <a:schemeClr val="tx1"/>
                 </a:solidFill>
@@ -19880,7 +20157,7 @@
               <a:t>中・高性能な</a:t>
             </a:r>
             <a:r>
-              <a:rPr lang="en-US" altLang="ja-JP" sz="2000" dirty="0">
+              <a:rPr lang="en-US" altLang="ja-JP" sz="2000">
                 <a:solidFill>
                   <a:schemeClr val="tx1"/>
                 </a:solidFill>
@@ -19888,7 +20165,7 @@
               <a:t>GPU</a:t>
             </a:r>
             <a:r>
-              <a:rPr lang="ja-JP" altLang="en-US" sz="2000" dirty="0">
+              <a:rPr lang="ja-JP" altLang="en-US" sz="2000">
                 <a:solidFill>
                   <a:schemeClr val="tx1"/>
                 </a:solidFill>
@@ -19896,7 +20173,7 @@
               <a:t>ユーザは他人に</a:t>
             </a:r>
             <a:r>
-              <a:rPr lang="en-US" altLang="ja-JP" sz="2000" dirty="0">
+              <a:rPr lang="en-US" altLang="ja-JP" sz="2000">
                 <a:solidFill>
                   <a:schemeClr val="tx1"/>
                 </a:solidFill>
@@ -19904,7 +20181,7 @@
               <a:t>GPU</a:t>
             </a:r>
             <a:r>
-              <a:rPr lang="ja-JP" altLang="en-US" sz="2000" dirty="0">
+              <a:rPr lang="ja-JP" altLang="en-US" sz="2000">
                 <a:solidFill>
                   <a:schemeClr val="tx1"/>
                 </a:solidFill>
@@ -19912,14 +20189,14 @@
               <a:t>を使われるため、</a:t>
             </a:r>
             <a:r>
-              <a:rPr lang="ja-JP" altLang="en-US" sz="2000" b="1" dirty="0">
+              <a:rPr lang="ja-JP" altLang="en-US" sz="2000" b="1">
                 <a:solidFill>
                   <a:schemeClr val="tx1"/>
                 </a:solidFill>
               </a:rPr>
               <a:t>待ち時間が増加</a:t>
             </a:r>
-            <a:endParaRPr kumimoji="1" lang="ja-JP" altLang="en-US" sz="2000" b="1" dirty="0">
+            <a:endParaRPr kumimoji="1" lang="ja-JP" altLang="en-US" sz="2000" b="1">
               <a:solidFill>
                 <a:schemeClr val="tx1"/>
               </a:solidFill>
@@ -19984,7 +20261,7 @@
           <a:p>
             <a:pPr algn="ctr"/>
             <a:r>
-              <a:rPr kumimoji="1" lang="ja-JP" altLang="en-US" dirty="0">
+              <a:rPr kumimoji="1" lang="ja-JP" altLang="en-US">
                 <a:solidFill>
                   <a:schemeClr val="tx1"/>
                 </a:solidFill>
@@ -20009,7 +20286,7 @@
           <p:nvPr/>
         </p:nvPicPr>
         <p:blipFill>
-          <a:blip r:embed="rId3"/>
+          <a:blip r:embed="rId4"/>
           <a:srcRect t="36546" b="28978"/>
           <a:stretch>
             <a:fillRect/>
@@ -20246,7 +20523,7 @@
           <a:lstStyle/>
           <a:p>
             <a:pPr algn="ctr"/>
-            <a:endParaRPr kumimoji="1" lang="ja-JP" altLang="en-US" dirty="0">
+            <a:endParaRPr kumimoji="1" lang="ja-JP" altLang="en-US">
               <a:solidFill>
                 <a:schemeClr val="tx1"/>
               </a:solidFill>
@@ -20283,24 +20560,24 @@
           <a:lstStyle/>
           <a:p>
             <a:r>
-              <a:rPr lang="ja-JP" altLang="en-US" dirty="0"/>
+              <a:rPr lang="ja-JP" altLang="en-US"/>
               <a:t>低性能</a:t>
             </a:r>
             <a:r>
-              <a:rPr lang="en-US" altLang="ja-JP" dirty="0"/>
+              <a:rPr lang="en-US" altLang="ja-JP"/>
               <a:t>GPU</a:t>
             </a:r>
             <a:r>
-              <a:rPr lang="ja-JP" altLang="en-US" dirty="0"/>
+              <a:rPr lang="ja-JP" altLang="en-US"/>
               <a:t>は共有シナリオで待ち時間が</a:t>
             </a:r>
             <a:r>
-              <a:rPr lang="ja-JP" altLang="en-US" b="1" dirty="0"/>
+              <a:rPr lang="ja-JP" altLang="en-US" b="1"/>
               <a:t>大幅に減少</a:t>
             </a:r>
           </a:p>
           <a:p>
-            <a:endParaRPr kumimoji="1" lang="ja-JP" altLang="en-US" dirty="0"/>
+            <a:endParaRPr kumimoji="1" lang="ja-JP" altLang="en-US"/>
           </a:p>
         </p:txBody>
       </p:sp>
@@ -20356,9 +20633,18 @@
           <a:lstStyle/>
           <a:p>
             <a:r>
-              <a:rPr kumimoji="1" lang="ja-JP" altLang="en-US" dirty="0"/>
-              <a:t>リサーチクエスチョン２</a:t>
-            </a:r>
+              <a:rPr lang="ja-JP" altLang="en-US" b="1"/>
+              <a:t>性能別ユーザー行動による</a:t>
+            </a:r>
+            <a:r>
+              <a:rPr lang="en-US" altLang="ja-JP" b="1"/>
+              <a:t>ACP</a:t>
+            </a:r>
+            <a:r>
+              <a:rPr lang="ja-JP" altLang="en-US" b="1"/>
+              <a:t>参加評価</a:t>
+            </a:r>
+            <a:endParaRPr lang="en-US" altLang="ja-JP" b="1"/>
           </a:p>
         </p:txBody>
       </p:sp>
@@ -20381,202 +20667,259 @@
         <p:spPr/>
         <p:txBody>
           <a:bodyPr>
-            <a:normAutofit fontScale="77500" lnSpcReduction="20000"/>
+            <a:normAutofit fontScale="62500" lnSpcReduction="20000"/>
           </a:bodyPr>
           <a:lstStyle/>
           <a:p>
             <a:pPr marL="0" indent="0">
+              <a:lnSpc>
+                <a:spcPct val="150000"/>
+              </a:lnSpc>
               <a:buNone/>
             </a:pPr>
             <a:r>
-              <a:rPr kumimoji="1" lang="en-US" altLang="ja-JP" b="1" u="sng" dirty="0">
+              <a:rPr lang="ja-JP" altLang="en-US" sz="3400" b="1">
                 <a:solidFill>
                   <a:schemeClr val="accent3">
                     <a:lumMod val="75000"/>
                   </a:schemeClr>
                 </a:solidFill>
               </a:rPr>
-              <a:t>RQ2</a:t>
-            </a:r>
-            <a:r>
-              <a:rPr kumimoji="1" lang="ja-JP" altLang="en-US" b="1" u="sng" dirty="0">
-                <a:solidFill>
-                  <a:schemeClr val="accent3">
-                    <a:lumMod val="75000"/>
-                  </a:schemeClr>
-                </a:solidFill>
-              </a:rPr>
-              <a:t>　</a:t>
-            </a:r>
-            <a:r>
-              <a:rPr lang="ja-JP" altLang="en-US" b="1" u="sng" dirty="0">
-                <a:solidFill>
-                  <a:schemeClr val="accent3">
-                    <a:lumMod val="75000"/>
-                  </a:schemeClr>
-                </a:solidFill>
-              </a:rPr>
-              <a:t>「速いなら参加する」ユーザー行動による</a:t>
-            </a:r>
-            <a:r>
-              <a:rPr lang="en-US" altLang="ja-JP" b="1" u="sng" dirty="0">
-                <a:solidFill>
-                  <a:schemeClr val="accent3">
-                    <a:lumMod val="75000"/>
-                  </a:schemeClr>
-                </a:solidFill>
-              </a:rPr>
-              <a:t>ACP</a:t>
-            </a:r>
-            <a:r>
-              <a:rPr lang="ja-JP" altLang="en-US" b="1" u="sng" dirty="0">
-                <a:solidFill>
-                  <a:schemeClr val="accent3">
-                    <a:lumMod val="75000"/>
-                  </a:schemeClr>
-                </a:solidFill>
-              </a:rPr>
-              <a:t>普及の検証</a:t>
-            </a:r>
-            <a:endParaRPr lang="en-US" altLang="ja-JP" b="1" u="sng" dirty="0">
+              <a:t>待ち時間を効用式とした意思決定モデルと参加者数の推移評価</a:t>
+            </a:r>
+            <a:endParaRPr lang="en-US" altLang="ja-JP" sz="3400" b="1">
               <a:solidFill>
                 <a:schemeClr val="accent3">
                   <a:lumMod val="75000"/>
                 </a:schemeClr>
               </a:solidFill>
+              <a:latin typeface="メイリオ" panose="020B0604030504040204" pitchFamily="50" charset="-128"/>
+              <a:ea typeface="メイリオ" panose="020B0604030504040204" pitchFamily="50" charset="-128"/>
             </a:endParaRPr>
           </a:p>
           <a:p>
             <a:pPr marL="0" indent="0">
               <a:lnSpc>
-                <a:spcPct val="160000"/>
+                <a:spcPct val="150000"/>
               </a:lnSpc>
               <a:buNone/>
             </a:pPr>
             <a:r>
-              <a:rPr kumimoji="1" lang="ja-JP" altLang="en-US" sz="2600" b="1" dirty="0"/>
-              <a:t>タスク平均完了時間の速さのみで参加可否を判断する合理的なユーザを想定</a:t>
-            </a:r>
-            <a:endParaRPr kumimoji="1" lang="en-US" altLang="ja-JP" sz="2600" b="1" dirty="0"/>
-          </a:p>
-          <a:p>
-            <a:pPr marL="0" indent="0">
+              <a:rPr lang="ja-JP" altLang="en-US" sz="2900" b="1">
+                <a:latin typeface="メイリオ" panose="020B0604030504040204" pitchFamily="50" charset="-128"/>
+                <a:ea typeface="メイリオ" panose="020B0604030504040204" pitchFamily="50" charset="-128"/>
+              </a:rPr>
+              <a:t>合理的なユーザー行動のモデル化</a:t>
+            </a:r>
+            <a:endParaRPr lang="ja-JP" altLang="en-US" sz="2900">
+              <a:latin typeface="メイリオ" panose="020B0604030504040204" pitchFamily="50" charset="-128"/>
+              <a:ea typeface="メイリオ" panose="020B0604030504040204" pitchFamily="50" charset="-128"/>
+            </a:endParaRPr>
+          </a:p>
+          <a:p>
+            <a:pPr marL="457200" lvl="1" indent="0">
               <a:lnSpc>
-                <a:spcPct val="160000"/>
+                <a:spcPct val="150000"/>
               </a:lnSpc>
               <a:buNone/>
             </a:pPr>
             <a:r>
-              <a:rPr lang="ja-JP" altLang="en-US" sz="2600" b="1" dirty="0"/>
-              <a:t>「</a:t>
-            </a:r>
-            <a:r>
-              <a:rPr lang="en-US" altLang="ja-JP" sz="2600" b="1" dirty="0"/>
-              <a:t>FCFS</a:t>
-            </a:r>
-            <a:r>
-              <a:rPr lang="ja-JP" altLang="en-US" sz="2600" b="1" dirty="0"/>
-              <a:t>」、「所有者優先」、「ぷりえんぷしょん」の</a:t>
-            </a:r>
-            <a:r>
-              <a:rPr lang="en-US" altLang="ja-JP" sz="2600" b="1" dirty="0"/>
-              <a:t>3</a:t>
-            </a:r>
-            <a:r>
-              <a:rPr lang="ja-JP" altLang="en-US" sz="2600" b="1" dirty="0"/>
-              <a:t>シナリオで</a:t>
-            </a:r>
-            <a:r>
-              <a:rPr lang="en-US" altLang="ja-JP" sz="2600" b="1" dirty="0"/>
-              <a:t>RQ1</a:t>
-            </a:r>
-            <a:r>
-              <a:rPr lang="ja-JP" altLang="en-US" sz="2600" b="1" dirty="0"/>
-              <a:t>のシミュレーションをループさせ、ループ毎に各ユーザが参加判断を行う</a:t>
-            </a:r>
-            <a:endParaRPr lang="en-US" altLang="ja-JP" sz="2600" b="1" dirty="0"/>
+              <a:rPr lang="ja-JP" altLang="en-US" sz="2900">
+                <a:latin typeface="メイリオ" panose="020B0604030504040204" pitchFamily="50" charset="-128"/>
+                <a:ea typeface="メイリオ" panose="020B0604030504040204" pitchFamily="50" charset="-128"/>
+              </a:rPr>
+              <a:t>各ユーザーは「タスクの平均完了時間」の速さのみを基準に、</a:t>
+            </a:r>
+            <a:r>
+              <a:rPr lang="en-US" altLang="ja-JP" sz="2900">
+                <a:latin typeface="メイリオ" panose="020B0604030504040204" pitchFamily="50" charset="-128"/>
+                <a:ea typeface="メイリオ" panose="020B0604030504040204" pitchFamily="50" charset="-128"/>
+              </a:rPr>
+              <a:t>ACP</a:t>
+            </a:r>
+            <a:r>
+              <a:rPr lang="ja-JP" altLang="en-US" sz="2900">
+                <a:latin typeface="メイリオ" panose="020B0604030504040204" pitchFamily="50" charset="-128"/>
+                <a:ea typeface="メイリオ" panose="020B0604030504040204" pitchFamily="50" charset="-128"/>
+              </a:rPr>
+              <a:t>への参加・不参加を自律的に判断すると想定。</a:t>
+            </a:r>
           </a:p>
           <a:p>
             <a:pPr marL="0" indent="0">
               <a:lnSpc>
-                <a:spcPct val="160000"/>
+                <a:spcPct val="150000"/>
               </a:lnSpc>
               <a:buNone/>
             </a:pPr>
             <a:r>
-              <a:rPr kumimoji="1" lang="ja-JP" altLang="en-US" sz="2600" b="1" dirty="0"/>
-              <a:t>参加判断</a:t>
-            </a:r>
-            <a:endParaRPr kumimoji="1" lang="en-US" altLang="ja-JP" sz="2600" b="1" dirty="0"/>
-          </a:p>
-          <a:p>
-            <a:pPr marL="0" indent="0">
+              <a:rPr lang="ja-JP" altLang="en-US" sz="2900" b="1">
+                <a:latin typeface="メイリオ" panose="020B0604030504040204" pitchFamily="50" charset="-128"/>
+                <a:ea typeface="メイリオ" panose="020B0604030504040204" pitchFamily="50" charset="-128"/>
+              </a:rPr>
+              <a:t>参加判断のロジック　</a:t>
+            </a:r>
+            <a:r>
+              <a:rPr lang="ja-JP" altLang="en-US" sz="2900">
+                <a:latin typeface="メイリオ" panose="020B0604030504040204" pitchFamily="50" charset="-128"/>
+                <a:ea typeface="メイリオ" panose="020B0604030504040204" pitchFamily="50" charset="-128"/>
+              </a:rPr>
+              <a:t>毎ループごとに参加判断</a:t>
+            </a:r>
+          </a:p>
+          <a:p>
+            <a:pPr marL="457200" lvl="1" indent="0">
               <a:lnSpc>
-                <a:spcPct val="160000"/>
+                <a:spcPct val="150000"/>
               </a:lnSpc>
               <a:buNone/>
             </a:pPr>
             <a:r>
-              <a:rPr lang="ja-JP" altLang="en-US" sz="2600" b="1" dirty="0"/>
-              <a:t>不参加のユーザ：前回の</a:t>
-            </a:r>
-            <a:r>
-              <a:rPr lang="en-US" altLang="ja-JP" sz="2600" b="1" dirty="0"/>
+              <a:rPr lang="ja-JP" altLang="en-US" sz="2900" b="1">
+                <a:latin typeface="メイリオ" panose="020B0604030504040204" pitchFamily="50" charset="-128"/>
+                <a:ea typeface="メイリオ" panose="020B0604030504040204" pitchFamily="50" charset="-128"/>
+              </a:rPr>
+              <a:t>未参加者：</a:t>
+            </a:r>
+            <a:r>
+              <a:rPr lang="ja-JP" altLang="en-US" sz="2900">
+                <a:latin typeface="メイリオ" panose="020B0604030504040204" pitchFamily="50" charset="-128"/>
+                <a:ea typeface="メイリオ" panose="020B0604030504040204" pitchFamily="50" charset="-128"/>
+              </a:rPr>
+              <a:t>「現在の</a:t>
+            </a:r>
+            <a:r>
+              <a:rPr lang="en-US" altLang="ja-JP" sz="2900">
+                <a:latin typeface="メイリオ" panose="020B0604030504040204" pitchFamily="50" charset="-128"/>
+                <a:ea typeface="メイリオ" panose="020B0604030504040204" pitchFamily="50" charset="-128"/>
+              </a:rPr>
               <a:t>ACP</a:t>
             </a:r>
             <a:r>
-              <a:rPr lang="ja-JP" altLang="en-US" sz="2600" b="1" dirty="0"/>
-              <a:t>参加者群＋自分で１度シミュレーションを回して、ターンアラウンドタイムを測定。自分の</a:t>
-            </a:r>
-            <a:r>
-              <a:rPr lang="en-US" altLang="ja-JP" sz="2600" b="1" dirty="0"/>
+              <a:rPr lang="ja-JP" altLang="en-US" sz="2900">
+                <a:latin typeface="メイリオ" panose="020B0604030504040204" pitchFamily="50" charset="-128"/>
+                <a:ea typeface="メイリオ" panose="020B0604030504040204" pitchFamily="50" charset="-128"/>
+              </a:rPr>
+              <a:t>に自分が加わった場合」の待ち時間を予測し、自分の</a:t>
+            </a:r>
+            <a:r>
+              <a:rPr lang="en-US" altLang="ja-JP" sz="2900">
+                <a:latin typeface="メイリオ" panose="020B0604030504040204" pitchFamily="50" charset="-128"/>
+                <a:ea typeface="メイリオ" panose="020B0604030504040204" pitchFamily="50" charset="-128"/>
+              </a:rPr>
               <a:t>GPU</a:t>
             </a:r>
             <a:r>
-              <a:rPr lang="ja-JP" altLang="en-US" sz="2600" b="1" dirty="0"/>
-              <a:t>で行った場合と比較して早いほうを選択</a:t>
-            </a:r>
-            <a:endParaRPr lang="en-US" altLang="ja-JP" sz="2600" b="1" dirty="0"/>
-          </a:p>
-          <a:p>
-            <a:pPr marL="0" indent="0">
+              <a:rPr lang="ja-JP" altLang="en-US" sz="2900">
+                <a:latin typeface="メイリオ" panose="020B0604030504040204" pitchFamily="50" charset="-128"/>
+                <a:ea typeface="メイリオ" panose="020B0604030504040204" pitchFamily="50" charset="-128"/>
+              </a:rPr>
+              <a:t>のみを使う場合と比較して早い方を選択。</a:t>
+            </a:r>
+          </a:p>
+          <a:p>
+            <a:pPr marL="457200" lvl="1" indent="0">
               <a:lnSpc>
-                <a:spcPct val="160000"/>
+                <a:spcPct val="150000"/>
               </a:lnSpc>
               <a:buNone/>
             </a:pPr>
             <a:r>
-              <a:rPr kumimoji="1" lang="ja-JP" altLang="en-US" sz="2600" b="1" dirty="0"/>
-              <a:t>参加のユーザ：前回の</a:t>
-            </a:r>
-            <a:r>
-              <a:rPr kumimoji="1" lang="en-US" altLang="ja-JP" sz="2600" b="1" dirty="0"/>
+              <a:rPr lang="ja-JP" altLang="en-US" sz="2900" b="1">
+                <a:latin typeface="メイリオ" panose="020B0604030504040204" pitchFamily="50" charset="-128"/>
+                <a:ea typeface="メイリオ" panose="020B0604030504040204" pitchFamily="50" charset="-128"/>
+              </a:rPr>
+              <a:t>参加者：</a:t>
+            </a:r>
+            <a:r>
+              <a:rPr lang="ja-JP" altLang="en-US" sz="2900">
+                <a:latin typeface="メイリオ" panose="020B0604030504040204" pitchFamily="50" charset="-128"/>
+                <a:ea typeface="メイリオ" panose="020B0604030504040204" pitchFamily="50" charset="-128"/>
+              </a:rPr>
+              <a:t>「現在の</a:t>
+            </a:r>
+            <a:r>
+              <a:rPr lang="en-US" altLang="ja-JP" sz="2900">
+                <a:latin typeface="メイリオ" panose="020B0604030504040204" pitchFamily="50" charset="-128"/>
+                <a:ea typeface="メイリオ" panose="020B0604030504040204" pitchFamily="50" charset="-128"/>
+              </a:rPr>
               <a:t>ACP</a:t>
             </a:r>
             <a:r>
-              <a:rPr kumimoji="1" lang="ja-JP" altLang="en-US" sz="2600" b="1" dirty="0"/>
-              <a:t>での平均ターンアラウンドタイムと自分一人での比較する</a:t>
-            </a:r>
-            <a:endParaRPr kumimoji="1" lang="en-US" altLang="ja-JP" sz="2600" b="1" dirty="0"/>
+              <a:rPr lang="ja-JP" altLang="en-US" sz="2900">
+                <a:latin typeface="メイリオ" panose="020B0604030504040204" pitchFamily="50" charset="-128"/>
+                <a:ea typeface="メイリオ" panose="020B0604030504040204" pitchFamily="50" charset="-128"/>
+              </a:rPr>
+              <a:t>での実績値」と、自分一人で計算した場合を比較し、継続か離脱かを判断。</a:t>
+            </a:r>
           </a:p>
           <a:p>
             <a:pPr marL="0" indent="0">
               <a:lnSpc>
-                <a:spcPct val="160000"/>
+                <a:spcPct val="150000"/>
               </a:lnSpc>
               <a:buNone/>
             </a:pPr>
             <a:r>
-              <a:rPr lang="ja-JP" altLang="en-US" sz="2600" b="1" dirty="0"/>
-              <a:t>最初のループはランダムで参加させ、全ユーザーが選択を変更しなくなった時点で終了して、最終的な参加者を評価</a:t>
-            </a:r>
-            <a:endParaRPr kumimoji="1" lang="en-US" altLang="ja-JP" sz="2600" b="1" dirty="0"/>
+              <a:rPr lang="ja-JP" altLang="en-US" sz="2900" b="1">
+                <a:latin typeface="メイリオ" panose="020B0604030504040204" pitchFamily="50" charset="-128"/>
+                <a:ea typeface="メイリオ" panose="020B0604030504040204" pitchFamily="50" charset="-128"/>
+              </a:rPr>
+              <a:t>持続性の評価指標</a:t>
+            </a:r>
+            <a:endParaRPr lang="ja-JP" altLang="en-US" sz="2900">
+              <a:latin typeface="メイリオ" panose="020B0604030504040204" pitchFamily="50" charset="-128"/>
+              <a:ea typeface="メイリオ" panose="020B0604030504040204" pitchFamily="50" charset="-128"/>
+            </a:endParaRPr>
+          </a:p>
+          <a:p>
+            <a:pPr marL="457200" lvl="1" indent="0">
+              <a:lnSpc>
+                <a:spcPct val="150000"/>
+              </a:lnSpc>
+              <a:buNone/>
+            </a:pPr>
+            <a:r>
+              <a:rPr lang="ja-JP" altLang="en-US" sz="2900">
+                <a:latin typeface="メイリオ" panose="020B0604030504040204" pitchFamily="50" charset="-128"/>
+                <a:ea typeface="メイリオ" panose="020B0604030504040204" pitchFamily="50" charset="-128"/>
+              </a:rPr>
+              <a:t>初回をランダム参加とし、</a:t>
+            </a:r>
+            <a:r>
+              <a:rPr lang="en-US" altLang="ja-JP" sz="2900">
+                <a:latin typeface="メイリオ" panose="020B0604030504040204" pitchFamily="50" charset="-128"/>
+                <a:ea typeface="メイリオ" panose="020B0604030504040204" pitchFamily="50" charset="-128"/>
+              </a:rPr>
+              <a:t>10</a:t>
+            </a:r>
+            <a:r>
+              <a:rPr lang="ja-JP" altLang="en-US" sz="2900">
+                <a:latin typeface="メイリオ" panose="020B0604030504040204" pitchFamily="50" charset="-128"/>
+                <a:ea typeface="メイリオ" panose="020B0604030504040204" pitchFamily="50" charset="-128"/>
+              </a:rPr>
+              <a:t>回のループを通じて、性能別のユーザーが最終的にどれだけ</a:t>
+            </a:r>
+            <a:r>
+              <a:rPr lang="en-US" altLang="ja-JP" sz="2900">
+                <a:latin typeface="メイリオ" panose="020B0604030504040204" pitchFamily="50" charset="-128"/>
+                <a:ea typeface="メイリオ" panose="020B0604030504040204" pitchFamily="50" charset="-128"/>
+              </a:rPr>
+              <a:t>ACP</a:t>
+            </a:r>
+            <a:r>
+              <a:rPr lang="ja-JP" altLang="en-US" sz="2900">
+                <a:latin typeface="メイリオ" panose="020B0604030504040204" pitchFamily="50" charset="-128"/>
+                <a:ea typeface="メイリオ" panose="020B0604030504040204" pitchFamily="50" charset="-128"/>
+              </a:rPr>
+              <a:t>に定着するかを評価。</a:t>
+            </a:r>
           </a:p>
           <a:p>
             <a:pPr marL="0" indent="0">
               <a:buNone/>
             </a:pPr>
-            <a:endParaRPr kumimoji="1" lang="ja-JP" altLang="en-US" b="1" dirty="0">
+            <a:endParaRPr kumimoji="1" lang="ja-JP" altLang="en-US" b="1">
               <a:solidFill>
                 <a:schemeClr val="accent3">
                   <a:lumMod val="75000"/>
@@ -20612,7 +20955,7 @@
               <a:pPr/>
               <a:t>9</a:t>
             </a:fld>
-            <a:endParaRPr lang="ja-JP" altLang="en-US" dirty="0"/>
+            <a:endParaRPr lang="ja-JP" altLang="en-US"/>
           </a:p>
         </p:txBody>
       </p:sp>
@@ -21479,17 +21822,17 @@
 <file path=customXml/itemProps1.xml><?xml version="1.0" encoding="utf-8"?>
 <ds:datastoreItem xmlns:ds="http://schemas.openxmlformats.org/officeDocument/2006/customXml" ds:itemID="{3E828904-8F7D-4B81-9CCE-432514A83640}">
   <ds:schemaRefs>
-    <ds:schemaRef ds:uri="http://purl.org/dc/elements/1.1/"/>
-    <ds:schemaRef ds:uri="http://schemas.microsoft.com/office/2006/documentManagement/types"/>
-    <ds:schemaRef ds:uri="http://purl.org/dc/dcmitype/"/>
     <ds:schemaRef ds:uri="13c3e6d6-2f17-42f4-9391-040ce6806117"/>
-    <ds:schemaRef ds:uri="http://schemas.openxmlformats.org/package/2006/metadata/core-properties"/>
-    <ds:schemaRef ds:uri="http://schemas.microsoft.com/office/2006/metadata/properties"/>
-    <ds:schemaRef ds:uri="http://purl.org/dc/terms/"/>
-    <ds:schemaRef ds:uri="http://www.w3.org/XML/1998/namespace"/>
-    <ds:schemaRef ds:uri="http://schemas.microsoft.com/office/infopath/2007/PartnerControls"/>
     <ds:schemaRef ds:uri="b034c360-b5dc-49e4-921e-4ae488fbe071"/>
     <ds:schemaRef ds:uri="b903afa0-f4f8-44ee-9336-5e6f46981d16"/>
+    <ds:schemaRef ds:uri="http://purl.org/dc/dcmitype/"/>
+    <ds:schemaRef ds:uri="http://purl.org/dc/elements/1.1/"/>
+    <ds:schemaRef ds:uri="http://purl.org/dc/terms/"/>
+    <ds:schemaRef ds:uri="http://schemas.microsoft.com/office/2006/documentManagement/types"/>
+    <ds:schemaRef ds:uri="http://schemas.microsoft.com/office/2006/metadata/properties"/>
+    <ds:schemaRef ds:uri="http://schemas.microsoft.com/office/infopath/2007/PartnerControls"/>
+    <ds:schemaRef ds:uri="http://schemas.openxmlformats.org/package/2006/metadata/core-properties"/>
+    <ds:schemaRef ds:uri="http://www.w3.org/XML/1998/namespace"/>
   </ds:schemaRefs>
 </ds:datastoreItem>
 </file>
@@ -21505,18 +21848,18 @@
 <file path=customXml/itemProps3.xml><?xml version="1.0" encoding="utf-8"?>
 <ds:datastoreItem xmlns:ds="http://schemas.openxmlformats.org/officeDocument/2006/customXml" ds:itemID="{06B9729E-66AA-48AA-91EF-FA5F60CB2B26}">
   <ds:schemaRefs>
-    <ds:schemaRef ds:uri="http://schemas.microsoft.com/office/2006/metadata/contentType"/>
-    <ds:schemaRef ds:uri="http://schemas.microsoft.com/office/2006/metadata/properties/metaAttributes"/>
-    <ds:schemaRef ds:uri="http://www.w3.org/2001/XMLSchema"/>
-    <ds:schemaRef ds:uri="http://schemas.microsoft.com/office/2006/metadata/properties"/>
+    <ds:schemaRef ds:uri="b034c360-b5dc-49e4-921e-4ae488fbe071"/>
     <ds:schemaRef ds:uri="b903afa0-f4f8-44ee-9336-5e6f46981d16"/>
-    <ds:schemaRef ds:uri="b034c360-b5dc-49e4-921e-4ae488fbe071"/>
-    <ds:schemaRef ds:uri="http://schemas.microsoft.com/office/2006/documentManagement/types"/>
-    <ds:schemaRef ds:uri="http://schemas.microsoft.com/office/infopath/2007/PartnerControls"/>
-    <ds:schemaRef ds:uri="http://schemas.openxmlformats.org/package/2006/metadata/core-properties"/>
     <ds:schemaRef ds:uri="http://purl.org/dc/elements/1.1/"/>
     <ds:schemaRef ds:uri="http://purl.org/dc/terms/"/>
     <ds:schemaRef ds:uri="http://schemas.microsoft.com/internal/obd"/>
+    <ds:schemaRef ds:uri="http://schemas.microsoft.com/office/2006/documentManagement/types"/>
+    <ds:schemaRef ds:uri="http://schemas.microsoft.com/office/2006/metadata/contentType"/>
+    <ds:schemaRef ds:uri="http://schemas.microsoft.com/office/2006/metadata/properties"/>
+    <ds:schemaRef ds:uri="http://schemas.microsoft.com/office/2006/metadata/properties/metaAttributes"/>
+    <ds:schemaRef ds:uri="http://schemas.microsoft.com/office/infopath/2007/PartnerControls"/>
+    <ds:schemaRef ds:uri="http://schemas.openxmlformats.org/package/2006/metadata/core-properties"/>
+    <ds:schemaRef ds:uri="http://www.w3.org/2001/XMLSchema"/>
   </ds:schemaRefs>
 </ds:datastoreItem>
 </file>